--- a/usecase1_csat_nlp_rootcause/final_output/usecase1_csat_summary.pptx
+++ b/usecase1_csat_nlp_rootcause/final_output/usecase1_csat_summary.pptx
@@ -3738,7 +3738,7 @@
                 </a:solidFill>
                 <a:latin typeface="Calibri"/>
               </a:rPr>
-              <a:t>Channel mix:  Voice: 3,319  |  Chat: 2,711  |  Email: 1,470</a:t>
+              <a:t>Channel mix:  Voice: 3,350  |  Chat: 2,642  |  Email: 1,508</a:t>
             </a:r>
           </a:p>
         </p:txBody>
@@ -4246,7 +4246,7 @@
                 </a:solidFill>
                 <a:latin typeface="Calibri"/>
               </a:rPr>
-              <a:t>33%</a:t>
+              <a:t>32%</a:t>
             </a:r>
           </a:p>
           <a:p>
@@ -4313,7 +4313,7 @@
                 </a:solidFill>
                 <a:latin typeface="Calibri"/>
               </a:rPr>
-              <a:t>3.00</a:t>
+              <a:t>3.01</a:t>
             </a:r>
           </a:p>
           <a:p>
@@ -4380,7 +4380,7 @@
                 </a:solidFill>
                 <a:latin typeface="Calibri"/>
               </a:rPr>
-              <a:t>51%</a:t>
+              <a:t>50%</a:t>
             </a:r>
           </a:p>
           <a:p>
@@ -4447,7 +4447,7 @@
                 </a:solidFill>
                 <a:latin typeface="Calibri"/>
               </a:rPr>
-              <a:t>55%</a:t>
+              <a:t>2.96</a:t>
             </a:r>
           </a:p>
           <a:p>
@@ -4459,7 +4459,7 @@
                 </a:solidFill>
                 <a:latin typeface="Calibri"/>
               </a:rPr>
-              <a:t>First-Contact Resolution rate for Billing Charges</a:t>
+              <a:t>Lowest avg CSAT: Delhi NCR circle</a:t>
             </a:r>
           </a:p>
         </p:txBody>
@@ -4498,7 +4498,7 @@
                 </a:solidFill>
                 <a:latin typeface="Calibri"/>
               </a:rPr>
-              <a:t>●   Billing Charges is both the highest-VOLUME and lowest-CSAT driver (avg CSAT 2.48) - the clear priority-one fix.</a:t>
+              <a:t>●   Billing Charges is both the highest-VOLUME and lowest-CSAT driver (avg CSAT 2.50) - the clear priority-one fix.</a:t>
             </a:r>
           </a:p>
           <a:p>
@@ -4514,7 +4514,7 @@
                 </a:solidFill>
                 <a:latin typeface="Calibri"/>
               </a:rPr>
-              <a:t>●   It also runs the longest average handle time (493 seconds) - a real operational cost on top of the CSAT hit.</a:t>
+              <a:t>●   Delhi NCR is the lowest-performing circle (avg CSAT 2.96) and Postpaid Standard the lowest-performing plan tier (avg CSAT 2.90) - two segment-level leads worth investigating alongside the process fix.</a:t>
             </a:r>
           </a:p>
           <a:p>
@@ -4681,7 +4681,7 @@
                 </a:solidFill>
                 <a:latin typeface="Calibri"/>
               </a:rPr>
-              <a:t>●   Fix #1: Billing Charges - the single biggest, lowest-scoring driver, concentrated and compounding with “Sub-theme: Roaming Add” in 71% of its own complaints.</a:t>
+              <a:t>●   Fix #1: Billing Charges - the single biggest, lowest-scoring driver, concentrated and compounding with “Sub-theme: Charged” in 72% of its own complaints.</a:t>
             </a:r>
           </a:p>
           <a:p>

--- a/usecase1_csat_nlp_rootcause/final_output/usecase1_csat_summary.pptx
+++ b/usecase1_csat_nlp_rootcause/final_output/usecase1_csat_summary.pptx
@@ -3738,7 +3738,7 @@
                 </a:solidFill>
                 <a:latin typeface="Calibri"/>
               </a:rPr>
-              <a:t>Channel mix:  Voice: 3,350  |  Chat: 2,642  |  Email: 1,508</a:t>
+              <a:t>Channel mix:  Voice: 3,322  |  Chat: 2,665  |  Email: 1,513</a:t>
             </a:r>
           </a:p>
         </p:txBody>
@@ -4447,7 +4447,7 @@
                 </a:solidFill>
                 <a:latin typeface="Calibri"/>
               </a:rPr>
-              <a:t>2.96</a:t>
+              <a:t>2.83</a:t>
             </a:r>
           </a:p>
           <a:p>
@@ -4459,7 +4459,7 @@
                 </a:solidFill>
                 <a:latin typeface="Calibri"/>
               </a:rPr>
-              <a:t>Lowest avg CSAT: Delhi NCR circle</a:t>
+              <a:t>Lowest avg CSAT: Mumbai circle</a:t>
             </a:r>
           </a:p>
         </p:txBody>
@@ -4514,7 +4514,7 @@
                 </a:solidFill>
                 <a:latin typeface="Calibri"/>
               </a:rPr>
-              <a:t>●   Delhi NCR is the lowest-performing circle (avg CSAT 2.96) and Postpaid Standard the lowest-performing plan tier (avg CSAT 2.90) - two segment-level leads worth investigating alongside the process fix.</a:t>
+              <a:t>●   Mumbai is the lowest-performing circle (avg CSAT 2.83) and Standard the lowest-performing plan tier (avg CSAT 2.98) - two segment-level leads worth investigating alongside the process fix.</a:t>
             </a:r>
           </a:p>
           <a:p>
@@ -4530,7 +4530,7 @@
                 </a:solidFill>
                 <a:latin typeface="Calibri"/>
               </a:rPr>
-              <a:t>●   CSAT mix: 38% Promoters (4-5) vs 38% Detractors (1-2) - a split, not a crisis, but with a specific, fixable lever.</a:t>
+              <a:t>●   CSAT mix: 39% Promoters (4-5) vs 38% Detractors (1-2) - a split, not a crisis, but with a specific, fixable lever.</a:t>
             </a:r>
           </a:p>
           <a:p>
@@ -4681,7 +4681,7 @@
                 </a:solidFill>
                 <a:latin typeface="Calibri"/>
               </a:rPr>
-              <a:t>●   Fix #1: Billing Charges - the single biggest, lowest-scoring driver, concentrated and compounding with “Sub-theme: Charged” in 72% of its own complaints.</a:t>
+              <a:t>●   Fix #1: Billing Charges - the single biggest, lowest-scoring driver, concentrated and compounding with “Sub-theme: Charged” in 45% of its own complaints.</a:t>
             </a:r>
           </a:p>
           <a:p>

--- a/usecase1_csat_nlp_rootcause/final_output/usecase1_csat_summary.pptx
+++ b/usecase1_csat_nlp_rootcause/final_output/usecase1_csat_summary.pptx
@@ -3109,7 +3109,7 @@
         </p:nvSpPr>
         <p:spPr>
           <a:xfrm>
-            <a:off x="594360" y="2606040"/>
+            <a:off x="594360" y="2103120"/>
             <a:ext cx="1097280" cy="63500"/>
           </a:xfrm>
           <a:prstGeom prst="rect">
@@ -3153,7 +3153,7 @@
         </p:nvSpPr>
         <p:spPr>
           <a:xfrm>
-            <a:off x="594360" y="2743200"/>
+            <a:off x="594360" y="2240280"/>
             <a:ext cx="10972800" cy="1188720"/>
           </a:xfrm>
           <a:prstGeom prst="rect">
@@ -3169,7 +3169,7 @@
           <a:p>
             <a:pPr algn="l"/>
             <a:r>
-              <a:rPr sz="4000" b="1">
+              <a:rPr sz="4000" b="1" i="0">
                 <a:solidFill>
                   <a:srgbClr val="FFFFFF"/>
                 </a:solidFill>
@@ -3189,7 +3189,7 @@
         </p:nvSpPr>
         <p:spPr>
           <a:xfrm>
-            <a:off x="594360" y="3977639"/>
+            <a:off x="594360" y="3474720"/>
             <a:ext cx="10058400" cy="548640"/>
           </a:xfrm>
           <a:prstGeom prst="rect">
@@ -3205,7 +3205,7 @@
           <a:p>
             <a:pPr algn="l"/>
             <a:r>
-              <a:rPr sz="1800" b="0">
+              <a:rPr sz="1800" b="0" i="0">
                 <a:solidFill>
                   <a:srgbClr val="2EC4B6"/>
                 </a:solidFill>
@@ -3218,14 +3218,282 @@
       </p:sp>
       <p:sp>
         <p:nvSpPr>
-          <p:cNvPr id="5" name="TextBox 4"/>
+          <p:cNvPr id="5" name="Rounded Rectangle 4"/>
+          <p:cNvSpPr/>
+          <p:nvPr/>
+        </p:nvSpPr>
+        <p:spPr>
+          <a:xfrm>
+            <a:off x="594360" y="4389120"/>
+            <a:ext cx="2651760" cy="868680"/>
+          </a:xfrm>
+          <a:prstGeom prst="roundRect">
+            <a:avLst/>
+          </a:prstGeom>
+          <a:solidFill>
+            <a:srgbClr val="2B3C5E"/>
+          </a:solidFill>
+          <a:ln w="12700">
+            <a:solidFill>
+              <a:srgbClr val="2EC4B6"/>
+            </a:solidFill>
+          </a:ln>
+          <a:effectLst/>
+        </p:spPr>
+        <p:style>
+          <a:lnRef idx="1">
+            <a:schemeClr val="accent1"/>
+          </a:lnRef>
+          <a:fillRef idx="3">
+            <a:schemeClr val="accent1"/>
+          </a:fillRef>
+          <a:effectRef idx="2">
+            <a:schemeClr val="accent1"/>
+          </a:effectRef>
+          <a:fontRef idx="minor">
+            <a:schemeClr val="lt1"/>
+          </a:fontRef>
+        </p:style>
+        <p:txBody>
+          <a:bodyPr rtlCol="0" anchor="ctr" wrap="square"/>
+          <a:lstStyle/>
+          <a:p>
+            <a:pPr algn="ctr"/>
+            <a:r>
+              <a:rPr sz="1900" b="1">
+                <a:solidFill>
+                  <a:srgbClr val="2EC4B6"/>
+                </a:solidFill>
+                <a:latin typeface="Calibri"/>
+              </a:rPr>
+              <a:t>7,500</a:t>
+            </a:r>
+          </a:p>
+          <a:p>
+            <a:pPr algn="ctr"/>
+            <a:r>
+              <a:rPr sz="1050">
+                <a:solidFill>
+                  <a:srgbClr val="D7DEE8"/>
+                </a:solidFill>
+                <a:latin typeface="Calibri"/>
+              </a:rPr>
+              <a:t>Survey responses analyzed</a:t>
+            </a:r>
+          </a:p>
+        </p:txBody>
+      </p:sp>
+      <p:sp>
+        <p:nvSpPr>
+          <p:cNvPr id="6" name="Rounded Rectangle 5"/>
+          <p:cNvSpPr/>
+          <p:nvPr/>
+        </p:nvSpPr>
+        <p:spPr>
+          <a:xfrm>
+            <a:off x="3474720" y="4389120"/>
+            <a:ext cx="2651760" cy="868680"/>
+          </a:xfrm>
+          <a:prstGeom prst="roundRect">
+            <a:avLst/>
+          </a:prstGeom>
+          <a:solidFill>
+            <a:srgbClr val="2B3C5E"/>
+          </a:solidFill>
+          <a:ln w="12700">
+            <a:solidFill>
+              <a:srgbClr val="2EC4B6"/>
+            </a:solidFill>
+          </a:ln>
+          <a:effectLst/>
+        </p:spPr>
+        <p:style>
+          <a:lnRef idx="1">
+            <a:schemeClr val="accent1"/>
+          </a:lnRef>
+          <a:fillRef idx="3">
+            <a:schemeClr val="accent1"/>
+          </a:fillRef>
+          <a:effectRef idx="2">
+            <a:schemeClr val="accent1"/>
+          </a:effectRef>
+          <a:fontRef idx="minor">
+            <a:schemeClr val="lt1"/>
+          </a:fontRef>
+        </p:style>
+        <p:txBody>
+          <a:bodyPr rtlCol="0" anchor="ctr" wrap="square"/>
+          <a:lstStyle/>
+          <a:p>
+            <a:pPr algn="ctr"/>
+            <a:r>
+              <a:rPr sz="1900" b="1">
+                <a:solidFill>
+                  <a:srgbClr val="2EC4B6"/>
+                </a:solidFill>
+                <a:latin typeface="Calibri"/>
+              </a:rPr>
+              <a:t>Aug–Oct 2026</a:t>
+            </a:r>
+          </a:p>
+          <a:p>
+            <a:pPr algn="ctr"/>
+            <a:r>
+              <a:rPr sz="1050">
+                <a:solidFill>
+                  <a:srgbClr val="D7DEE8"/>
+                </a:solidFill>
+                <a:latin typeface="Calibri"/>
+              </a:rPr>
+              <a:t>Period covered</a:t>
+            </a:r>
+          </a:p>
+        </p:txBody>
+      </p:sp>
+      <p:sp>
+        <p:nvSpPr>
+          <p:cNvPr id="7" name="Rounded Rectangle 6"/>
+          <p:cNvSpPr/>
+          <p:nvPr/>
+        </p:nvSpPr>
+        <p:spPr>
+          <a:xfrm>
+            <a:off x="6355080" y="4389120"/>
+            <a:ext cx="2651760" cy="868680"/>
+          </a:xfrm>
+          <a:prstGeom prst="roundRect">
+            <a:avLst/>
+          </a:prstGeom>
+          <a:solidFill>
+            <a:srgbClr val="2B3C5E"/>
+          </a:solidFill>
+          <a:ln w="12700">
+            <a:solidFill>
+              <a:srgbClr val="2EC4B6"/>
+            </a:solidFill>
+          </a:ln>
+          <a:effectLst/>
+        </p:spPr>
+        <p:style>
+          <a:lnRef idx="1">
+            <a:schemeClr val="accent1"/>
+          </a:lnRef>
+          <a:fillRef idx="3">
+            <a:schemeClr val="accent1"/>
+          </a:fillRef>
+          <a:effectRef idx="2">
+            <a:schemeClr val="accent1"/>
+          </a:effectRef>
+          <a:fontRef idx="minor">
+            <a:schemeClr val="lt1"/>
+          </a:fontRef>
+        </p:style>
+        <p:txBody>
+          <a:bodyPr rtlCol="0" anchor="ctr" wrap="square"/>
+          <a:lstStyle/>
+          <a:p>
+            <a:pPr algn="ctr"/>
+            <a:r>
+              <a:rPr sz="1900" b="1">
+                <a:solidFill>
+                  <a:srgbClr val="2EC4B6"/>
+                </a:solidFill>
+                <a:latin typeface="Calibri"/>
+              </a:rPr>
+              <a:t>3</a:t>
+            </a:r>
+          </a:p>
+          <a:p>
+            <a:pPr algn="ctr"/>
+            <a:r>
+              <a:rPr sz="1050">
+                <a:solidFill>
+                  <a:srgbClr val="D7DEE8"/>
+                </a:solidFill>
+                <a:latin typeface="Calibri"/>
+              </a:rPr>
+              <a:t>Channels: chat, email, voice</a:t>
+            </a:r>
+          </a:p>
+        </p:txBody>
+      </p:sp>
+      <p:sp>
+        <p:nvSpPr>
+          <p:cNvPr id="8" name="Rounded Rectangle 7"/>
+          <p:cNvSpPr/>
+          <p:nvPr/>
+        </p:nvSpPr>
+        <p:spPr>
+          <a:xfrm>
+            <a:off x="9235440" y="4389120"/>
+            <a:ext cx="2651760" cy="868680"/>
+          </a:xfrm>
+          <a:prstGeom prst="roundRect">
+            <a:avLst/>
+          </a:prstGeom>
+          <a:solidFill>
+            <a:srgbClr val="2B3C5E"/>
+          </a:solidFill>
+          <a:ln w="12700">
+            <a:solidFill>
+              <a:srgbClr val="2EC4B6"/>
+            </a:solidFill>
+          </a:ln>
+          <a:effectLst/>
+        </p:spPr>
+        <p:style>
+          <a:lnRef idx="1">
+            <a:schemeClr val="accent1"/>
+          </a:lnRef>
+          <a:fillRef idx="3">
+            <a:schemeClr val="accent1"/>
+          </a:fillRef>
+          <a:effectRef idx="2">
+            <a:schemeClr val="accent1"/>
+          </a:effectRef>
+          <a:fontRef idx="minor">
+            <a:schemeClr val="lt1"/>
+          </a:fontRef>
+        </p:style>
+        <p:txBody>
+          <a:bodyPr rtlCol="0" anchor="ctr" wrap="square"/>
+          <a:lstStyle/>
+          <a:p>
+            <a:pPr algn="ctr"/>
+            <a:r>
+              <a:rPr sz="1900" b="1">
+                <a:solidFill>
+                  <a:srgbClr val="2EC4B6"/>
+                </a:solidFill>
+                <a:latin typeface="Calibri"/>
+              </a:rPr>
+              <a:t>12 / 42</a:t>
+            </a:r>
+          </a:p>
+          <a:p>
+            <a:pPr algn="ctr"/>
+            <a:r>
+              <a:rPr sz="1050">
+                <a:solidFill>
+                  <a:srgbClr val="D7DEE8"/>
+                </a:solidFill>
+                <a:latin typeface="Calibri"/>
+              </a:rPr>
+              <a:t>Primary / secondary drivers</a:t>
+            </a:r>
+          </a:p>
+        </p:txBody>
+      </p:sp>
+      <p:sp>
+        <p:nvSpPr>
+          <p:cNvPr id="9" name="TextBox 8"/>
           <p:cNvSpPr txBox="1"/>
           <p:nvPr/>
         </p:nvSpPr>
         <p:spPr>
           <a:xfrm>
-            <a:off x="594360" y="6126480"/>
-            <a:ext cx="10058400" cy="365760"/>
+            <a:off x="594360" y="6446520"/>
+            <a:ext cx="10058400" cy="320040"/>
           </a:xfrm>
           <a:prstGeom prst="rect">
             <a:avLst/>
@@ -3240,13 +3508,13 @@
           <a:p>
             <a:pPr algn="l"/>
             <a:r>
-              <a:rPr sz="1300" b="0">
-                <a:solidFill>
-                  <a:srgbClr val="B8C2D0"/>
-                </a:solidFill>
-                <a:latin typeface="Calibri"/>
-              </a:rPr>
-              <a:t>Data Analytics Consulting  |  Aug 2026 – Oct 2026  |  7,500 survey responses</a:t>
+              <a:rPr sz="1100" b="0" i="0">
+                <a:solidFill>
+                  <a:srgbClr val="8A97AB"/>
+                </a:solidFill>
+                <a:latin typeface="Calibri"/>
+              </a:rPr>
+              <a:t>Data Analytics Consulting</a:t>
             </a:r>
           </a:p>
         </p:txBody>
@@ -3323,14 +3591,69 @@
       </p:sp>
       <p:sp>
         <p:nvSpPr>
-          <p:cNvPr id="3" name="TextBox 2"/>
+          <p:cNvPr id="3" name="Rounded Rectangle 2"/>
+          <p:cNvSpPr/>
+          <p:nvPr/>
+        </p:nvSpPr>
+        <p:spPr>
+          <a:xfrm>
+            <a:off x="594360" y="365760"/>
+            <a:ext cx="1737360" cy="292608"/>
+          </a:xfrm>
+          <a:prstGeom prst="roundRect">
+            <a:avLst/>
+          </a:prstGeom>
+          <a:solidFill>
+            <a:srgbClr val="F5F7FA"/>
+          </a:solidFill>
+          <a:ln w="12700">
+            <a:solidFill>
+              <a:srgbClr val="2EC4B6"/>
+            </a:solidFill>
+          </a:ln>
+          <a:effectLst/>
+        </p:spPr>
+        <p:style>
+          <a:lnRef idx="1">
+            <a:schemeClr val="accent1"/>
+          </a:lnRef>
+          <a:fillRef idx="3">
+            <a:schemeClr val="accent1"/>
+          </a:fillRef>
+          <a:effectRef idx="2">
+            <a:schemeClr val="accent1"/>
+          </a:effectRef>
+          <a:fontRef idx="minor">
+            <a:schemeClr val="lt1"/>
+          </a:fontRef>
+        </p:style>
+        <p:txBody>
+          <a:bodyPr rtlCol="0" anchor="ctr" wrap="none" lIns="0" rIns="0"/>
+          <a:lstStyle/>
+          <a:p>
+            <a:pPr algn="ctr"/>
+            <a:r>
+              <a:rPr sz="1100" b="1">
+                <a:solidFill>
+                  <a:srgbClr val="1F9A8F"/>
+                </a:solidFill>
+                <a:latin typeface="Calibri"/>
+              </a:rPr>
+              <a:t>BUSINESS CONTEXT</a:t>
+            </a:r>
+          </a:p>
+        </p:txBody>
+      </p:sp>
+      <p:sp>
+        <p:nvSpPr>
+          <p:cNvPr id="4" name="TextBox 3"/>
           <p:cNvSpPr txBox="1"/>
           <p:nvPr/>
         </p:nvSpPr>
         <p:spPr>
           <a:xfrm>
-            <a:off x="594360" y="365760"/>
-            <a:ext cx="9144000" cy="365760"/>
+            <a:off x="594360" y="786384"/>
+            <a:ext cx="10972800" cy="822960"/>
           </a:xfrm>
           <a:prstGeom prst="rect">
             <a:avLst/>
@@ -3345,27 +3668,71 @@
           <a:p>
             <a:pPr algn="l"/>
             <a:r>
-              <a:rPr sz="1300" b="1">
-                <a:solidFill>
-                  <a:srgbClr val="2EC4B6"/>
-                </a:solidFill>
-                <a:latin typeface="Calibri"/>
-              </a:rPr>
-              <a:t>BUSINESS CONTEXT</a:t>
-            </a:r>
-          </a:p>
-        </p:txBody>
-      </p:sp>
-      <p:sp>
-        <p:nvSpPr>
-          <p:cNvPr id="4" name="TextBox 3"/>
+              <a:rPr sz="3000" b="1" i="0">
+                <a:solidFill>
+                  <a:srgbClr val="1B2A4A"/>
+                </a:solidFill>
+                <a:latin typeface="Calibri"/>
+              </a:rPr>
+              <a:t>The Use Case</a:t>
+            </a:r>
+          </a:p>
+        </p:txBody>
+      </p:sp>
+      <p:sp>
+        <p:nvSpPr>
+          <p:cNvPr id="5" name="Oval 4"/>
+          <p:cNvSpPr/>
+          <p:nvPr/>
+        </p:nvSpPr>
+        <p:spPr>
+          <a:xfrm>
+            <a:off x="594360" y="1581912"/>
+            <a:ext cx="128016" cy="128016"/>
+          </a:xfrm>
+          <a:prstGeom prst="ellipse">
+            <a:avLst/>
+          </a:prstGeom>
+          <a:solidFill>
+            <a:srgbClr val="2EC4B6"/>
+          </a:solidFill>
+          <a:ln>
+            <a:noFill/>
+          </a:ln>
+          <a:effectLst/>
+        </p:spPr>
+        <p:style>
+          <a:lnRef idx="1">
+            <a:schemeClr val="accent1"/>
+          </a:lnRef>
+          <a:fillRef idx="3">
+            <a:schemeClr val="accent1"/>
+          </a:fillRef>
+          <a:effectRef idx="2">
+            <a:schemeClr val="accent1"/>
+          </a:effectRef>
+          <a:fontRef idx="minor">
+            <a:schemeClr val="lt1"/>
+          </a:fontRef>
+        </p:style>
+        <p:txBody>
+          <a:bodyPr rtlCol="0" anchor="ctr"/>
+          <a:lstStyle/>
+          <a:p>
+            <a:pPr algn="ctr"/>
+          </a:p>
+        </p:txBody>
+      </p:sp>
+      <p:sp>
+        <p:nvSpPr>
+          <p:cNvPr id="6" name="TextBox 5"/>
           <p:cNvSpPr txBox="1"/>
           <p:nvPr/>
         </p:nvSpPr>
         <p:spPr>
           <a:xfrm>
-            <a:off x="594360" y="713232"/>
-            <a:ext cx="10972800" cy="822960"/>
+            <a:off x="914400" y="1508760"/>
+            <a:ext cx="6355080" cy="1417320"/>
           </a:xfrm>
           <a:prstGeom prst="rect">
             <a:avLst/>
@@ -3380,27 +3747,71 @@
           <a:p>
             <a:pPr algn="l"/>
             <a:r>
-              <a:rPr sz="3000" b="1">
-                <a:solidFill>
-                  <a:srgbClr val="1B2A4A"/>
-                </a:solidFill>
-                <a:latin typeface="Calibri"/>
-              </a:rPr>
-              <a:t>The Use Case</a:t>
-            </a:r>
-          </a:p>
-        </p:txBody>
-      </p:sp>
-      <p:sp>
-        <p:nvSpPr>
-          <p:cNvPr id="5" name="TextBox 4"/>
+              <a:rPr sz="1700" b="0" i="0">
+                <a:solidFill>
+                  <a:srgbClr val="202633"/>
+                </a:solidFill>
+                <a:latin typeface="Calibri"/>
+              </a:rPr>
+              <a:t>CSAT scores are down, and leadership needs to know WHY - not just that satisfaction has slipped, but which specific, fixable issue is driving it.</a:t>
+            </a:r>
+          </a:p>
+        </p:txBody>
+      </p:sp>
+      <p:sp>
+        <p:nvSpPr>
+          <p:cNvPr id="7" name="Oval 6"/>
+          <p:cNvSpPr/>
+          <p:nvPr/>
+        </p:nvSpPr>
+        <p:spPr>
+          <a:xfrm>
+            <a:off x="594360" y="2999232"/>
+            <a:ext cx="128016" cy="128016"/>
+          </a:xfrm>
+          <a:prstGeom prst="ellipse">
+            <a:avLst/>
+          </a:prstGeom>
+          <a:solidFill>
+            <a:srgbClr val="2EC4B6"/>
+          </a:solidFill>
+          <a:ln>
+            <a:noFill/>
+          </a:ln>
+          <a:effectLst/>
+        </p:spPr>
+        <p:style>
+          <a:lnRef idx="1">
+            <a:schemeClr val="accent1"/>
+          </a:lnRef>
+          <a:fillRef idx="3">
+            <a:schemeClr val="accent1"/>
+          </a:fillRef>
+          <a:effectRef idx="2">
+            <a:schemeClr val="accent1"/>
+          </a:effectRef>
+          <a:fontRef idx="minor">
+            <a:schemeClr val="lt1"/>
+          </a:fontRef>
+        </p:style>
+        <p:txBody>
+          <a:bodyPr rtlCol="0" anchor="ctr"/>
+          <a:lstStyle/>
+          <a:p>
+            <a:pPr algn="ctr"/>
+          </a:p>
+        </p:txBody>
+      </p:sp>
+      <p:sp>
+        <p:nvSpPr>
+          <p:cNvPr id="8" name="TextBox 7"/>
           <p:cNvSpPr txBox="1"/>
           <p:nvPr/>
         </p:nvSpPr>
         <p:spPr>
           <a:xfrm>
-            <a:off x="594360" y="1463040"/>
-            <a:ext cx="10789920" cy="4114800"/>
+            <a:off x="914400" y="2926080"/>
+            <a:ext cx="6355080" cy="1417320"/>
           </a:xfrm>
           <a:prstGeom prst="rect">
             <a:avLst/>
@@ -3413,65 +3824,73 @@
           </a:bodyPr>
           <a:lstStyle/>
           <a:p>
-            <a:pPr algn="l">
-              <a:spcAft>
-                <a:spcPts val="2200"/>
-              </a:spcAft>
-            </a:pPr>
-            <a:r>
-              <a:rPr sz="1900">
+            <a:pPr algn="l"/>
+            <a:r>
+              <a:rPr sz="1700" b="0" i="0">
                 <a:solidFill>
                   <a:srgbClr val="202633"/>
                 </a:solidFill>
                 <a:latin typeface="Calibri"/>
               </a:rPr>
-              <a:t>●   CSAT scores are down, and leadership needs to know WHY - not just that satisfaction has slipped, but which specific, fixable issue is driving it.</a:t>
-            </a:r>
-          </a:p>
-          <a:p>
-            <a:pPr algn="l">
-              <a:spcAft>
-                <a:spcPts val="2200"/>
-              </a:spcAft>
-            </a:pPr>
-            <a:r>
-              <a:rPr sz="1900">
-                <a:solidFill>
-                  <a:srgbClr val="202633"/>
-                </a:solidFill>
-                <a:latin typeface="Calibri"/>
-              </a:rPr>
-              <a:t>●   Thousands of open-text survey responses arrive across chat, email and voice every month - too much volume to read by hand, but too much nuance for a dashboard number alone.</a:t>
-            </a:r>
-          </a:p>
-          <a:p>
-            <a:pPr algn="l">
-              <a:spcAft>
-                <a:spcPts val="2200"/>
-              </a:spcAft>
-            </a:pPr>
-            <a:r>
-              <a:rPr sz="1900">
-                <a:solidFill>
-                  <a:srgbClr val="202633"/>
-                </a:solidFill>
-                <a:latin typeface="Calibri"/>
-              </a:rPr>
-              <a:t>●   Objective: systematically tag every response against a small set of known root-cause drivers, score its sentiment, and roll everything up into a ranked, actionable view - which driver matters most, where it concentrates, and what's compounding it.</a:t>
-            </a:r>
-          </a:p>
-        </p:txBody>
-      </p:sp>
-      <p:sp>
-        <p:nvSpPr>
-          <p:cNvPr id="6" name="TextBox 5"/>
+              <a:t>Thousands of open-text survey responses arrive across chat, email and voice every month - too much volume to read by hand, but too much nuance for a dashboard number alone.</a:t>
+            </a:r>
+          </a:p>
+        </p:txBody>
+      </p:sp>
+      <p:sp>
+        <p:nvSpPr>
+          <p:cNvPr id="9" name="Oval 8"/>
+          <p:cNvSpPr/>
+          <p:nvPr/>
+        </p:nvSpPr>
+        <p:spPr>
+          <a:xfrm>
+            <a:off x="594360" y="4416552"/>
+            <a:ext cx="128016" cy="128016"/>
+          </a:xfrm>
+          <a:prstGeom prst="ellipse">
+            <a:avLst/>
+          </a:prstGeom>
+          <a:solidFill>
+            <a:srgbClr val="2EC4B6"/>
+          </a:solidFill>
+          <a:ln>
+            <a:noFill/>
+          </a:ln>
+          <a:effectLst/>
+        </p:spPr>
+        <p:style>
+          <a:lnRef idx="1">
+            <a:schemeClr val="accent1"/>
+          </a:lnRef>
+          <a:fillRef idx="3">
+            <a:schemeClr val="accent1"/>
+          </a:fillRef>
+          <a:effectRef idx="2">
+            <a:schemeClr val="accent1"/>
+          </a:effectRef>
+          <a:fontRef idx="minor">
+            <a:schemeClr val="lt1"/>
+          </a:fontRef>
+        </p:style>
+        <p:txBody>
+          <a:bodyPr rtlCol="0" anchor="ctr"/>
+          <a:lstStyle/>
+          <a:p>
+            <a:pPr algn="ctr"/>
+          </a:p>
+        </p:txBody>
+      </p:sp>
+      <p:sp>
+        <p:nvSpPr>
+          <p:cNvPr id="10" name="TextBox 9"/>
           <p:cNvSpPr txBox="1"/>
           <p:nvPr/>
         </p:nvSpPr>
         <p:spPr>
           <a:xfrm>
-            <a:off x="594360" y="6446520"/>
-            <a:ext cx="9144000" cy="320040"/>
+            <a:off x="914400" y="4343400"/>
+            <a:ext cx="6355080" cy="1417320"/>
           </a:xfrm>
           <a:prstGeom prst="rect">
             <a:avLst/>
@@ -3486,13 +3905,199 @@
           <a:p>
             <a:pPr algn="l"/>
             <a:r>
-              <a:rPr sz="1000" b="0">
+              <a:rPr sz="1700" b="0" i="0">
+                <a:solidFill>
+                  <a:srgbClr val="202633"/>
+                </a:solidFill>
+                <a:latin typeface="Calibri"/>
+              </a:rPr>
+              <a:t>Objective: systematically tag every response against a known root-cause taxonomy, score its sentiment, and roll everything up into a ranked, actionable view.</a:t>
+            </a:r>
+          </a:p>
+        </p:txBody>
+      </p:sp>
+      <p:sp>
+        <p:nvSpPr>
+          <p:cNvPr id="11" name="Rounded Rectangle 10"/>
+          <p:cNvSpPr/>
+          <p:nvPr/>
+        </p:nvSpPr>
+        <p:spPr>
+          <a:xfrm>
+            <a:off x="7589520" y="1508760"/>
+            <a:ext cx="4023360" cy="3931920"/>
+          </a:xfrm>
+          <a:prstGeom prst="roundRect">
+            <a:avLst/>
+          </a:prstGeom>
+          <a:solidFill>
+            <a:srgbClr val="F5F7FA"/>
+          </a:solidFill>
+          <a:ln>
+            <a:solidFill>
+              <a:srgbClr val="DDE2E8"/>
+            </a:solidFill>
+          </a:ln>
+          <a:effectLst/>
+        </p:spPr>
+        <p:style>
+          <a:lnRef idx="1">
+            <a:schemeClr val="accent1"/>
+          </a:lnRef>
+          <a:fillRef idx="3">
+            <a:schemeClr val="accent1"/>
+          </a:fillRef>
+          <a:effectRef idx="2">
+            <a:schemeClr val="accent1"/>
+          </a:effectRef>
+          <a:fontRef idx="minor">
+            <a:schemeClr val="lt1"/>
+          </a:fontRef>
+        </p:style>
+        <p:txBody>
+          <a:bodyPr rtlCol="0" anchor="ctr"/>
+          <a:lstStyle/>
+          <a:p>
+            <a:pPr algn="ctr"/>
+          </a:p>
+        </p:txBody>
+      </p:sp>
+      <p:sp>
+        <p:nvSpPr>
+          <p:cNvPr id="12" name="TextBox 11"/>
+          <p:cNvSpPr txBox="1"/>
+          <p:nvPr/>
+        </p:nvSpPr>
+        <p:spPr>
+          <a:xfrm>
+            <a:off x="7909560" y="1783080"/>
+            <a:ext cx="3474720" cy="365760"/>
+          </a:xfrm>
+          <a:prstGeom prst="rect">
+            <a:avLst/>
+          </a:prstGeom>
+          <a:noFill/>
+        </p:spPr>
+        <p:txBody>
+          <a:bodyPr wrap="square">
+            <a:spAutoFit/>
+          </a:bodyPr>
+          <a:lstStyle/>
+          <a:p>
+            <a:pPr algn="l"/>
+            <a:r>
+              <a:rPr sz="1200" b="1" i="0">
+                <a:solidFill>
+                  <a:srgbClr val="1F9A8F"/>
+                </a:solidFill>
+                <a:latin typeface="Calibri"/>
+              </a:rPr>
+              <a:t>WHY THIS MATTERS</a:t>
+            </a:r>
+          </a:p>
+        </p:txBody>
+      </p:sp>
+      <p:sp>
+        <p:nvSpPr>
+          <p:cNvPr id="13" name="TextBox 12"/>
+          <p:cNvSpPr txBox="1"/>
+          <p:nvPr/>
+        </p:nvSpPr>
+        <p:spPr>
+          <a:xfrm>
+            <a:off x="7909560" y="2194560"/>
+            <a:ext cx="3429000" cy="3017520"/>
+          </a:xfrm>
+          <a:prstGeom prst="rect">
+            <a:avLst/>
+          </a:prstGeom>
+          <a:noFill/>
+        </p:spPr>
+        <p:txBody>
+          <a:bodyPr wrap="square">
+            <a:spAutoFit/>
+          </a:bodyPr>
+          <a:lstStyle/>
+          <a:p>
+            <a:pPr algn="l"/>
+            <a:r>
+              <a:rPr sz="1450" b="0" i="0">
+                <a:solidFill>
+                  <a:srgbClr val="202633"/>
+                </a:solidFill>
+                <a:latin typeface="Calibri"/>
+              </a:rPr>
+              <a:t>A vague “customer sentiment is down” finding can't be acted on. A ranked, named driver - “Duplicate billing charges, concentrated in the Postpaid LoB” - can go straight to the team that owns the fix, with a number attached to track whether the fix is working.</a:t>
+            </a:r>
+          </a:p>
+        </p:txBody>
+      </p:sp>
+      <p:sp>
+        <p:nvSpPr>
+          <p:cNvPr id="14" name="TextBox 13"/>
+          <p:cNvSpPr txBox="1"/>
+          <p:nvPr/>
+        </p:nvSpPr>
+        <p:spPr>
+          <a:xfrm>
+            <a:off x="594360" y="6473952"/>
+            <a:ext cx="9144000" cy="320040"/>
+          </a:xfrm>
+          <a:prstGeom prst="rect">
+            <a:avLst/>
+          </a:prstGeom>
+          <a:noFill/>
+        </p:spPr>
+        <p:txBody>
+          <a:bodyPr wrap="square">
+            <a:spAutoFit/>
+          </a:bodyPr>
+          <a:lstStyle/>
+          <a:p>
+            <a:pPr algn="l"/>
+            <a:r>
+              <a:rPr sz="1000" b="0" i="0">
                 <a:solidFill>
                   <a:srgbClr val="5A6B7D"/>
                 </a:solidFill>
                 <a:latin typeface="Calibri"/>
               </a:rPr>
               <a:t>CSAT Root-Cause &amp; Sentiment Driver Analysis</a:t>
+            </a:r>
+          </a:p>
+        </p:txBody>
+      </p:sp>
+      <p:sp>
+        <p:nvSpPr>
+          <p:cNvPr id="15" name="TextBox 14"/>
+          <p:cNvSpPr txBox="1"/>
+          <p:nvPr/>
+        </p:nvSpPr>
+        <p:spPr>
+          <a:xfrm>
+            <a:off x="11064240" y="6473952"/>
+            <a:ext cx="822960" cy="320040"/>
+          </a:xfrm>
+          <a:prstGeom prst="rect">
+            <a:avLst/>
+          </a:prstGeom>
+          <a:noFill/>
+        </p:spPr>
+        <p:txBody>
+          <a:bodyPr wrap="square">
+            <a:spAutoFit/>
+          </a:bodyPr>
+          <a:lstStyle/>
+          <a:p>
+            <a:pPr algn="r"/>
+            <a:r>
+              <a:rPr sz="1000" b="0" i="0">
+                <a:solidFill>
+                  <a:srgbClr val="5A6B7D"/>
+                </a:solidFill>
+                <a:latin typeface="Calibri"/>
+              </a:rPr>
+              <a:t>02 / 06</a:t>
             </a:r>
           </a:p>
         </p:txBody>
@@ -3569,14 +4174,69 @@
       </p:sp>
       <p:sp>
         <p:nvSpPr>
-          <p:cNvPr id="3" name="TextBox 2"/>
+          <p:cNvPr id="3" name="Rounded Rectangle 2"/>
+          <p:cNvSpPr/>
+          <p:nvPr/>
+        </p:nvSpPr>
+        <p:spPr>
+          <a:xfrm>
+            <a:off x="594360" y="365760"/>
+            <a:ext cx="1737360" cy="292608"/>
+          </a:xfrm>
+          <a:prstGeom prst="roundRect">
+            <a:avLst/>
+          </a:prstGeom>
+          <a:solidFill>
+            <a:srgbClr val="F5F7FA"/>
+          </a:solidFill>
+          <a:ln w="12700">
+            <a:solidFill>
+              <a:srgbClr val="2EC4B6"/>
+            </a:solidFill>
+          </a:ln>
+          <a:effectLst/>
+        </p:spPr>
+        <p:style>
+          <a:lnRef idx="1">
+            <a:schemeClr val="accent1"/>
+          </a:lnRef>
+          <a:fillRef idx="3">
+            <a:schemeClr val="accent1"/>
+          </a:fillRef>
+          <a:effectRef idx="2">
+            <a:schemeClr val="accent1"/>
+          </a:effectRef>
+          <a:fontRef idx="minor">
+            <a:schemeClr val="lt1"/>
+          </a:fontRef>
+        </p:style>
+        <p:txBody>
+          <a:bodyPr rtlCol="0" anchor="ctr" wrap="none" lIns="0" rIns="0"/>
+          <a:lstStyle/>
+          <a:p>
+            <a:pPr algn="ctr"/>
+            <a:r>
+              <a:rPr sz="1100" b="1">
+                <a:solidFill>
+                  <a:srgbClr val="1F9A8F"/>
+                </a:solidFill>
+                <a:latin typeface="Calibri"/>
+              </a:rPr>
+              <a:t>INPUT</a:t>
+            </a:r>
+          </a:p>
+        </p:txBody>
+      </p:sp>
+      <p:sp>
+        <p:nvSpPr>
+          <p:cNvPr id="4" name="TextBox 3"/>
           <p:cNvSpPr txBox="1"/>
           <p:nvPr/>
         </p:nvSpPr>
         <p:spPr>
           <a:xfrm>
-            <a:off x="594360" y="365760"/>
-            <a:ext cx="9144000" cy="365760"/>
+            <a:off x="594360" y="786384"/>
+            <a:ext cx="10972800" cy="822960"/>
           </a:xfrm>
           <a:prstGeom prst="rect">
             <a:avLst/>
@@ -3591,27 +4251,515 @@
           <a:p>
             <a:pPr algn="l"/>
             <a:r>
-              <a:rPr sz="1300" b="1">
-                <a:solidFill>
-                  <a:srgbClr val="2EC4B6"/>
-                </a:solidFill>
-                <a:latin typeface="Calibri"/>
-              </a:rPr>
-              <a:t>INPUT</a:t>
-            </a:r>
-          </a:p>
-        </p:txBody>
-      </p:sp>
-      <p:sp>
-        <p:nvSpPr>
-          <p:cNvPr id="4" name="TextBox 3"/>
+              <a:rPr sz="3000" b="1" i="0">
+                <a:solidFill>
+                  <a:srgbClr val="1B2A4A"/>
+                </a:solidFill>
+                <a:latin typeface="Calibri"/>
+              </a:rPr>
+              <a:t>The Data</a:t>
+            </a:r>
+          </a:p>
+        </p:txBody>
+      </p:sp>
+      <p:sp>
+        <p:nvSpPr>
+          <p:cNvPr id="5" name="Rectangle 4"/>
+          <p:cNvSpPr/>
+          <p:nvPr/>
+        </p:nvSpPr>
+        <p:spPr>
+          <a:xfrm>
+            <a:off x="594360" y="1463040"/>
+            <a:ext cx="2542032" cy="82296"/>
+          </a:xfrm>
+          <a:prstGeom prst="rect">
+            <a:avLst/>
+          </a:prstGeom>
+          <a:solidFill>
+            <a:srgbClr val="2EC4B6"/>
+          </a:solidFill>
+          <a:ln>
+            <a:noFill/>
+          </a:ln>
+          <a:effectLst/>
+        </p:spPr>
+        <p:style>
+          <a:lnRef idx="1">
+            <a:schemeClr val="accent1"/>
+          </a:lnRef>
+          <a:fillRef idx="3">
+            <a:schemeClr val="accent1"/>
+          </a:fillRef>
+          <a:effectRef idx="2">
+            <a:schemeClr val="accent1"/>
+          </a:effectRef>
+          <a:fontRef idx="minor">
+            <a:schemeClr val="lt1"/>
+          </a:fontRef>
+        </p:style>
+        <p:txBody>
+          <a:bodyPr rtlCol="0" anchor="ctr"/>
+          <a:lstStyle/>
+          <a:p>
+            <a:pPr algn="ctr"/>
+          </a:p>
+        </p:txBody>
+      </p:sp>
+      <p:sp>
+        <p:nvSpPr>
+          <p:cNvPr id="6" name="Rectangle 5"/>
+          <p:cNvSpPr/>
+          <p:nvPr/>
+        </p:nvSpPr>
+        <p:spPr>
+          <a:xfrm>
+            <a:off x="594360" y="1545336"/>
+            <a:ext cx="2542032" cy="1152144"/>
+          </a:xfrm>
+          <a:prstGeom prst="rect">
+            <a:avLst/>
+          </a:prstGeom>
+          <a:solidFill>
+            <a:srgbClr val="F5F7FA"/>
+          </a:solidFill>
+          <a:ln w="9525">
+            <a:solidFill>
+              <a:srgbClr val="DDE2E8"/>
+            </a:solidFill>
+          </a:ln>
+          <a:effectLst/>
+        </p:spPr>
+        <p:style>
+          <a:lnRef idx="1">
+            <a:schemeClr val="accent1"/>
+          </a:lnRef>
+          <a:fillRef idx="3">
+            <a:schemeClr val="accent1"/>
+          </a:fillRef>
+          <a:effectRef idx="2">
+            <a:schemeClr val="accent1"/>
+          </a:effectRef>
+          <a:fontRef idx="minor">
+            <a:schemeClr val="lt1"/>
+          </a:fontRef>
+        </p:style>
+        <p:txBody>
+          <a:bodyPr rtlCol="0" anchor="ctr" wrap="square"/>
+          <a:lstStyle/>
+          <a:p>
+            <a:pPr algn="ctr"/>
+            <a:r>
+              <a:rPr sz="3000" b="1">
+                <a:solidFill>
+                  <a:srgbClr val="1B2A4A"/>
+                </a:solidFill>
+                <a:latin typeface="Calibri"/>
+              </a:rPr>
+              <a:t>7,500</a:t>
+            </a:r>
+          </a:p>
+          <a:p>
+            <a:pPr algn="ctr"/>
+            <a:r>
+              <a:rPr sz="1200">
+                <a:solidFill>
+                  <a:srgbClr val="5A6B7D"/>
+                </a:solidFill>
+                <a:latin typeface="Calibri"/>
+              </a:rPr>
+              <a:t>Survey responses</a:t>
+            </a:r>
+          </a:p>
+        </p:txBody>
+      </p:sp>
+      <p:sp>
+        <p:nvSpPr>
+          <p:cNvPr id="7" name="Rectangle 6"/>
+          <p:cNvSpPr/>
+          <p:nvPr/>
+        </p:nvSpPr>
+        <p:spPr>
+          <a:xfrm>
+            <a:off x="3392424" y="1463040"/>
+            <a:ext cx="2542032" cy="82296"/>
+          </a:xfrm>
+          <a:prstGeom prst="rect">
+            <a:avLst/>
+          </a:prstGeom>
+          <a:solidFill>
+            <a:srgbClr val="2EC4B6"/>
+          </a:solidFill>
+          <a:ln>
+            <a:noFill/>
+          </a:ln>
+          <a:effectLst/>
+        </p:spPr>
+        <p:style>
+          <a:lnRef idx="1">
+            <a:schemeClr val="accent1"/>
+          </a:lnRef>
+          <a:fillRef idx="3">
+            <a:schemeClr val="accent1"/>
+          </a:fillRef>
+          <a:effectRef idx="2">
+            <a:schemeClr val="accent1"/>
+          </a:effectRef>
+          <a:fontRef idx="minor">
+            <a:schemeClr val="lt1"/>
+          </a:fontRef>
+        </p:style>
+        <p:txBody>
+          <a:bodyPr rtlCol="0" anchor="ctr"/>
+          <a:lstStyle/>
+          <a:p>
+            <a:pPr algn="ctr"/>
+          </a:p>
+        </p:txBody>
+      </p:sp>
+      <p:sp>
+        <p:nvSpPr>
+          <p:cNvPr id="8" name="Rectangle 7"/>
+          <p:cNvSpPr/>
+          <p:nvPr/>
+        </p:nvSpPr>
+        <p:spPr>
+          <a:xfrm>
+            <a:off x="3392424" y="1545336"/>
+            <a:ext cx="2542032" cy="1152144"/>
+          </a:xfrm>
+          <a:prstGeom prst="rect">
+            <a:avLst/>
+          </a:prstGeom>
+          <a:solidFill>
+            <a:srgbClr val="F5F7FA"/>
+          </a:solidFill>
+          <a:ln w="9525">
+            <a:solidFill>
+              <a:srgbClr val="DDE2E8"/>
+            </a:solidFill>
+          </a:ln>
+          <a:effectLst/>
+        </p:spPr>
+        <p:style>
+          <a:lnRef idx="1">
+            <a:schemeClr val="accent1"/>
+          </a:lnRef>
+          <a:fillRef idx="3">
+            <a:schemeClr val="accent1"/>
+          </a:fillRef>
+          <a:effectRef idx="2">
+            <a:schemeClr val="accent1"/>
+          </a:effectRef>
+          <a:fontRef idx="minor">
+            <a:schemeClr val="lt1"/>
+          </a:fontRef>
+        </p:style>
+        <p:txBody>
+          <a:bodyPr rtlCol="0" anchor="ctr" wrap="square"/>
+          <a:lstStyle/>
+          <a:p>
+            <a:pPr algn="ctr"/>
+            <a:r>
+              <a:rPr sz="3000" b="1">
+                <a:solidFill>
+                  <a:srgbClr val="1B2A4A"/>
+                </a:solidFill>
+                <a:latin typeface="Calibri"/>
+              </a:rPr>
+              <a:t>3</a:t>
+            </a:r>
+          </a:p>
+          <a:p>
+            <a:pPr algn="ctr"/>
+            <a:r>
+              <a:rPr sz="1200">
+                <a:solidFill>
+                  <a:srgbClr val="5A6B7D"/>
+                </a:solidFill>
+                <a:latin typeface="Calibri"/>
+              </a:rPr>
+              <a:t>Channels (chat/email/voice)</a:t>
+            </a:r>
+          </a:p>
+        </p:txBody>
+      </p:sp>
+      <p:sp>
+        <p:nvSpPr>
+          <p:cNvPr id="9" name="Rectangle 8"/>
+          <p:cNvSpPr/>
+          <p:nvPr/>
+        </p:nvSpPr>
+        <p:spPr>
+          <a:xfrm>
+            <a:off x="6190488" y="1463040"/>
+            <a:ext cx="2542032" cy="82296"/>
+          </a:xfrm>
+          <a:prstGeom prst="rect">
+            <a:avLst/>
+          </a:prstGeom>
+          <a:solidFill>
+            <a:srgbClr val="2EC4B6"/>
+          </a:solidFill>
+          <a:ln>
+            <a:noFill/>
+          </a:ln>
+          <a:effectLst/>
+        </p:spPr>
+        <p:style>
+          <a:lnRef idx="1">
+            <a:schemeClr val="accent1"/>
+          </a:lnRef>
+          <a:fillRef idx="3">
+            <a:schemeClr val="accent1"/>
+          </a:fillRef>
+          <a:effectRef idx="2">
+            <a:schemeClr val="accent1"/>
+          </a:effectRef>
+          <a:fontRef idx="minor">
+            <a:schemeClr val="lt1"/>
+          </a:fontRef>
+        </p:style>
+        <p:txBody>
+          <a:bodyPr rtlCol="0" anchor="ctr"/>
+          <a:lstStyle/>
+          <a:p>
+            <a:pPr algn="ctr"/>
+          </a:p>
+        </p:txBody>
+      </p:sp>
+      <p:sp>
+        <p:nvSpPr>
+          <p:cNvPr id="10" name="Rectangle 9"/>
+          <p:cNvSpPr/>
+          <p:nvPr/>
+        </p:nvSpPr>
+        <p:spPr>
+          <a:xfrm>
+            <a:off x="6190488" y="1545336"/>
+            <a:ext cx="2542032" cy="1152144"/>
+          </a:xfrm>
+          <a:prstGeom prst="rect">
+            <a:avLst/>
+          </a:prstGeom>
+          <a:solidFill>
+            <a:srgbClr val="F5F7FA"/>
+          </a:solidFill>
+          <a:ln w="9525">
+            <a:solidFill>
+              <a:srgbClr val="DDE2E8"/>
+            </a:solidFill>
+          </a:ln>
+          <a:effectLst/>
+        </p:spPr>
+        <p:style>
+          <a:lnRef idx="1">
+            <a:schemeClr val="accent1"/>
+          </a:lnRef>
+          <a:fillRef idx="3">
+            <a:schemeClr val="accent1"/>
+          </a:fillRef>
+          <a:effectRef idx="2">
+            <a:schemeClr val="accent1"/>
+          </a:effectRef>
+          <a:fontRef idx="minor">
+            <a:schemeClr val="lt1"/>
+          </a:fontRef>
+        </p:style>
+        <p:txBody>
+          <a:bodyPr rtlCol="0" anchor="ctr" wrap="square"/>
+          <a:lstStyle/>
+          <a:p>
+            <a:pPr algn="ctr"/>
+            <a:r>
+              <a:rPr sz="3000" b="1">
+                <a:solidFill>
+                  <a:srgbClr val="1B2A4A"/>
+                </a:solidFill>
+                <a:latin typeface="Calibri"/>
+              </a:rPr>
+              <a:t>4</a:t>
+            </a:r>
+          </a:p>
+          <a:p>
+            <a:pPr algn="ctr"/>
+            <a:r>
+              <a:rPr sz="1200">
+                <a:solidFill>
+                  <a:srgbClr val="5A6B7D"/>
+                </a:solidFill>
+                <a:latin typeface="Calibri"/>
+              </a:rPr>
+              <a:t>Lines of business</a:t>
+            </a:r>
+          </a:p>
+        </p:txBody>
+      </p:sp>
+      <p:sp>
+        <p:nvSpPr>
+          <p:cNvPr id="11" name="Rectangle 10"/>
+          <p:cNvSpPr/>
+          <p:nvPr/>
+        </p:nvSpPr>
+        <p:spPr>
+          <a:xfrm>
+            <a:off x="8988552" y="1463040"/>
+            <a:ext cx="2542032" cy="82296"/>
+          </a:xfrm>
+          <a:prstGeom prst="rect">
+            <a:avLst/>
+          </a:prstGeom>
+          <a:solidFill>
+            <a:srgbClr val="2EC4B6"/>
+          </a:solidFill>
+          <a:ln>
+            <a:noFill/>
+          </a:ln>
+          <a:effectLst/>
+        </p:spPr>
+        <p:style>
+          <a:lnRef idx="1">
+            <a:schemeClr val="accent1"/>
+          </a:lnRef>
+          <a:fillRef idx="3">
+            <a:schemeClr val="accent1"/>
+          </a:fillRef>
+          <a:effectRef idx="2">
+            <a:schemeClr val="accent1"/>
+          </a:effectRef>
+          <a:fontRef idx="minor">
+            <a:schemeClr val="lt1"/>
+          </a:fontRef>
+        </p:style>
+        <p:txBody>
+          <a:bodyPr rtlCol="0" anchor="ctr"/>
+          <a:lstStyle/>
+          <a:p>
+            <a:pPr algn="ctr"/>
+          </a:p>
+        </p:txBody>
+      </p:sp>
+      <p:sp>
+        <p:nvSpPr>
+          <p:cNvPr id="12" name="Rectangle 11"/>
+          <p:cNvSpPr/>
+          <p:nvPr/>
+        </p:nvSpPr>
+        <p:spPr>
+          <a:xfrm>
+            <a:off x="8988552" y="1545336"/>
+            <a:ext cx="2542032" cy="1152144"/>
+          </a:xfrm>
+          <a:prstGeom prst="rect">
+            <a:avLst/>
+          </a:prstGeom>
+          <a:solidFill>
+            <a:srgbClr val="F5F7FA"/>
+          </a:solidFill>
+          <a:ln w="9525">
+            <a:solidFill>
+              <a:srgbClr val="DDE2E8"/>
+            </a:solidFill>
+          </a:ln>
+          <a:effectLst/>
+        </p:spPr>
+        <p:style>
+          <a:lnRef idx="1">
+            <a:schemeClr val="accent1"/>
+          </a:lnRef>
+          <a:fillRef idx="3">
+            <a:schemeClr val="accent1"/>
+          </a:fillRef>
+          <a:effectRef idx="2">
+            <a:schemeClr val="accent1"/>
+          </a:effectRef>
+          <a:fontRef idx="minor">
+            <a:schemeClr val="lt1"/>
+          </a:fontRef>
+        </p:style>
+        <p:txBody>
+          <a:bodyPr rtlCol="0" anchor="ctr" wrap="square"/>
+          <a:lstStyle/>
+          <a:p>
+            <a:pPr algn="ctr"/>
+            <a:r>
+              <a:rPr sz="3000" b="1">
+                <a:solidFill>
+                  <a:srgbClr val="1B2A4A"/>
+                </a:solidFill>
+                <a:latin typeface="Calibri"/>
+              </a:rPr>
+              <a:t>23</a:t>
+            </a:r>
+          </a:p>
+          <a:p>
+            <a:pPr algn="ctr"/>
+            <a:r>
+              <a:rPr sz="1200">
+                <a:solidFill>
+                  <a:srgbClr val="5A6B7D"/>
+                </a:solidFill>
+                <a:latin typeface="Calibri"/>
+              </a:rPr>
+              <a:t>Telecom circles covered</a:t>
+            </a:r>
+          </a:p>
+        </p:txBody>
+      </p:sp>
+      <p:sp>
+        <p:nvSpPr>
+          <p:cNvPr id="13" name="Oval 12"/>
+          <p:cNvSpPr/>
+          <p:nvPr/>
+        </p:nvSpPr>
+        <p:spPr>
+          <a:xfrm>
+            <a:off x="594360" y="3090672"/>
+            <a:ext cx="128016" cy="128016"/>
+          </a:xfrm>
+          <a:prstGeom prst="ellipse">
+            <a:avLst/>
+          </a:prstGeom>
+          <a:solidFill>
+            <a:srgbClr val="2EC4B6"/>
+          </a:solidFill>
+          <a:ln>
+            <a:noFill/>
+          </a:ln>
+          <a:effectLst/>
+        </p:spPr>
+        <p:style>
+          <a:lnRef idx="1">
+            <a:schemeClr val="accent1"/>
+          </a:lnRef>
+          <a:fillRef idx="3">
+            <a:schemeClr val="accent1"/>
+          </a:fillRef>
+          <a:effectRef idx="2">
+            <a:schemeClr val="accent1"/>
+          </a:effectRef>
+          <a:fontRef idx="minor">
+            <a:schemeClr val="lt1"/>
+          </a:fontRef>
+        </p:style>
+        <p:txBody>
+          <a:bodyPr rtlCol="0" anchor="ctr"/>
+          <a:lstStyle/>
+          <a:p>
+            <a:pPr algn="ctr"/>
+          </a:p>
+        </p:txBody>
+      </p:sp>
+      <p:sp>
+        <p:nvSpPr>
+          <p:cNvPr id="14" name="TextBox 13"/>
           <p:cNvSpPr txBox="1"/>
           <p:nvPr/>
         </p:nvSpPr>
         <p:spPr>
           <a:xfrm>
-            <a:off x="594360" y="713232"/>
-            <a:ext cx="10972800" cy="822960"/>
+            <a:off x="914400" y="3017520"/>
+            <a:ext cx="10561320" cy="594360"/>
           </a:xfrm>
           <a:prstGeom prst="rect">
             <a:avLst/>
@@ -3626,27 +4774,71 @@
           <a:p>
             <a:pPr algn="l"/>
             <a:r>
-              <a:rPr sz="3000" b="1">
-                <a:solidFill>
-                  <a:srgbClr val="1B2A4A"/>
-                </a:solidFill>
-                <a:latin typeface="Calibri"/>
-              </a:rPr>
-              <a:t>The Data</a:t>
-            </a:r>
-          </a:p>
-        </p:txBody>
-      </p:sp>
-      <p:sp>
-        <p:nvSpPr>
-          <p:cNvPr id="5" name="TextBox 4"/>
+              <a:rPr sz="1550" b="0" i="0">
+                <a:solidFill>
+                  <a:srgbClr val="202633"/>
+                </a:solidFill>
+                <a:latin typeface="Calibri"/>
+              </a:rPr>
+              <a:t>01 Aug – 31 Oct 2026: date, unique response ID, channel, line of business, the customer's own words (verbatim), CSAT score (1-5)</a:t>
+            </a:r>
+          </a:p>
+        </p:txBody>
+      </p:sp>
+      <p:sp>
+        <p:nvSpPr>
+          <p:cNvPr id="15" name="Oval 14"/>
+          <p:cNvSpPr/>
+          <p:nvPr/>
+        </p:nvSpPr>
+        <p:spPr>
+          <a:xfrm>
+            <a:off x="594360" y="3685032"/>
+            <a:ext cx="128016" cy="128016"/>
+          </a:xfrm>
+          <a:prstGeom prst="ellipse">
+            <a:avLst/>
+          </a:prstGeom>
+          <a:solidFill>
+            <a:srgbClr val="2EC4B6"/>
+          </a:solidFill>
+          <a:ln>
+            <a:noFill/>
+          </a:ln>
+          <a:effectLst/>
+        </p:spPr>
+        <p:style>
+          <a:lnRef idx="1">
+            <a:schemeClr val="accent1"/>
+          </a:lnRef>
+          <a:fillRef idx="3">
+            <a:schemeClr val="accent1"/>
+          </a:fillRef>
+          <a:effectRef idx="2">
+            <a:schemeClr val="accent1"/>
+          </a:effectRef>
+          <a:fontRef idx="minor">
+            <a:schemeClr val="lt1"/>
+          </a:fontRef>
+        </p:style>
+        <p:txBody>
+          <a:bodyPr rtlCol="0" anchor="ctr"/>
+          <a:lstStyle/>
+          <a:p>
+            <a:pPr algn="ctr"/>
+          </a:p>
+        </p:txBody>
+      </p:sp>
+      <p:sp>
+        <p:nvSpPr>
+          <p:cNvPr id="16" name="TextBox 15"/>
           <p:cNvSpPr txBox="1"/>
           <p:nvPr/>
         </p:nvSpPr>
         <p:spPr>
           <a:xfrm>
-            <a:off x="594360" y="1463040"/>
-            <a:ext cx="10789920" cy="2926080"/>
+            <a:off x="914400" y="3611880"/>
+            <a:ext cx="10561320" cy="594360"/>
           </a:xfrm>
           <a:prstGeom prst="rect">
             <a:avLst/>
@@ -3659,65 +4851,29 @@
           </a:bodyPr>
           <a:lstStyle/>
           <a:p>
-            <a:pPr algn="l">
-              <a:spcAft>
-                <a:spcPts val="2000"/>
-              </a:spcAft>
-            </a:pPr>
-            <a:r>
-              <a:rPr sz="1900">
+            <a:pPr algn="l"/>
+            <a:r>
+              <a:rPr sz="1550" b="0" i="0">
                 <a:solidFill>
                   <a:srgbClr val="202633"/>
                 </a:solidFill>
                 <a:latin typeface="Calibri"/>
               </a:rPr>
-              <a:t>●   7,500 customer survey responses across chat, email and voice (01 Aug – 31 Oct 2026)</a:t>
-            </a:r>
-          </a:p>
-          <a:p>
-            <a:pPr algn="l">
-              <a:spcAft>
-                <a:spcPts val="2000"/>
-              </a:spcAft>
-            </a:pPr>
-            <a:r>
-              <a:rPr sz="1900">
-                <a:solidFill>
-                  <a:srgbClr val="202633"/>
-                </a:solidFill>
-                <a:latin typeface="Calibri"/>
-              </a:rPr>
-              <a:t>●   Columns: date, unique response ID, channel, line of business, the customer's own words (verbatim), CSAT score (1-5), plus the agent/TL/manager who handled it</a:t>
-            </a:r>
-          </a:p>
-          <a:p>
-            <a:pPr algn="l">
-              <a:spcAft>
-                <a:spcPts val="2000"/>
-              </a:spcAft>
-            </a:pPr>
-            <a:r>
-              <a:rPr sz="1900">
-                <a:solidFill>
-                  <a:srgbClr val="202633"/>
-                </a:solidFill>
-                <a:latin typeface="Calibri"/>
-              </a:rPr>
-              <a:t>●   Also carries three real call-center operational signals: handle time, first-contact-resolution flag, and 30-day repeat-contact flag</a:t>
-            </a:r>
-          </a:p>
-        </p:txBody>
-      </p:sp>
-      <p:sp>
-        <p:nvSpPr>
-          <p:cNvPr id="6" name="TextBox 5"/>
+              <a:t>Who handled it: agent, team lead, manager - and customer-master fields a survey platform routinely carries: plan tier (5 tiers) and telecom circle (23 circles, all-India)</a:t>
+            </a:r>
+          </a:p>
+        </p:txBody>
+      </p:sp>
+      <p:sp>
+        <p:nvSpPr>
+          <p:cNvPr id="17" name="TextBox 16"/>
           <p:cNvSpPr txBox="1"/>
           <p:nvPr/>
         </p:nvSpPr>
         <p:spPr>
           <a:xfrm>
-            <a:off x="594360" y="4480560"/>
-            <a:ext cx="10789920" cy="457200"/>
+            <a:off x="594360" y="4434840"/>
+            <a:ext cx="4572000" cy="320040"/>
           </a:xfrm>
           <a:prstGeom prst="rect">
             <a:avLst/>
@@ -3732,27 +4888,209 @@
           <a:p>
             <a:pPr algn="l"/>
             <a:r>
-              <a:rPr sz="1600" b="0">
-                <a:solidFill>
-                  <a:srgbClr val="5A6B7D"/>
-                </a:solidFill>
-                <a:latin typeface="Calibri"/>
-              </a:rPr>
-              <a:t>Channel mix:  Voice: 3,322  |  Chat: 2,665  |  Email: 1,513</a:t>
-            </a:r>
-          </a:p>
-        </p:txBody>
-      </p:sp>
-      <p:sp>
-        <p:nvSpPr>
-          <p:cNvPr id="7" name="TextBox 6"/>
+              <a:rPr sz="1200" b="1" i="0">
+                <a:solidFill>
+                  <a:srgbClr val="1F9A8F"/>
+                </a:solidFill>
+                <a:latin typeface="Calibri"/>
+              </a:rPr>
+              <a:t>CHANNEL MIX</a:t>
+            </a:r>
+          </a:p>
+        </p:txBody>
+      </p:sp>
+      <p:sp>
+        <p:nvSpPr>
+          <p:cNvPr id="18" name="Rectangle 17"/>
+          <p:cNvSpPr/>
+          <p:nvPr/>
+        </p:nvSpPr>
+        <p:spPr>
+          <a:xfrm>
+            <a:off x="594360" y="4800600"/>
+            <a:ext cx="4934334" cy="411480"/>
+          </a:xfrm>
+          <a:prstGeom prst="rect">
+            <a:avLst/>
+          </a:prstGeom>
+          <a:solidFill>
+            <a:srgbClr val="1B2A4A"/>
+          </a:solidFill>
+          <a:ln w="19050">
+            <a:solidFill>
+              <a:srgbClr val="FFFFFF"/>
+            </a:solidFill>
+          </a:ln>
+          <a:effectLst/>
+        </p:spPr>
+        <p:style>
+          <a:lnRef idx="1">
+            <a:schemeClr val="accent1"/>
+          </a:lnRef>
+          <a:fillRef idx="3">
+            <a:schemeClr val="accent1"/>
+          </a:fillRef>
+          <a:effectRef idx="2">
+            <a:schemeClr val="accent1"/>
+          </a:effectRef>
+          <a:fontRef idx="minor">
+            <a:schemeClr val="lt1"/>
+          </a:fontRef>
+        </p:style>
+        <p:txBody>
+          <a:bodyPr rtlCol="0" anchor="ctr"/>
+          <a:lstStyle/>
+          <a:p>
+            <a:pPr algn="ctr"/>
+          </a:p>
+        </p:txBody>
+      </p:sp>
+      <p:sp>
+        <p:nvSpPr>
+          <p:cNvPr id="19" name="Rectangle 18"/>
+          <p:cNvSpPr/>
+          <p:nvPr/>
+        </p:nvSpPr>
+        <p:spPr>
+          <a:xfrm>
+            <a:off x="5528694" y="4800600"/>
+            <a:ext cx="3762048" cy="411480"/>
+          </a:xfrm>
+          <a:prstGeom prst="rect">
+            <a:avLst/>
+          </a:prstGeom>
+          <a:solidFill>
+            <a:srgbClr val="2EC4B6"/>
+          </a:solidFill>
+          <a:ln w="19050">
+            <a:solidFill>
+              <a:srgbClr val="FFFFFF"/>
+            </a:solidFill>
+          </a:ln>
+          <a:effectLst/>
+        </p:spPr>
+        <p:style>
+          <a:lnRef idx="1">
+            <a:schemeClr val="accent1"/>
+          </a:lnRef>
+          <a:fillRef idx="3">
+            <a:schemeClr val="accent1"/>
+          </a:fillRef>
+          <a:effectRef idx="2">
+            <a:schemeClr val="accent1"/>
+          </a:effectRef>
+          <a:fontRef idx="minor">
+            <a:schemeClr val="lt1"/>
+          </a:fontRef>
+        </p:style>
+        <p:txBody>
+          <a:bodyPr rtlCol="0" anchor="ctr"/>
+          <a:lstStyle/>
+          <a:p>
+            <a:pPr algn="ctr"/>
+          </a:p>
+        </p:txBody>
+      </p:sp>
+      <p:sp>
+        <p:nvSpPr>
+          <p:cNvPr id="20" name="Rectangle 19"/>
+          <p:cNvSpPr/>
+          <p:nvPr/>
+        </p:nvSpPr>
+        <p:spPr>
+          <a:xfrm>
+            <a:off x="9290742" y="4800600"/>
+            <a:ext cx="2184977" cy="411480"/>
+          </a:xfrm>
+          <a:prstGeom prst="rect">
+            <a:avLst/>
+          </a:prstGeom>
+          <a:solidFill>
+            <a:srgbClr val="E8A83C"/>
+          </a:solidFill>
+          <a:ln w="19050">
+            <a:solidFill>
+              <a:srgbClr val="FFFFFF"/>
+            </a:solidFill>
+          </a:ln>
+          <a:effectLst/>
+        </p:spPr>
+        <p:style>
+          <a:lnRef idx="1">
+            <a:schemeClr val="accent1"/>
+          </a:lnRef>
+          <a:fillRef idx="3">
+            <a:schemeClr val="accent1"/>
+          </a:fillRef>
+          <a:effectRef idx="2">
+            <a:schemeClr val="accent1"/>
+          </a:effectRef>
+          <a:fontRef idx="minor">
+            <a:schemeClr val="lt1"/>
+          </a:fontRef>
+        </p:style>
+        <p:txBody>
+          <a:bodyPr rtlCol="0" anchor="ctr"/>
+          <a:lstStyle/>
+          <a:p>
+            <a:pPr algn="ctr"/>
+          </a:p>
+        </p:txBody>
+      </p:sp>
+      <p:sp>
+        <p:nvSpPr>
+          <p:cNvPr id="21" name="Oval 20"/>
+          <p:cNvSpPr/>
+          <p:nvPr/>
+        </p:nvSpPr>
+        <p:spPr>
+          <a:xfrm>
+            <a:off x="594360" y="5321808"/>
+            <a:ext cx="128016" cy="128016"/>
+          </a:xfrm>
+          <a:prstGeom prst="ellipse">
+            <a:avLst/>
+          </a:prstGeom>
+          <a:solidFill>
+            <a:srgbClr val="1B2A4A"/>
+          </a:solidFill>
+          <a:ln>
+            <a:noFill/>
+          </a:ln>
+          <a:effectLst/>
+        </p:spPr>
+        <p:style>
+          <a:lnRef idx="1">
+            <a:schemeClr val="accent1"/>
+          </a:lnRef>
+          <a:fillRef idx="3">
+            <a:schemeClr val="accent1"/>
+          </a:fillRef>
+          <a:effectRef idx="2">
+            <a:schemeClr val="accent1"/>
+          </a:effectRef>
+          <a:fontRef idx="minor">
+            <a:schemeClr val="lt1"/>
+          </a:fontRef>
+        </p:style>
+        <p:txBody>
+          <a:bodyPr rtlCol="0" anchor="ctr"/>
+          <a:lstStyle/>
+          <a:p>
+            <a:pPr algn="ctr"/>
+          </a:p>
+        </p:txBody>
+      </p:sp>
+      <p:sp>
+        <p:nvSpPr>
+          <p:cNvPr id="22" name="TextBox 21"/>
           <p:cNvSpPr txBox="1"/>
           <p:nvPr/>
         </p:nvSpPr>
         <p:spPr>
           <a:xfrm>
-            <a:off x="594360" y="6446520"/>
-            <a:ext cx="9144000" cy="320040"/>
+            <a:off x="777240" y="5276088"/>
+            <a:ext cx="2377440" cy="274320"/>
           </a:xfrm>
           <a:prstGeom prst="rect">
             <a:avLst/>
@@ -3767,13 +5105,241 @@
           <a:p>
             <a:pPr algn="l"/>
             <a:r>
-              <a:rPr sz="1000" b="0">
+              <a:rPr sz="1300" b="0" i="0">
                 <a:solidFill>
                   <a:srgbClr val="5A6B7D"/>
                 </a:solidFill>
                 <a:latin typeface="Calibri"/>
               </a:rPr>
+              <a:t>Voice: 45%</a:t>
+            </a:r>
+          </a:p>
+        </p:txBody>
+      </p:sp>
+      <p:sp>
+        <p:nvSpPr>
+          <p:cNvPr id="23" name="Oval 22"/>
+          <p:cNvSpPr/>
+          <p:nvPr/>
+        </p:nvSpPr>
+        <p:spPr>
+          <a:xfrm>
+            <a:off x="3108960" y="5321808"/>
+            <a:ext cx="128016" cy="128016"/>
+          </a:xfrm>
+          <a:prstGeom prst="ellipse">
+            <a:avLst/>
+          </a:prstGeom>
+          <a:solidFill>
+            <a:srgbClr val="2EC4B6"/>
+          </a:solidFill>
+          <a:ln>
+            <a:noFill/>
+          </a:ln>
+          <a:effectLst/>
+        </p:spPr>
+        <p:style>
+          <a:lnRef idx="1">
+            <a:schemeClr val="accent1"/>
+          </a:lnRef>
+          <a:fillRef idx="3">
+            <a:schemeClr val="accent1"/>
+          </a:fillRef>
+          <a:effectRef idx="2">
+            <a:schemeClr val="accent1"/>
+          </a:effectRef>
+          <a:fontRef idx="minor">
+            <a:schemeClr val="lt1"/>
+          </a:fontRef>
+        </p:style>
+        <p:txBody>
+          <a:bodyPr rtlCol="0" anchor="ctr"/>
+          <a:lstStyle/>
+          <a:p>
+            <a:pPr algn="ctr"/>
+          </a:p>
+        </p:txBody>
+      </p:sp>
+      <p:sp>
+        <p:nvSpPr>
+          <p:cNvPr id="24" name="TextBox 23"/>
+          <p:cNvSpPr txBox="1"/>
+          <p:nvPr/>
+        </p:nvSpPr>
+        <p:spPr>
+          <a:xfrm>
+            <a:off x="3291840" y="5276088"/>
+            <a:ext cx="2377440" cy="274320"/>
+          </a:xfrm>
+          <a:prstGeom prst="rect">
+            <a:avLst/>
+          </a:prstGeom>
+          <a:noFill/>
+        </p:spPr>
+        <p:txBody>
+          <a:bodyPr wrap="square">
+            <a:spAutoFit/>
+          </a:bodyPr>
+          <a:lstStyle/>
+          <a:p>
+            <a:pPr algn="l"/>
+            <a:r>
+              <a:rPr sz="1300" b="0" i="0">
+                <a:solidFill>
+                  <a:srgbClr val="5A6B7D"/>
+                </a:solidFill>
+                <a:latin typeface="Calibri"/>
+              </a:rPr>
+              <a:t>Chat: 35%</a:t>
+            </a:r>
+          </a:p>
+        </p:txBody>
+      </p:sp>
+      <p:sp>
+        <p:nvSpPr>
+          <p:cNvPr id="25" name="Oval 24"/>
+          <p:cNvSpPr/>
+          <p:nvPr/>
+        </p:nvSpPr>
+        <p:spPr>
+          <a:xfrm>
+            <a:off x="5623560" y="5321808"/>
+            <a:ext cx="128016" cy="128016"/>
+          </a:xfrm>
+          <a:prstGeom prst="ellipse">
+            <a:avLst/>
+          </a:prstGeom>
+          <a:solidFill>
+            <a:srgbClr val="E8A83C"/>
+          </a:solidFill>
+          <a:ln>
+            <a:noFill/>
+          </a:ln>
+          <a:effectLst/>
+        </p:spPr>
+        <p:style>
+          <a:lnRef idx="1">
+            <a:schemeClr val="accent1"/>
+          </a:lnRef>
+          <a:fillRef idx="3">
+            <a:schemeClr val="accent1"/>
+          </a:fillRef>
+          <a:effectRef idx="2">
+            <a:schemeClr val="accent1"/>
+          </a:effectRef>
+          <a:fontRef idx="minor">
+            <a:schemeClr val="lt1"/>
+          </a:fontRef>
+        </p:style>
+        <p:txBody>
+          <a:bodyPr rtlCol="0" anchor="ctr"/>
+          <a:lstStyle/>
+          <a:p>
+            <a:pPr algn="ctr"/>
+          </a:p>
+        </p:txBody>
+      </p:sp>
+      <p:sp>
+        <p:nvSpPr>
+          <p:cNvPr id="26" name="TextBox 25"/>
+          <p:cNvSpPr txBox="1"/>
+          <p:nvPr/>
+        </p:nvSpPr>
+        <p:spPr>
+          <a:xfrm>
+            <a:off x="5806440" y="5276088"/>
+            <a:ext cx="2377440" cy="274320"/>
+          </a:xfrm>
+          <a:prstGeom prst="rect">
+            <a:avLst/>
+          </a:prstGeom>
+          <a:noFill/>
+        </p:spPr>
+        <p:txBody>
+          <a:bodyPr wrap="square">
+            <a:spAutoFit/>
+          </a:bodyPr>
+          <a:lstStyle/>
+          <a:p>
+            <a:pPr algn="l"/>
+            <a:r>
+              <a:rPr sz="1300" b="0" i="0">
+                <a:solidFill>
+                  <a:srgbClr val="5A6B7D"/>
+                </a:solidFill>
+                <a:latin typeface="Calibri"/>
+              </a:rPr>
+              <a:t>Email: 20%</a:t>
+            </a:r>
+          </a:p>
+        </p:txBody>
+      </p:sp>
+      <p:sp>
+        <p:nvSpPr>
+          <p:cNvPr id="27" name="TextBox 26"/>
+          <p:cNvSpPr txBox="1"/>
+          <p:nvPr/>
+        </p:nvSpPr>
+        <p:spPr>
+          <a:xfrm>
+            <a:off x="594360" y="6473952"/>
+            <a:ext cx="9144000" cy="320040"/>
+          </a:xfrm>
+          <a:prstGeom prst="rect">
+            <a:avLst/>
+          </a:prstGeom>
+          <a:noFill/>
+        </p:spPr>
+        <p:txBody>
+          <a:bodyPr wrap="square">
+            <a:spAutoFit/>
+          </a:bodyPr>
+          <a:lstStyle/>
+          <a:p>
+            <a:pPr algn="l"/>
+            <a:r>
+              <a:rPr sz="1000" b="0" i="0">
+                <a:solidFill>
+                  <a:srgbClr val="5A6B7D"/>
+                </a:solidFill>
+                <a:latin typeface="Calibri"/>
+              </a:rPr>
               <a:t>CSAT Root-Cause &amp; Sentiment Driver Analysis</a:t>
+            </a:r>
+          </a:p>
+        </p:txBody>
+      </p:sp>
+      <p:sp>
+        <p:nvSpPr>
+          <p:cNvPr id="28" name="TextBox 27"/>
+          <p:cNvSpPr txBox="1"/>
+          <p:nvPr/>
+        </p:nvSpPr>
+        <p:spPr>
+          <a:xfrm>
+            <a:off x="11064240" y="6473952"/>
+            <a:ext cx="822960" cy="320040"/>
+          </a:xfrm>
+          <a:prstGeom prst="rect">
+            <a:avLst/>
+          </a:prstGeom>
+          <a:noFill/>
+        </p:spPr>
+        <p:txBody>
+          <a:bodyPr wrap="square">
+            <a:spAutoFit/>
+          </a:bodyPr>
+          <a:lstStyle/>
+          <a:p>
+            <a:pPr algn="r"/>
+            <a:r>
+              <a:rPr sz="1000" b="0" i="0">
+                <a:solidFill>
+                  <a:srgbClr val="5A6B7D"/>
+                </a:solidFill>
+                <a:latin typeface="Calibri"/>
+              </a:rPr>
+              <a:t>03 / 06</a:t>
             </a:r>
           </a:p>
         </p:txBody>
@@ -3850,14 +5416,69 @@
       </p:sp>
       <p:sp>
         <p:nvSpPr>
-          <p:cNvPr id="3" name="TextBox 2"/>
+          <p:cNvPr id="3" name="Rounded Rectangle 2"/>
+          <p:cNvSpPr/>
+          <p:nvPr/>
+        </p:nvSpPr>
+        <p:spPr>
+          <a:xfrm>
+            <a:off x="594360" y="365760"/>
+            <a:ext cx="1737360" cy="292608"/>
+          </a:xfrm>
+          <a:prstGeom prst="roundRect">
+            <a:avLst/>
+          </a:prstGeom>
+          <a:solidFill>
+            <a:srgbClr val="F5F7FA"/>
+          </a:solidFill>
+          <a:ln w="12700">
+            <a:solidFill>
+              <a:srgbClr val="2EC4B6"/>
+            </a:solidFill>
+          </a:ln>
+          <a:effectLst/>
+        </p:spPr>
+        <p:style>
+          <a:lnRef idx="1">
+            <a:schemeClr val="accent1"/>
+          </a:lnRef>
+          <a:fillRef idx="3">
+            <a:schemeClr val="accent1"/>
+          </a:fillRef>
+          <a:effectRef idx="2">
+            <a:schemeClr val="accent1"/>
+          </a:effectRef>
+          <a:fontRef idx="minor">
+            <a:schemeClr val="lt1"/>
+          </a:fontRef>
+        </p:style>
+        <p:txBody>
+          <a:bodyPr rtlCol="0" anchor="ctr" wrap="none" lIns="0" rIns="0"/>
+          <a:lstStyle/>
+          <a:p>
+            <a:pPr algn="ctr"/>
+            <a:r>
+              <a:rPr sz="1100" b="1">
+                <a:solidFill>
+                  <a:srgbClr val="1F9A8F"/>
+                </a:solidFill>
+                <a:latin typeface="Calibri"/>
+              </a:rPr>
+              <a:t>METHOD</a:t>
+            </a:r>
+          </a:p>
+        </p:txBody>
+      </p:sp>
+      <p:sp>
+        <p:nvSpPr>
+          <p:cNvPr id="4" name="TextBox 3"/>
           <p:cNvSpPr txBox="1"/>
           <p:nvPr/>
         </p:nvSpPr>
         <p:spPr>
           <a:xfrm>
-            <a:off x="594360" y="365760"/>
-            <a:ext cx="9144000" cy="365760"/>
+            <a:off x="594360" y="786384"/>
+            <a:ext cx="10972800" cy="822960"/>
           </a:xfrm>
           <a:prstGeom prst="rect">
             <a:avLst/>
@@ -3872,27 +5493,115 @@
           <a:p>
             <a:pPr algn="l"/>
             <a:r>
-              <a:rPr sz="1300" b="1">
-                <a:solidFill>
-                  <a:srgbClr val="2EC4B6"/>
-                </a:solidFill>
-                <a:latin typeface="Calibri"/>
-              </a:rPr>
-              <a:t>METHOD</a:t>
-            </a:r>
-          </a:p>
-        </p:txBody>
-      </p:sp>
-      <p:sp>
-        <p:nvSpPr>
-          <p:cNvPr id="4" name="TextBox 3"/>
+              <a:rPr sz="3000" b="1" i="0">
+                <a:solidFill>
+                  <a:srgbClr val="1B2A4A"/>
+                </a:solidFill>
+                <a:latin typeface="Calibri"/>
+              </a:rPr>
+              <a:t>Approach &amp; Expected Output</a:t>
+            </a:r>
+          </a:p>
+        </p:txBody>
+      </p:sp>
+      <p:cxnSp>
+        <p:nvCxnSpPr>
+          <p:cNvPr id="5" name="Connector 4"/>
+          <p:cNvCxnSpPr/>
+          <p:nvPr/>
+        </p:nvCxnSpPr>
+        <p:spPr>
+          <a:xfrm>
+            <a:off x="708660.0" y="1851660.0"/>
+            <a:ext cx="10744200.0" cy="0.0"/>
+          </a:xfrm>
+          <a:prstGeom prst="line">
+            <a:avLst/>
+          </a:prstGeom>
+          <a:ln w="25400">
+            <a:solidFill>
+              <a:srgbClr val="DDE2E8"/>
+            </a:solidFill>
+          </a:ln>
+        </p:spPr>
+        <p:style>
+          <a:lnRef idx="2">
+            <a:schemeClr val="accent1"/>
+          </a:lnRef>
+          <a:fillRef idx="0">
+            <a:schemeClr val="accent1"/>
+          </a:fillRef>
+          <a:effectRef idx="1">
+            <a:schemeClr val="accent1"/>
+          </a:effectRef>
+          <a:fontRef idx="minor">
+            <a:schemeClr val="tx1"/>
+          </a:fontRef>
+        </p:style>
+      </p:cxnSp>
+      <p:sp>
+        <p:nvSpPr>
+          <p:cNvPr id="6" name="Oval 5"/>
+          <p:cNvSpPr/>
+          <p:nvPr/>
+        </p:nvSpPr>
+        <p:spPr>
+          <a:xfrm>
+            <a:off x="1330452" y="1600200"/>
+            <a:ext cx="502920" cy="502920"/>
+          </a:xfrm>
+          <a:prstGeom prst="ellipse">
+            <a:avLst/>
+          </a:prstGeom>
+          <a:solidFill>
+            <a:srgbClr val="2EC4B6"/>
+          </a:solidFill>
+          <a:ln>
+            <a:noFill/>
+          </a:ln>
+          <a:effectLst/>
+        </p:spPr>
+        <p:style>
+          <a:lnRef idx="1">
+            <a:schemeClr val="accent1"/>
+          </a:lnRef>
+          <a:fillRef idx="3">
+            <a:schemeClr val="accent1"/>
+          </a:fillRef>
+          <a:effectRef idx="2">
+            <a:schemeClr val="accent1"/>
+          </a:effectRef>
+          <a:fontRef idx="minor">
+            <a:schemeClr val="lt1"/>
+          </a:fontRef>
+        </p:style>
+        <p:txBody>
+          <a:bodyPr rtlCol="0" anchor="ctr"/>
+          <a:lstStyle/>
+          <a:p>
+            <a:pPr algn="ctr"/>
+            <a:r>
+              <a:rPr sz="1800" b="1">
+                <a:solidFill>
+                  <a:srgbClr val="FFFFFF"/>
+                </a:solidFill>
+                <a:latin typeface="Calibri"/>
+              </a:rPr>
+              <a:t>1</a:t>
+            </a:r>
+          </a:p>
+        </p:txBody>
+      </p:sp>
+      <p:sp>
+        <p:nvSpPr>
+          <p:cNvPr id="7" name="TextBox 6"/>
           <p:cNvSpPr txBox="1"/>
           <p:nvPr/>
         </p:nvSpPr>
         <p:spPr>
           <a:xfrm>
-            <a:off x="594360" y="713232"/>
-            <a:ext cx="10972800" cy="822960"/>
+            <a:off x="457200" y="2240280"/>
+            <a:ext cx="2249424" cy="365760"/>
           </a:xfrm>
           <a:prstGeom prst="rect">
             <a:avLst/>
@@ -3905,29 +5614,29 @@
           </a:bodyPr>
           <a:lstStyle/>
           <a:p>
-            <a:pPr algn="l"/>
-            <a:r>
-              <a:rPr sz="3000" b="1">
+            <a:pPr algn="ctr"/>
+            <a:r>
+              <a:rPr sz="1450" b="1" i="0">
                 <a:solidFill>
                   <a:srgbClr val="1B2A4A"/>
                 </a:solidFill>
                 <a:latin typeface="Calibri"/>
               </a:rPr>
-              <a:t>Approach &amp; Expected Output</a:t>
-            </a:r>
-          </a:p>
-        </p:txBody>
-      </p:sp>
-      <p:sp>
-        <p:nvSpPr>
-          <p:cNvPr id="5" name="TextBox 4"/>
+              <a:t>1. Bootstrap dictionary</a:t>
+            </a:r>
+          </a:p>
+        </p:txBody>
+      </p:sp>
+      <p:sp>
+        <p:nvSpPr>
+          <p:cNvPr id="8" name="TextBox 7"/>
           <p:cNvSpPr txBox="1"/>
           <p:nvPr/>
         </p:nvSpPr>
         <p:spPr>
           <a:xfrm>
-            <a:off x="594360" y="1463040"/>
-            <a:ext cx="10789920" cy="4114800"/>
+            <a:off x="457200" y="2633472"/>
+            <a:ext cx="2249424" cy="1371600"/>
           </a:xfrm>
           <a:prstGeom prst="rect">
             <a:avLst/>
@@ -3940,97 +5649,82 @@
           </a:bodyPr>
           <a:lstStyle/>
           <a:p>
-            <a:pPr algn="l">
-              <a:spcAft>
-                <a:spcPts val="1800"/>
-              </a:spcAft>
-            </a:pPr>
-            <a:r>
-              <a:rPr sz="1800">
-                <a:solidFill>
-                  <a:srgbClr val="202633"/>
-                </a:solidFill>
-                <a:latin typeface="Calibri"/>
-              </a:rPr>
-              <a:t>●   Bootstrap a root-cause keyword dictionary from the terms that actually distinguish low-CSAT from high-CSAT text (minutes, not days of manual reading)</a:t>
-            </a:r>
-          </a:p>
-          <a:p>
-            <a:pPr algn="l">
-              <a:spcAft>
-                <a:spcPts val="1800"/>
-              </a:spcAft>
-            </a:pPr>
-            <a:r>
-              <a:rPr sz="1800">
-                <a:solidFill>
-                  <a:srgbClr val="202633"/>
-                </a:solidFill>
-                <a:latin typeface="Calibri"/>
-              </a:rPr>
-              <a:t>●   Tag every response against the dictionary, ranked by match strength into a PRIMARY and SECONDARY driver per response</a:t>
-            </a:r>
-          </a:p>
-          <a:p>
-            <a:pPr algn="l">
-              <a:spcAft>
-                <a:spcPts val="1800"/>
-              </a:spcAft>
-            </a:pPr>
-            <a:r>
-              <a:rPr sz="1800">
-                <a:solidFill>
-                  <a:srgbClr val="202633"/>
-                </a:solidFill>
-                <a:latin typeface="Calibri"/>
-              </a:rPr>
-              <a:t>●   Where the dictionary finds nothing, TF-IDF + NMF topic modeling discovers an actionable secondary sub-theme directly from the text - no response is left unexplained</a:t>
-            </a:r>
-          </a:p>
-          <a:p>
-            <a:pPr algn="l">
-              <a:spcAft>
-                <a:spcPts val="1800"/>
-              </a:spcAft>
-            </a:pPr>
-            <a:r>
-              <a:rPr sz="1800">
-                <a:solidFill>
-                  <a:srgbClr val="202633"/>
-                </a:solidFill>
-                <a:latin typeface="Calibri"/>
-              </a:rPr>
-              <a:t>●   Score sentiment with an offline lexicon model (no AI/LLM API dependency)</a:t>
-            </a:r>
-          </a:p>
-          <a:p>
-            <a:pPr algn="l">
-              <a:spcAft>
-                <a:spcPts val="1800"/>
-              </a:spcAft>
-            </a:pPr>
-            <a:r>
-              <a:rPr sz="1800">
-                <a:solidFill>
-                  <a:srgbClr val="202633"/>
-                </a:solidFill>
-                <a:latin typeface="Calibri"/>
-              </a:rPr>
-              <a:t>●   Expected output: one Excel workbook (raw tagged data, every summary cut, every chart) plus a Power BI report for the business narrative</a:t>
-            </a:r>
-          </a:p>
-        </p:txBody>
-      </p:sp>
-      <p:sp>
-        <p:nvSpPr>
-          <p:cNvPr id="6" name="TextBox 5"/>
+            <a:pPr algn="ctr"/>
+            <a:r>
+              <a:rPr sz="1200" b="0" i="0">
+                <a:solidFill>
+                  <a:srgbClr val="5A6B7D"/>
+                </a:solidFill>
+                <a:latin typeface="Calibri"/>
+              </a:rPr>
+              <a:t>Sentiment-split term frequency surfaces the words that actually distinguish low-CSAT from high-CSAT text.</a:t>
+            </a:r>
+          </a:p>
+        </p:txBody>
+      </p:sp>
+      <p:sp>
+        <p:nvSpPr>
+          <p:cNvPr id="9" name="Oval 8"/>
+          <p:cNvSpPr/>
+          <p:nvPr/>
+        </p:nvSpPr>
+        <p:spPr>
+          <a:xfrm>
+            <a:off x="3579876" y="1600200"/>
+            <a:ext cx="502920" cy="502920"/>
+          </a:xfrm>
+          <a:prstGeom prst="ellipse">
+            <a:avLst/>
+          </a:prstGeom>
+          <a:solidFill>
+            <a:srgbClr val="2EC4B6"/>
+          </a:solidFill>
+          <a:ln>
+            <a:noFill/>
+          </a:ln>
+          <a:effectLst/>
+        </p:spPr>
+        <p:style>
+          <a:lnRef idx="1">
+            <a:schemeClr val="accent1"/>
+          </a:lnRef>
+          <a:fillRef idx="3">
+            <a:schemeClr val="accent1"/>
+          </a:fillRef>
+          <a:effectRef idx="2">
+            <a:schemeClr val="accent1"/>
+          </a:effectRef>
+          <a:fontRef idx="minor">
+            <a:schemeClr val="lt1"/>
+          </a:fontRef>
+        </p:style>
+        <p:txBody>
+          <a:bodyPr rtlCol="0" anchor="ctr"/>
+          <a:lstStyle/>
+          <a:p>
+            <a:pPr algn="ctr"/>
+            <a:r>
+              <a:rPr sz="1800" b="1">
+                <a:solidFill>
+                  <a:srgbClr val="FFFFFF"/>
+                </a:solidFill>
+                <a:latin typeface="Calibri"/>
+              </a:rPr>
+              <a:t>2</a:t>
+            </a:r>
+          </a:p>
+        </p:txBody>
+      </p:sp>
+      <p:sp>
+        <p:nvSpPr>
+          <p:cNvPr id="10" name="TextBox 9"/>
           <p:cNvSpPr txBox="1"/>
           <p:nvPr/>
         </p:nvSpPr>
         <p:spPr>
           <a:xfrm>
-            <a:off x="594360" y="6446520"/>
-            <a:ext cx="9144000" cy="320040"/>
+            <a:off x="2706624" y="2240280"/>
+            <a:ext cx="2249424" cy="365760"/>
           </a:xfrm>
           <a:prstGeom prst="rect">
             <a:avLst/>
@@ -4043,15 +5737,490 @@
           </a:bodyPr>
           <a:lstStyle/>
           <a:p>
+            <a:pPr algn="ctr"/>
+            <a:r>
+              <a:rPr sz="1450" b="1" i="0">
+                <a:solidFill>
+                  <a:srgbClr val="1B2A4A"/>
+                </a:solidFill>
+                <a:latin typeface="Calibri"/>
+              </a:rPr>
+              <a:t>2. Tag drivers</a:t>
+            </a:r>
+          </a:p>
+        </p:txBody>
+      </p:sp>
+      <p:sp>
+        <p:nvSpPr>
+          <p:cNvPr id="11" name="TextBox 10"/>
+          <p:cNvSpPr txBox="1"/>
+          <p:nvPr/>
+        </p:nvSpPr>
+        <p:spPr>
+          <a:xfrm>
+            <a:off x="2706624" y="2633472"/>
+            <a:ext cx="2249424" cy="1371600"/>
+          </a:xfrm>
+          <a:prstGeom prst="rect">
+            <a:avLst/>
+          </a:prstGeom>
+          <a:noFill/>
+        </p:spPr>
+        <p:txBody>
+          <a:bodyPr wrap="square">
+            <a:spAutoFit/>
+          </a:bodyPr>
+          <a:lstStyle/>
+          <a:p>
+            <a:pPr algn="ctr"/>
+            <a:r>
+              <a:rPr sz="1200" b="0" i="0">
+                <a:solidFill>
+                  <a:srgbClr val="5A6B7D"/>
+                </a:solidFill>
+                <a:latin typeface="Calibri"/>
+              </a:rPr>
+              <a:t>Every response matched against an 11-category primary / 42-sub-issue taxonomy, ranked by match strength.</a:t>
+            </a:r>
+          </a:p>
+        </p:txBody>
+      </p:sp>
+      <p:sp>
+        <p:nvSpPr>
+          <p:cNvPr id="12" name="Oval 11"/>
+          <p:cNvSpPr/>
+          <p:nvPr/>
+        </p:nvSpPr>
+        <p:spPr>
+          <a:xfrm>
+            <a:off x="5829300" y="1600200"/>
+            <a:ext cx="502920" cy="502920"/>
+          </a:xfrm>
+          <a:prstGeom prst="ellipse">
+            <a:avLst/>
+          </a:prstGeom>
+          <a:solidFill>
+            <a:srgbClr val="2EC4B6"/>
+          </a:solidFill>
+          <a:ln>
+            <a:noFill/>
+          </a:ln>
+          <a:effectLst/>
+        </p:spPr>
+        <p:style>
+          <a:lnRef idx="1">
+            <a:schemeClr val="accent1"/>
+          </a:lnRef>
+          <a:fillRef idx="3">
+            <a:schemeClr val="accent1"/>
+          </a:fillRef>
+          <a:effectRef idx="2">
+            <a:schemeClr val="accent1"/>
+          </a:effectRef>
+          <a:fontRef idx="minor">
+            <a:schemeClr val="lt1"/>
+          </a:fontRef>
+        </p:style>
+        <p:txBody>
+          <a:bodyPr rtlCol="0" anchor="ctr"/>
+          <a:lstStyle/>
+          <a:p>
+            <a:pPr algn="ctr"/>
+            <a:r>
+              <a:rPr sz="1800" b="1">
+                <a:solidFill>
+                  <a:srgbClr val="FFFFFF"/>
+                </a:solidFill>
+                <a:latin typeface="Calibri"/>
+              </a:rPr>
+              <a:t>3</a:t>
+            </a:r>
+          </a:p>
+        </p:txBody>
+      </p:sp>
+      <p:sp>
+        <p:nvSpPr>
+          <p:cNvPr id="13" name="TextBox 12"/>
+          <p:cNvSpPr txBox="1"/>
+          <p:nvPr/>
+        </p:nvSpPr>
+        <p:spPr>
+          <a:xfrm>
+            <a:off x="4956048" y="2240280"/>
+            <a:ext cx="2249424" cy="365760"/>
+          </a:xfrm>
+          <a:prstGeom prst="rect">
+            <a:avLst/>
+          </a:prstGeom>
+          <a:noFill/>
+        </p:spPr>
+        <p:txBody>
+          <a:bodyPr wrap="square">
+            <a:spAutoFit/>
+          </a:bodyPr>
+          <a:lstStyle/>
+          <a:p>
+            <a:pPr algn="ctr"/>
+            <a:r>
+              <a:rPr sz="1450" b="1" i="0">
+                <a:solidFill>
+                  <a:srgbClr val="1B2A4A"/>
+                </a:solidFill>
+                <a:latin typeface="Calibri"/>
+              </a:rPr>
+              <a:t>3. NMF safety net</a:t>
+            </a:r>
+          </a:p>
+        </p:txBody>
+      </p:sp>
+      <p:sp>
+        <p:nvSpPr>
+          <p:cNvPr id="14" name="TextBox 13"/>
+          <p:cNvSpPr txBox="1"/>
+          <p:nvPr/>
+        </p:nvSpPr>
+        <p:spPr>
+          <a:xfrm>
+            <a:off x="4956048" y="2633472"/>
+            <a:ext cx="2249424" cy="1371600"/>
+          </a:xfrm>
+          <a:prstGeom prst="rect">
+            <a:avLst/>
+          </a:prstGeom>
+          <a:noFill/>
+        </p:spPr>
+        <p:txBody>
+          <a:bodyPr wrap="square">
+            <a:spAutoFit/>
+          </a:bodyPr>
+          <a:lstStyle/>
+          <a:p>
+            <a:pPr algn="ctr"/>
+            <a:r>
+              <a:rPr sz="1200" b="0" i="0">
+                <a:solidFill>
+                  <a:srgbClr val="5A6B7D"/>
+                </a:solidFill>
+                <a:latin typeface="Calibri"/>
+              </a:rPr>
+              <a:t>TF-IDF + NMF topic modeling (YAKE-labeled) catches any edge-of-
+vocabulary residual - no response left unexplained.</a:t>
+            </a:r>
+          </a:p>
+        </p:txBody>
+      </p:sp>
+      <p:sp>
+        <p:nvSpPr>
+          <p:cNvPr id="15" name="Oval 14"/>
+          <p:cNvSpPr/>
+          <p:nvPr/>
+        </p:nvSpPr>
+        <p:spPr>
+          <a:xfrm>
+            <a:off x="8078724" y="1600200"/>
+            <a:ext cx="502920" cy="502920"/>
+          </a:xfrm>
+          <a:prstGeom prst="ellipse">
+            <a:avLst/>
+          </a:prstGeom>
+          <a:solidFill>
+            <a:srgbClr val="2EC4B6"/>
+          </a:solidFill>
+          <a:ln>
+            <a:noFill/>
+          </a:ln>
+          <a:effectLst/>
+        </p:spPr>
+        <p:style>
+          <a:lnRef idx="1">
+            <a:schemeClr val="accent1"/>
+          </a:lnRef>
+          <a:fillRef idx="3">
+            <a:schemeClr val="accent1"/>
+          </a:fillRef>
+          <a:effectRef idx="2">
+            <a:schemeClr val="accent1"/>
+          </a:effectRef>
+          <a:fontRef idx="minor">
+            <a:schemeClr val="lt1"/>
+          </a:fontRef>
+        </p:style>
+        <p:txBody>
+          <a:bodyPr rtlCol="0" anchor="ctr"/>
+          <a:lstStyle/>
+          <a:p>
+            <a:pPr algn="ctr"/>
+            <a:r>
+              <a:rPr sz="1800" b="1">
+                <a:solidFill>
+                  <a:srgbClr val="FFFFFF"/>
+                </a:solidFill>
+                <a:latin typeface="Calibri"/>
+              </a:rPr>
+              <a:t>4</a:t>
+            </a:r>
+          </a:p>
+        </p:txBody>
+      </p:sp>
+      <p:sp>
+        <p:nvSpPr>
+          <p:cNvPr id="16" name="TextBox 15"/>
+          <p:cNvSpPr txBox="1"/>
+          <p:nvPr/>
+        </p:nvSpPr>
+        <p:spPr>
+          <a:xfrm>
+            <a:off x="7205472" y="2240280"/>
+            <a:ext cx="2249424" cy="365760"/>
+          </a:xfrm>
+          <a:prstGeom prst="rect">
+            <a:avLst/>
+          </a:prstGeom>
+          <a:noFill/>
+        </p:spPr>
+        <p:txBody>
+          <a:bodyPr wrap="square">
+            <a:spAutoFit/>
+          </a:bodyPr>
+          <a:lstStyle/>
+          <a:p>
+            <a:pPr algn="ctr"/>
+            <a:r>
+              <a:rPr sz="1450" b="1" i="0">
+                <a:solidFill>
+                  <a:srgbClr val="1B2A4A"/>
+                </a:solidFill>
+                <a:latin typeface="Calibri"/>
+              </a:rPr>
+              <a:t>4. Score sentiment</a:t>
+            </a:r>
+          </a:p>
+        </p:txBody>
+      </p:sp>
+      <p:sp>
+        <p:nvSpPr>
+          <p:cNvPr id="17" name="TextBox 16"/>
+          <p:cNvSpPr txBox="1"/>
+          <p:nvPr/>
+        </p:nvSpPr>
+        <p:spPr>
+          <a:xfrm>
+            <a:off x="7205472" y="2633472"/>
+            <a:ext cx="2249424" cy="1371600"/>
+          </a:xfrm>
+          <a:prstGeom prst="rect">
+            <a:avLst/>
+          </a:prstGeom>
+          <a:noFill/>
+        </p:spPr>
+        <p:txBody>
+          <a:bodyPr wrap="square">
+            <a:spAutoFit/>
+          </a:bodyPr>
+          <a:lstStyle/>
+          <a:p>
+            <a:pPr algn="ctr"/>
+            <a:r>
+              <a:rPr sz="1200" b="0" i="0">
+                <a:solidFill>
+                  <a:srgbClr val="5A6B7D"/>
+                </a:solidFill>
+                <a:latin typeface="Calibri"/>
+              </a:rPr>
+              <a:t>VADER lexicon model scores tone - fully offline, no AI/LLM API dependency.</a:t>
+            </a:r>
+          </a:p>
+        </p:txBody>
+      </p:sp>
+      <p:sp>
+        <p:nvSpPr>
+          <p:cNvPr id="18" name="Oval 17"/>
+          <p:cNvSpPr/>
+          <p:nvPr/>
+        </p:nvSpPr>
+        <p:spPr>
+          <a:xfrm>
+            <a:off x="10328148" y="1600200"/>
+            <a:ext cx="502920" cy="502920"/>
+          </a:xfrm>
+          <a:prstGeom prst="ellipse">
+            <a:avLst/>
+          </a:prstGeom>
+          <a:solidFill>
+            <a:srgbClr val="2EC4B6"/>
+          </a:solidFill>
+          <a:ln>
+            <a:noFill/>
+          </a:ln>
+          <a:effectLst/>
+        </p:spPr>
+        <p:style>
+          <a:lnRef idx="1">
+            <a:schemeClr val="accent1"/>
+          </a:lnRef>
+          <a:fillRef idx="3">
+            <a:schemeClr val="accent1"/>
+          </a:fillRef>
+          <a:effectRef idx="2">
+            <a:schemeClr val="accent1"/>
+          </a:effectRef>
+          <a:fontRef idx="minor">
+            <a:schemeClr val="lt1"/>
+          </a:fontRef>
+        </p:style>
+        <p:txBody>
+          <a:bodyPr rtlCol="0" anchor="ctr"/>
+          <a:lstStyle/>
+          <a:p>
+            <a:pPr algn="ctr"/>
+            <a:r>
+              <a:rPr sz="1800" b="1">
+                <a:solidFill>
+                  <a:srgbClr val="FFFFFF"/>
+                </a:solidFill>
+                <a:latin typeface="Calibri"/>
+              </a:rPr>
+              <a:t>5</a:t>
+            </a:r>
+          </a:p>
+        </p:txBody>
+      </p:sp>
+      <p:sp>
+        <p:nvSpPr>
+          <p:cNvPr id="19" name="TextBox 18"/>
+          <p:cNvSpPr txBox="1"/>
+          <p:nvPr/>
+        </p:nvSpPr>
+        <p:spPr>
+          <a:xfrm>
+            <a:off x="9454896" y="2240280"/>
+            <a:ext cx="2249424" cy="365760"/>
+          </a:xfrm>
+          <a:prstGeom prst="rect">
+            <a:avLst/>
+          </a:prstGeom>
+          <a:noFill/>
+        </p:spPr>
+        <p:txBody>
+          <a:bodyPr wrap="square">
+            <a:spAutoFit/>
+          </a:bodyPr>
+          <a:lstStyle/>
+          <a:p>
+            <a:pPr algn="ctr"/>
+            <a:r>
+              <a:rPr sz="1450" b="1" i="0">
+                <a:solidFill>
+                  <a:srgbClr val="1B2A4A"/>
+                </a:solidFill>
+                <a:latin typeface="Calibri"/>
+              </a:rPr>
+              <a:t>5. Publish</a:t>
+            </a:r>
+          </a:p>
+        </p:txBody>
+      </p:sp>
+      <p:sp>
+        <p:nvSpPr>
+          <p:cNvPr id="20" name="TextBox 19"/>
+          <p:cNvSpPr txBox="1"/>
+          <p:nvPr/>
+        </p:nvSpPr>
+        <p:spPr>
+          <a:xfrm>
+            <a:off x="9454896" y="2633472"/>
+            <a:ext cx="2249424" cy="1371600"/>
+          </a:xfrm>
+          <a:prstGeom prst="rect">
+            <a:avLst/>
+          </a:prstGeom>
+          <a:noFill/>
+        </p:spPr>
+        <p:txBody>
+          <a:bodyPr wrap="square">
+            <a:spAutoFit/>
+          </a:bodyPr>
+          <a:lstStyle/>
+          <a:p>
+            <a:pPr algn="ctr"/>
+            <a:r>
+              <a:rPr sz="1200" b="0" i="0">
+                <a:solidFill>
+                  <a:srgbClr val="5A6B7D"/>
+                </a:solidFill>
+                <a:latin typeface="Calibri"/>
+              </a:rPr>
+              <a:t>One Excel workbook (tagged data + every chart) plus a Power BI report for the business narrative.</a:t>
+            </a:r>
+          </a:p>
+        </p:txBody>
+      </p:sp>
+      <p:sp>
+        <p:nvSpPr>
+          <p:cNvPr id="21" name="TextBox 20"/>
+          <p:cNvSpPr txBox="1"/>
+          <p:nvPr/>
+        </p:nvSpPr>
+        <p:spPr>
+          <a:xfrm>
+            <a:off x="594360" y="6473952"/>
+            <a:ext cx="9144000" cy="320040"/>
+          </a:xfrm>
+          <a:prstGeom prst="rect">
+            <a:avLst/>
+          </a:prstGeom>
+          <a:noFill/>
+        </p:spPr>
+        <p:txBody>
+          <a:bodyPr wrap="square">
+            <a:spAutoFit/>
+          </a:bodyPr>
+          <a:lstStyle/>
+          <a:p>
             <a:pPr algn="l"/>
             <a:r>
-              <a:rPr sz="1000" b="0">
+              <a:rPr sz="1000" b="0" i="0">
                 <a:solidFill>
                   <a:srgbClr val="5A6B7D"/>
                 </a:solidFill>
                 <a:latin typeface="Calibri"/>
               </a:rPr>
               <a:t>CSAT Root-Cause &amp; Sentiment Driver Analysis</a:t>
+            </a:r>
+          </a:p>
+        </p:txBody>
+      </p:sp>
+      <p:sp>
+        <p:nvSpPr>
+          <p:cNvPr id="22" name="TextBox 21"/>
+          <p:cNvSpPr txBox="1"/>
+          <p:nvPr/>
+        </p:nvSpPr>
+        <p:spPr>
+          <a:xfrm>
+            <a:off x="11064240" y="6473952"/>
+            <a:ext cx="822960" cy="320040"/>
+          </a:xfrm>
+          <a:prstGeom prst="rect">
+            <a:avLst/>
+          </a:prstGeom>
+          <a:noFill/>
+        </p:spPr>
+        <p:txBody>
+          <a:bodyPr wrap="square">
+            <a:spAutoFit/>
+          </a:bodyPr>
+          <a:lstStyle/>
+          <a:p>
+            <a:pPr algn="r"/>
+            <a:r>
+              <a:rPr sz="1000" b="0" i="0">
+                <a:solidFill>
+                  <a:srgbClr val="5A6B7D"/>
+                </a:solidFill>
+                <a:latin typeface="Calibri"/>
+              </a:rPr>
+              <a:t>04 / 06</a:t>
             </a:r>
           </a:p>
         </p:txBody>
@@ -4128,84 +6297,14 @@
       </p:sp>
       <p:sp>
         <p:nvSpPr>
-          <p:cNvPr id="3" name="TextBox 2"/>
-          <p:cNvSpPr txBox="1"/>
+          <p:cNvPr id="3" name="Rounded Rectangle 2"/>
+          <p:cNvSpPr/>
           <p:nvPr/>
         </p:nvSpPr>
         <p:spPr>
           <a:xfrm>
             <a:off x="594360" y="365760"/>
-            <a:ext cx="9144000" cy="365760"/>
-          </a:xfrm>
-          <a:prstGeom prst="rect">
-            <a:avLst/>
-          </a:prstGeom>
-          <a:noFill/>
-        </p:spPr>
-        <p:txBody>
-          <a:bodyPr wrap="square">
-            <a:spAutoFit/>
-          </a:bodyPr>
-          <a:lstStyle/>
-          <a:p>
-            <a:pPr algn="l"/>
-            <a:r>
-              <a:rPr sz="1300" b="1">
-                <a:solidFill>
-                  <a:srgbClr val="2EC4B6"/>
-                </a:solidFill>
-                <a:latin typeface="Calibri"/>
-              </a:rPr>
-              <a:t>RESULTS</a:t>
-            </a:r>
-          </a:p>
-        </p:txBody>
-      </p:sp>
-      <p:sp>
-        <p:nvSpPr>
-          <p:cNvPr id="4" name="TextBox 3"/>
-          <p:cNvSpPr txBox="1"/>
-          <p:nvPr/>
-        </p:nvSpPr>
-        <p:spPr>
-          <a:xfrm>
-            <a:off x="594360" y="713232"/>
-            <a:ext cx="10972800" cy="822960"/>
-          </a:xfrm>
-          <a:prstGeom prst="rect">
-            <a:avLst/>
-          </a:prstGeom>
-          <a:noFill/>
-        </p:spPr>
-        <p:txBody>
-          <a:bodyPr wrap="square">
-            <a:spAutoFit/>
-          </a:bodyPr>
-          <a:lstStyle/>
-          <a:p>
-            <a:pPr algn="l"/>
-            <a:r>
-              <a:rPr sz="3000" b="1">
-                <a:solidFill>
-                  <a:srgbClr val="1B2A4A"/>
-                </a:solidFill>
-                <a:latin typeface="Calibri"/>
-              </a:rPr>
-              <a:t>Key Outcomes</a:t>
-            </a:r>
-          </a:p>
-        </p:txBody>
-      </p:sp>
-      <p:sp>
-        <p:nvSpPr>
-          <p:cNvPr id="5" name="Rounded Rectangle 4"/>
-          <p:cNvSpPr/>
-          <p:nvPr/>
-        </p:nvSpPr>
-        <p:spPr>
-          <a:xfrm>
-            <a:off x="594360" y="1554480"/>
-            <a:ext cx="2514600" cy="1554480"/>
+            <a:ext cx="1737360" cy="292608"/>
           </a:xfrm>
           <a:prstGeom prst="roundRect">
             <a:avLst/>
@@ -4213,7 +6312,7 @@
           <a:solidFill>
             <a:srgbClr val="F5F7FA"/>
           </a:solidFill>
-          <a:ln w="19050">
+          <a:ln w="12700">
             <a:solidFill>
               <a:srgbClr val="2EC4B6"/>
             </a:solidFill>
@@ -4235,55 +6334,76 @@
           </a:fontRef>
         </p:style>
         <p:txBody>
-          <a:bodyPr rtlCol="0" anchor="ctr" wrap="square"/>
+          <a:bodyPr rtlCol="0" anchor="ctr" wrap="none" lIns="0" rIns="0"/>
           <a:lstStyle/>
           <a:p>
             <a:pPr algn="ctr"/>
             <a:r>
-              <a:rPr sz="3000" b="1">
-                <a:solidFill>
-                  <a:srgbClr val="2EC4B6"/>
-                </a:solidFill>
-                <a:latin typeface="Calibri"/>
-              </a:rPr>
-              <a:t>32%</a:t>
-            </a:r>
-          </a:p>
-          <a:p>
-            <a:pPr algn="ctr"/>
-            <a:r>
-              <a:rPr sz="1200">
-                <a:solidFill>
-                  <a:srgbClr val="5A6B7D"/>
-                </a:solidFill>
-                <a:latin typeface="Calibri"/>
-              </a:rPr>
-              <a:t>of responses: Billing Charges</a:t>
-            </a:r>
-          </a:p>
-        </p:txBody>
-      </p:sp>
-      <p:sp>
-        <p:nvSpPr>
-          <p:cNvPr id="6" name="Rounded Rectangle 5"/>
+              <a:rPr sz="1100" b="1">
+                <a:solidFill>
+                  <a:srgbClr val="1F9A8F"/>
+                </a:solidFill>
+                <a:latin typeface="Calibri"/>
+              </a:rPr>
+              <a:t>RESULTS</a:t>
+            </a:r>
+          </a:p>
+        </p:txBody>
+      </p:sp>
+      <p:sp>
+        <p:nvSpPr>
+          <p:cNvPr id="4" name="TextBox 3"/>
+          <p:cNvSpPr txBox="1"/>
+          <p:nvPr/>
+        </p:nvSpPr>
+        <p:spPr>
+          <a:xfrm>
+            <a:off x="594360" y="786384"/>
+            <a:ext cx="10972800" cy="822960"/>
+          </a:xfrm>
+          <a:prstGeom prst="rect">
+            <a:avLst/>
+          </a:prstGeom>
+          <a:noFill/>
+        </p:spPr>
+        <p:txBody>
+          <a:bodyPr wrap="square">
+            <a:spAutoFit/>
+          </a:bodyPr>
+          <a:lstStyle/>
+          <a:p>
+            <a:pPr algn="l"/>
+            <a:r>
+              <a:rPr sz="3000" b="1" i="0">
+                <a:solidFill>
+                  <a:srgbClr val="1B2A4A"/>
+                </a:solidFill>
+                <a:latin typeface="Calibri"/>
+              </a:rPr>
+              <a:t>Key Outcomes</a:t>
+            </a:r>
+          </a:p>
+        </p:txBody>
+      </p:sp>
+      <p:sp>
+        <p:nvSpPr>
+          <p:cNvPr id="5" name="Rectangle 4"/>
           <p:cNvSpPr/>
           <p:nvPr/>
         </p:nvSpPr>
         <p:spPr>
           <a:xfrm>
-            <a:off x="3383280" y="1554480"/>
-            <a:ext cx="2514600" cy="1554480"/>
-          </a:xfrm>
-          <a:prstGeom prst="roundRect">
+            <a:off x="594360" y="1463040"/>
+            <a:ext cx="2542032" cy="82296"/>
+          </a:xfrm>
+          <a:prstGeom prst="rect">
             <a:avLst/>
           </a:prstGeom>
           <a:solidFill>
-            <a:srgbClr val="F5F7FA"/>
+            <a:srgbClr val="2EC4B6"/>
           </a:solidFill>
-          <a:ln w="19050">
-            <a:solidFill>
-              <a:srgbClr val="1B2A4A"/>
-            </a:solidFill>
+          <a:ln>
+            <a:noFill/>
           </a:ln>
           <a:effectLst/>
         </p:spPr>
@@ -4302,54 +6422,33 @@
           </a:fontRef>
         </p:style>
         <p:txBody>
-          <a:bodyPr rtlCol="0" anchor="ctr" wrap="square"/>
+          <a:bodyPr rtlCol="0" anchor="ctr"/>
           <a:lstStyle/>
           <a:p>
             <a:pPr algn="ctr"/>
-            <a:r>
-              <a:rPr sz="3000" b="1">
-                <a:solidFill>
-                  <a:srgbClr val="1B2A4A"/>
-                </a:solidFill>
-                <a:latin typeface="Calibri"/>
-              </a:rPr>
-              <a:t>3.01</a:t>
-            </a:r>
-          </a:p>
-          <a:p>
-            <a:pPr algn="ctr"/>
-            <a:r>
-              <a:rPr sz="1200">
-                <a:solidFill>
-                  <a:srgbClr val="5A6B7D"/>
-                </a:solidFill>
-                <a:latin typeface="Calibri"/>
-              </a:rPr>
-              <a:t>Overall average CSAT (out of 5)</a:t>
-            </a:r>
-          </a:p>
-        </p:txBody>
-      </p:sp>
-      <p:sp>
-        <p:nvSpPr>
-          <p:cNvPr id="7" name="Rounded Rectangle 6"/>
+          </a:p>
+        </p:txBody>
+      </p:sp>
+      <p:sp>
+        <p:nvSpPr>
+          <p:cNvPr id="6" name="Rectangle 5"/>
           <p:cNvSpPr/>
           <p:nvPr/>
         </p:nvSpPr>
         <p:spPr>
           <a:xfrm>
-            <a:off x="6172200" y="1554480"/>
-            <a:ext cx="2514600" cy="1554480"/>
-          </a:xfrm>
-          <a:prstGeom prst="roundRect">
+            <a:off x="594360" y="1545336"/>
+            <a:ext cx="2542032" cy="1289304"/>
+          </a:xfrm>
+          <a:prstGeom prst="rect">
             <a:avLst/>
           </a:prstGeom>
           <a:solidFill>
             <a:srgbClr val="F5F7FA"/>
           </a:solidFill>
-          <a:ln w="19050">
+          <a:ln w="9525">
             <a:solidFill>
-              <a:srgbClr val="E05A47"/>
+              <a:srgbClr val="DDE2E8"/>
             </a:solidFill>
           </a:ln>
           <a:effectLst/>
@@ -4376,11 +6475,11 @@
             <a:r>
               <a:rPr sz="3000" b="1">
                 <a:solidFill>
-                  <a:srgbClr val="E05A47"/>
-                </a:solidFill>
-                <a:latin typeface="Calibri"/>
-              </a:rPr>
-              <a:t>50%</a:t>
+                  <a:srgbClr val="1B2A4A"/>
+                </a:solidFill>
+                <a:latin typeface="Calibri"/>
+              </a:rPr>
+              <a:t>21%</a:t>
             </a:r>
           </a:p>
           <a:p>
@@ -4392,32 +6491,30 @@
                 </a:solidFill>
                 <a:latin typeface="Calibri"/>
               </a:rPr>
-              <a:t>of responses carry negative sentiment</a:t>
-            </a:r>
-          </a:p>
-        </p:txBody>
-      </p:sp>
-      <p:sp>
-        <p:nvSpPr>
-          <p:cNvPr id="8" name="Rounded Rectangle 7"/>
+              <a:t>of responses: Billing Charges</a:t>
+            </a:r>
+          </a:p>
+        </p:txBody>
+      </p:sp>
+      <p:sp>
+        <p:nvSpPr>
+          <p:cNvPr id="7" name="Rectangle 6"/>
           <p:cNvSpPr/>
           <p:nvPr/>
         </p:nvSpPr>
         <p:spPr>
           <a:xfrm>
-            <a:off x="8961120" y="1554480"/>
-            <a:ext cx="2514600" cy="1554480"/>
-          </a:xfrm>
-          <a:prstGeom prst="roundRect">
+            <a:off x="3392424" y="1463040"/>
+            <a:ext cx="2542032" cy="82296"/>
+          </a:xfrm>
+          <a:prstGeom prst="rect">
             <a:avLst/>
           </a:prstGeom>
           <a:solidFill>
-            <a:srgbClr val="F5F7FA"/>
+            <a:srgbClr val="1B2A4A"/>
           </a:solidFill>
-          <a:ln w="19050">
-            <a:solidFill>
-              <a:srgbClr val="2EC4B6"/>
-            </a:solidFill>
+          <a:ln>
+            <a:noFill/>
           </a:ln>
           <a:effectLst/>
         </p:spPr>
@@ -4436,6 +6533,52 @@
           </a:fontRef>
         </p:style>
         <p:txBody>
+          <a:bodyPr rtlCol="0" anchor="ctr"/>
+          <a:lstStyle/>
+          <a:p>
+            <a:pPr algn="ctr"/>
+          </a:p>
+        </p:txBody>
+      </p:sp>
+      <p:sp>
+        <p:nvSpPr>
+          <p:cNvPr id="8" name="Rectangle 7"/>
+          <p:cNvSpPr/>
+          <p:nvPr/>
+        </p:nvSpPr>
+        <p:spPr>
+          <a:xfrm>
+            <a:off x="3392424" y="1545336"/>
+            <a:ext cx="2542032" cy="1289304"/>
+          </a:xfrm>
+          <a:prstGeom prst="rect">
+            <a:avLst/>
+          </a:prstGeom>
+          <a:solidFill>
+            <a:srgbClr val="F5F7FA"/>
+          </a:solidFill>
+          <a:ln w="9525">
+            <a:solidFill>
+              <a:srgbClr val="DDE2E8"/>
+            </a:solidFill>
+          </a:ln>
+          <a:effectLst/>
+        </p:spPr>
+        <p:style>
+          <a:lnRef idx="1">
+            <a:schemeClr val="accent1"/>
+          </a:lnRef>
+          <a:fillRef idx="3">
+            <a:schemeClr val="accent1"/>
+          </a:fillRef>
+          <a:effectRef idx="2">
+            <a:schemeClr val="accent1"/>
+          </a:effectRef>
+          <a:fontRef idx="minor">
+            <a:schemeClr val="lt1"/>
+          </a:fontRef>
+        </p:style>
+        <p:txBody>
           <a:bodyPr rtlCol="0" anchor="ctr" wrap="square"/>
           <a:lstStyle/>
           <a:p>
@@ -4443,11 +6586,11 @@
             <a:r>
               <a:rPr sz="3000" b="1">
                 <a:solidFill>
-                  <a:srgbClr val="2EC4B6"/>
-                </a:solidFill>
-                <a:latin typeface="Calibri"/>
-              </a:rPr>
-              <a:t>2.83</a:t>
+                  <a:srgbClr val="1B2A4A"/>
+                </a:solidFill>
+                <a:latin typeface="Calibri"/>
+              </a:rPr>
+              <a:t>2.85</a:t>
             </a:r>
           </a:p>
           <a:p>
@@ -4459,21 +6602,243 @@
                 </a:solidFill>
                 <a:latin typeface="Calibri"/>
               </a:rPr>
-              <a:t>Lowest avg CSAT: Mumbai circle</a:t>
-            </a:r>
-          </a:p>
-        </p:txBody>
-      </p:sp>
-      <p:sp>
-        <p:nvSpPr>
-          <p:cNvPr id="9" name="TextBox 8"/>
+              <a:t>Overall average CSAT (out of 5)</a:t>
+            </a:r>
+          </a:p>
+        </p:txBody>
+      </p:sp>
+      <p:sp>
+        <p:nvSpPr>
+          <p:cNvPr id="9" name="Rectangle 8"/>
+          <p:cNvSpPr/>
+          <p:nvPr/>
+        </p:nvSpPr>
+        <p:spPr>
+          <a:xfrm>
+            <a:off x="6190488" y="1463040"/>
+            <a:ext cx="2542032" cy="82296"/>
+          </a:xfrm>
+          <a:prstGeom prst="rect">
+            <a:avLst/>
+          </a:prstGeom>
+          <a:solidFill>
+            <a:srgbClr val="E05A47"/>
+          </a:solidFill>
+          <a:ln>
+            <a:noFill/>
+          </a:ln>
+          <a:effectLst/>
+        </p:spPr>
+        <p:style>
+          <a:lnRef idx="1">
+            <a:schemeClr val="accent1"/>
+          </a:lnRef>
+          <a:fillRef idx="3">
+            <a:schemeClr val="accent1"/>
+          </a:fillRef>
+          <a:effectRef idx="2">
+            <a:schemeClr val="accent1"/>
+          </a:effectRef>
+          <a:fontRef idx="minor">
+            <a:schemeClr val="lt1"/>
+          </a:fontRef>
+        </p:style>
+        <p:txBody>
+          <a:bodyPr rtlCol="0" anchor="ctr"/>
+          <a:lstStyle/>
+          <a:p>
+            <a:pPr algn="ctr"/>
+          </a:p>
+        </p:txBody>
+      </p:sp>
+      <p:sp>
+        <p:nvSpPr>
+          <p:cNvPr id="10" name="Rectangle 9"/>
+          <p:cNvSpPr/>
+          <p:nvPr/>
+        </p:nvSpPr>
+        <p:spPr>
+          <a:xfrm>
+            <a:off x="6190488" y="1545336"/>
+            <a:ext cx="2542032" cy="1289304"/>
+          </a:xfrm>
+          <a:prstGeom prst="rect">
+            <a:avLst/>
+          </a:prstGeom>
+          <a:solidFill>
+            <a:srgbClr val="F5F7FA"/>
+          </a:solidFill>
+          <a:ln w="9525">
+            <a:solidFill>
+              <a:srgbClr val="DDE2E8"/>
+            </a:solidFill>
+          </a:ln>
+          <a:effectLst/>
+        </p:spPr>
+        <p:style>
+          <a:lnRef idx="1">
+            <a:schemeClr val="accent1"/>
+          </a:lnRef>
+          <a:fillRef idx="3">
+            <a:schemeClr val="accent1"/>
+          </a:fillRef>
+          <a:effectRef idx="2">
+            <a:schemeClr val="accent1"/>
+          </a:effectRef>
+          <a:fontRef idx="minor">
+            <a:schemeClr val="lt1"/>
+          </a:fontRef>
+        </p:style>
+        <p:txBody>
+          <a:bodyPr rtlCol="0" anchor="ctr" wrap="square"/>
+          <a:lstStyle/>
+          <a:p>
+            <a:pPr algn="ctr"/>
+            <a:r>
+              <a:rPr sz="3000" b="1">
+                <a:solidFill>
+                  <a:srgbClr val="1B2A4A"/>
+                </a:solidFill>
+                <a:latin typeface="Calibri"/>
+              </a:rPr>
+              <a:t>37%</a:t>
+            </a:r>
+          </a:p>
+          <a:p>
+            <a:pPr algn="ctr"/>
+            <a:r>
+              <a:rPr sz="1200">
+                <a:solidFill>
+                  <a:srgbClr val="5A6B7D"/>
+                </a:solidFill>
+                <a:latin typeface="Calibri"/>
+              </a:rPr>
+              <a:t>of responses carry negative sentiment</a:t>
+            </a:r>
+          </a:p>
+        </p:txBody>
+      </p:sp>
+      <p:sp>
+        <p:nvSpPr>
+          <p:cNvPr id="11" name="Rectangle 10"/>
+          <p:cNvSpPr/>
+          <p:nvPr/>
+        </p:nvSpPr>
+        <p:spPr>
+          <a:xfrm>
+            <a:off x="8988552" y="1463040"/>
+            <a:ext cx="2542032" cy="82296"/>
+          </a:xfrm>
+          <a:prstGeom prst="rect">
+            <a:avLst/>
+          </a:prstGeom>
+          <a:solidFill>
+            <a:srgbClr val="2EC4B6"/>
+          </a:solidFill>
+          <a:ln>
+            <a:noFill/>
+          </a:ln>
+          <a:effectLst/>
+        </p:spPr>
+        <p:style>
+          <a:lnRef idx="1">
+            <a:schemeClr val="accent1"/>
+          </a:lnRef>
+          <a:fillRef idx="3">
+            <a:schemeClr val="accent1"/>
+          </a:fillRef>
+          <a:effectRef idx="2">
+            <a:schemeClr val="accent1"/>
+          </a:effectRef>
+          <a:fontRef idx="minor">
+            <a:schemeClr val="lt1"/>
+          </a:fontRef>
+        </p:style>
+        <p:txBody>
+          <a:bodyPr rtlCol="0" anchor="ctr"/>
+          <a:lstStyle/>
+          <a:p>
+            <a:pPr algn="ctr"/>
+          </a:p>
+        </p:txBody>
+      </p:sp>
+      <p:sp>
+        <p:nvSpPr>
+          <p:cNvPr id="12" name="Rectangle 11"/>
+          <p:cNvSpPr/>
+          <p:nvPr/>
+        </p:nvSpPr>
+        <p:spPr>
+          <a:xfrm>
+            <a:off x="8988552" y="1545336"/>
+            <a:ext cx="2542032" cy="1289304"/>
+          </a:xfrm>
+          <a:prstGeom prst="rect">
+            <a:avLst/>
+          </a:prstGeom>
+          <a:solidFill>
+            <a:srgbClr val="F5F7FA"/>
+          </a:solidFill>
+          <a:ln w="9525">
+            <a:solidFill>
+              <a:srgbClr val="DDE2E8"/>
+            </a:solidFill>
+          </a:ln>
+          <a:effectLst/>
+        </p:spPr>
+        <p:style>
+          <a:lnRef idx="1">
+            <a:schemeClr val="accent1"/>
+          </a:lnRef>
+          <a:fillRef idx="3">
+            <a:schemeClr val="accent1"/>
+          </a:fillRef>
+          <a:effectRef idx="2">
+            <a:schemeClr val="accent1"/>
+          </a:effectRef>
+          <a:fontRef idx="minor">
+            <a:schemeClr val="lt1"/>
+          </a:fontRef>
+        </p:style>
+        <p:txBody>
+          <a:bodyPr rtlCol="0" anchor="ctr" wrap="square"/>
+          <a:lstStyle/>
+          <a:p>
+            <a:pPr algn="ctr"/>
+            <a:r>
+              <a:rPr sz="3000" b="1">
+                <a:solidFill>
+                  <a:srgbClr val="1B2A4A"/>
+                </a:solidFill>
+                <a:latin typeface="Calibri"/>
+              </a:rPr>
+              <a:t>2.78</a:t>
+            </a:r>
+          </a:p>
+          <a:p>
+            <a:pPr algn="ctr"/>
+            <a:r>
+              <a:rPr sz="1200">
+                <a:solidFill>
+                  <a:srgbClr val="5A6B7D"/>
+                </a:solidFill>
+                <a:latin typeface="Calibri"/>
+              </a:rPr>
+              <a:t>Lowest avg CSAT: North East circle</a:t>
+            </a:r>
+          </a:p>
+        </p:txBody>
+      </p:sp>
+      <p:sp>
+        <p:nvSpPr>
+          <p:cNvPr id="13" name="TextBox 12"/>
           <p:cNvSpPr txBox="1"/>
           <p:nvPr/>
         </p:nvSpPr>
         <p:spPr>
           <a:xfrm>
-            <a:off x="594360" y="3566160"/>
-            <a:ext cx="10789920" cy="2377440"/>
+            <a:off x="594360" y="3063240"/>
+            <a:ext cx="4572000" cy="320040"/>
           </a:xfrm>
           <a:prstGeom prst="rect">
             <a:avLst/>
@@ -4486,81 +6851,211 @@
           </a:bodyPr>
           <a:lstStyle/>
           <a:p>
-            <a:pPr algn="l">
-              <a:spcAft>
-                <a:spcPts val="1400"/>
-              </a:spcAft>
-            </a:pPr>
-            <a:r>
-              <a:rPr sz="1700">
-                <a:solidFill>
-                  <a:srgbClr val="202633"/>
-                </a:solidFill>
-                <a:latin typeface="Calibri"/>
-              </a:rPr>
-              <a:t>●   Billing Charges is both the highest-VOLUME and lowest-CSAT driver (avg CSAT 2.50) - the clear priority-one fix.</a:t>
-            </a:r>
-          </a:p>
-          <a:p>
-            <a:pPr algn="l">
-              <a:spcAft>
-                <a:spcPts val="1400"/>
-              </a:spcAft>
-            </a:pPr>
-            <a:r>
-              <a:rPr sz="1700">
-                <a:solidFill>
-                  <a:srgbClr val="202633"/>
-                </a:solidFill>
-                <a:latin typeface="Calibri"/>
-              </a:rPr>
-              <a:t>●   Mumbai is the lowest-performing circle (avg CSAT 2.83) and Standard the lowest-performing plan tier (avg CSAT 2.98) - two segment-level leads worth investigating alongside the process fix.</a:t>
-            </a:r>
-          </a:p>
-          <a:p>
-            <a:pPr algn="l">
-              <a:spcAft>
-                <a:spcPts val="1400"/>
-              </a:spcAft>
-            </a:pPr>
-            <a:r>
-              <a:rPr sz="1700">
-                <a:solidFill>
-                  <a:srgbClr val="202633"/>
-                </a:solidFill>
-                <a:latin typeface="Calibri"/>
-              </a:rPr>
-              <a:t>●   CSAT mix: 39% Promoters (4-5) vs 38% Detractors (1-2) - a split, not a crisis, but with a specific, fixable lever.</a:t>
-            </a:r>
-          </a:p>
-          <a:p>
-            <a:pPr algn="l">
-              <a:spcAft>
-                <a:spcPts val="1400"/>
-              </a:spcAft>
-            </a:pPr>
-            <a:r>
-              <a:rPr sz="1700">
-                <a:solidFill>
-                  <a:srgbClr val="202633"/>
-                </a:solidFill>
-                <a:latin typeface="Calibri"/>
-              </a:rPr>
-              <a:t>●   Agents with less than 6 months' tenure skew toward the lowest-CSAT bucket (&lt;6 months) - a coaching signal alongside the process fix.</a:t>
-            </a:r>
-          </a:p>
-        </p:txBody>
-      </p:sp>
-      <p:sp>
-        <p:nvSpPr>
-          <p:cNvPr id="10" name="TextBox 9"/>
+            <a:pPr algn="l"/>
+            <a:r>
+              <a:rPr sz="1200" b="1" i="0">
+                <a:solidFill>
+                  <a:srgbClr val="1F9A8F"/>
+                </a:solidFill>
+                <a:latin typeface="Calibri"/>
+              </a:rPr>
+              <a:t>CSAT MIX</a:t>
+            </a:r>
+          </a:p>
+        </p:txBody>
+      </p:sp>
+      <p:sp>
+        <p:nvSpPr>
+          <p:cNvPr id="14" name="Rectangle 13"/>
+          <p:cNvSpPr/>
+          <p:nvPr/>
+        </p:nvSpPr>
+        <p:spPr>
+          <a:xfrm>
+            <a:off x="594360" y="3429000"/>
+            <a:ext cx="1676838" cy="411480"/>
+          </a:xfrm>
+          <a:prstGeom prst="rect">
+            <a:avLst/>
+          </a:prstGeom>
+          <a:solidFill>
+            <a:srgbClr val="2EC4B6"/>
+          </a:solidFill>
+          <a:ln w="19050">
+            <a:solidFill>
+              <a:srgbClr val="FFFFFF"/>
+            </a:solidFill>
+          </a:ln>
+          <a:effectLst/>
+        </p:spPr>
+        <p:style>
+          <a:lnRef idx="1">
+            <a:schemeClr val="accent1"/>
+          </a:lnRef>
+          <a:fillRef idx="3">
+            <a:schemeClr val="accent1"/>
+          </a:fillRef>
+          <a:effectRef idx="2">
+            <a:schemeClr val="accent1"/>
+          </a:effectRef>
+          <a:fontRef idx="minor">
+            <a:schemeClr val="lt1"/>
+          </a:fontRef>
+        </p:style>
+        <p:txBody>
+          <a:bodyPr rtlCol="0" anchor="ctr"/>
+          <a:lstStyle/>
+          <a:p>
+            <a:pPr algn="ctr"/>
+          </a:p>
+        </p:txBody>
+      </p:sp>
+      <p:sp>
+        <p:nvSpPr>
+          <p:cNvPr id="15" name="Rectangle 14"/>
+          <p:cNvSpPr/>
+          <p:nvPr/>
+        </p:nvSpPr>
+        <p:spPr>
+          <a:xfrm>
+            <a:off x="2271198" y="3429000"/>
+            <a:ext cx="1314980" cy="411480"/>
+          </a:xfrm>
+          <a:prstGeom prst="rect">
+            <a:avLst/>
+          </a:prstGeom>
+          <a:solidFill>
+            <a:srgbClr val="E8A83C"/>
+          </a:solidFill>
+          <a:ln w="19050">
+            <a:solidFill>
+              <a:srgbClr val="FFFFFF"/>
+            </a:solidFill>
+          </a:ln>
+          <a:effectLst/>
+        </p:spPr>
+        <p:style>
+          <a:lnRef idx="1">
+            <a:schemeClr val="accent1"/>
+          </a:lnRef>
+          <a:fillRef idx="3">
+            <a:schemeClr val="accent1"/>
+          </a:fillRef>
+          <a:effectRef idx="2">
+            <a:schemeClr val="accent1"/>
+          </a:effectRef>
+          <a:fontRef idx="minor">
+            <a:schemeClr val="lt1"/>
+          </a:fontRef>
+        </p:style>
+        <p:txBody>
+          <a:bodyPr rtlCol="0" anchor="ctr"/>
+          <a:lstStyle/>
+          <a:p>
+            <a:pPr algn="ctr"/>
+          </a:p>
+        </p:txBody>
+      </p:sp>
+      <p:sp>
+        <p:nvSpPr>
+          <p:cNvPr id="16" name="Rectangle 15"/>
+          <p:cNvSpPr/>
+          <p:nvPr/>
+        </p:nvSpPr>
+        <p:spPr>
+          <a:xfrm>
+            <a:off x="3586178" y="3429000"/>
+            <a:ext cx="2128820" cy="411480"/>
+          </a:xfrm>
+          <a:prstGeom prst="rect">
+            <a:avLst/>
+          </a:prstGeom>
+          <a:solidFill>
+            <a:srgbClr val="E05A47"/>
+          </a:solidFill>
+          <a:ln w="19050">
+            <a:solidFill>
+              <a:srgbClr val="FFFFFF"/>
+            </a:solidFill>
+          </a:ln>
+          <a:effectLst/>
+        </p:spPr>
+        <p:style>
+          <a:lnRef idx="1">
+            <a:schemeClr val="accent1"/>
+          </a:lnRef>
+          <a:fillRef idx="3">
+            <a:schemeClr val="accent1"/>
+          </a:fillRef>
+          <a:effectRef idx="2">
+            <a:schemeClr val="accent1"/>
+          </a:effectRef>
+          <a:fontRef idx="minor">
+            <a:schemeClr val="lt1"/>
+          </a:fontRef>
+        </p:style>
+        <p:txBody>
+          <a:bodyPr rtlCol="0" anchor="ctr"/>
+          <a:lstStyle/>
+          <a:p>
+            <a:pPr algn="ctr"/>
+          </a:p>
+        </p:txBody>
+      </p:sp>
+      <p:sp>
+        <p:nvSpPr>
+          <p:cNvPr id="17" name="Oval 16"/>
+          <p:cNvSpPr/>
+          <p:nvPr/>
+        </p:nvSpPr>
+        <p:spPr>
+          <a:xfrm>
+            <a:off x="594360" y="3950208"/>
+            <a:ext cx="128016" cy="128016"/>
+          </a:xfrm>
+          <a:prstGeom prst="ellipse">
+            <a:avLst/>
+          </a:prstGeom>
+          <a:solidFill>
+            <a:srgbClr val="2EC4B6"/>
+          </a:solidFill>
+          <a:ln>
+            <a:noFill/>
+          </a:ln>
+          <a:effectLst/>
+        </p:spPr>
+        <p:style>
+          <a:lnRef idx="1">
+            <a:schemeClr val="accent1"/>
+          </a:lnRef>
+          <a:fillRef idx="3">
+            <a:schemeClr val="accent1"/>
+          </a:fillRef>
+          <a:effectRef idx="2">
+            <a:schemeClr val="accent1"/>
+          </a:effectRef>
+          <a:fontRef idx="minor">
+            <a:schemeClr val="lt1"/>
+          </a:fontRef>
+        </p:style>
+        <p:txBody>
+          <a:bodyPr rtlCol="0" anchor="ctr"/>
+          <a:lstStyle/>
+          <a:p>
+            <a:pPr algn="ctr"/>
+          </a:p>
+        </p:txBody>
+      </p:sp>
+      <p:sp>
+        <p:nvSpPr>
+          <p:cNvPr id="18" name="TextBox 17"/>
           <p:cNvSpPr txBox="1"/>
           <p:nvPr/>
         </p:nvSpPr>
         <p:spPr>
           <a:xfrm>
-            <a:off x="594360" y="6446520"/>
-            <a:ext cx="9144000" cy="320040"/>
+            <a:off x="777240" y="3904488"/>
+            <a:ext cx="2377440" cy="274320"/>
           </a:xfrm>
           <a:prstGeom prst="rect">
             <a:avLst/>
@@ -4575,13 +7070,478 @@
           <a:p>
             <a:pPr algn="l"/>
             <a:r>
-              <a:rPr sz="1000" b="0">
+              <a:rPr sz="1300" b="0" i="0">
                 <a:solidFill>
                   <a:srgbClr val="5A6B7D"/>
                 </a:solidFill>
                 <a:latin typeface="Calibri"/>
               </a:rPr>
+              <a:t>Promoters (4-5): 33%</a:t>
+            </a:r>
+          </a:p>
+        </p:txBody>
+      </p:sp>
+      <p:sp>
+        <p:nvSpPr>
+          <p:cNvPr id="19" name="Oval 18"/>
+          <p:cNvSpPr/>
+          <p:nvPr/>
+        </p:nvSpPr>
+        <p:spPr>
+          <a:xfrm>
+            <a:off x="3108960" y="3950208"/>
+            <a:ext cx="128016" cy="128016"/>
+          </a:xfrm>
+          <a:prstGeom prst="ellipse">
+            <a:avLst/>
+          </a:prstGeom>
+          <a:solidFill>
+            <a:srgbClr val="E8A83C"/>
+          </a:solidFill>
+          <a:ln>
+            <a:noFill/>
+          </a:ln>
+          <a:effectLst/>
+        </p:spPr>
+        <p:style>
+          <a:lnRef idx="1">
+            <a:schemeClr val="accent1"/>
+          </a:lnRef>
+          <a:fillRef idx="3">
+            <a:schemeClr val="accent1"/>
+          </a:fillRef>
+          <a:effectRef idx="2">
+            <a:schemeClr val="accent1"/>
+          </a:effectRef>
+          <a:fontRef idx="minor">
+            <a:schemeClr val="lt1"/>
+          </a:fontRef>
+        </p:style>
+        <p:txBody>
+          <a:bodyPr rtlCol="0" anchor="ctr"/>
+          <a:lstStyle/>
+          <a:p>
+            <a:pPr algn="ctr"/>
+          </a:p>
+        </p:txBody>
+      </p:sp>
+      <p:sp>
+        <p:nvSpPr>
+          <p:cNvPr id="20" name="TextBox 19"/>
+          <p:cNvSpPr txBox="1"/>
+          <p:nvPr/>
+        </p:nvSpPr>
+        <p:spPr>
+          <a:xfrm>
+            <a:off x="3291840" y="3904488"/>
+            <a:ext cx="2377440" cy="274320"/>
+          </a:xfrm>
+          <a:prstGeom prst="rect">
+            <a:avLst/>
+          </a:prstGeom>
+          <a:noFill/>
+        </p:spPr>
+        <p:txBody>
+          <a:bodyPr wrap="square">
+            <a:spAutoFit/>
+          </a:bodyPr>
+          <a:lstStyle/>
+          <a:p>
+            <a:pPr algn="l"/>
+            <a:r>
+              <a:rPr sz="1300" b="0" i="0">
+                <a:solidFill>
+                  <a:srgbClr val="5A6B7D"/>
+                </a:solidFill>
+                <a:latin typeface="Calibri"/>
+              </a:rPr>
+              <a:t>Neutral (3): 26%</a:t>
+            </a:r>
+          </a:p>
+        </p:txBody>
+      </p:sp>
+      <p:sp>
+        <p:nvSpPr>
+          <p:cNvPr id="21" name="Oval 20"/>
+          <p:cNvSpPr/>
+          <p:nvPr/>
+        </p:nvSpPr>
+        <p:spPr>
+          <a:xfrm>
+            <a:off x="5623560" y="3950208"/>
+            <a:ext cx="128016" cy="128016"/>
+          </a:xfrm>
+          <a:prstGeom prst="ellipse">
+            <a:avLst/>
+          </a:prstGeom>
+          <a:solidFill>
+            <a:srgbClr val="E05A47"/>
+          </a:solidFill>
+          <a:ln>
+            <a:noFill/>
+          </a:ln>
+          <a:effectLst/>
+        </p:spPr>
+        <p:style>
+          <a:lnRef idx="1">
+            <a:schemeClr val="accent1"/>
+          </a:lnRef>
+          <a:fillRef idx="3">
+            <a:schemeClr val="accent1"/>
+          </a:fillRef>
+          <a:effectRef idx="2">
+            <a:schemeClr val="accent1"/>
+          </a:effectRef>
+          <a:fontRef idx="minor">
+            <a:schemeClr val="lt1"/>
+          </a:fontRef>
+        </p:style>
+        <p:txBody>
+          <a:bodyPr rtlCol="0" anchor="ctr"/>
+          <a:lstStyle/>
+          <a:p>
+            <a:pPr algn="ctr"/>
+          </a:p>
+        </p:txBody>
+      </p:sp>
+      <p:sp>
+        <p:nvSpPr>
+          <p:cNvPr id="22" name="TextBox 21"/>
+          <p:cNvSpPr txBox="1"/>
+          <p:nvPr/>
+        </p:nvSpPr>
+        <p:spPr>
+          <a:xfrm>
+            <a:off x="5806440" y="3904488"/>
+            <a:ext cx="2377440" cy="274320"/>
+          </a:xfrm>
+          <a:prstGeom prst="rect">
+            <a:avLst/>
+          </a:prstGeom>
+          <a:noFill/>
+        </p:spPr>
+        <p:txBody>
+          <a:bodyPr wrap="square">
+            <a:spAutoFit/>
+          </a:bodyPr>
+          <a:lstStyle/>
+          <a:p>
+            <a:pPr algn="l"/>
+            <a:r>
+              <a:rPr sz="1300" b="0" i="0">
+                <a:solidFill>
+                  <a:srgbClr val="5A6B7D"/>
+                </a:solidFill>
+                <a:latin typeface="Calibri"/>
+              </a:rPr>
+              <a:t>Detractors (1-2): 42%</a:t>
+            </a:r>
+          </a:p>
+        </p:txBody>
+      </p:sp>
+      <p:sp>
+        <p:nvSpPr>
+          <p:cNvPr id="23" name="Oval 22"/>
+          <p:cNvSpPr/>
+          <p:nvPr/>
+        </p:nvSpPr>
+        <p:spPr>
+          <a:xfrm>
+            <a:off x="6309360" y="3136392"/>
+            <a:ext cx="128016" cy="128016"/>
+          </a:xfrm>
+          <a:prstGeom prst="ellipse">
+            <a:avLst/>
+          </a:prstGeom>
+          <a:solidFill>
+            <a:srgbClr val="2EC4B6"/>
+          </a:solidFill>
+          <a:ln>
+            <a:noFill/>
+          </a:ln>
+          <a:effectLst/>
+        </p:spPr>
+        <p:style>
+          <a:lnRef idx="1">
+            <a:schemeClr val="accent1"/>
+          </a:lnRef>
+          <a:fillRef idx="3">
+            <a:schemeClr val="accent1"/>
+          </a:fillRef>
+          <a:effectRef idx="2">
+            <a:schemeClr val="accent1"/>
+          </a:effectRef>
+          <a:fontRef idx="minor">
+            <a:schemeClr val="lt1"/>
+          </a:fontRef>
+        </p:style>
+        <p:txBody>
+          <a:bodyPr rtlCol="0" anchor="ctr"/>
+          <a:lstStyle/>
+          <a:p>
+            <a:pPr algn="ctr"/>
+          </a:p>
+        </p:txBody>
+      </p:sp>
+      <p:sp>
+        <p:nvSpPr>
+          <p:cNvPr id="24" name="TextBox 23"/>
+          <p:cNvSpPr txBox="1"/>
+          <p:nvPr/>
+        </p:nvSpPr>
+        <p:spPr>
+          <a:xfrm>
+            <a:off x="6629400" y="3063240"/>
+            <a:ext cx="4983480" cy="868680"/>
+          </a:xfrm>
+          <a:prstGeom prst="rect">
+            <a:avLst/>
+          </a:prstGeom>
+          <a:noFill/>
+        </p:spPr>
+        <p:txBody>
+          <a:bodyPr wrap="square">
+            <a:spAutoFit/>
+          </a:bodyPr>
+          <a:lstStyle/>
+          <a:p>
+            <a:pPr algn="l"/>
+            <a:r>
+              <a:rPr sz="1450" b="0" i="0">
+                <a:solidFill>
+                  <a:srgbClr val="202633"/>
+                </a:solidFill>
+                <a:latin typeface="Calibri"/>
+              </a:rPr>
+              <a:t>Billing Charges is both the highest-volume and lowest-CSAT driver (avg CSAT 2.51) - the clear priority-one fix.</a:t>
+            </a:r>
+          </a:p>
+        </p:txBody>
+      </p:sp>
+      <p:sp>
+        <p:nvSpPr>
+          <p:cNvPr id="25" name="Oval 24"/>
+          <p:cNvSpPr/>
+          <p:nvPr/>
+        </p:nvSpPr>
+        <p:spPr>
+          <a:xfrm>
+            <a:off x="6309360" y="4005072"/>
+            <a:ext cx="128016" cy="128016"/>
+          </a:xfrm>
+          <a:prstGeom prst="ellipse">
+            <a:avLst/>
+          </a:prstGeom>
+          <a:solidFill>
+            <a:srgbClr val="2EC4B6"/>
+          </a:solidFill>
+          <a:ln>
+            <a:noFill/>
+          </a:ln>
+          <a:effectLst/>
+        </p:spPr>
+        <p:style>
+          <a:lnRef idx="1">
+            <a:schemeClr val="accent1"/>
+          </a:lnRef>
+          <a:fillRef idx="3">
+            <a:schemeClr val="accent1"/>
+          </a:fillRef>
+          <a:effectRef idx="2">
+            <a:schemeClr val="accent1"/>
+          </a:effectRef>
+          <a:fontRef idx="minor">
+            <a:schemeClr val="lt1"/>
+          </a:fontRef>
+        </p:style>
+        <p:txBody>
+          <a:bodyPr rtlCol="0" anchor="ctr"/>
+          <a:lstStyle/>
+          <a:p>
+            <a:pPr algn="ctr"/>
+          </a:p>
+        </p:txBody>
+      </p:sp>
+      <p:sp>
+        <p:nvSpPr>
+          <p:cNvPr id="26" name="TextBox 25"/>
+          <p:cNvSpPr txBox="1"/>
+          <p:nvPr/>
+        </p:nvSpPr>
+        <p:spPr>
+          <a:xfrm>
+            <a:off x="6629400" y="3931920"/>
+            <a:ext cx="4983480" cy="868680"/>
+          </a:xfrm>
+          <a:prstGeom prst="rect">
+            <a:avLst/>
+          </a:prstGeom>
+          <a:noFill/>
+        </p:spPr>
+        <p:txBody>
+          <a:bodyPr wrap="square">
+            <a:spAutoFit/>
+          </a:bodyPr>
+          <a:lstStyle/>
+          <a:p>
+            <a:pPr algn="l"/>
+            <a:r>
+              <a:rPr sz="1450" b="0" i="0">
+                <a:solidFill>
+                  <a:srgbClr val="202633"/>
+                </a:solidFill>
+                <a:latin typeface="Calibri"/>
+              </a:rPr>
+              <a:t>North East circle and Standard tier are the lowest-performing segments (avg CSAT 2.78 / 2.83).</a:t>
+            </a:r>
+          </a:p>
+        </p:txBody>
+      </p:sp>
+      <p:sp>
+        <p:nvSpPr>
+          <p:cNvPr id="27" name="Oval 26"/>
+          <p:cNvSpPr/>
+          <p:nvPr/>
+        </p:nvSpPr>
+        <p:spPr>
+          <a:xfrm>
+            <a:off x="594360" y="5148072"/>
+            <a:ext cx="128016" cy="128016"/>
+          </a:xfrm>
+          <a:prstGeom prst="ellipse">
+            <a:avLst/>
+          </a:prstGeom>
+          <a:solidFill>
+            <a:srgbClr val="2EC4B6"/>
+          </a:solidFill>
+          <a:ln>
+            <a:noFill/>
+          </a:ln>
+          <a:effectLst/>
+        </p:spPr>
+        <p:style>
+          <a:lnRef idx="1">
+            <a:schemeClr val="accent1"/>
+          </a:lnRef>
+          <a:fillRef idx="3">
+            <a:schemeClr val="accent1"/>
+          </a:fillRef>
+          <a:effectRef idx="2">
+            <a:schemeClr val="accent1"/>
+          </a:effectRef>
+          <a:fontRef idx="minor">
+            <a:schemeClr val="lt1"/>
+          </a:fontRef>
+        </p:style>
+        <p:txBody>
+          <a:bodyPr rtlCol="0" anchor="ctr"/>
+          <a:lstStyle/>
+          <a:p>
+            <a:pPr algn="ctr"/>
+          </a:p>
+        </p:txBody>
+      </p:sp>
+      <p:sp>
+        <p:nvSpPr>
+          <p:cNvPr id="28" name="TextBox 27"/>
+          <p:cNvSpPr txBox="1"/>
+          <p:nvPr/>
+        </p:nvSpPr>
+        <p:spPr>
+          <a:xfrm>
+            <a:off x="914400" y="5074920"/>
+            <a:ext cx="10561320" cy="640080"/>
+          </a:xfrm>
+          <a:prstGeom prst="rect">
+            <a:avLst/>
+          </a:prstGeom>
+          <a:noFill/>
+        </p:spPr>
+        <p:txBody>
+          <a:bodyPr wrap="square">
+            <a:spAutoFit/>
+          </a:bodyPr>
+          <a:lstStyle/>
+          <a:p>
+            <a:pPr algn="l"/>
+            <a:r>
+              <a:rPr sz="1450" b="0" i="0">
+                <a:solidFill>
+                  <a:srgbClr val="202633"/>
+                </a:solidFill>
+                <a:latin typeface="Calibri"/>
+              </a:rPr>
+              <a:t>Agents with less than 6 months' tenure skew toward the lowest-CSAT bucket (&lt;6 months) - a coaching signal alongside the process fix.</a:t>
+            </a:r>
+          </a:p>
+        </p:txBody>
+      </p:sp>
+      <p:sp>
+        <p:nvSpPr>
+          <p:cNvPr id="29" name="TextBox 28"/>
+          <p:cNvSpPr txBox="1"/>
+          <p:nvPr/>
+        </p:nvSpPr>
+        <p:spPr>
+          <a:xfrm>
+            <a:off x="594360" y="6473952"/>
+            <a:ext cx="9144000" cy="320040"/>
+          </a:xfrm>
+          <a:prstGeom prst="rect">
+            <a:avLst/>
+          </a:prstGeom>
+          <a:noFill/>
+        </p:spPr>
+        <p:txBody>
+          <a:bodyPr wrap="square">
+            <a:spAutoFit/>
+          </a:bodyPr>
+          <a:lstStyle/>
+          <a:p>
+            <a:pPr algn="l"/>
+            <a:r>
+              <a:rPr sz="1000" b="0" i="0">
+                <a:solidFill>
+                  <a:srgbClr val="5A6B7D"/>
+                </a:solidFill>
+                <a:latin typeface="Calibri"/>
+              </a:rPr>
               <a:t>CSAT Root-Cause &amp; Sentiment Driver Analysis</a:t>
+            </a:r>
+          </a:p>
+        </p:txBody>
+      </p:sp>
+      <p:sp>
+        <p:nvSpPr>
+          <p:cNvPr id="30" name="TextBox 29"/>
+          <p:cNvSpPr txBox="1"/>
+          <p:nvPr/>
+        </p:nvSpPr>
+        <p:spPr>
+          <a:xfrm>
+            <a:off x="11064240" y="6473952"/>
+            <a:ext cx="822960" cy="320040"/>
+          </a:xfrm>
+          <a:prstGeom prst="rect">
+            <a:avLst/>
+          </a:prstGeom>
+          <a:noFill/>
+        </p:spPr>
+        <p:txBody>
+          <a:bodyPr wrap="square">
+            <a:spAutoFit/>
+          </a:bodyPr>
+          <a:lstStyle/>
+          <a:p>
+            <a:pPr algn="r"/>
+            <a:r>
+              <a:rPr sz="1000" b="0" i="0">
+                <a:solidFill>
+                  <a:srgbClr val="5A6B7D"/>
+                </a:solidFill>
+                <a:latin typeface="Calibri"/>
+              </a:rPr>
+              <a:t>05 / 06</a:t>
             </a:r>
           </a:p>
         </p:txBody>
@@ -4620,7 +7580,7 @@
         </p:nvSpPr>
         <p:spPr>
           <a:xfrm>
-            <a:off x="594360" y="457200"/>
+            <a:off x="594360" y="502920"/>
             <a:ext cx="10789920" cy="731520"/>
           </a:xfrm>
           <a:prstGeom prst="rect">
@@ -4636,7 +7596,7 @@
           <a:p>
             <a:pPr algn="l"/>
             <a:r>
-              <a:rPr sz="3000" b="1">
+              <a:rPr sz="3000" b="1" i="0">
                 <a:solidFill>
                   <a:srgbClr val="FFFFFF"/>
                 </a:solidFill>
@@ -4649,14 +7609,67 @@
       </p:sp>
       <p:sp>
         <p:nvSpPr>
-          <p:cNvPr id="3" name="TextBox 2"/>
+          <p:cNvPr id="3" name="Oval 2"/>
+          <p:cNvSpPr/>
+          <p:nvPr/>
+        </p:nvSpPr>
+        <p:spPr>
+          <a:xfrm>
+            <a:off x="594360" y="1737360"/>
+            <a:ext cx="457200" cy="457200"/>
+          </a:xfrm>
+          <a:prstGeom prst="ellipse">
+            <a:avLst/>
+          </a:prstGeom>
+          <a:solidFill>
+            <a:srgbClr val="2EC4B6"/>
+          </a:solidFill>
+          <a:ln>
+            <a:noFill/>
+          </a:ln>
+          <a:effectLst/>
+        </p:spPr>
+        <p:style>
+          <a:lnRef idx="1">
+            <a:schemeClr val="accent1"/>
+          </a:lnRef>
+          <a:fillRef idx="3">
+            <a:schemeClr val="accent1"/>
+          </a:fillRef>
+          <a:effectRef idx="2">
+            <a:schemeClr val="accent1"/>
+          </a:effectRef>
+          <a:fontRef idx="minor">
+            <a:schemeClr val="lt1"/>
+          </a:fontRef>
+        </p:style>
+        <p:txBody>
+          <a:bodyPr rtlCol="0" anchor="ctr"/>
+          <a:lstStyle/>
+          <a:p>
+            <a:pPr algn="ctr"/>
+            <a:r>
+              <a:rPr sz="1800" b="1">
+                <a:solidFill>
+                  <a:srgbClr val="1B2A4A"/>
+                </a:solidFill>
+                <a:latin typeface="Calibri"/>
+              </a:rPr>
+              <a:t>1</a:t>
+            </a:r>
+          </a:p>
+        </p:txBody>
+      </p:sp>
+      <p:sp>
+        <p:nvSpPr>
+          <p:cNvPr id="4" name="TextBox 3"/>
           <p:cNvSpPr txBox="1"/>
           <p:nvPr/>
         </p:nvSpPr>
         <p:spPr>
           <a:xfrm>
-            <a:off x="594360" y="1645920"/>
-            <a:ext cx="10972800" cy="4114800"/>
+            <a:off x="1280160" y="1709928"/>
+            <a:ext cx="10287000" cy="1325880"/>
           </a:xfrm>
           <a:prstGeom prst="rect">
             <a:avLst/>
@@ -4669,65 +7682,97 @@
           </a:bodyPr>
           <a:lstStyle/>
           <a:p>
+            <a:r>
+              <a:rPr sz="1800" b="1">
+                <a:solidFill>
+                  <a:srgbClr val="FFFFFF"/>
+                </a:solidFill>
+                <a:latin typeface="Calibri"/>
+              </a:rPr>
+              <a:t>Fix #1: Billing Charges</a:t>
+            </a:r>
+          </a:p>
+          <a:p>
             <a:pPr>
-              <a:spcAft>
-                <a:spcPts val="2200"/>
-              </a:spcAft>
+              <a:spcBef>
+                <a:spcPts val="400"/>
+              </a:spcBef>
             </a:pPr>
             <a:r>
-              <a:rPr sz="1900">
-                <a:solidFill>
-                  <a:srgbClr val="FFFFFF"/>
-                </a:solidFill>
-                <a:latin typeface="Calibri"/>
-              </a:rPr>
-              <a:t>●   Fix #1: Billing Charges - the single biggest, lowest-scoring driver, concentrated and compounding with “Sub-theme: Charged” in 45% of its own complaints.</a:t>
-            </a:r>
-          </a:p>
-          <a:p>
-            <a:pPr>
-              <a:spcAft>
-                <a:spcPts val="2200"/>
-              </a:spcAft>
-            </a:pPr>
-            <a:r>
-              <a:rPr sz="1900">
-                <a:solidFill>
-                  <a:srgbClr val="FFFFFF"/>
-                </a:solidFill>
-                <a:latin typeface="Calibri"/>
-              </a:rPr>
-              <a:t>●   Fix #2: coach agents under 6 months' tenure - this cohort shows the weakest CSAT (&lt;6 months bucket) across the board.</a:t>
-            </a:r>
-          </a:p>
-          <a:p>
-            <a:pPr>
-              <a:spcAft>
-                <a:spcPts val="2200"/>
-              </a:spcAft>
-            </a:pPr>
-            <a:r>
-              <a:rPr sz="1900">
-                <a:solidFill>
-                  <a:srgbClr val="FFFFFF"/>
-                </a:solidFill>
-                <a:latin typeface="Calibri"/>
-              </a:rPr>
-              <a:t>●   Next step: validate this taxonomy against a sample of real customer verbatim, then track the top driver's weekly trend (already built into the workbook) as fixes roll out.</a:t>
-            </a:r>
-          </a:p>
-        </p:txBody>
-      </p:sp>
-      <p:sp>
-        <p:nvSpPr>
-          <p:cNvPr id="4" name="TextBox 3"/>
+              <a:rPr sz="1450">
+                <a:solidFill>
+                  <a:srgbClr val="D7DEE8"/>
+                </a:solidFill>
+                <a:latin typeface="Calibri"/>
+              </a:rPr>
+              <a:t>The single biggest, lowest-scoring driver, concentrated and compounding with “Duplicate Charge” in 21% of its own complaints.</a:t>
+            </a:r>
+          </a:p>
+        </p:txBody>
+      </p:sp>
+      <p:sp>
+        <p:nvSpPr>
+          <p:cNvPr id="5" name="Oval 4"/>
+          <p:cNvSpPr/>
+          <p:nvPr/>
+        </p:nvSpPr>
+        <p:spPr>
+          <a:xfrm>
+            <a:off x="594360" y="3063240"/>
+            <a:ext cx="457200" cy="457200"/>
+          </a:xfrm>
+          <a:prstGeom prst="ellipse">
+            <a:avLst/>
+          </a:prstGeom>
+          <a:solidFill>
+            <a:srgbClr val="2EC4B6"/>
+          </a:solidFill>
+          <a:ln>
+            <a:noFill/>
+          </a:ln>
+          <a:effectLst/>
+        </p:spPr>
+        <p:style>
+          <a:lnRef idx="1">
+            <a:schemeClr val="accent1"/>
+          </a:lnRef>
+          <a:fillRef idx="3">
+            <a:schemeClr val="accent1"/>
+          </a:fillRef>
+          <a:effectRef idx="2">
+            <a:schemeClr val="accent1"/>
+          </a:effectRef>
+          <a:fontRef idx="minor">
+            <a:schemeClr val="lt1"/>
+          </a:fontRef>
+        </p:style>
+        <p:txBody>
+          <a:bodyPr rtlCol="0" anchor="ctr"/>
+          <a:lstStyle/>
+          <a:p>
+            <a:pPr algn="ctr"/>
+            <a:r>
+              <a:rPr sz="1800" b="1">
+                <a:solidFill>
+                  <a:srgbClr val="1B2A4A"/>
+                </a:solidFill>
+                <a:latin typeface="Calibri"/>
+              </a:rPr>
+              <a:t>2</a:t>
+            </a:r>
+          </a:p>
+        </p:txBody>
+      </p:sp>
+      <p:sp>
+        <p:nvSpPr>
+          <p:cNvPr id="6" name="TextBox 5"/>
           <p:cNvSpPr txBox="1"/>
           <p:nvPr/>
         </p:nvSpPr>
         <p:spPr>
           <a:xfrm>
-            <a:off x="594360" y="6217920"/>
-            <a:ext cx="10058400" cy="365760"/>
+            <a:off x="1280160" y="3035808"/>
+            <a:ext cx="10287000" cy="1325880"/>
           </a:xfrm>
           <a:prstGeom prst="rect">
             <a:avLst/>
@@ -4740,9 +7785,162 @@
           </a:bodyPr>
           <a:lstStyle/>
           <a:p>
+            <a:r>
+              <a:rPr sz="1800" b="1">
+                <a:solidFill>
+                  <a:srgbClr val="FFFFFF"/>
+                </a:solidFill>
+                <a:latin typeface="Calibri"/>
+              </a:rPr>
+              <a:t>Fix #2: Coach agents under 6 months' tenure</a:t>
+            </a:r>
+          </a:p>
+          <a:p>
+            <a:pPr>
+              <a:spcBef>
+                <a:spcPts val="400"/>
+              </a:spcBef>
+            </a:pPr>
+            <a:r>
+              <a:rPr sz="1450">
+                <a:solidFill>
+                  <a:srgbClr val="D7DEE8"/>
+                </a:solidFill>
+                <a:latin typeface="Calibri"/>
+              </a:rPr>
+              <a:t>This cohort shows the weakest CSAT (&lt;6 months bucket) across the board.</a:t>
+            </a:r>
+          </a:p>
+        </p:txBody>
+      </p:sp>
+      <p:sp>
+        <p:nvSpPr>
+          <p:cNvPr id="7" name="Oval 6"/>
+          <p:cNvSpPr/>
+          <p:nvPr/>
+        </p:nvSpPr>
+        <p:spPr>
+          <a:xfrm>
+            <a:off x="594360" y="4389120"/>
+            <a:ext cx="457200" cy="457200"/>
+          </a:xfrm>
+          <a:prstGeom prst="ellipse">
+            <a:avLst/>
+          </a:prstGeom>
+          <a:solidFill>
+            <a:srgbClr val="2EC4B6"/>
+          </a:solidFill>
+          <a:ln>
+            <a:noFill/>
+          </a:ln>
+          <a:effectLst/>
+        </p:spPr>
+        <p:style>
+          <a:lnRef idx="1">
+            <a:schemeClr val="accent1"/>
+          </a:lnRef>
+          <a:fillRef idx="3">
+            <a:schemeClr val="accent1"/>
+          </a:fillRef>
+          <a:effectRef idx="2">
+            <a:schemeClr val="accent1"/>
+          </a:effectRef>
+          <a:fontRef idx="minor">
+            <a:schemeClr val="lt1"/>
+          </a:fontRef>
+        </p:style>
+        <p:txBody>
+          <a:bodyPr rtlCol="0" anchor="ctr"/>
+          <a:lstStyle/>
+          <a:p>
+            <a:pPr algn="ctr"/>
+            <a:r>
+              <a:rPr sz="1800" b="1">
+                <a:solidFill>
+                  <a:srgbClr val="1B2A4A"/>
+                </a:solidFill>
+                <a:latin typeface="Calibri"/>
+              </a:rPr>
+              <a:t>3</a:t>
+            </a:r>
+          </a:p>
+        </p:txBody>
+      </p:sp>
+      <p:sp>
+        <p:nvSpPr>
+          <p:cNvPr id="8" name="TextBox 7"/>
+          <p:cNvSpPr txBox="1"/>
+          <p:nvPr/>
+        </p:nvSpPr>
+        <p:spPr>
+          <a:xfrm>
+            <a:off x="1280160" y="4361688"/>
+            <a:ext cx="10287000" cy="1325880"/>
+          </a:xfrm>
+          <a:prstGeom prst="rect">
+            <a:avLst/>
+          </a:prstGeom>
+          <a:noFill/>
+        </p:spPr>
+        <p:txBody>
+          <a:bodyPr wrap="square">
+            <a:spAutoFit/>
+          </a:bodyPr>
+          <a:lstStyle/>
+          <a:p>
+            <a:r>
+              <a:rPr sz="1800" b="1">
+                <a:solidFill>
+                  <a:srgbClr val="FFFFFF"/>
+                </a:solidFill>
+                <a:latin typeface="Calibri"/>
+              </a:rPr>
+              <a:t>Next step: Validate &amp; track</a:t>
+            </a:r>
+          </a:p>
+          <a:p>
+            <a:pPr>
+              <a:spcBef>
+                <a:spcPts val="400"/>
+              </a:spcBef>
+            </a:pPr>
+            <a:r>
+              <a:rPr sz="1450">
+                <a:solidFill>
+                  <a:srgbClr val="D7DEE8"/>
+                </a:solidFill>
+                <a:latin typeface="Calibri"/>
+              </a:rPr>
+              <a:t>Validate this taxonomy against a sample of real customer verbatim, then track the top driver's weekly trend (already built into the workbook) as fixes roll out.</a:t>
+            </a:r>
+          </a:p>
+        </p:txBody>
+      </p:sp>
+      <p:sp>
+        <p:nvSpPr>
+          <p:cNvPr id="9" name="TextBox 8"/>
+          <p:cNvSpPr txBox="1"/>
+          <p:nvPr/>
+        </p:nvSpPr>
+        <p:spPr>
+          <a:xfrm>
+            <a:off x="594360" y="6309360"/>
+            <a:ext cx="10058400" cy="365760"/>
+          </a:xfrm>
+          <a:prstGeom prst="rect">
+            <a:avLst/>
+          </a:prstGeom>
+          <a:noFill/>
+        </p:spPr>
+        <p:txBody>
+          <a:bodyPr wrap="square">
+            <a:spAutoFit/>
+          </a:bodyPr>
+          <a:lstStyle/>
+          <a:p>
             <a:pPr algn="l"/>
             <a:r>
-              <a:rPr sz="1200" b="0">
+              <a:rPr sz="1200" b="0" i="0">
                 <a:solidFill>
                   <a:srgbClr val="B8C2D0"/>
                 </a:solidFill>

--- a/usecase1_csat_nlp_rootcause/final_output/usecase1_csat_summary.pptx
+++ b/usecase1_csat_nlp_rootcause/final_output/usecase1_csat_summary.pptx
@@ -4908,7 +4908,7 @@
         <p:spPr>
           <a:xfrm>
             <a:off x="594360" y="4800600"/>
-            <a:ext cx="4934334" cy="411480"/>
+            <a:ext cx="4929981" cy="411480"/>
           </a:xfrm>
           <a:prstGeom prst="rect">
             <a:avLst/>
@@ -4953,8 +4953,8 @@
         </p:nvSpPr>
         <p:spPr>
           <a:xfrm>
-            <a:off x="5528694" y="4800600"/>
-            <a:ext cx="3762048" cy="411480"/>
+            <a:off x="5524341" y="4800600"/>
+            <a:ext cx="3773655" cy="411480"/>
           </a:xfrm>
           <a:prstGeom prst="rect">
             <a:avLst/>
@@ -4999,8 +4999,8 @@
         </p:nvSpPr>
         <p:spPr>
           <a:xfrm>
-            <a:off x="9290742" y="4800600"/>
-            <a:ext cx="2184977" cy="411480"/>
+            <a:off x="9297996" y="4800600"/>
+            <a:ext cx="2177722" cy="411480"/>
           </a:xfrm>
           <a:prstGeom prst="rect">
             <a:avLst/>
@@ -6590,7 +6590,7 @@
                 </a:solidFill>
                 <a:latin typeface="Calibri"/>
               </a:rPr>
-              <a:t>2.85</a:t>
+              <a:t>2.86</a:t>
             </a:r>
           </a:p>
           <a:p>
@@ -6701,7 +6701,7 @@
                 </a:solidFill>
                 <a:latin typeface="Calibri"/>
               </a:rPr>
-              <a:t>37%</a:t>
+              <a:t>38%</a:t>
             </a:r>
           </a:p>
           <a:p>
@@ -6873,7 +6873,7 @@
         <p:spPr>
           <a:xfrm>
             <a:off x="594360" y="3429000"/>
-            <a:ext cx="1676838" cy="411480"/>
+            <a:ext cx="1681618" cy="411480"/>
           </a:xfrm>
           <a:prstGeom prst="rect">
             <a:avLst/>
@@ -6918,8 +6918,8 @@
         </p:nvSpPr>
         <p:spPr>
           <a:xfrm>
-            <a:off x="2271198" y="3429000"/>
-            <a:ext cx="1314980" cy="411480"/>
+            <a:off x="2275978" y="3429000"/>
+            <a:ext cx="1313614" cy="411480"/>
           </a:xfrm>
           <a:prstGeom prst="rect">
             <a:avLst/>
@@ -6964,8 +6964,8 @@
         </p:nvSpPr>
         <p:spPr>
           <a:xfrm>
-            <a:off x="3586178" y="3429000"/>
-            <a:ext cx="2128820" cy="411480"/>
+            <a:off x="3589592" y="3429000"/>
+            <a:ext cx="2125406" cy="411480"/>
           </a:xfrm>
           <a:prstGeom prst="rect">
             <a:avLst/>
@@ -7392,7 +7392,7 @@
                 </a:solidFill>
                 <a:latin typeface="Calibri"/>
               </a:rPr>
-              <a:t>North East circle and Standard tier are the lowest-performing segments (avg CSAT 2.78 / 2.83).</a:t>
+              <a:t>North East circle and Elite tier are the lowest-performing segments (avg CSAT 2.78 / 2.82).</a:t>
             </a:r>
           </a:p>
         </p:txBody>
@@ -7705,7 +7705,7 @@
                 </a:solidFill>
                 <a:latin typeface="Calibri"/>
               </a:rPr>
-              <a:t>The single biggest, lowest-scoring driver, concentrated and compounding with “Duplicate Charge” in 21% of its own complaints.</a:t>
+              <a:t>The single biggest, lowest-scoring driver, concentrated and compounding with “Duplicate Charge” in 22% of its own complaints.</a:t>
             </a:r>
           </a:p>
         </p:txBody>

--- a/usecase1_csat_nlp_rootcause/final_output/usecase1_csat_summary.pptx
+++ b/usecase1_csat_nlp_rootcause/final_output/usecase1_csat_summary.pptx
@@ -3109,7 +3109,7 @@
         </p:nvSpPr>
         <p:spPr>
           <a:xfrm>
-            <a:off x="594360" y="2103120"/>
+            <a:off x="594360" y="2788920"/>
             <a:ext cx="1097280" cy="63500"/>
           </a:xfrm>
           <a:prstGeom prst="rect">
@@ -3153,7 +3153,7 @@
         </p:nvSpPr>
         <p:spPr>
           <a:xfrm>
-            <a:off x="594360" y="2240280"/>
+            <a:off x="594360" y="2926080"/>
             <a:ext cx="10972800" cy="1188720"/>
           </a:xfrm>
           <a:prstGeom prst="rect">
@@ -3177,344 +3177,6 @@
               </a:rPr>
               <a:t>CSAT Root-Cause &amp; Sentiment
 Driver Analysis</a:t>
-            </a:r>
-          </a:p>
-        </p:txBody>
-      </p:sp>
-      <p:sp>
-        <p:nvSpPr>
-          <p:cNvPr id="4" name="TextBox 3"/>
-          <p:cNvSpPr txBox="1"/>
-          <p:nvPr/>
-        </p:nvSpPr>
-        <p:spPr>
-          <a:xfrm>
-            <a:off x="594360" y="3474720"/>
-            <a:ext cx="10058400" cy="548640"/>
-          </a:xfrm>
-          <a:prstGeom prst="rect">
-            <a:avLst/>
-          </a:prstGeom>
-          <a:noFill/>
-        </p:spPr>
-        <p:txBody>
-          <a:bodyPr wrap="square">
-            <a:spAutoFit/>
-          </a:bodyPr>
-          <a:lstStyle/>
-          <a:p>
-            <a:pPr algn="l"/>
-            <a:r>
-              <a:rPr sz="1800" b="0" i="0">
-                <a:solidFill>
-                  <a:srgbClr val="2EC4B6"/>
-                </a:solidFill>
-                <a:latin typeface="Calibri"/>
-              </a:rPr>
-              <a:t>Identifying and prioritizing what's actually driving customer dissatisfaction</a:t>
-            </a:r>
-          </a:p>
-        </p:txBody>
-      </p:sp>
-      <p:sp>
-        <p:nvSpPr>
-          <p:cNvPr id="5" name="Rounded Rectangle 4"/>
-          <p:cNvSpPr/>
-          <p:nvPr/>
-        </p:nvSpPr>
-        <p:spPr>
-          <a:xfrm>
-            <a:off x="594360" y="4389120"/>
-            <a:ext cx="2651760" cy="868680"/>
-          </a:xfrm>
-          <a:prstGeom prst="roundRect">
-            <a:avLst/>
-          </a:prstGeom>
-          <a:solidFill>
-            <a:srgbClr val="2B3C5E"/>
-          </a:solidFill>
-          <a:ln w="12700">
-            <a:solidFill>
-              <a:srgbClr val="2EC4B6"/>
-            </a:solidFill>
-          </a:ln>
-          <a:effectLst/>
-        </p:spPr>
-        <p:style>
-          <a:lnRef idx="1">
-            <a:schemeClr val="accent1"/>
-          </a:lnRef>
-          <a:fillRef idx="3">
-            <a:schemeClr val="accent1"/>
-          </a:fillRef>
-          <a:effectRef idx="2">
-            <a:schemeClr val="accent1"/>
-          </a:effectRef>
-          <a:fontRef idx="minor">
-            <a:schemeClr val="lt1"/>
-          </a:fontRef>
-        </p:style>
-        <p:txBody>
-          <a:bodyPr rtlCol="0" anchor="ctr" wrap="square"/>
-          <a:lstStyle/>
-          <a:p>
-            <a:pPr algn="ctr"/>
-            <a:r>
-              <a:rPr sz="1900" b="1">
-                <a:solidFill>
-                  <a:srgbClr val="2EC4B6"/>
-                </a:solidFill>
-                <a:latin typeface="Calibri"/>
-              </a:rPr>
-              <a:t>7,500</a:t>
-            </a:r>
-          </a:p>
-          <a:p>
-            <a:pPr algn="ctr"/>
-            <a:r>
-              <a:rPr sz="1050">
-                <a:solidFill>
-                  <a:srgbClr val="D7DEE8"/>
-                </a:solidFill>
-                <a:latin typeface="Calibri"/>
-              </a:rPr>
-              <a:t>Survey responses analyzed</a:t>
-            </a:r>
-          </a:p>
-        </p:txBody>
-      </p:sp>
-      <p:sp>
-        <p:nvSpPr>
-          <p:cNvPr id="6" name="Rounded Rectangle 5"/>
-          <p:cNvSpPr/>
-          <p:nvPr/>
-        </p:nvSpPr>
-        <p:spPr>
-          <a:xfrm>
-            <a:off x="3474720" y="4389120"/>
-            <a:ext cx="2651760" cy="868680"/>
-          </a:xfrm>
-          <a:prstGeom prst="roundRect">
-            <a:avLst/>
-          </a:prstGeom>
-          <a:solidFill>
-            <a:srgbClr val="2B3C5E"/>
-          </a:solidFill>
-          <a:ln w="12700">
-            <a:solidFill>
-              <a:srgbClr val="2EC4B6"/>
-            </a:solidFill>
-          </a:ln>
-          <a:effectLst/>
-        </p:spPr>
-        <p:style>
-          <a:lnRef idx="1">
-            <a:schemeClr val="accent1"/>
-          </a:lnRef>
-          <a:fillRef idx="3">
-            <a:schemeClr val="accent1"/>
-          </a:fillRef>
-          <a:effectRef idx="2">
-            <a:schemeClr val="accent1"/>
-          </a:effectRef>
-          <a:fontRef idx="minor">
-            <a:schemeClr val="lt1"/>
-          </a:fontRef>
-        </p:style>
-        <p:txBody>
-          <a:bodyPr rtlCol="0" anchor="ctr" wrap="square"/>
-          <a:lstStyle/>
-          <a:p>
-            <a:pPr algn="ctr"/>
-            <a:r>
-              <a:rPr sz="1900" b="1">
-                <a:solidFill>
-                  <a:srgbClr val="2EC4B6"/>
-                </a:solidFill>
-                <a:latin typeface="Calibri"/>
-              </a:rPr>
-              <a:t>Aug–Oct 2026</a:t>
-            </a:r>
-          </a:p>
-          <a:p>
-            <a:pPr algn="ctr"/>
-            <a:r>
-              <a:rPr sz="1050">
-                <a:solidFill>
-                  <a:srgbClr val="D7DEE8"/>
-                </a:solidFill>
-                <a:latin typeface="Calibri"/>
-              </a:rPr>
-              <a:t>Period covered</a:t>
-            </a:r>
-          </a:p>
-        </p:txBody>
-      </p:sp>
-      <p:sp>
-        <p:nvSpPr>
-          <p:cNvPr id="7" name="Rounded Rectangle 6"/>
-          <p:cNvSpPr/>
-          <p:nvPr/>
-        </p:nvSpPr>
-        <p:spPr>
-          <a:xfrm>
-            <a:off x="6355080" y="4389120"/>
-            <a:ext cx="2651760" cy="868680"/>
-          </a:xfrm>
-          <a:prstGeom prst="roundRect">
-            <a:avLst/>
-          </a:prstGeom>
-          <a:solidFill>
-            <a:srgbClr val="2B3C5E"/>
-          </a:solidFill>
-          <a:ln w="12700">
-            <a:solidFill>
-              <a:srgbClr val="2EC4B6"/>
-            </a:solidFill>
-          </a:ln>
-          <a:effectLst/>
-        </p:spPr>
-        <p:style>
-          <a:lnRef idx="1">
-            <a:schemeClr val="accent1"/>
-          </a:lnRef>
-          <a:fillRef idx="3">
-            <a:schemeClr val="accent1"/>
-          </a:fillRef>
-          <a:effectRef idx="2">
-            <a:schemeClr val="accent1"/>
-          </a:effectRef>
-          <a:fontRef idx="minor">
-            <a:schemeClr val="lt1"/>
-          </a:fontRef>
-        </p:style>
-        <p:txBody>
-          <a:bodyPr rtlCol="0" anchor="ctr" wrap="square"/>
-          <a:lstStyle/>
-          <a:p>
-            <a:pPr algn="ctr"/>
-            <a:r>
-              <a:rPr sz="1900" b="1">
-                <a:solidFill>
-                  <a:srgbClr val="2EC4B6"/>
-                </a:solidFill>
-                <a:latin typeface="Calibri"/>
-              </a:rPr>
-              <a:t>3</a:t>
-            </a:r>
-          </a:p>
-          <a:p>
-            <a:pPr algn="ctr"/>
-            <a:r>
-              <a:rPr sz="1050">
-                <a:solidFill>
-                  <a:srgbClr val="D7DEE8"/>
-                </a:solidFill>
-                <a:latin typeface="Calibri"/>
-              </a:rPr>
-              <a:t>Channels: chat, email, voice</a:t>
-            </a:r>
-          </a:p>
-        </p:txBody>
-      </p:sp>
-      <p:sp>
-        <p:nvSpPr>
-          <p:cNvPr id="8" name="Rounded Rectangle 7"/>
-          <p:cNvSpPr/>
-          <p:nvPr/>
-        </p:nvSpPr>
-        <p:spPr>
-          <a:xfrm>
-            <a:off x="9235440" y="4389120"/>
-            <a:ext cx="2651760" cy="868680"/>
-          </a:xfrm>
-          <a:prstGeom prst="roundRect">
-            <a:avLst/>
-          </a:prstGeom>
-          <a:solidFill>
-            <a:srgbClr val="2B3C5E"/>
-          </a:solidFill>
-          <a:ln w="12700">
-            <a:solidFill>
-              <a:srgbClr val="2EC4B6"/>
-            </a:solidFill>
-          </a:ln>
-          <a:effectLst/>
-        </p:spPr>
-        <p:style>
-          <a:lnRef idx="1">
-            <a:schemeClr val="accent1"/>
-          </a:lnRef>
-          <a:fillRef idx="3">
-            <a:schemeClr val="accent1"/>
-          </a:fillRef>
-          <a:effectRef idx="2">
-            <a:schemeClr val="accent1"/>
-          </a:effectRef>
-          <a:fontRef idx="minor">
-            <a:schemeClr val="lt1"/>
-          </a:fontRef>
-        </p:style>
-        <p:txBody>
-          <a:bodyPr rtlCol="0" anchor="ctr" wrap="square"/>
-          <a:lstStyle/>
-          <a:p>
-            <a:pPr algn="ctr"/>
-            <a:r>
-              <a:rPr sz="1900" b="1">
-                <a:solidFill>
-                  <a:srgbClr val="2EC4B6"/>
-                </a:solidFill>
-                <a:latin typeface="Calibri"/>
-              </a:rPr>
-              <a:t>12 / 42</a:t>
-            </a:r>
-          </a:p>
-          <a:p>
-            <a:pPr algn="ctr"/>
-            <a:r>
-              <a:rPr sz="1050">
-                <a:solidFill>
-                  <a:srgbClr val="D7DEE8"/>
-                </a:solidFill>
-                <a:latin typeface="Calibri"/>
-              </a:rPr>
-              <a:t>Primary / secondary drivers</a:t>
-            </a:r>
-          </a:p>
-        </p:txBody>
-      </p:sp>
-      <p:sp>
-        <p:nvSpPr>
-          <p:cNvPr id="9" name="TextBox 8"/>
-          <p:cNvSpPr txBox="1"/>
-          <p:nvPr/>
-        </p:nvSpPr>
-        <p:spPr>
-          <a:xfrm>
-            <a:off x="594360" y="6446520"/>
-            <a:ext cx="10058400" cy="320040"/>
-          </a:xfrm>
-          <a:prstGeom prst="rect">
-            <a:avLst/>
-          </a:prstGeom>
-          <a:noFill/>
-        </p:spPr>
-        <p:txBody>
-          <a:bodyPr wrap="square">
-            <a:spAutoFit/>
-          </a:bodyPr>
-          <a:lstStyle/>
-          <a:p>
-            <a:pPr algn="l"/>
-            <a:r>
-              <a:rPr sz="1100" b="0" i="0">
-                <a:solidFill>
-                  <a:srgbClr val="8A97AB"/>
-                </a:solidFill>
-                <a:latin typeface="Calibri"/>
-              </a:rPr>
-              <a:t>Data Analytics Consulting</a:t>
             </a:r>
           </a:p>
         </p:txBody>
@@ -5504,51 +5166,16 @@
           </a:p>
         </p:txBody>
       </p:sp>
-      <p:cxnSp>
-        <p:nvCxnSpPr>
-          <p:cNvPr id="5" name="Connector 4"/>
-          <p:cNvCxnSpPr/>
-          <p:nvPr/>
-        </p:nvCxnSpPr>
-        <p:spPr>
-          <a:xfrm>
-            <a:off x="708660.0" y="1851660.0"/>
-            <a:ext cx="10744200.0" cy="0.0"/>
-          </a:xfrm>
-          <a:prstGeom prst="line">
-            <a:avLst/>
-          </a:prstGeom>
-          <a:ln w="25400">
-            <a:solidFill>
-              <a:srgbClr val="DDE2E8"/>
-            </a:solidFill>
-          </a:ln>
-        </p:spPr>
-        <p:style>
-          <a:lnRef idx="2">
-            <a:schemeClr val="accent1"/>
-          </a:lnRef>
-          <a:fillRef idx="0">
-            <a:schemeClr val="accent1"/>
-          </a:fillRef>
-          <a:effectRef idx="1">
-            <a:schemeClr val="accent1"/>
-          </a:effectRef>
-          <a:fontRef idx="minor">
-            <a:schemeClr val="tx1"/>
-          </a:fontRef>
-        </p:style>
-      </p:cxnSp>
-      <p:sp>
-        <p:nvSpPr>
-          <p:cNvPr id="6" name="Oval 5"/>
+      <p:sp>
+        <p:nvSpPr>
+          <p:cNvPr id="5" name="Oval 4"/>
           <p:cNvSpPr/>
           <p:nvPr/>
         </p:nvSpPr>
         <p:spPr>
           <a:xfrm>
-            <a:off x="1330452" y="1600200"/>
-            <a:ext cx="502920" cy="502920"/>
+            <a:off x="594360" y="1417320"/>
+            <a:ext cx="292608" cy="292608"/>
           </a:xfrm>
           <a:prstGeom prst="ellipse">
             <a:avLst/>
@@ -5581,7 +5208,7 @@
           <a:p>
             <a:pPr algn="ctr"/>
             <a:r>
-              <a:rPr sz="1800" b="1">
+              <a:rPr sz="1400" b="1">
                 <a:solidFill>
                   <a:srgbClr val="FFFFFF"/>
                 </a:solidFill>
@@ -5594,14 +5221,14 @@
       </p:sp>
       <p:sp>
         <p:nvSpPr>
-          <p:cNvPr id="7" name="TextBox 6"/>
+          <p:cNvPr id="6" name="TextBox 5"/>
           <p:cNvSpPr txBox="1"/>
           <p:nvPr/>
         </p:nvSpPr>
         <p:spPr>
           <a:xfrm>
-            <a:off x="457200" y="2240280"/>
-            <a:ext cx="2249424" cy="365760"/>
+            <a:off x="978408" y="1399032"/>
+            <a:ext cx="4828032" cy="292608"/>
           </a:xfrm>
           <a:prstGeom prst="rect">
             <a:avLst/>
@@ -5614,7 +5241,7 @@
           </a:bodyPr>
           <a:lstStyle/>
           <a:p>
-            <a:pPr algn="ctr"/>
+            <a:pPr algn="l"/>
             <a:r>
               <a:rPr sz="1450" b="1" i="0">
                 <a:solidFill>
@@ -5622,56 +5249,21 @@
                 </a:solidFill>
                 <a:latin typeface="Calibri"/>
               </a:rPr>
-              <a:t>1. Bootstrap dictionary</a:t>
-            </a:r>
-          </a:p>
-        </p:txBody>
-      </p:sp>
-      <p:sp>
-        <p:nvSpPr>
-          <p:cNvPr id="8" name="TextBox 7"/>
-          <p:cNvSpPr txBox="1"/>
-          <p:nvPr/>
-        </p:nvSpPr>
-        <p:spPr>
-          <a:xfrm>
-            <a:off x="457200" y="2633472"/>
-            <a:ext cx="2249424" cy="1371600"/>
-          </a:xfrm>
-          <a:prstGeom prst="rect">
-            <a:avLst/>
-          </a:prstGeom>
-          <a:noFill/>
-        </p:spPr>
-        <p:txBody>
-          <a:bodyPr wrap="square">
-            <a:spAutoFit/>
-          </a:bodyPr>
-          <a:lstStyle/>
-          <a:p>
-            <a:pPr algn="ctr"/>
-            <a:r>
-              <a:rPr sz="1200" b="0" i="0">
-                <a:solidFill>
-                  <a:srgbClr val="5A6B7D"/>
-                </a:solidFill>
-                <a:latin typeface="Calibri"/>
-              </a:rPr>
-              <a:t>Sentiment-split term frequency surfaces the words that actually distinguish low-CSAT from high-CSAT text.</a:t>
-            </a:r>
-          </a:p>
-        </p:txBody>
-      </p:sp>
-      <p:sp>
-        <p:nvSpPr>
-          <p:cNvPr id="9" name="Oval 8"/>
+              <a:t>Bootstrap dictionary</a:t>
+            </a:r>
+          </a:p>
+        </p:txBody>
+      </p:sp>
+      <p:sp>
+        <p:nvSpPr>
+          <p:cNvPr id="7" name="Oval 6"/>
           <p:cNvSpPr/>
           <p:nvPr/>
         </p:nvSpPr>
         <p:spPr>
           <a:xfrm>
-            <a:off x="3579876" y="1600200"/>
-            <a:ext cx="502920" cy="502920"/>
+            <a:off x="667512" y="1847088"/>
+            <a:ext cx="82296" cy="82296"/>
           </a:xfrm>
           <a:prstGeom prst="ellipse">
             <a:avLst/>
@@ -5703,28 +5295,19 @@
           <a:lstStyle/>
           <a:p>
             <a:pPr algn="ctr"/>
-            <a:r>
-              <a:rPr sz="1800" b="1">
-                <a:solidFill>
-                  <a:srgbClr val="FFFFFF"/>
-                </a:solidFill>
-                <a:latin typeface="Calibri"/>
-              </a:rPr>
-              <a:t>2</a:t>
-            </a:r>
-          </a:p>
-        </p:txBody>
-      </p:sp>
-      <p:sp>
-        <p:nvSpPr>
-          <p:cNvPr id="10" name="TextBox 9"/>
+          </a:p>
+        </p:txBody>
+      </p:sp>
+      <p:sp>
+        <p:nvSpPr>
+          <p:cNvPr id="8" name="TextBox 7"/>
           <p:cNvSpPr txBox="1"/>
           <p:nvPr/>
         </p:nvSpPr>
         <p:spPr>
           <a:xfrm>
-            <a:off x="2706624" y="2240280"/>
-            <a:ext cx="2249424" cy="365760"/>
+            <a:off x="868680" y="1783080"/>
+            <a:ext cx="4937760" cy="292608"/>
           </a:xfrm>
           <a:prstGeom prst="rect">
             <a:avLst/>
@@ -5737,64 +5320,29 @@
           </a:bodyPr>
           <a:lstStyle/>
           <a:p>
-            <a:pPr algn="ctr"/>
-            <a:r>
-              <a:rPr sz="1450" b="1" i="0">
-                <a:solidFill>
-                  <a:srgbClr val="1B2A4A"/>
-                </a:solidFill>
-                <a:latin typeface="Calibri"/>
-              </a:rPr>
-              <a:t>2. Tag drivers</a:t>
-            </a:r>
-          </a:p>
-        </p:txBody>
-      </p:sp>
-      <p:sp>
-        <p:nvSpPr>
-          <p:cNvPr id="11" name="TextBox 10"/>
-          <p:cNvSpPr txBox="1"/>
-          <p:nvPr/>
-        </p:nvSpPr>
-        <p:spPr>
-          <a:xfrm>
-            <a:off x="2706624" y="2633472"/>
-            <a:ext cx="2249424" cy="1371600"/>
-          </a:xfrm>
-          <a:prstGeom prst="rect">
-            <a:avLst/>
-          </a:prstGeom>
-          <a:noFill/>
-        </p:spPr>
-        <p:txBody>
-          <a:bodyPr wrap="square">
-            <a:spAutoFit/>
-          </a:bodyPr>
-          <a:lstStyle/>
-          <a:p>
-            <a:pPr algn="ctr"/>
-            <a:r>
-              <a:rPr sz="1200" b="0" i="0">
-                <a:solidFill>
-                  <a:srgbClr val="5A6B7D"/>
-                </a:solidFill>
-                <a:latin typeface="Calibri"/>
-              </a:rPr>
-              <a:t>Every response matched against an 11-category primary / 42-sub-issue taxonomy, ranked by match strength.</a:t>
-            </a:r>
-          </a:p>
-        </p:txBody>
-      </p:sp>
-      <p:sp>
-        <p:nvSpPr>
-          <p:cNvPr id="12" name="Oval 11"/>
+            <a:pPr algn="l"/>
+            <a:r>
+              <a:rPr sz="1150" b="0" i="0">
+                <a:solidFill>
+                  <a:srgbClr val="202633"/>
+                </a:solidFill>
+                <a:latin typeface="Calibri"/>
+              </a:rPr>
+              <a:t>Splits term frequency: low-CSAT vs high-CSAT text</a:t>
+            </a:r>
+          </a:p>
+        </p:txBody>
+      </p:sp>
+      <p:sp>
+        <p:nvSpPr>
+          <p:cNvPr id="9" name="Oval 8"/>
           <p:cNvSpPr/>
           <p:nvPr/>
         </p:nvSpPr>
         <p:spPr>
           <a:xfrm>
-            <a:off x="5829300" y="1600200"/>
-            <a:ext cx="502920" cy="502920"/>
+            <a:off x="667512" y="2157984"/>
+            <a:ext cx="82296" cy="82296"/>
           </a:xfrm>
           <a:prstGeom prst="ellipse">
             <a:avLst/>
@@ -5826,28 +5374,19 @@
           <a:lstStyle/>
           <a:p>
             <a:pPr algn="ctr"/>
-            <a:r>
-              <a:rPr sz="1800" b="1">
-                <a:solidFill>
-                  <a:srgbClr val="FFFFFF"/>
-                </a:solidFill>
-                <a:latin typeface="Calibri"/>
-              </a:rPr>
-              <a:t>3</a:t>
-            </a:r>
-          </a:p>
-        </p:txBody>
-      </p:sp>
-      <p:sp>
-        <p:nvSpPr>
-          <p:cNvPr id="13" name="TextBox 12"/>
+          </a:p>
+        </p:txBody>
+      </p:sp>
+      <p:sp>
+        <p:nvSpPr>
+          <p:cNvPr id="10" name="TextBox 9"/>
           <p:cNvSpPr txBox="1"/>
           <p:nvPr/>
         </p:nvSpPr>
         <p:spPr>
           <a:xfrm>
-            <a:off x="4956048" y="2240280"/>
-            <a:ext cx="2249424" cy="365760"/>
+            <a:off x="868680" y="2093976"/>
+            <a:ext cx="4937760" cy="292608"/>
           </a:xfrm>
           <a:prstGeom prst="rect">
             <a:avLst/>
@@ -5860,65 +5399,29 @@
           </a:bodyPr>
           <a:lstStyle/>
           <a:p>
-            <a:pPr algn="ctr"/>
-            <a:r>
-              <a:rPr sz="1450" b="1" i="0">
-                <a:solidFill>
-                  <a:srgbClr val="1B2A4A"/>
-                </a:solidFill>
-                <a:latin typeface="Calibri"/>
-              </a:rPr>
-              <a:t>3. NMF safety net</a:t>
-            </a:r>
-          </a:p>
-        </p:txBody>
-      </p:sp>
-      <p:sp>
-        <p:nvSpPr>
-          <p:cNvPr id="14" name="TextBox 13"/>
-          <p:cNvSpPr txBox="1"/>
-          <p:nvPr/>
-        </p:nvSpPr>
-        <p:spPr>
-          <a:xfrm>
-            <a:off x="4956048" y="2633472"/>
-            <a:ext cx="2249424" cy="1371600"/>
-          </a:xfrm>
-          <a:prstGeom prst="rect">
-            <a:avLst/>
-          </a:prstGeom>
-          <a:noFill/>
-        </p:spPr>
-        <p:txBody>
-          <a:bodyPr wrap="square">
-            <a:spAutoFit/>
-          </a:bodyPr>
-          <a:lstStyle/>
-          <a:p>
-            <a:pPr algn="ctr"/>
-            <a:r>
-              <a:rPr sz="1200" b="0" i="0">
-                <a:solidFill>
-                  <a:srgbClr val="5A6B7D"/>
-                </a:solidFill>
-                <a:latin typeface="Calibri"/>
-              </a:rPr>
-              <a:t>TF-IDF + NMF topic modeling (YAKE-labeled) catches any edge-of-
-vocabulary residual - no response left unexplained.</a:t>
-            </a:r>
-          </a:p>
-        </p:txBody>
-      </p:sp>
-      <p:sp>
-        <p:nvSpPr>
-          <p:cNvPr id="15" name="Oval 14"/>
+            <a:pPr algn="l"/>
+            <a:r>
+              <a:rPr sz="1150" b="0" i="0">
+                <a:solidFill>
+                  <a:srgbClr val="202633"/>
+                </a:solidFill>
+                <a:latin typeface="Calibri"/>
+              </a:rPr>
+              <a:t>Labels every term's sentiment lean upfront</a:t>
+            </a:r>
+          </a:p>
+        </p:txBody>
+      </p:sp>
+      <p:sp>
+        <p:nvSpPr>
+          <p:cNvPr id="11" name="Oval 10"/>
           <p:cNvSpPr/>
           <p:nvPr/>
         </p:nvSpPr>
         <p:spPr>
           <a:xfrm>
-            <a:off x="8078724" y="1600200"/>
-            <a:ext cx="502920" cy="502920"/>
+            <a:off x="667512" y="2468880"/>
+            <a:ext cx="82296" cy="82296"/>
           </a:xfrm>
           <a:prstGeom prst="ellipse">
             <a:avLst/>
@@ -5950,28 +5453,19 @@
           <a:lstStyle/>
           <a:p>
             <a:pPr algn="ctr"/>
-            <a:r>
-              <a:rPr sz="1800" b="1">
-                <a:solidFill>
-                  <a:srgbClr val="FFFFFF"/>
-                </a:solidFill>
-                <a:latin typeface="Calibri"/>
-              </a:rPr>
-              <a:t>4</a:t>
-            </a:r>
-          </a:p>
-        </p:txBody>
-      </p:sp>
-      <p:sp>
-        <p:nvSpPr>
-          <p:cNvPr id="16" name="TextBox 15"/>
+          </a:p>
+        </p:txBody>
+      </p:sp>
+      <p:sp>
+        <p:nvSpPr>
+          <p:cNvPr id="12" name="TextBox 11"/>
           <p:cNvSpPr txBox="1"/>
           <p:nvPr/>
         </p:nvSpPr>
         <p:spPr>
           <a:xfrm>
-            <a:off x="7205472" y="2240280"/>
-            <a:ext cx="2249424" cy="365760"/>
+            <a:off x="868680" y="2404872"/>
+            <a:ext cx="4937760" cy="292608"/>
           </a:xfrm>
           <a:prstGeom prst="rect">
             <a:avLst/>
@@ -5984,64 +5478,29 @@
           </a:bodyPr>
           <a:lstStyle/>
           <a:p>
-            <a:pPr algn="ctr"/>
-            <a:r>
-              <a:rPr sz="1450" b="1" i="0">
-                <a:solidFill>
-                  <a:srgbClr val="1B2A4A"/>
-                </a:solidFill>
-                <a:latin typeface="Calibri"/>
-              </a:rPr>
-              <a:t>4. Score sentiment</a:t>
-            </a:r>
-          </a:p>
-        </p:txBody>
-      </p:sp>
-      <p:sp>
-        <p:nvSpPr>
-          <p:cNvPr id="17" name="TextBox 16"/>
-          <p:cNvSpPr txBox="1"/>
-          <p:nvPr/>
-        </p:nvSpPr>
-        <p:spPr>
-          <a:xfrm>
-            <a:off x="7205472" y="2633472"/>
-            <a:ext cx="2249424" cy="1371600"/>
-          </a:xfrm>
-          <a:prstGeom prst="rect">
-            <a:avLst/>
-          </a:prstGeom>
-          <a:noFill/>
-        </p:spPr>
-        <p:txBody>
-          <a:bodyPr wrap="square">
-            <a:spAutoFit/>
-          </a:bodyPr>
-          <a:lstStyle/>
-          <a:p>
-            <a:pPr algn="ctr"/>
-            <a:r>
-              <a:rPr sz="1200" b="0" i="0">
-                <a:solidFill>
-                  <a:srgbClr val="5A6B7D"/>
-                </a:solidFill>
-                <a:latin typeface="Calibri"/>
-              </a:rPr>
-              <a:t>VADER lexicon model scores tone - fully offline, no AI/LLM API dependency.</a:t>
-            </a:r>
-          </a:p>
-        </p:txBody>
-      </p:sp>
-      <p:sp>
-        <p:nvSpPr>
-          <p:cNvPr id="18" name="Oval 17"/>
+            <a:pPr algn="l"/>
+            <a:r>
+              <a:rPr sz="1150" b="0" i="0">
+                <a:solidFill>
+                  <a:srgbClr val="202633"/>
+                </a:solidFill>
+                <a:latin typeface="Calibri"/>
+              </a:rPr>
+              <a:t>Produces an inspectable shortlist, not a guess</a:t>
+            </a:r>
+          </a:p>
+        </p:txBody>
+      </p:sp>
+      <p:sp>
+        <p:nvSpPr>
+          <p:cNvPr id="13" name="Oval 12"/>
           <p:cNvSpPr/>
           <p:nvPr/>
         </p:nvSpPr>
         <p:spPr>
           <a:xfrm>
-            <a:off x="10328148" y="1600200"/>
-            <a:ext cx="502920" cy="502920"/>
+            <a:off x="667512" y="2779776"/>
+            <a:ext cx="82296" cy="82296"/>
           </a:xfrm>
           <a:prstGeom prst="ellipse">
             <a:avLst/>
@@ -6073,28 +5532,19 @@
           <a:lstStyle/>
           <a:p>
             <a:pPr algn="ctr"/>
-            <a:r>
-              <a:rPr sz="1800" b="1">
-                <a:solidFill>
-                  <a:srgbClr val="FFFFFF"/>
-                </a:solidFill>
-                <a:latin typeface="Calibri"/>
-              </a:rPr>
-              <a:t>5</a:t>
-            </a:r>
-          </a:p>
-        </p:txBody>
-      </p:sp>
-      <p:sp>
-        <p:nvSpPr>
-          <p:cNvPr id="19" name="TextBox 18"/>
+          </a:p>
+        </p:txBody>
+      </p:sp>
+      <p:sp>
+        <p:nvSpPr>
+          <p:cNvPr id="14" name="TextBox 13"/>
           <p:cNvSpPr txBox="1"/>
           <p:nvPr/>
         </p:nvSpPr>
         <p:spPr>
           <a:xfrm>
-            <a:off x="9454896" y="2240280"/>
-            <a:ext cx="2249424" cy="365760"/>
+            <a:off x="868680" y="2715768"/>
+            <a:ext cx="4937760" cy="292608"/>
           </a:xfrm>
           <a:prstGeom prst="rect">
             <a:avLst/>
@@ -6107,29 +5557,82 @@
           </a:bodyPr>
           <a:lstStyle/>
           <a:p>
+            <a:pPr algn="l"/>
+            <a:r>
+              <a:rPr sz="1150" b="0" i="0">
+                <a:solidFill>
+                  <a:srgbClr val="202633"/>
+                </a:solidFill>
+                <a:latin typeface="Calibri"/>
+              </a:rPr>
+              <a:t>Minutes of compute, not days of manual reading</a:t>
+            </a:r>
+          </a:p>
+        </p:txBody>
+      </p:sp>
+      <p:sp>
+        <p:nvSpPr>
+          <p:cNvPr id="15" name="Oval 14"/>
+          <p:cNvSpPr/>
+          <p:nvPr/>
+        </p:nvSpPr>
+        <p:spPr>
+          <a:xfrm>
+            <a:off x="594360" y="3026664"/>
+            <a:ext cx="292608" cy="292608"/>
+          </a:xfrm>
+          <a:prstGeom prst="ellipse">
+            <a:avLst/>
+          </a:prstGeom>
+          <a:solidFill>
+            <a:srgbClr val="2EC4B6"/>
+          </a:solidFill>
+          <a:ln>
+            <a:noFill/>
+          </a:ln>
+          <a:effectLst/>
+        </p:spPr>
+        <p:style>
+          <a:lnRef idx="1">
+            <a:schemeClr val="accent1"/>
+          </a:lnRef>
+          <a:fillRef idx="3">
+            <a:schemeClr val="accent1"/>
+          </a:fillRef>
+          <a:effectRef idx="2">
+            <a:schemeClr val="accent1"/>
+          </a:effectRef>
+          <a:fontRef idx="minor">
+            <a:schemeClr val="lt1"/>
+          </a:fontRef>
+        </p:style>
+        <p:txBody>
+          <a:bodyPr rtlCol="0" anchor="ctr"/>
+          <a:lstStyle/>
+          <a:p>
             <a:pPr algn="ctr"/>
             <a:r>
-              <a:rPr sz="1450" b="1" i="0">
-                <a:solidFill>
-                  <a:srgbClr val="1B2A4A"/>
-                </a:solidFill>
-                <a:latin typeface="Calibri"/>
-              </a:rPr>
-              <a:t>5. Publish</a:t>
-            </a:r>
-          </a:p>
-        </p:txBody>
-      </p:sp>
-      <p:sp>
-        <p:nvSpPr>
-          <p:cNvPr id="20" name="TextBox 19"/>
+              <a:rPr sz="1400" b="1">
+                <a:solidFill>
+                  <a:srgbClr val="FFFFFF"/>
+                </a:solidFill>
+                <a:latin typeface="Calibri"/>
+              </a:rPr>
+              <a:t>2</a:t>
+            </a:r>
+          </a:p>
+        </p:txBody>
+      </p:sp>
+      <p:sp>
+        <p:nvSpPr>
+          <p:cNvPr id="16" name="TextBox 15"/>
           <p:cNvSpPr txBox="1"/>
           <p:nvPr/>
         </p:nvSpPr>
         <p:spPr>
           <a:xfrm>
-            <a:off x="9454896" y="2633472"/>
-            <a:ext cx="2249424" cy="1371600"/>
+            <a:off x="978408" y="3008376"/>
+            <a:ext cx="4828032" cy="292608"/>
           </a:xfrm>
           <a:prstGeom prst="rect">
             <a:avLst/>
@@ -6142,29 +5645,73 @@
           </a:bodyPr>
           <a:lstStyle/>
           <a:p>
+            <a:pPr algn="l"/>
+            <a:r>
+              <a:rPr sz="1450" b="1" i="0">
+                <a:solidFill>
+                  <a:srgbClr val="1B2A4A"/>
+                </a:solidFill>
+                <a:latin typeface="Calibri"/>
+              </a:rPr>
+              <a:t>Tag drivers</a:t>
+            </a:r>
+          </a:p>
+        </p:txBody>
+      </p:sp>
+      <p:sp>
+        <p:nvSpPr>
+          <p:cNvPr id="17" name="Oval 16"/>
+          <p:cNvSpPr/>
+          <p:nvPr/>
+        </p:nvSpPr>
+        <p:spPr>
+          <a:xfrm>
+            <a:off x="667512" y="3456432"/>
+            <a:ext cx="82296" cy="82296"/>
+          </a:xfrm>
+          <a:prstGeom prst="ellipse">
+            <a:avLst/>
+          </a:prstGeom>
+          <a:solidFill>
+            <a:srgbClr val="2EC4B6"/>
+          </a:solidFill>
+          <a:ln>
+            <a:noFill/>
+          </a:ln>
+          <a:effectLst/>
+        </p:spPr>
+        <p:style>
+          <a:lnRef idx="1">
+            <a:schemeClr val="accent1"/>
+          </a:lnRef>
+          <a:fillRef idx="3">
+            <a:schemeClr val="accent1"/>
+          </a:fillRef>
+          <a:effectRef idx="2">
+            <a:schemeClr val="accent1"/>
+          </a:effectRef>
+          <a:fontRef idx="minor">
+            <a:schemeClr val="lt1"/>
+          </a:fontRef>
+        </p:style>
+        <p:txBody>
+          <a:bodyPr rtlCol="0" anchor="ctr"/>
+          <a:lstStyle/>
+          <a:p>
             <a:pPr algn="ctr"/>
-            <a:r>
-              <a:rPr sz="1200" b="0" i="0">
-                <a:solidFill>
-                  <a:srgbClr val="5A6B7D"/>
-                </a:solidFill>
-                <a:latin typeface="Calibri"/>
-              </a:rPr>
-              <a:t>One Excel workbook (tagged data + every chart) plus a Power BI report for the business narrative.</a:t>
-            </a:r>
-          </a:p>
-        </p:txBody>
-      </p:sp>
-      <p:sp>
-        <p:nvSpPr>
-          <p:cNvPr id="21" name="TextBox 20"/>
+          </a:p>
+        </p:txBody>
+      </p:sp>
+      <p:sp>
+        <p:nvSpPr>
+          <p:cNvPr id="18" name="TextBox 17"/>
           <p:cNvSpPr txBox="1"/>
           <p:nvPr/>
         </p:nvSpPr>
         <p:spPr>
           <a:xfrm>
-            <a:off x="594360" y="6473952"/>
-            <a:ext cx="9144000" cy="320040"/>
+            <a:off x="868680" y="3392424"/>
+            <a:ext cx="4937760" cy="292608"/>
           </a:xfrm>
           <a:prstGeom prst="rect">
             <a:avLst/>
@@ -6179,6 +5726,1490 @@
           <a:p>
             <a:pPr algn="l"/>
             <a:r>
+              <a:rPr sz="1150" b="0" i="0">
+                <a:solidFill>
+                  <a:srgbClr val="202633"/>
+                </a:solidFill>
+                <a:latin typeface="Calibri"/>
+              </a:rPr>
+              <a:t>Matches against 11 categories, 42 sub-issues</a:t>
+            </a:r>
+          </a:p>
+        </p:txBody>
+      </p:sp>
+      <p:sp>
+        <p:nvSpPr>
+          <p:cNvPr id="19" name="Oval 18"/>
+          <p:cNvSpPr/>
+          <p:nvPr/>
+        </p:nvSpPr>
+        <p:spPr>
+          <a:xfrm>
+            <a:off x="667512" y="3767328"/>
+            <a:ext cx="82296" cy="82296"/>
+          </a:xfrm>
+          <a:prstGeom prst="ellipse">
+            <a:avLst/>
+          </a:prstGeom>
+          <a:solidFill>
+            <a:srgbClr val="2EC4B6"/>
+          </a:solidFill>
+          <a:ln>
+            <a:noFill/>
+          </a:ln>
+          <a:effectLst/>
+        </p:spPr>
+        <p:style>
+          <a:lnRef idx="1">
+            <a:schemeClr val="accent1"/>
+          </a:lnRef>
+          <a:fillRef idx="3">
+            <a:schemeClr val="accent1"/>
+          </a:fillRef>
+          <a:effectRef idx="2">
+            <a:schemeClr val="accent1"/>
+          </a:effectRef>
+          <a:fontRef idx="minor">
+            <a:schemeClr val="lt1"/>
+          </a:fontRef>
+        </p:style>
+        <p:txBody>
+          <a:bodyPr rtlCol="0" anchor="ctr"/>
+          <a:lstStyle/>
+          <a:p>
+            <a:pPr algn="ctr"/>
+          </a:p>
+        </p:txBody>
+      </p:sp>
+      <p:sp>
+        <p:nvSpPr>
+          <p:cNvPr id="20" name="TextBox 19"/>
+          <p:cNvSpPr txBox="1"/>
+          <p:nvPr/>
+        </p:nvSpPr>
+        <p:spPr>
+          <a:xfrm>
+            <a:off x="868680" y="3703320"/>
+            <a:ext cx="4937760" cy="292608"/>
+          </a:xfrm>
+          <a:prstGeom prst="rect">
+            <a:avLst/>
+          </a:prstGeom>
+          <a:noFill/>
+        </p:spPr>
+        <p:txBody>
+          <a:bodyPr wrap="square">
+            <a:spAutoFit/>
+          </a:bodyPr>
+          <a:lstStyle/>
+          <a:p>
+            <a:pPr algn="l"/>
+            <a:r>
+              <a:rPr sz="1150" b="0" i="0">
+                <a:solidFill>
+                  <a:srgbClr val="202633"/>
+                </a:solidFill>
+                <a:latin typeface="Calibri"/>
+              </a:rPr>
+              <a:t>Ranks matches by phrase-match strength</a:t>
+            </a:r>
+          </a:p>
+        </p:txBody>
+      </p:sp>
+      <p:sp>
+        <p:nvSpPr>
+          <p:cNvPr id="21" name="Oval 20"/>
+          <p:cNvSpPr/>
+          <p:nvPr/>
+        </p:nvSpPr>
+        <p:spPr>
+          <a:xfrm>
+            <a:off x="667512" y="4078224"/>
+            <a:ext cx="82296" cy="82296"/>
+          </a:xfrm>
+          <a:prstGeom prst="ellipse">
+            <a:avLst/>
+          </a:prstGeom>
+          <a:solidFill>
+            <a:srgbClr val="2EC4B6"/>
+          </a:solidFill>
+          <a:ln>
+            <a:noFill/>
+          </a:ln>
+          <a:effectLst/>
+        </p:spPr>
+        <p:style>
+          <a:lnRef idx="1">
+            <a:schemeClr val="accent1"/>
+          </a:lnRef>
+          <a:fillRef idx="3">
+            <a:schemeClr val="accent1"/>
+          </a:fillRef>
+          <a:effectRef idx="2">
+            <a:schemeClr val="accent1"/>
+          </a:effectRef>
+          <a:fontRef idx="minor">
+            <a:schemeClr val="lt1"/>
+          </a:fontRef>
+        </p:style>
+        <p:txBody>
+          <a:bodyPr rtlCol="0" anchor="ctr"/>
+          <a:lstStyle/>
+          <a:p>
+            <a:pPr algn="ctr"/>
+          </a:p>
+        </p:txBody>
+      </p:sp>
+      <p:sp>
+        <p:nvSpPr>
+          <p:cNvPr id="22" name="TextBox 21"/>
+          <p:cNvSpPr txBox="1"/>
+          <p:nvPr/>
+        </p:nvSpPr>
+        <p:spPr>
+          <a:xfrm>
+            <a:off x="868680" y="4014216"/>
+            <a:ext cx="4937760" cy="292608"/>
+          </a:xfrm>
+          <a:prstGeom prst="rect">
+            <a:avLst/>
+          </a:prstGeom>
+          <a:noFill/>
+        </p:spPr>
+        <p:txBody>
+          <a:bodyPr wrap="square">
+            <a:spAutoFit/>
+          </a:bodyPr>
+          <a:lstStyle/>
+          <a:p>
+            <a:pPr algn="l"/>
+            <a:r>
+              <a:rPr sz="1150" b="0" i="0">
+                <a:solidFill>
+                  <a:srgbClr val="202633"/>
+                </a:solidFill>
+                <a:latin typeface="Calibri"/>
+              </a:rPr>
+              <a:t>Strongest match's category = PRIMARY driver</a:t>
+            </a:r>
+          </a:p>
+        </p:txBody>
+      </p:sp>
+      <p:sp>
+        <p:nvSpPr>
+          <p:cNvPr id="23" name="Oval 22"/>
+          <p:cNvSpPr/>
+          <p:nvPr/>
+        </p:nvSpPr>
+        <p:spPr>
+          <a:xfrm>
+            <a:off x="667512" y="4389120"/>
+            <a:ext cx="82296" cy="82296"/>
+          </a:xfrm>
+          <a:prstGeom prst="ellipse">
+            <a:avLst/>
+          </a:prstGeom>
+          <a:solidFill>
+            <a:srgbClr val="2EC4B6"/>
+          </a:solidFill>
+          <a:ln>
+            <a:noFill/>
+          </a:ln>
+          <a:effectLst/>
+        </p:spPr>
+        <p:style>
+          <a:lnRef idx="1">
+            <a:schemeClr val="accent1"/>
+          </a:lnRef>
+          <a:fillRef idx="3">
+            <a:schemeClr val="accent1"/>
+          </a:fillRef>
+          <a:effectRef idx="2">
+            <a:schemeClr val="accent1"/>
+          </a:effectRef>
+          <a:fontRef idx="minor">
+            <a:schemeClr val="lt1"/>
+          </a:fontRef>
+        </p:style>
+        <p:txBody>
+          <a:bodyPr rtlCol="0" anchor="ctr"/>
+          <a:lstStyle/>
+          <a:p>
+            <a:pPr algn="ctr"/>
+          </a:p>
+        </p:txBody>
+      </p:sp>
+      <p:sp>
+        <p:nvSpPr>
+          <p:cNvPr id="24" name="TextBox 23"/>
+          <p:cNvSpPr txBox="1"/>
+          <p:nvPr/>
+        </p:nvSpPr>
+        <p:spPr>
+          <a:xfrm>
+            <a:off x="868680" y="4325112"/>
+            <a:ext cx="4937760" cy="292608"/>
+          </a:xfrm>
+          <a:prstGeom prst="rect">
+            <a:avLst/>
+          </a:prstGeom>
+          <a:noFill/>
+        </p:spPr>
+        <p:txBody>
+          <a:bodyPr wrap="square">
+            <a:spAutoFit/>
+          </a:bodyPr>
+          <a:lstStyle/>
+          <a:p>
+            <a:pPr algn="l"/>
+            <a:r>
+              <a:rPr sz="1150" b="0" i="0">
+                <a:solidFill>
+                  <a:srgbClr val="202633"/>
+                </a:solidFill>
+                <a:latin typeface="Calibri"/>
+              </a:rPr>
+              <a:t>The sub-issue itself = actionable SECONDARY</a:t>
+            </a:r>
+          </a:p>
+        </p:txBody>
+      </p:sp>
+      <p:sp>
+        <p:nvSpPr>
+          <p:cNvPr id="25" name="Oval 24"/>
+          <p:cNvSpPr/>
+          <p:nvPr/>
+        </p:nvSpPr>
+        <p:spPr>
+          <a:xfrm>
+            <a:off x="594360" y="4636008"/>
+            <a:ext cx="292608" cy="292608"/>
+          </a:xfrm>
+          <a:prstGeom prst="ellipse">
+            <a:avLst/>
+          </a:prstGeom>
+          <a:solidFill>
+            <a:srgbClr val="2EC4B6"/>
+          </a:solidFill>
+          <a:ln>
+            <a:noFill/>
+          </a:ln>
+          <a:effectLst/>
+        </p:spPr>
+        <p:style>
+          <a:lnRef idx="1">
+            <a:schemeClr val="accent1"/>
+          </a:lnRef>
+          <a:fillRef idx="3">
+            <a:schemeClr val="accent1"/>
+          </a:fillRef>
+          <a:effectRef idx="2">
+            <a:schemeClr val="accent1"/>
+          </a:effectRef>
+          <a:fontRef idx="minor">
+            <a:schemeClr val="lt1"/>
+          </a:fontRef>
+        </p:style>
+        <p:txBody>
+          <a:bodyPr rtlCol="0" anchor="ctr"/>
+          <a:lstStyle/>
+          <a:p>
+            <a:pPr algn="ctr"/>
+            <a:r>
+              <a:rPr sz="1400" b="1">
+                <a:solidFill>
+                  <a:srgbClr val="FFFFFF"/>
+                </a:solidFill>
+                <a:latin typeface="Calibri"/>
+              </a:rPr>
+              <a:t>3</a:t>
+            </a:r>
+          </a:p>
+        </p:txBody>
+      </p:sp>
+      <p:sp>
+        <p:nvSpPr>
+          <p:cNvPr id="26" name="TextBox 25"/>
+          <p:cNvSpPr txBox="1"/>
+          <p:nvPr/>
+        </p:nvSpPr>
+        <p:spPr>
+          <a:xfrm>
+            <a:off x="978408" y="4617720"/>
+            <a:ext cx="4828032" cy="292608"/>
+          </a:xfrm>
+          <a:prstGeom prst="rect">
+            <a:avLst/>
+          </a:prstGeom>
+          <a:noFill/>
+        </p:spPr>
+        <p:txBody>
+          <a:bodyPr wrap="square">
+            <a:spAutoFit/>
+          </a:bodyPr>
+          <a:lstStyle/>
+          <a:p>
+            <a:pPr algn="l"/>
+            <a:r>
+              <a:rPr sz="1450" b="1" i="0">
+                <a:solidFill>
+                  <a:srgbClr val="1B2A4A"/>
+                </a:solidFill>
+                <a:latin typeface="Calibri"/>
+              </a:rPr>
+              <a:t>NMF safety net</a:t>
+            </a:r>
+          </a:p>
+        </p:txBody>
+      </p:sp>
+      <p:sp>
+        <p:nvSpPr>
+          <p:cNvPr id="27" name="Oval 26"/>
+          <p:cNvSpPr/>
+          <p:nvPr/>
+        </p:nvSpPr>
+        <p:spPr>
+          <a:xfrm>
+            <a:off x="667512" y="5065776"/>
+            <a:ext cx="82296" cy="82296"/>
+          </a:xfrm>
+          <a:prstGeom prst="ellipse">
+            <a:avLst/>
+          </a:prstGeom>
+          <a:solidFill>
+            <a:srgbClr val="2EC4B6"/>
+          </a:solidFill>
+          <a:ln>
+            <a:noFill/>
+          </a:ln>
+          <a:effectLst/>
+        </p:spPr>
+        <p:style>
+          <a:lnRef idx="1">
+            <a:schemeClr val="accent1"/>
+          </a:lnRef>
+          <a:fillRef idx="3">
+            <a:schemeClr val="accent1"/>
+          </a:fillRef>
+          <a:effectRef idx="2">
+            <a:schemeClr val="accent1"/>
+          </a:effectRef>
+          <a:fontRef idx="minor">
+            <a:schemeClr val="lt1"/>
+          </a:fontRef>
+        </p:style>
+        <p:txBody>
+          <a:bodyPr rtlCol="0" anchor="ctr"/>
+          <a:lstStyle/>
+          <a:p>
+            <a:pPr algn="ctr"/>
+          </a:p>
+        </p:txBody>
+      </p:sp>
+      <p:sp>
+        <p:nvSpPr>
+          <p:cNvPr id="28" name="TextBox 27"/>
+          <p:cNvSpPr txBox="1"/>
+          <p:nvPr/>
+        </p:nvSpPr>
+        <p:spPr>
+          <a:xfrm>
+            <a:off x="868680" y="5001768"/>
+            <a:ext cx="4937760" cy="292608"/>
+          </a:xfrm>
+          <a:prstGeom prst="rect">
+            <a:avLst/>
+          </a:prstGeom>
+          <a:noFill/>
+        </p:spPr>
+        <p:txBody>
+          <a:bodyPr wrap="square">
+            <a:spAutoFit/>
+          </a:bodyPr>
+          <a:lstStyle/>
+          <a:p>
+            <a:pPr algn="l"/>
+            <a:r>
+              <a:rPr sz="1150" b="0" i="0">
+                <a:solidFill>
+                  <a:srgbClr val="202633"/>
+                </a:solidFill>
+                <a:latin typeface="Calibri"/>
+              </a:rPr>
+              <a:t>TF-IDF + NMF finds latent themes in leftovers</a:t>
+            </a:r>
+          </a:p>
+        </p:txBody>
+      </p:sp>
+      <p:sp>
+        <p:nvSpPr>
+          <p:cNvPr id="29" name="Oval 28"/>
+          <p:cNvSpPr/>
+          <p:nvPr/>
+        </p:nvSpPr>
+        <p:spPr>
+          <a:xfrm>
+            <a:off x="667512" y="5376672"/>
+            <a:ext cx="82296" cy="82296"/>
+          </a:xfrm>
+          <a:prstGeom prst="ellipse">
+            <a:avLst/>
+          </a:prstGeom>
+          <a:solidFill>
+            <a:srgbClr val="2EC4B6"/>
+          </a:solidFill>
+          <a:ln>
+            <a:noFill/>
+          </a:ln>
+          <a:effectLst/>
+        </p:spPr>
+        <p:style>
+          <a:lnRef idx="1">
+            <a:schemeClr val="accent1"/>
+          </a:lnRef>
+          <a:fillRef idx="3">
+            <a:schemeClr val="accent1"/>
+          </a:fillRef>
+          <a:effectRef idx="2">
+            <a:schemeClr val="accent1"/>
+          </a:effectRef>
+          <a:fontRef idx="minor">
+            <a:schemeClr val="lt1"/>
+          </a:fontRef>
+        </p:style>
+        <p:txBody>
+          <a:bodyPr rtlCol="0" anchor="ctr"/>
+          <a:lstStyle/>
+          <a:p>
+            <a:pPr algn="ctr"/>
+          </a:p>
+        </p:txBody>
+      </p:sp>
+      <p:sp>
+        <p:nvSpPr>
+          <p:cNvPr id="30" name="TextBox 29"/>
+          <p:cNvSpPr txBox="1"/>
+          <p:nvPr/>
+        </p:nvSpPr>
+        <p:spPr>
+          <a:xfrm>
+            <a:off x="868680" y="5312664"/>
+            <a:ext cx="4937760" cy="292608"/>
+          </a:xfrm>
+          <a:prstGeom prst="rect">
+            <a:avLst/>
+          </a:prstGeom>
+          <a:noFill/>
+        </p:spPr>
+        <p:txBody>
+          <a:bodyPr wrap="square">
+            <a:spAutoFit/>
+          </a:bodyPr>
+          <a:lstStyle/>
+          <a:p>
+            <a:pPr algn="l"/>
+            <a:r>
+              <a:rPr sz="1150" b="0" i="0">
+                <a:solidFill>
+                  <a:srgbClr val="202633"/>
+                </a:solidFill>
+                <a:latin typeface="Calibri"/>
+              </a:rPr>
+              <a:t>YAKE auto-labels each theme, fully offline</a:t>
+            </a:r>
+          </a:p>
+        </p:txBody>
+      </p:sp>
+      <p:sp>
+        <p:nvSpPr>
+          <p:cNvPr id="31" name="Oval 30"/>
+          <p:cNvSpPr/>
+          <p:nvPr/>
+        </p:nvSpPr>
+        <p:spPr>
+          <a:xfrm>
+            <a:off x="667512" y="5687568"/>
+            <a:ext cx="82296" cy="82296"/>
+          </a:xfrm>
+          <a:prstGeom prst="ellipse">
+            <a:avLst/>
+          </a:prstGeom>
+          <a:solidFill>
+            <a:srgbClr val="2EC4B6"/>
+          </a:solidFill>
+          <a:ln>
+            <a:noFill/>
+          </a:ln>
+          <a:effectLst/>
+        </p:spPr>
+        <p:style>
+          <a:lnRef idx="1">
+            <a:schemeClr val="accent1"/>
+          </a:lnRef>
+          <a:fillRef idx="3">
+            <a:schemeClr val="accent1"/>
+          </a:fillRef>
+          <a:effectRef idx="2">
+            <a:schemeClr val="accent1"/>
+          </a:effectRef>
+          <a:fontRef idx="minor">
+            <a:schemeClr val="lt1"/>
+          </a:fontRef>
+        </p:style>
+        <p:txBody>
+          <a:bodyPr rtlCol="0" anchor="ctr"/>
+          <a:lstStyle/>
+          <a:p>
+            <a:pPr algn="ctr"/>
+          </a:p>
+        </p:txBody>
+      </p:sp>
+      <p:sp>
+        <p:nvSpPr>
+          <p:cNvPr id="32" name="TextBox 31"/>
+          <p:cNvSpPr txBox="1"/>
+          <p:nvPr/>
+        </p:nvSpPr>
+        <p:spPr>
+          <a:xfrm>
+            <a:off x="868680" y="5623560"/>
+            <a:ext cx="4937760" cy="292608"/>
+          </a:xfrm>
+          <a:prstGeom prst="rect">
+            <a:avLst/>
+          </a:prstGeom>
+          <a:noFill/>
+        </p:spPr>
+        <p:txBody>
+          <a:bodyPr wrap="square">
+            <a:spAutoFit/>
+          </a:bodyPr>
+          <a:lstStyle/>
+          <a:p>
+            <a:pPr algn="l"/>
+            <a:r>
+              <a:rPr sz="1150" b="0" i="0">
+                <a:solidFill>
+                  <a:srgbClr val="202633"/>
+                </a:solidFill>
+                <a:latin typeface="Calibri"/>
+              </a:rPr>
+              <a:t>Catches edge-of-vocabulary phrasing</a:t>
+            </a:r>
+          </a:p>
+        </p:txBody>
+      </p:sp>
+      <p:sp>
+        <p:nvSpPr>
+          <p:cNvPr id="33" name="Oval 32"/>
+          <p:cNvSpPr/>
+          <p:nvPr/>
+        </p:nvSpPr>
+        <p:spPr>
+          <a:xfrm>
+            <a:off x="667512" y="5998464"/>
+            <a:ext cx="82296" cy="82296"/>
+          </a:xfrm>
+          <a:prstGeom prst="ellipse">
+            <a:avLst/>
+          </a:prstGeom>
+          <a:solidFill>
+            <a:srgbClr val="2EC4B6"/>
+          </a:solidFill>
+          <a:ln>
+            <a:noFill/>
+          </a:ln>
+          <a:effectLst/>
+        </p:spPr>
+        <p:style>
+          <a:lnRef idx="1">
+            <a:schemeClr val="accent1"/>
+          </a:lnRef>
+          <a:fillRef idx="3">
+            <a:schemeClr val="accent1"/>
+          </a:fillRef>
+          <a:effectRef idx="2">
+            <a:schemeClr val="accent1"/>
+          </a:effectRef>
+          <a:fontRef idx="minor">
+            <a:schemeClr val="lt1"/>
+          </a:fontRef>
+        </p:style>
+        <p:txBody>
+          <a:bodyPr rtlCol="0" anchor="ctr"/>
+          <a:lstStyle/>
+          <a:p>
+            <a:pPr algn="ctr"/>
+          </a:p>
+        </p:txBody>
+      </p:sp>
+      <p:sp>
+        <p:nvSpPr>
+          <p:cNvPr id="34" name="TextBox 33"/>
+          <p:cNvSpPr txBox="1"/>
+          <p:nvPr/>
+        </p:nvSpPr>
+        <p:spPr>
+          <a:xfrm>
+            <a:off x="868680" y="5934456"/>
+            <a:ext cx="4937760" cy="292608"/>
+          </a:xfrm>
+          <a:prstGeom prst="rect">
+            <a:avLst/>
+          </a:prstGeom>
+          <a:noFill/>
+        </p:spPr>
+        <p:txBody>
+          <a:bodyPr wrap="square">
+            <a:spAutoFit/>
+          </a:bodyPr>
+          <a:lstStyle/>
+          <a:p>
+            <a:pPr algn="l"/>
+            <a:r>
+              <a:rPr sz="1150" b="0" i="0">
+                <a:solidFill>
+                  <a:srgbClr val="202633"/>
+                </a:solidFill>
+                <a:latin typeface="Calibri"/>
+              </a:rPr>
+              <a:t>No response ends with a blank secondary driver</a:t>
+            </a:r>
+          </a:p>
+        </p:txBody>
+      </p:sp>
+      <p:sp>
+        <p:nvSpPr>
+          <p:cNvPr id="35" name="Oval 34"/>
+          <p:cNvSpPr/>
+          <p:nvPr/>
+        </p:nvSpPr>
+        <p:spPr>
+          <a:xfrm>
+            <a:off x="6172200" y="2221992"/>
+            <a:ext cx="292608" cy="292608"/>
+          </a:xfrm>
+          <a:prstGeom prst="ellipse">
+            <a:avLst/>
+          </a:prstGeom>
+          <a:solidFill>
+            <a:srgbClr val="2EC4B6"/>
+          </a:solidFill>
+          <a:ln>
+            <a:noFill/>
+          </a:ln>
+          <a:effectLst/>
+        </p:spPr>
+        <p:style>
+          <a:lnRef idx="1">
+            <a:schemeClr val="accent1"/>
+          </a:lnRef>
+          <a:fillRef idx="3">
+            <a:schemeClr val="accent1"/>
+          </a:fillRef>
+          <a:effectRef idx="2">
+            <a:schemeClr val="accent1"/>
+          </a:effectRef>
+          <a:fontRef idx="minor">
+            <a:schemeClr val="lt1"/>
+          </a:fontRef>
+        </p:style>
+        <p:txBody>
+          <a:bodyPr rtlCol="0" anchor="ctr"/>
+          <a:lstStyle/>
+          <a:p>
+            <a:pPr algn="ctr"/>
+            <a:r>
+              <a:rPr sz="1400" b="1">
+                <a:solidFill>
+                  <a:srgbClr val="FFFFFF"/>
+                </a:solidFill>
+                <a:latin typeface="Calibri"/>
+              </a:rPr>
+              <a:t>4</a:t>
+            </a:r>
+          </a:p>
+        </p:txBody>
+      </p:sp>
+      <p:sp>
+        <p:nvSpPr>
+          <p:cNvPr id="36" name="TextBox 35"/>
+          <p:cNvSpPr txBox="1"/>
+          <p:nvPr/>
+        </p:nvSpPr>
+        <p:spPr>
+          <a:xfrm>
+            <a:off x="6556248" y="2203704"/>
+            <a:ext cx="4828032" cy="292608"/>
+          </a:xfrm>
+          <a:prstGeom prst="rect">
+            <a:avLst/>
+          </a:prstGeom>
+          <a:noFill/>
+        </p:spPr>
+        <p:txBody>
+          <a:bodyPr wrap="square">
+            <a:spAutoFit/>
+          </a:bodyPr>
+          <a:lstStyle/>
+          <a:p>
+            <a:pPr algn="l"/>
+            <a:r>
+              <a:rPr sz="1450" b="1" i="0">
+                <a:solidFill>
+                  <a:srgbClr val="1B2A4A"/>
+                </a:solidFill>
+                <a:latin typeface="Calibri"/>
+              </a:rPr>
+              <a:t>Score sentiment</a:t>
+            </a:r>
+          </a:p>
+        </p:txBody>
+      </p:sp>
+      <p:sp>
+        <p:nvSpPr>
+          <p:cNvPr id="37" name="Oval 36"/>
+          <p:cNvSpPr/>
+          <p:nvPr/>
+        </p:nvSpPr>
+        <p:spPr>
+          <a:xfrm>
+            <a:off x="6245352" y="2651760"/>
+            <a:ext cx="82296" cy="82296"/>
+          </a:xfrm>
+          <a:prstGeom prst="ellipse">
+            <a:avLst/>
+          </a:prstGeom>
+          <a:solidFill>
+            <a:srgbClr val="2EC4B6"/>
+          </a:solidFill>
+          <a:ln>
+            <a:noFill/>
+          </a:ln>
+          <a:effectLst/>
+        </p:spPr>
+        <p:style>
+          <a:lnRef idx="1">
+            <a:schemeClr val="accent1"/>
+          </a:lnRef>
+          <a:fillRef idx="3">
+            <a:schemeClr val="accent1"/>
+          </a:fillRef>
+          <a:effectRef idx="2">
+            <a:schemeClr val="accent1"/>
+          </a:effectRef>
+          <a:fontRef idx="minor">
+            <a:schemeClr val="lt1"/>
+          </a:fontRef>
+        </p:style>
+        <p:txBody>
+          <a:bodyPr rtlCol="0" anchor="ctr"/>
+          <a:lstStyle/>
+          <a:p>
+            <a:pPr algn="ctr"/>
+          </a:p>
+        </p:txBody>
+      </p:sp>
+      <p:sp>
+        <p:nvSpPr>
+          <p:cNvPr id="38" name="TextBox 37"/>
+          <p:cNvSpPr txBox="1"/>
+          <p:nvPr/>
+        </p:nvSpPr>
+        <p:spPr>
+          <a:xfrm>
+            <a:off x="6446520" y="2587752"/>
+            <a:ext cx="4937760" cy="292608"/>
+          </a:xfrm>
+          <a:prstGeom prst="rect">
+            <a:avLst/>
+          </a:prstGeom>
+          <a:noFill/>
+        </p:spPr>
+        <p:txBody>
+          <a:bodyPr wrap="square">
+            <a:spAutoFit/>
+          </a:bodyPr>
+          <a:lstStyle/>
+          <a:p>
+            <a:pPr algn="l"/>
+            <a:r>
+              <a:rPr sz="1150" b="0" i="0">
+                <a:solidFill>
+                  <a:srgbClr val="202633"/>
+                </a:solidFill>
+                <a:latin typeface="Calibri"/>
+              </a:rPr>
+              <a:t>VADER lexicon model scores tone of every row</a:t>
+            </a:r>
+          </a:p>
+        </p:txBody>
+      </p:sp>
+      <p:sp>
+        <p:nvSpPr>
+          <p:cNvPr id="39" name="Oval 38"/>
+          <p:cNvSpPr/>
+          <p:nvPr/>
+        </p:nvSpPr>
+        <p:spPr>
+          <a:xfrm>
+            <a:off x="6245352" y="2962656"/>
+            <a:ext cx="82296" cy="82296"/>
+          </a:xfrm>
+          <a:prstGeom prst="ellipse">
+            <a:avLst/>
+          </a:prstGeom>
+          <a:solidFill>
+            <a:srgbClr val="2EC4B6"/>
+          </a:solidFill>
+          <a:ln>
+            <a:noFill/>
+          </a:ln>
+          <a:effectLst/>
+        </p:spPr>
+        <p:style>
+          <a:lnRef idx="1">
+            <a:schemeClr val="accent1"/>
+          </a:lnRef>
+          <a:fillRef idx="3">
+            <a:schemeClr val="accent1"/>
+          </a:fillRef>
+          <a:effectRef idx="2">
+            <a:schemeClr val="accent1"/>
+          </a:effectRef>
+          <a:fontRef idx="minor">
+            <a:schemeClr val="lt1"/>
+          </a:fontRef>
+        </p:style>
+        <p:txBody>
+          <a:bodyPr rtlCol="0" anchor="ctr"/>
+          <a:lstStyle/>
+          <a:p>
+            <a:pPr algn="ctr"/>
+          </a:p>
+        </p:txBody>
+      </p:sp>
+      <p:sp>
+        <p:nvSpPr>
+          <p:cNvPr id="40" name="TextBox 39"/>
+          <p:cNvSpPr txBox="1"/>
+          <p:nvPr/>
+        </p:nvSpPr>
+        <p:spPr>
+          <a:xfrm>
+            <a:off x="6446520" y="2898648"/>
+            <a:ext cx="4937760" cy="292608"/>
+          </a:xfrm>
+          <a:prstGeom prst="rect">
+            <a:avLst/>
+          </a:prstGeom>
+          <a:noFill/>
+        </p:spPr>
+        <p:txBody>
+          <a:bodyPr wrap="square">
+            <a:spAutoFit/>
+          </a:bodyPr>
+          <a:lstStyle/>
+          <a:p>
+            <a:pPr algn="l"/>
+            <a:r>
+              <a:rPr sz="1150" b="0" i="0">
+                <a:solidFill>
+                  <a:srgbClr val="202633"/>
+                </a:solidFill>
+                <a:latin typeface="Calibri"/>
+              </a:rPr>
+              <a:t>Deterministic and explainable, no black box</a:t>
+            </a:r>
+          </a:p>
+        </p:txBody>
+      </p:sp>
+      <p:sp>
+        <p:nvSpPr>
+          <p:cNvPr id="41" name="Oval 40"/>
+          <p:cNvSpPr/>
+          <p:nvPr/>
+        </p:nvSpPr>
+        <p:spPr>
+          <a:xfrm>
+            <a:off x="6245352" y="3273552"/>
+            <a:ext cx="82296" cy="82296"/>
+          </a:xfrm>
+          <a:prstGeom prst="ellipse">
+            <a:avLst/>
+          </a:prstGeom>
+          <a:solidFill>
+            <a:srgbClr val="2EC4B6"/>
+          </a:solidFill>
+          <a:ln>
+            <a:noFill/>
+          </a:ln>
+          <a:effectLst/>
+        </p:spPr>
+        <p:style>
+          <a:lnRef idx="1">
+            <a:schemeClr val="accent1"/>
+          </a:lnRef>
+          <a:fillRef idx="3">
+            <a:schemeClr val="accent1"/>
+          </a:fillRef>
+          <a:effectRef idx="2">
+            <a:schemeClr val="accent1"/>
+          </a:effectRef>
+          <a:fontRef idx="minor">
+            <a:schemeClr val="lt1"/>
+          </a:fontRef>
+        </p:style>
+        <p:txBody>
+          <a:bodyPr rtlCol="0" anchor="ctr"/>
+          <a:lstStyle/>
+          <a:p>
+            <a:pPr algn="ctr"/>
+          </a:p>
+        </p:txBody>
+      </p:sp>
+      <p:sp>
+        <p:nvSpPr>
+          <p:cNvPr id="42" name="TextBox 41"/>
+          <p:cNvSpPr txBox="1"/>
+          <p:nvPr/>
+        </p:nvSpPr>
+        <p:spPr>
+          <a:xfrm>
+            <a:off x="6446520" y="3209544"/>
+            <a:ext cx="4937760" cy="292608"/>
+          </a:xfrm>
+          <a:prstGeom prst="rect">
+            <a:avLst/>
+          </a:prstGeom>
+          <a:noFill/>
+        </p:spPr>
+        <p:txBody>
+          <a:bodyPr wrap="square">
+            <a:spAutoFit/>
+          </a:bodyPr>
+          <a:lstStyle/>
+          <a:p>
+            <a:pPr algn="l"/>
+            <a:r>
+              <a:rPr sz="1150" b="0" i="0">
+                <a:solidFill>
+                  <a:srgbClr val="202633"/>
+                </a:solidFill>
+                <a:latin typeface="Calibri"/>
+              </a:rPr>
+              <a:t>100% offline — zero AI/LLM API dependency</a:t>
+            </a:r>
+          </a:p>
+        </p:txBody>
+      </p:sp>
+      <p:sp>
+        <p:nvSpPr>
+          <p:cNvPr id="43" name="Oval 42"/>
+          <p:cNvSpPr/>
+          <p:nvPr/>
+        </p:nvSpPr>
+        <p:spPr>
+          <a:xfrm>
+            <a:off x="6245352" y="3584448"/>
+            <a:ext cx="82296" cy="82296"/>
+          </a:xfrm>
+          <a:prstGeom prst="ellipse">
+            <a:avLst/>
+          </a:prstGeom>
+          <a:solidFill>
+            <a:srgbClr val="2EC4B6"/>
+          </a:solidFill>
+          <a:ln>
+            <a:noFill/>
+          </a:ln>
+          <a:effectLst/>
+        </p:spPr>
+        <p:style>
+          <a:lnRef idx="1">
+            <a:schemeClr val="accent1"/>
+          </a:lnRef>
+          <a:fillRef idx="3">
+            <a:schemeClr val="accent1"/>
+          </a:fillRef>
+          <a:effectRef idx="2">
+            <a:schemeClr val="accent1"/>
+          </a:effectRef>
+          <a:fontRef idx="minor">
+            <a:schemeClr val="lt1"/>
+          </a:fontRef>
+        </p:style>
+        <p:txBody>
+          <a:bodyPr rtlCol="0" anchor="ctr"/>
+          <a:lstStyle/>
+          <a:p>
+            <a:pPr algn="ctr"/>
+          </a:p>
+        </p:txBody>
+      </p:sp>
+      <p:sp>
+        <p:nvSpPr>
+          <p:cNvPr id="44" name="TextBox 43"/>
+          <p:cNvSpPr txBox="1"/>
+          <p:nvPr/>
+        </p:nvSpPr>
+        <p:spPr>
+          <a:xfrm>
+            <a:off x="6446520" y="3520440"/>
+            <a:ext cx="4937760" cy="292608"/>
+          </a:xfrm>
+          <a:prstGeom prst="rect">
+            <a:avLst/>
+          </a:prstGeom>
+          <a:noFill/>
+        </p:spPr>
+        <p:txBody>
+          <a:bodyPr wrap="square">
+            <a:spAutoFit/>
+          </a:bodyPr>
+          <a:lstStyle/>
+          <a:p>
+            <a:pPr algn="l"/>
+            <a:r>
+              <a:rPr sz="1150" b="0" i="0">
+                <a:solidFill>
+                  <a:srgbClr val="202633"/>
+                </a:solidFill>
+                <a:latin typeface="Calibri"/>
+              </a:rPr>
+              <a:t>Cross-checked against the CSAT score bucket</a:t>
+            </a:r>
+          </a:p>
+        </p:txBody>
+      </p:sp>
+      <p:sp>
+        <p:nvSpPr>
+          <p:cNvPr id="45" name="Oval 44"/>
+          <p:cNvSpPr/>
+          <p:nvPr/>
+        </p:nvSpPr>
+        <p:spPr>
+          <a:xfrm>
+            <a:off x="6172200" y="3831336"/>
+            <a:ext cx="292608" cy="292608"/>
+          </a:xfrm>
+          <a:prstGeom prst="ellipse">
+            <a:avLst/>
+          </a:prstGeom>
+          <a:solidFill>
+            <a:srgbClr val="2EC4B6"/>
+          </a:solidFill>
+          <a:ln>
+            <a:noFill/>
+          </a:ln>
+          <a:effectLst/>
+        </p:spPr>
+        <p:style>
+          <a:lnRef idx="1">
+            <a:schemeClr val="accent1"/>
+          </a:lnRef>
+          <a:fillRef idx="3">
+            <a:schemeClr val="accent1"/>
+          </a:fillRef>
+          <a:effectRef idx="2">
+            <a:schemeClr val="accent1"/>
+          </a:effectRef>
+          <a:fontRef idx="minor">
+            <a:schemeClr val="lt1"/>
+          </a:fontRef>
+        </p:style>
+        <p:txBody>
+          <a:bodyPr rtlCol="0" anchor="ctr"/>
+          <a:lstStyle/>
+          <a:p>
+            <a:pPr algn="ctr"/>
+            <a:r>
+              <a:rPr sz="1400" b="1">
+                <a:solidFill>
+                  <a:srgbClr val="FFFFFF"/>
+                </a:solidFill>
+                <a:latin typeface="Calibri"/>
+              </a:rPr>
+              <a:t>5</a:t>
+            </a:r>
+          </a:p>
+        </p:txBody>
+      </p:sp>
+      <p:sp>
+        <p:nvSpPr>
+          <p:cNvPr id="46" name="TextBox 45"/>
+          <p:cNvSpPr txBox="1"/>
+          <p:nvPr/>
+        </p:nvSpPr>
+        <p:spPr>
+          <a:xfrm>
+            <a:off x="6556248" y="3813048"/>
+            <a:ext cx="4828032" cy="292608"/>
+          </a:xfrm>
+          <a:prstGeom prst="rect">
+            <a:avLst/>
+          </a:prstGeom>
+          <a:noFill/>
+        </p:spPr>
+        <p:txBody>
+          <a:bodyPr wrap="square">
+            <a:spAutoFit/>
+          </a:bodyPr>
+          <a:lstStyle/>
+          <a:p>
+            <a:pPr algn="l"/>
+            <a:r>
+              <a:rPr sz="1450" b="1" i="0">
+                <a:solidFill>
+                  <a:srgbClr val="1B2A4A"/>
+                </a:solidFill>
+                <a:latin typeface="Calibri"/>
+              </a:rPr>
+              <a:t>Publish</a:t>
+            </a:r>
+          </a:p>
+        </p:txBody>
+      </p:sp>
+      <p:sp>
+        <p:nvSpPr>
+          <p:cNvPr id="47" name="Oval 46"/>
+          <p:cNvSpPr/>
+          <p:nvPr/>
+        </p:nvSpPr>
+        <p:spPr>
+          <a:xfrm>
+            <a:off x="6245352" y="4261104"/>
+            <a:ext cx="82296" cy="82296"/>
+          </a:xfrm>
+          <a:prstGeom prst="ellipse">
+            <a:avLst/>
+          </a:prstGeom>
+          <a:solidFill>
+            <a:srgbClr val="2EC4B6"/>
+          </a:solidFill>
+          <a:ln>
+            <a:noFill/>
+          </a:ln>
+          <a:effectLst/>
+        </p:spPr>
+        <p:style>
+          <a:lnRef idx="1">
+            <a:schemeClr val="accent1"/>
+          </a:lnRef>
+          <a:fillRef idx="3">
+            <a:schemeClr val="accent1"/>
+          </a:fillRef>
+          <a:effectRef idx="2">
+            <a:schemeClr val="accent1"/>
+          </a:effectRef>
+          <a:fontRef idx="minor">
+            <a:schemeClr val="lt1"/>
+          </a:fontRef>
+        </p:style>
+        <p:txBody>
+          <a:bodyPr rtlCol="0" anchor="ctr"/>
+          <a:lstStyle/>
+          <a:p>
+            <a:pPr algn="ctr"/>
+          </a:p>
+        </p:txBody>
+      </p:sp>
+      <p:sp>
+        <p:nvSpPr>
+          <p:cNvPr id="48" name="TextBox 47"/>
+          <p:cNvSpPr txBox="1"/>
+          <p:nvPr/>
+        </p:nvSpPr>
+        <p:spPr>
+          <a:xfrm>
+            <a:off x="6446520" y="4197096"/>
+            <a:ext cx="4937760" cy="292608"/>
+          </a:xfrm>
+          <a:prstGeom prst="rect">
+            <a:avLst/>
+          </a:prstGeom>
+          <a:noFill/>
+        </p:spPr>
+        <p:txBody>
+          <a:bodyPr wrap="square">
+            <a:spAutoFit/>
+          </a:bodyPr>
+          <a:lstStyle/>
+          <a:p>
+            <a:pPr algn="l"/>
+            <a:r>
+              <a:rPr sz="1150" b="0" i="0">
+                <a:solidFill>
+                  <a:srgbClr val="202633"/>
+                </a:solidFill>
+                <a:latin typeface="Calibri"/>
+              </a:rPr>
+              <a:t>One workbook: row data + Analysis sheet</a:t>
+            </a:r>
+          </a:p>
+        </p:txBody>
+      </p:sp>
+      <p:sp>
+        <p:nvSpPr>
+          <p:cNvPr id="49" name="Oval 48"/>
+          <p:cNvSpPr/>
+          <p:nvPr/>
+        </p:nvSpPr>
+        <p:spPr>
+          <a:xfrm>
+            <a:off x="6245352" y="4572000"/>
+            <a:ext cx="82296" cy="82296"/>
+          </a:xfrm>
+          <a:prstGeom prst="ellipse">
+            <a:avLst/>
+          </a:prstGeom>
+          <a:solidFill>
+            <a:srgbClr val="2EC4B6"/>
+          </a:solidFill>
+          <a:ln>
+            <a:noFill/>
+          </a:ln>
+          <a:effectLst/>
+        </p:spPr>
+        <p:style>
+          <a:lnRef idx="1">
+            <a:schemeClr val="accent1"/>
+          </a:lnRef>
+          <a:fillRef idx="3">
+            <a:schemeClr val="accent1"/>
+          </a:fillRef>
+          <a:effectRef idx="2">
+            <a:schemeClr val="accent1"/>
+          </a:effectRef>
+          <a:fontRef idx="minor">
+            <a:schemeClr val="lt1"/>
+          </a:fontRef>
+        </p:style>
+        <p:txBody>
+          <a:bodyPr rtlCol="0" anchor="ctr"/>
+          <a:lstStyle/>
+          <a:p>
+            <a:pPr algn="ctr"/>
+          </a:p>
+        </p:txBody>
+      </p:sp>
+      <p:sp>
+        <p:nvSpPr>
+          <p:cNvPr id="50" name="TextBox 49"/>
+          <p:cNvSpPr txBox="1"/>
+          <p:nvPr/>
+        </p:nvSpPr>
+        <p:spPr>
+          <a:xfrm>
+            <a:off x="6446520" y="4507992"/>
+            <a:ext cx="4937760" cy="292608"/>
+          </a:xfrm>
+          <a:prstGeom prst="rect">
+            <a:avLst/>
+          </a:prstGeom>
+          <a:noFill/>
+        </p:spPr>
+        <p:txBody>
+          <a:bodyPr wrap="square">
+            <a:spAutoFit/>
+          </a:bodyPr>
+          <a:lstStyle/>
+          <a:p>
+            <a:pPr algn="l"/>
+            <a:r>
+              <a:rPr sz="1150" b="0" i="0">
+                <a:solidFill>
+                  <a:srgbClr val="202633"/>
+                </a:solidFill>
+                <a:latin typeface="Calibri"/>
+              </a:rPr>
+              <a:t>Every chart pairs volume with CSAT severity</a:t>
+            </a:r>
+          </a:p>
+        </p:txBody>
+      </p:sp>
+      <p:sp>
+        <p:nvSpPr>
+          <p:cNvPr id="51" name="Oval 50"/>
+          <p:cNvSpPr/>
+          <p:nvPr/>
+        </p:nvSpPr>
+        <p:spPr>
+          <a:xfrm>
+            <a:off x="6245352" y="4882896"/>
+            <a:ext cx="82296" cy="82296"/>
+          </a:xfrm>
+          <a:prstGeom prst="ellipse">
+            <a:avLst/>
+          </a:prstGeom>
+          <a:solidFill>
+            <a:srgbClr val="2EC4B6"/>
+          </a:solidFill>
+          <a:ln>
+            <a:noFill/>
+          </a:ln>
+          <a:effectLst/>
+        </p:spPr>
+        <p:style>
+          <a:lnRef idx="1">
+            <a:schemeClr val="accent1"/>
+          </a:lnRef>
+          <a:fillRef idx="3">
+            <a:schemeClr val="accent1"/>
+          </a:fillRef>
+          <a:effectRef idx="2">
+            <a:schemeClr val="accent1"/>
+          </a:effectRef>
+          <a:fontRef idx="minor">
+            <a:schemeClr val="lt1"/>
+          </a:fontRef>
+        </p:style>
+        <p:txBody>
+          <a:bodyPr rtlCol="0" anchor="ctr"/>
+          <a:lstStyle/>
+          <a:p>
+            <a:pPr algn="ctr"/>
+          </a:p>
+        </p:txBody>
+      </p:sp>
+      <p:sp>
+        <p:nvSpPr>
+          <p:cNvPr id="52" name="TextBox 51"/>
+          <p:cNvSpPr txBox="1"/>
+          <p:nvPr/>
+        </p:nvSpPr>
+        <p:spPr>
+          <a:xfrm>
+            <a:off x="6446520" y="4818888"/>
+            <a:ext cx="4937760" cy="292608"/>
+          </a:xfrm>
+          <a:prstGeom prst="rect">
+            <a:avLst/>
+          </a:prstGeom>
+          <a:noFill/>
+        </p:spPr>
+        <p:txBody>
+          <a:bodyPr wrap="square">
+            <a:spAutoFit/>
+          </a:bodyPr>
+          <a:lstStyle/>
+          <a:p>
+            <a:pPr algn="l"/>
+            <a:r>
+              <a:rPr sz="1150" b="0" i="0">
+                <a:solidFill>
+                  <a:srgbClr val="202633"/>
+                </a:solidFill>
+                <a:latin typeface="Calibri"/>
+              </a:rPr>
+              <a:t>A 6-slide deck, numbers read live from the data</a:t>
+            </a:r>
+          </a:p>
+        </p:txBody>
+      </p:sp>
+      <p:sp>
+        <p:nvSpPr>
+          <p:cNvPr id="53" name="Oval 52"/>
+          <p:cNvSpPr/>
+          <p:nvPr/>
+        </p:nvSpPr>
+        <p:spPr>
+          <a:xfrm>
+            <a:off x="6245352" y="5193792"/>
+            <a:ext cx="82296" cy="82296"/>
+          </a:xfrm>
+          <a:prstGeom prst="ellipse">
+            <a:avLst/>
+          </a:prstGeom>
+          <a:solidFill>
+            <a:srgbClr val="2EC4B6"/>
+          </a:solidFill>
+          <a:ln>
+            <a:noFill/>
+          </a:ln>
+          <a:effectLst/>
+        </p:spPr>
+        <p:style>
+          <a:lnRef idx="1">
+            <a:schemeClr val="accent1"/>
+          </a:lnRef>
+          <a:fillRef idx="3">
+            <a:schemeClr val="accent1"/>
+          </a:fillRef>
+          <a:effectRef idx="2">
+            <a:schemeClr val="accent1"/>
+          </a:effectRef>
+          <a:fontRef idx="minor">
+            <a:schemeClr val="lt1"/>
+          </a:fontRef>
+        </p:style>
+        <p:txBody>
+          <a:bodyPr rtlCol="0" anchor="ctr"/>
+          <a:lstStyle/>
+          <a:p>
+            <a:pPr algn="ctr"/>
+          </a:p>
+        </p:txBody>
+      </p:sp>
+      <p:sp>
+        <p:nvSpPr>
+          <p:cNvPr id="54" name="TextBox 53"/>
+          <p:cNvSpPr txBox="1"/>
+          <p:nvPr/>
+        </p:nvSpPr>
+        <p:spPr>
+          <a:xfrm>
+            <a:off x="6446520" y="5129784"/>
+            <a:ext cx="4937760" cy="292608"/>
+          </a:xfrm>
+          <a:prstGeom prst="rect">
+            <a:avLst/>
+          </a:prstGeom>
+          <a:noFill/>
+        </p:spPr>
+        <p:txBody>
+          <a:bodyPr wrap="square">
+            <a:spAutoFit/>
+          </a:bodyPr>
+          <a:lstStyle/>
+          <a:p>
+            <a:pPr algn="l"/>
+            <a:r>
+              <a:rPr sz="1150" b="0" i="0">
+                <a:solidFill>
+                  <a:srgbClr val="202633"/>
+                </a:solidFill>
+                <a:latin typeface="Calibri"/>
+              </a:rPr>
+              <a:t>A Power BI report built on top for the business</a:t>
+            </a:r>
+          </a:p>
+        </p:txBody>
+      </p:sp>
+      <p:sp>
+        <p:nvSpPr>
+          <p:cNvPr id="55" name="TextBox 54"/>
+          <p:cNvSpPr txBox="1"/>
+          <p:nvPr/>
+        </p:nvSpPr>
+        <p:spPr>
+          <a:xfrm>
+            <a:off x="594360" y="6473952"/>
+            <a:ext cx="9144000" cy="320040"/>
+          </a:xfrm>
+          <a:prstGeom prst="rect">
+            <a:avLst/>
+          </a:prstGeom>
+          <a:noFill/>
+        </p:spPr>
+        <p:txBody>
+          <a:bodyPr wrap="square">
+            <a:spAutoFit/>
+          </a:bodyPr>
+          <a:lstStyle/>
+          <a:p>
+            <a:pPr algn="l"/>
+            <a:r>
               <a:rPr sz="1000" b="0" i="0">
                 <a:solidFill>
                   <a:srgbClr val="5A6B7D"/>
@@ -6192,7 +7223,7 @@
       </p:sp>
       <p:sp>
         <p:nvSpPr>
-          <p:cNvPr id="22" name="TextBox 21"/>
+          <p:cNvPr id="56" name="TextBox 55"/>
           <p:cNvSpPr txBox="1"/>
           <p:nvPr/>
         </p:nvSpPr>
@@ -6400,7 +7431,7 @@
             <a:avLst/>
           </a:prstGeom>
           <a:solidFill>
-            <a:srgbClr val="2EC4B6"/>
+            <a:srgbClr val="1B2A4A"/>
           </a:solidFill>
           <a:ln>
             <a:noFill/>
@@ -6479,7 +7510,7 @@
                 </a:solidFill>
                 <a:latin typeface="Calibri"/>
               </a:rPr>
-              <a:t>21%</a:t>
+              <a:t>2.86</a:t>
             </a:r>
           </a:p>
           <a:p>
@@ -6491,7 +7522,7 @@
                 </a:solidFill>
                 <a:latin typeface="Calibri"/>
               </a:rPr>
-              <a:t>of responses: Billing Charges</a:t>
+              <a:t>Overall average CSAT (out of 5)</a:t>
             </a:r>
           </a:p>
         </p:txBody>
@@ -6511,7 +7542,7 @@
             <a:avLst/>
           </a:prstGeom>
           <a:solidFill>
-            <a:srgbClr val="1B2A4A"/>
+            <a:srgbClr val="E05A47"/>
           </a:solidFill>
           <a:ln>
             <a:noFill/>
@@ -6590,7 +7621,7 @@
                 </a:solidFill>
                 <a:latin typeface="Calibri"/>
               </a:rPr>
-              <a:t>2.86</a:t>
+              <a:t>38%</a:t>
             </a:r>
           </a:p>
           <a:p>
@@ -6602,7 +7633,7 @@
                 </a:solidFill>
                 <a:latin typeface="Calibri"/>
               </a:rPr>
-              <a:t>Overall average CSAT (out of 5)</a:t>
+              <a:t>of responses carry negative sentiment</a:t>
             </a:r>
           </a:p>
         </p:txBody>
@@ -6622,7 +7653,7 @@
             <a:avLst/>
           </a:prstGeom>
           <a:solidFill>
-            <a:srgbClr val="E05A47"/>
+            <a:srgbClr val="2EC4B6"/>
           </a:solidFill>
           <a:ln>
             <a:noFill/>
@@ -6701,7 +7732,7 @@
                 </a:solidFill>
                 <a:latin typeface="Calibri"/>
               </a:rPr>
-              <a:t>38%</a:t>
+              <a:t>2.78</a:t>
             </a:r>
           </a:p>
           <a:p>
@@ -6713,7 +7744,7 @@
                 </a:solidFill>
                 <a:latin typeface="Calibri"/>
               </a:rPr>
-              <a:t>of responses carry negative sentiment</a:t>
+              <a:t>Lowest avg CSAT: North East circle</a:t>
             </a:r>
           </a:p>
         </p:txBody>
@@ -6812,7 +7843,7 @@
                 </a:solidFill>
                 <a:latin typeface="Calibri"/>
               </a:rPr>
-              <a:t>2.78</a:t>
+              <a:t>21%</a:t>
             </a:r>
           </a:p>
           <a:p>
@@ -6824,7 +7855,7 @@
                 </a:solidFill>
                 <a:latin typeface="Calibri"/>
               </a:rPr>
-              <a:t>Lowest avg CSAT: North East circle</a:t>
+              <a:t>of responses: Billing Charges</a:t>
             </a:r>
           </a:p>
         </p:txBody>
@@ -6838,7 +7869,7 @@
         <p:spPr>
           <a:xfrm>
             <a:off x="594360" y="3063240"/>
-            <a:ext cx="4572000" cy="320040"/>
+            <a:ext cx="3514344" cy="274320"/>
           </a:xfrm>
           <a:prstGeom prst="rect">
             <a:avLst/>
@@ -6873,7 +7904,7 @@
         <p:spPr>
           <a:xfrm>
             <a:off x="594360" y="3429000"/>
-            <a:ext cx="1681618" cy="411480"/>
+            <a:ext cx="1154110" cy="320040"/>
           </a:xfrm>
           <a:prstGeom prst="rect">
             <a:avLst/>
@@ -6918,8 +7949,8 @@
         </p:nvSpPr>
         <p:spPr>
           <a:xfrm>
-            <a:off x="2275978" y="3429000"/>
-            <a:ext cx="1313614" cy="411480"/>
+            <a:off x="1748470" y="3429000"/>
+            <a:ext cx="901546" cy="320040"/>
           </a:xfrm>
           <a:prstGeom prst="rect">
             <a:avLst/>
@@ -6964,8 +7995,8 @@
         </p:nvSpPr>
         <p:spPr>
           <a:xfrm>
-            <a:off x="3589592" y="3429000"/>
-            <a:ext cx="2125406" cy="411480"/>
+            <a:off x="2650016" y="3429000"/>
+            <a:ext cx="1458687" cy="320040"/>
           </a:xfrm>
           <a:prstGeom prst="rect">
             <a:avLst/>
@@ -7010,7 +8041,7 @@
         </p:nvSpPr>
         <p:spPr>
           <a:xfrm>
-            <a:off x="594360" y="3950208"/>
+            <a:off x="594360" y="3895344"/>
             <a:ext cx="128016" cy="128016"/>
           </a:xfrm>
           <a:prstGeom prst="ellipse">
@@ -7054,8 +8085,8 @@
         </p:nvSpPr>
         <p:spPr>
           <a:xfrm>
-            <a:off x="777240" y="3904488"/>
-            <a:ext cx="2377440" cy="274320"/>
+            <a:off x="795528" y="3858768"/>
+            <a:ext cx="3313176" cy="274320"/>
           </a:xfrm>
           <a:prstGeom prst="rect">
             <a:avLst/>
@@ -7070,7 +8101,7 @@
           <a:p>
             <a:pPr algn="l"/>
             <a:r>
-              <a:rPr sz="1300" b="0" i="0">
+              <a:rPr sz="1250" b="0" i="0">
                 <a:solidFill>
                   <a:srgbClr val="5A6B7D"/>
                 </a:solidFill>
@@ -7089,7 +8120,7 @@
         </p:nvSpPr>
         <p:spPr>
           <a:xfrm>
-            <a:off x="3108960" y="3950208"/>
+            <a:off x="594360" y="4206240"/>
             <a:ext cx="128016" cy="128016"/>
           </a:xfrm>
           <a:prstGeom prst="ellipse">
@@ -7133,8 +8164,8 @@
         </p:nvSpPr>
         <p:spPr>
           <a:xfrm>
-            <a:off x="3291840" y="3904488"/>
-            <a:ext cx="2377440" cy="274320"/>
+            <a:off x="795528" y="4169664"/>
+            <a:ext cx="3313176" cy="274320"/>
           </a:xfrm>
           <a:prstGeom prst="rect">
             <a:avLst/>
@@ -7149,7 +8180,7 @@
           <a:p>
             <a:pPr algn="l"/>
             <a:r>
-              <a:rPr sz="1300" b="0" i="0">
+              <a:rPr sz="1250" b="0" i="0">
                 <a:solidFill>
                   <a:srgbClr val="5A6B7D"/>
                 </a:solidFill>
@@ -7168,7 +8199,7 @@
         </p:nvSpPr>
         <p:spPr>
           <a:xfrm>
-            <a:off x="5623560" y="3950208"/>
+            <a:off x="594360" y="4517136"/>
             <a:ext cx="128016" cy="128016"/>
           </a:xfrm>
           <a:prstGeom prst="ellipse">
@@ -7212,8 +8243,8 @@
         </p:nvSpPr>
         <p:spPr>
           <a:xfrm>
-            <a:off x="5806440" y="3904488"/>
-            <a:ext cx="2377440" cy="274320"/>
+            <a:off x="795528" y="4480560"/>
+            <a:ext cx="3313176" cy="274320"/>
           </a:xfrm>
           <a:prstGeom prst="rect">
             <a:avLst/>
@@ -7228,7 +8259,7 @@
           <a:p>
             <a:pPr algn="l"/>
             <a:r>
-              <a:rPr sz="1300" b="0" i="0">
+              <a:rPr sz="1250" b="0" i="0">
                 <a:solidFill>
                   <a:srgbClr val="5A6B7D"/>
                 </a:solidFill>
@@ -7241,14 +8272,49 @@
       </p:sp>
       <p:sp>
         <p:nvSpPr>
-          <p:cNvPr id="23" name="Oval 22"/>
+          <p:cNvPr id="23" name="TextBox 22"/>
+          <p:cNvSpPr txBox="1"/>
+          <p:nvPr/>
+        </p:nvSpPr>
+        <p:spPr>
+          <a:xfrm>
+            <a:off x="4337304" y="3063240"/>
+            <a:ext cx="3514344" cy="274320"/>
+          </a:xfrm>
+          <a:prstGeom prst="rect">
+            <a:avLst/>
+          </a:prstGeom>
+          <a:noFill/>
+        </p:spPr>
+        <p:txBody>
+          <a:bodyPr wrap="square">
+            <a:spAutoFit/>
+          </a:bodyPr>
+          <a:lstStyle/>
+          <a:p>
+            <a:pPr algn="l"/>
+            <a:r>
+              <a:rPr sz="1200" b="1" i="0">
+                <a:solidFill>
+                  <a:srgbClr val="1F9A8F"/>
+                </a:solidFill>
+                <a:latin typeface="Calibri"/>
+              </a:rPr>
+              <a:t>TOP 3 PRIMARY DRIVERS</a:t>
+            </a:r>
+          </a:p>
+        </p:txBody>
+      </p:sp>
+      <p:sp>
+        <p:nvSpPr>
+          <p:cNvPr id="24" name="Oval 23"/>
           <p:cNvSpPr/>
           <p:nvPr/>
         </p:nvSpPr>
         <p:spPr>
           <a:xfrm>
-            <a:off x="6309360" y="3136392"/>
-            <a:ext cx="128016" cy="128016"/>
+            <a:off x="4337304" y="3447288"/>
+            <a:ext cx="237744" cy="237744"/>
           </a:xfrm>
           <a:prstGeom prst="ellipse">
             <a:avLst/>
@@ -7280,19 +8346,28 @@
           <a:lstStyle/>
           <a:p>
             <a:pPr algn="ctr"/>
-          </a:p>
-        </p:txBody>
-      </p:sp>
-      <p:sp>
-        <p:nvSpPr>
-          <p:cNvPr id="24" name="TextBox 23"/>
+            <a:r>
+              <a:rPr sz="1200" b="1">
+                <a:solidFill>
+                  <a:srgbClr val="FFFFFF"/>
+                </a:solidFill>
+                <a:latin typeface="Calibri"/>
+              </a:rPr>
+              <a:t>1</a:t>
+            </a:r>
+          </a:p>
+        </p:txBody>
+      </p:sp>
+      <p:sp>
+        <p:nvSpPr>
+          <p:cNvPr id="25" name="TextBox 24"/>
           <p:cNvSpPr txBox="1"/>
           <p:nvPr/>
         </p:nvSpPr>
         <p:spPr>
           <a:xfrm>
-            <a:off x="6629400" y="3063240"/>
-            <a:ext cx="4983480" cy="868680"/>
+            <a:off x="4666488" y="3429000"/>
+            <a:ext cx="3185160" cy="329184"/>
           </a:xfrm>
           <a:prstGeom prst="rect">
             <a:avLst/>
@@ -7307,27 +8382,27 @@
           <a:p>
             <a:pPr algn="l"/>
             <a:r>
-              <a:rPr sz="1450" b="0" i="0">
+              <a:rPr sz="1300" b="0" i="0">
                 <a:solidFill>
                   <a:srgbClr val="202633"/>
                 </a:solidFill>
                 <a:latin typeface="Calibri"/>
               </a:rPr>
-              <a:t>Billing Charges is both the highest-volume and lowest-CSAT driver (avg CSAT 2.51) - the clear priority-one fix.</a:t>
-            </a:r>
-          </a:p>
-        </p:txBody>
-      </p:sp>
-      <p:sp>
-        <p:nvSpPr>
-          <p:cNvPr id="25" name="Oval 24"/>
+              <a:t>Billing Charges — 20.8%</a:t>
+            </a:r>
+          </a:p>
+        </p:txBody>
+      </p:sp>
+      <p:sp>
+        <p:nvSpPr>
+          <p:cNvPr id="26" name="Oval 25"/>
           <p:cNvSpPr/>
           <p:nvPr/>
         </p:nvSpPr>
         <p:spPr>
           <a:xfrm>
-            <a:off x="6309360" y="4005072"/>
-            <a:ext cx="128016" cy="128016"/>
+            <a:off x="4337304" y="3831336"/>
+            <a:ext cx="237744" cy="237744"/>
           </a:xfrm>
           <a:prstGeom prst="ellipse">
             <a:avLst/>
@@ -7359,19 +8434,28 @@
           <a:lstStyle/>
           <a:p>
             <a:pPr algn="ctr"/>
-          </a:p>
-        </p:txBody>
-      </p:sp>
-      <p:sp>
-        <p:nvSpPr>
-          <p:cNvPr id="26" name="TextBox 25"/>
+            <a:r>
+              <a:rPr sz="1200" b="1">
+                <a:solidFill>
+                  <a:srgbClr val="FFFFFF"/>
+                </a:solidFill>
+                <a:latin typeface="Calibri"/>
+              </a:rPr>
+              <a:t>2</a:t>
+            </a:r>
+          </a:p>
+        </p:txBody>
+      </p:sp>
+      <p:sp>
+        <p:nvSpPr>
+          <p:cNvPr id="27" name="TextBox 26"/>
           <p:cNvSpPr txBox="1"/>
           <p:nvPr/>
         </p:nvSpPr>
         <p:spPr>
           <a:xfrm>
-            <a:off x="6629400" y="3931920"/>
-            <a:ext cx="4983480" cy="868680"/>
+            <a:off x="4666488" y="3813048"/>
+            <a:ext cx="3185160" cy="329184"/>
           </a:xfrm>
           <a:prstGeom prst="rect">
             <a:avLst/>
@@ -7386,27 +8470,27 @@
           <a:p>
             <a:pPr algn="l"/>
             <a:r>
-              <a:rPr sz="1450" b="0" i="0">
+              <a:rPr sz="1300" b="0" i="0">
                 <a:solidFill>
                   <a:srgbClr val="202633"/>
                 </a:solidFill>
                 <a:latin typeface="Calibri"/>
               </a:rPr>
-              <a:t>North East circle and Elite tier are the lowest-performing segments (avg CSAT 2.78 / 2.82).</a:t>
-            </a:r>
-          </a:p>
-        </p:txBody>
-      </p:sp>
-      <p:sp>
-        <p:nvSpPr>
-          <p:cNvPr id="27" name="Oval 26"/>
+              <a:t>No Issue Positive — 16.7%</a:t>
+            </a:r>
+          </a:p>
+        </p:txBody>
+      </p:sp>
+      <p:sp>
+        <p:nvSpPr>
+          <p:cNvPr id="28" name="Oval 27"/>
           <p:cNvSpPr/>
           <p:nvPr/>
         </p:nvSpPr>
         <p:spPr>
           <a:xfrm>
-            <a:off x="594360" y="5148072"/>
-            <a:ext cx="128016" cy="128016"/>
+            <a:off x="4337304" y="4215384"/>
+            <a:ext cx="237744" cy="237744"/>
           </a:xfrm>
           <a:prstGeom prst="ellipse">
             <a:avLst/>
@@ -7438,19 +8522,28 @@
           <a:lstStyle/>
           <a:p>
             <a:pPr algn="ctr"/>
-          </a:p>
-        </p:txBody>
-      </p:sp>
-      <p:sp>
-        <p:nvSpPr>
-          <p:cNvPr id="28" name="TextBox 27"/>
+            <a:r>
+              <a:rPr sz="1200" b="1">
+                <a:solidFill>
+                  <a:srgbClr val="FFFFFF"/>
+                </a:solidFill>
+                <a:latin typeface="Calibri"/>
+              </a:rPr>
+              <a:t>3</a:t>
+            </a:r>
+          </a:p>
+        </p:txBody>
+      </p:sp>
+      <p:sp>
+        <p:nvSpPr>
+          <p:cNvPr id="29" name="TextBox 28"/>
           <p:cNvSpPr txBox="1"/>
           <p:nvPr/>
         </p:nvSpPr>
         <p:spPr>
           <a:xfrm>
-            <a:off x="914400" y="5074920"/>
-            <a:ext cx="10561320" cy="640080"/>
+            <a:off x="4666488" y="4197096"/>
+            <a:ext cx="3185160" cy="329184"/>
           </a:xfrm>
           <a:prstGeom prst="rect">
             <a:avLst/>
@@ -7465,27 +8558,27 @@
           <a:p>
             <a:pPr algn="l"/>
             <a:r>
-              <a:rPr sz="1450" b="0" i="0">
+              <a:rPr sz="1300" b="0" i="0">
                 <a:solidFill>
                   <a:srgbClr val="202633"/>
                 </a:solidFill>
                 <a:latin typeface="Calibri"/>
               </a:rPr>
-              <a:t>Agents with less than 6 months' tenure skew toward the lowest-CSAT bucket (&lt;6 months) - a coaching signal alongside the process fix.</a:t>
-            </a:r>
-          </a:p>
-        </p:txBody>
-      </p:sp>
-      <p:sp>
-        <p:nvSpPr>
-          <p:cNvPr id="29" name="TextBox 28"/>
+              <a:t>Agent Behavior Comm — 12.2%</a:t>
+            </a:r>
+          </a:p>
+        </p:txBody>
+      </p:sp>
+      <p:sp>
+        <p:nvSpPr>
+          <p:cNvPr id="30" name="TextBox 29"/>
           <p:cNvSpPr txBox="1"/>
           <p:nvPr/>
         </p:nvSpPr>
         <p:spPr>
           <a:xfrm>
-            <a:off x="594360" y="6473952"/>
-            <a:ext cx="9144000" cy="320040"/>
+            <a:off x="8080248" y="3063240"/>
+            <a:ext cx="3514344" cy="274320"/>
           </a:xfrm>
           <a:prstGeom prst="rect">
             <a:avLst/>
@@ -7500,6 +8593,384 @@
           <a:p>
             <a:pPr algn="l"/>
             <a:r>
+              <a:rPr sz="1200" b="1" i="0">
+                <a:solidFill>
+                  <a:srgbClr val="1F9A8F"/>
+                </a:solidFill>
+                <a:latin typeface="Calibri"/>
+              </a:rPr>
+              <a:t>TOP 3 SECONDARY DRIVERS</a:t>
+            </a:r>
+          </a:p>
+        </p:txBody>
+      </p:sp>
+      <p:sp>
+        <p:nvSpPr>
+          <p:cNvPr id="31" name="Oval 30"/>
+          <p:cNvSpPr/>
+          <p:nvPr/>
+        </p:nvSpPr>
+        <p:spPr>
+          <a:xfrm>
+            <a:off x="8080248" y="3447288"/>
+            <a:ext cx="237744" cy="237744"/>
+          </a:xfrm>
+          <a:prstGeom prst="ellipse">
+            <a:avLst/>
+          </a:prstGeom>
+          <a:solidFill>
+            <a:srgbClr val="2EC4B6"/>
+          </a:solidFill>
+          <a:ln>
+            <a:noFill/>
+          </a:ln>
+          <a:effectLst/>
+        </p:spPr>
+        <p:style>
+          <a:lnRef idx="1">
+            <a:schemeClr val="accent1"/>
+          </a:lnRef>
+          <a:fillRef idx="3">
+            <a:schemeClr val="accent1"/>
+          </a:fillRef>
+          <a:effectRef idx="2">
+            <a:schemeClr val="accent1"/>
+          </a:effectRef>
+          <a:fontRef idx="minor">
+            <a:schemeClr val="lt1"/>
+          </a:fontRef>
+        </p:style>
+        <p:txBody>
+          <a:bodyPr rtlCol="0" anchor="ctr"/>
+          <a:lstStyle/>
+          <a:p>
+            <a:pPr algn="ctr"/>
+            <a:r>
+              <a:rPr sz="1200" b="1">
+                <a:solidFill>
+                  <a:srgbClr val="FFFFFF"/>
+                </a:solidFill>
+                <a:latin typeface="Calibri"/>
+              </a:rPr>
+              <a:t>1</a:t>
+            </a:r>
+          </a:p>
+        </p:txBody>
+      </p:sp>
+      <p:sp>
+        <p:nvSpPr>
+          <p:cNvPr id="32" name="TextBox 31"/>
+          <p:cNvSpPr txBox="1"/>
+          <p:nvPr/>
+        </p:nvSpPr>
+        <p:spPr>
+          <a:xfrm>
+            <a:off x="8409432" y="3429000"/>
+            <a:ext cx="3185160" cy="329184"/>
+          </a:xfrm>
+          <a:prstGeom prst="rect">
+            <a:avLst/>
+          </a:prstGeom>
+          <a:noFill/>
+        </p:spPr>
+        <p:txBody>
+          <a:bodyPr wrap="square">
+            <a:spAutoFit/>
+          </a:bodyPr>
+          <a:lstStyle/>
+          <a:p>
+            <a:pPr algn="l"/>
+            <a:r>
+              <a:rPr sz="1300" b="0" i="0">
+                <a:solidFill>
+                  <a:srgbClr val="202633"/>
+                </a:solidFill>
+                <a:latin typeface="Calibri"/>
+              </a:rPr>
+              <a:t>Duplicate Charge — 4.6%</a:t>
+            </a:r>
+          </a:p>
+        </p:txBody>
+      </p:sp>
+      <p:sp>
+        <p:nvSpPr>
+          <p:cNvPr id="33" name="Oval 32"/>
+          <p:cNvSpPr/>
+          <p:nvPr/>
+        </p:nvSpPr>
+        <p:spPr>
+          <a:xfrm>
+            <a:off x="8080248" y="3831336"/>
+            <a:ext cx="237744" cy="237744"/>
+          </a:xfrm>
+          <a:prstGeom prst="ellipse">
+            <a:avLst/>
+          </a:prstGeom>
+          <a:solidFill>
+            <a:srgbClr val="2EC4B6"/>
+          </a:solidFill>
+          <a:ln>
+            <a:noFill/>
+          </a:ln>
+          <a:effectLst/>
+        </p:spPr>
+        <p:style>
+          <a:lnRef idx="1">
+            <a:schemeClr val="accent1"/>
+          </a:lnRef>
+          <a:fillRef idx="3">
+            <a:schemeClr val="accent1"/>
+          </a:fillRef>
+          <a:effectRef idx="2">
+            <a:schemeClr val="accent1"/>
+          </a:effectRef>
+          <a:fontRef idx="minor">
+            <a:schemeClr val="lt1"/>
+          </a:fontRef>
+        </p:style>
+        <p:txBody>
+          <a:bodyPr rtlCol="0" anchor="ctr"/>
+          <a:lstStyle/>
+          <a:p>
+            <a:pPr algn="ctr"/>
+            <a:r>
+              <a:rPr sz="1200" b="1">
+                <a:solidFill>
+                  <a:srgbClr val="FFFFFF"/>
+                </a:solidFill>
+                <a:latin typeface="Calibri"/>
+              </a:rPr>
+              <a:t>2</a:t>
+            </a:r>
+          </a:p>
+        </p:txBody>
+      </p:sp>
+      <p:sp>
+        <p:nvSpPr>
+          <p:cNvPr id="34" name="TextBox 33"/>
+          <p:cNvSpPr txBox="1"/>
+          <p:nvPr/>
+        </p:nvSpPr>
+        <p:spPr>
+          <a:xfrm>
+            <a:off x="8409432" y="3813048"/>
+            <a:ext cx="3185160" cy="329184"/>
+          </a:xfrm>
+          <a:prstGeom prst="rect">
+            <a:avLst/>
+          </a:prstGeom>
+          <a:noFill/>
+        </p:spPr>
+        <p:txBody>
+          <a:bodyPr wrap="square">
+            <a:spAutoFit/>
+          </a:bodyPr>
+          <a:lstStyle/>
+          <a:p>
+            <a:pPr algn="l"/>
+            <a:r>
+              <a:rPr sz="1300" b="0" i="0">
+                <a:solidFill>
+                  <a:srgbClr val="202633"/>
+                </a:solidFill>
+                <a:latin typeface="Calibri"/>
+              </a:rPr>
+              <a:t>GST/Tax Confusion — 4.3%</a:t>
+            </a:r>
+          </a:p>
+        </p:txBody>
+      </p:sp>
+      <p:sp>
+        <p:nvSpPr>
+          <p:cNvPr id="35" name="Oval 34"/>
+          <p:cNvSpPr/>
+          <p:nvPr/>
+        </p:nvSpPr>
+        <p:spPr>
+          <a:xfrm>
+            <a:off x="8080248" y="4215384"/>
+            <a:ext cx="237744" cy="237744"/>
+          </a:xfrm>
+          <a:prstGeom prst="ellipse">
+            <a:avLst/>
+          </a:prstGeom>
+          <a:solidFill>
+            <a:srgbClr val="2EC4B6"/>
+          </a:solidFill>
+          <a:ln>
+            <a:noFill/>
+          </a:ln>
+          <a:effectLst/>
+        </p:spPr>
+        <p:style>
+          <a:lnRef idx="1">
+            <a:schemeClr val="accent1"/>
+          </a:lnRef>
+          <a:fillRef idx="3">
+            <a:schemeClr val="accent1"/>
+          </a:fillRef>
+          <a:effectRef idx="2">
+            <a:schemeClr val="accent1"/>
+          </a:effectRef>
+          <a:fontRef idx="minor">
+            <a:schemeClr val="lt1"/>
+          </a:fontRef>
+        </p:style>
+        <p:txBody>
+          <a:bodyPr rtlCol="0" anchor="ctr"/>
+          <a:lstStyle/>
+          <a:p>
+            <a:pPr algn="ctr"/>
+            <a:r>
+              <a:rPr sz="1200" b="1">
+                <a:solidFill>
+                  <a:srgbClr val="FFFFFF"/>
+                </a:solidFill>
+                <a:latin typeface="Calibri"/>
+              </a:rPr>
+              <a:t>3</a:t>
+            </a:r>
+          </a:p>
+        </p:txBody>
+      </p:sp>
+      <p:sp>
+        <p:nvSpPr>
+          <p:cNvPr id="36" name="TextBox 35"/>
+          <p:cNvSpPr txBox="1"/>
+          <p:nvPr/>
+        </p:nvSpPr>
+        <p:spPr>
+          <a:xfrm>
+            <a:off x="8409432" y="4197096"/>
+            <a:ext cx="3185160" cy="329184"/>
+          </a:xfrm>
+          <a:prstGeom prst="rect">
+            <a:avLst/>
+          </a:prstGeom>
+          <a:noFill/>
+        </p:spPr>
+        <p:txBody>
+          <a:bodyPr wrap="square">
+            <a:spAutoFit/>
+          </a:bodyPr>
+          <a:lstStyle/>
+          <a:p>
+            <a:pPr algn="l"/>
+            <a:r>
+              <a:rPr sz="1300" b="0" i="0">
+                <a:solidFill>
+                  <a:srgbClr val="202633"/>
+                </a:solidFill>
+                <a:latin typeface="Calibri"/>
+              </a:rPr>
+              <a:t>Incorrect Late Fee — 4.2%</a:t>
+            </a:r>
+          </a:p>
+        </p:txBody>
+      </p:sp>
+      <p:sp>
+        <p:nvSpPr>
+          <p:cNvPr id="37" name="Oval 36"/>
+          <p:cNvSpPr/>
+          <p:nvPr/>
+        </p:nvSpPr>
+        <p:spPr>
+          <a:xfrm>
+            <a:off x="594360" y="5330952"/>
+            <a:ext cx="128016" cy="128016"/>
+          </a:xfrm>
+          <a:prstGeom prst="ellipse">
+            <a:avLst/>
+          </a:prstGeom>
+          <a:solidFill>
+            <a:srgbClr val="2EC4B6"/>
+          </a:solidFill>
+          <a:ln>
+            <a:noFill/>
+          </a:ln>
+          <a:effectLst/>
+        </p:spPr>
+        <p:style>
+          <a:lnRef idx="1">
+            <a:schemeClr val="accent1"/>
+          </a:lnRef>
+          <a:fillRef idx="3">
+            <a:schemeClr val="accent1"/>
+          </a:fillRef>
+          <a:effectRef idx="2">
+            <a:schemeClr val="accent1"/>
+          </a:effectRef>
+          <a:fontRef idx="minor">
+            <a:schemeClr val="lt1"/>
+          </a:fontRef>
+        </p:style>
+        <p:txBody>
+          <a:bodyPr rtlCol="0" anchor="ctr"/>
+          <a:lstStyle/>
+          <a:p>
+            <a:pPr algn="ctr"/>
+          </a:p>
+        </p:txBody>
+      </p:sp>
+      <p:sp>
+        <p:nvSpPr>
+          <p:cNvPr id="38" name="TextBox 37"/>
+          <p:cNvSpPr txBox="1"/>
+          <p:nvPr/>
+        </p:nvSpPr>
+        <p:spPr>
+          <a:xfrm>
+            <a:off x="914400" y="5257800"/>
+            <a:ext cx="10561320" cy="548640"/>
+          </a:xfrm>
+          <a:prstGeom prst="rect">
+            <a:avLst/>
+          </a:prstGeom>
+          <a:noFill/>
+        </p:spPr>
+        <p:txBody>
+          <a:bodyPr wrap="square">
+            <a:spAutoFit/>
+          </a:bodyPr>
+          <a:lstStyle/>
+          <a:p>
+            <a:pPr algn="l"/>
+            <a:r>
+              <a:rPr sz="1450" b="0" i="0">
+                <a:solidFill>
+                  <a:srgbClr val="202633"/>
+                </a:solidFill>
+                <a:latin typeface="Calibri"/>
+              </a:rPr>
+              <a:t>Agents with less than 6 months' tenure skew toward the lowest-CSAT bucket (&lt;6 months) - a coaching signal alongside the process fix.</a:t>
+            </a:r>
+          </a:p>
+        </p:txBody>
+      </p:sp>
+      <p:sp>
+        <p:nvSpPr>
+          <p:cNvPr id="39" name="TextBox 38"/>
+          <p:cNvSpPr txBox="1"/>
+          <p:nvPr/>
+        </p:nvSpPr>
+        <p:spPr>
+          <a:xfrm>
+            <a:off x="594360" y="6473952"/>
+            <a:ext cx="9144000" cy="320040"/>
+          </a:xfrm>
+          <a:prstGeom prst="rect">
+            <a:avLst/>
+          </a:prstGeom>
+          <a:noFill/>
+        </p:spPr>
+        <p:txBody>
+          <a:bodyPr wrap="square">
+            <a:spAutoFit/>
+          </a:bodyPr>
+          <a:lstStyle/>
+          <a:p>
+            <a:pPr algn="l"/>
+            <a:r>
               <a:rPr sz="1000" b="0" i="0">
                 <a:solidFill>
                   <a:srgbClr val="5A6B7D"/>
@@ -7513,7 +8984,7 @@
       </p:sp>
       <p:sp>
         <p:nvSpPr>
-          <p:cNvPr id="30" name="TextBox 29"/>
+          <p:cNvPr id="40" name="TextBox 39"/>
           <p:cNvSpPr txBox="1"/>
           <p:nvPr/>
         </p:nvSpPr>
@@ -7609,67 +9080,14 @@
       </p:sp>
       <p:sp>
         <p:nvSpPr>
-          <p:cNvPr id="3" name="Oval 2"/>
-          <p:cNvSpPr/>
-          <p:nvPr/>
-        </p:nvSpPr>
-        <p:spPr>
-          <a:xfrm>
-            <a:off x="594360" y="1737360"/>
-            <a:ext cx="457200" cy="457200"/>
-          </a:xfrm>
-          <a:prstGeom prst="ellipse">
-            <a:avLst/>
-          </a:prstGeom>
-          <a:solidFill>
-            <a:srgbClr val="2EC4B6"/>
-          </a:solidFill>
-          <a:ln>
-            <a:noFill/>
-          </a:ln>
-          <a:effectLst/>
-        </p:spPr>
-        <p:style>
-          <a:lnRef idx="1">
-            <a:schemeClr val="accent1"/>
-          </a:lnRef>
-          <a:fillRef idx="3">
-            <a:schemeClr val="accent1"/>
-          </a:fillRef>
-          <a:effectRef idx="2">
-            <a:schemeClr val="accent1"/>
-          </a:effectRef>
-          <a:fontRef idx="minor">
-            <a:schemeClr val="lt1"/>
-          </a:fontRef>
-        </p:style>
-        <p:txBody>
-          <a:bodyPr rtlCol="0" anchor="ctr"/>
-          <a:lstStyle/>
-          <a:p>
-            <a:pPr algn="ctr"/>
-            <a:r>
-              <a:rPr sz="1800" b="1">
-                <a:solidFill>
-                  <a:srgbClr val="1B2A4A"/>
-                </a:solidFill>
-                <a:latin typeface="Calibri"/>
-              </a:rPr>
-              <a:t>1</a:t>
-            </a:r>
-          </a:p>
-        </p:txBody>
-      </p:sp>
-      <p:sp>
-        <p:nvSpPr>
-          <p:cNvPr id="4" name="TextBox 3"/>
+          <p:cNvPr id="3" name="TextBox 2"/>
           <p:cNvSpPr txBox="1"/>
           <p:nvPr/>
         </p:nvSpPr>
         <p:spPr>
           <a:xfrm>
-            <a:off x="1280160" y="1709928"/>
-            <a:ext cx="10287000" cy="1325880"/>
+            <a:off x="594360" y="1691640"/>
+            <a:ext cx="3505200" cy="274320"/>
           </a:xfrm>
           <a:prstGeom prst="rect">
             <a:avLst/>
@@ -7682,97 +9100,29 @@
           </a:bodyPr>
           <a:lstStyle/>
           <a:p>
-            <a:r>
-              <a:rPr sz="1800" b="1">
-                <a:solidFill>
-                  <a:srgbClr val="FFFFFF"/>
-                </a:solidFill>
-                <a:latin typeface="Calibri"/>
-              </a:rPr>
-              <a:t>Fix #1: Billing Charges</a:t>
-            </a:r>
-          </a:p>
-          <a:p>
-            <a:pPr>
-              <a:spcBef>
-                <a:spcPts val="400"/>
-              </a:spcBef>
-            </a:pPr>
-            <a:r>
-              <a:rPr sz="1450">
-                <a:solidFill>
-                  <a:srgbClr val="D7DEE8"/>
-                </a:solidFill>
-                <a:latin typeface="Calibri"/>
-              </a:rPr>
-              <a:t>The single biggest, lowest-scoring driver, concentrated and compounding with “Duplicate Charge” in 22% of its own complaints.</a:t>
-            </a:r>
-          </a:p>
-        </p:txBody>
-      </p:sp>
-      <p:sp>
-        <p:nvSpPr>
-          <p:cNvPr id="5" name="Oval 4"/>
-          <p:cNvSpPr/>
-          <p:nvPr/>
-        </p:nvSpPr>
-        <p:spPr>
-          <a:xfrm>
-            <a:off x="594360" y="3063240"/>
-            <a:ext cx="457200" cy="457200"/>
-          </a:xfrm>
-          <a:prstGeom prst="ellipse">
-            <a:avLst/>
-          </a:prstGeom>
-          <a:solidFill>
-            <a:srgbClr val="2EC4B6"/>
-          </a:solidFill>
-          <a:ln>
-            <a:noFill/>
-          </a:ln>
-          <a:effectLst/>
-        </p:spPr>
-        <p:style>
-          <a:lnRef idx="1">
-            <a:schemeClr val="accent1"/>
-          </a:lnRef>
-          <a:fillRef idx="3">
-            <a:schemeClr val="accent1"/>
-          </a:fillRef>
-          <a:effectRef idx="2">
-            <a:schemeClr val="accent1"/>
-          </a:effectRef>
-          <a:fontRef idx="minor">
-            <a:schemeClr val="lt1"/>
-          </a:fontRef>
-        </p:style>
-        <p:txBody>
-          <a:bodyPr rtlCol="0" anchor="ctr"/>
-          <a:lstStyle/>
-          <a:p>
-            <a:pPr algn="ctr"/>
-            <a:r>
-              <a:rPr sz="1800" b="1">
-                <a:solidFill>
-                  <a:srgbClr val="1B2A4A"/>
-                </a:solidFill>
-                <a:latin typeface="Calibri"/>
-              </a:rPr>
-              <a:t>2</a:t>
-            </a:r>
-          </a:p>
-        </p:txBody>
-      </p:sp>
-      <p:sp>
-        <p:nvSpPr>
-          <p:cNvPr id="6" name="TextBox 5"/>
+            <a:pPr algn="l"/>
+            <a:r>
+              <a:rPr sz="1200" b="1" i="0">
+                <a:solidFill>
+                  <a:srgbClr val="2EC4B6"/>
+                </a:solidFill>
+                <a:latin typeface="Calibri"/>
+              </a:rPr>
+              <a:t>RECOMMENDATION</a:t>
+            </a:r>
+          </a:p>
+        </p:txBody>
+      </p:sp>
+      <p:sp>
+        <p:nvSpPr>
+          <p:cNvPr id="4" name="TextBox 3"/>
           <p:cNvSpPr txBox="1"/>
           <p:nvPr/>
         </p:nvSpPr>
         <p:spPr>
           <a:xfrm>
-            <a:off x="1280160" y="3035808"/>
-            <a:ext cx="10287000" cy="1325880"/>
+            <a:off x="4328160" y="1691640"/>
+            <a:ext cx="3505200" cy="274320"/>
           </a:xfrm>
           <a:prstGeom prst="rect">
             <a:avLst/>
@@ -7785,97 +9135,29 @@
           </a:bodyPr>
           <a:lstStyle/>
           <a:p>
-            <a:r>
-              <a:rPr sz="1800" b="1">
-                <a:solidFill>
-                  <a:srgbClr val="FFFFFF"/>
-                </a:solidFill>
-                <a:latin typeface="Calibri"/>
-              </a:rPr>
-              <a:t>Fix #2: Coach agents under 6 months' tenure</a:t>
-            </a:r>
-          </a:p>
-          <a:p>
-            <a:pPr>
-              <a:spcBef>
-                <a:spcPts val="400"/>
-              </a:spcBef>
-            </a:pPr>
-            <a:r>
-              <a:rPr sz="1450">
-                <a:solidFill>
-                  <a:srgbClr val="D7DEE8"/>
-                </a:solidFill>
-                <a:latin typeface="Calibri"/>
-              </a:rPr>
-              <a:t>This cohort shows the weakest CSAT (&lt;6 months bucket) across the board.</a:t>
-            </a:r>
-          </a:p>
-        </p:txBody>
-      </p:sp>
-      <p:sp>
-        <p:nvSpPr>
-          <p:cNvPr id="7" name="Oval 6"/>
-          <p:cNvSpPr/>
-          <p:nvPr/>
-        </p:nvSpPr>
-        <p:spPr>
-          <a:xfrm>
-            <a:off x="594360" y="4389120"/>
-            <a:ext cx="457200" cy="457200"/>
-          </a:xfrm>
-          <a:prstGeom prst="ellipse">
-            <a:avLst/>
-          </a:prstGeom>
-          <a:solidFill>
-            <a:srgbClr val="2EC4B6"/>
-          </a:solidFill>
-          <a:ln>
-            <a:noFill/>
-          </a:ln>
-          <a:effectLst/>
-        </p:spPr>
-        <p:style>
-          <a:lnRef idx="1">
-            <a:schemeClr val="accent1"/>
-          </a:lnRef>
-          <a:fillRef idx="3">
-            <a:schemeClr val="accent1"/>
-          </a:fillRef>
-          <a:effectRef idx="2">
-            <a:schemeClr val="accent1"/>
-          </a:effectRef>
-          <a:fontRef idx="minor">
-            <a:schemeClr val="lt1"/>
-          </a:fontRef>
-        </p:style>
-        <p:txBody>
-          <a:bodyPr rtlCol="0" anchor="ctr"/>
-          <a:lstStyle/>
-          <a:p>
-            <a:pPr algn="ctr"/>
-            <a:r>
-              <a:rPr sz="1800" b="1">
-                <a:solidFill>
-                  <a:srgbClr val="1B2A4A"/>
-                </a:solidFill>
-                <a:latin typeface="Calibri"/>
-              </a:rPr>
-              <a:t>3</a:t>
-            </a:r>
-          </a:p>
-        </p:txBody>
-      </p:sp>
-      <p:sp>
-        <p:nvSpPr>
-          <p:cNvPr id="8" name="TextBox 7"/>
+            <a:pPr algn="l"/>
+            <a:r>
+              <a:rPr sz="1200" b="1" i="0">
+                <a:solidFill>
+                  <a:srgbClr val="2EC4B6"/>
+                </a:solidFill>
+                <a:latin typeface="Calibri"/>
+              </a:rPr>
+              <a:t>WHAT TO DO</a:t>
+            </a:r>
+          </a:p>
+        </p:txBody>
+      </p:sp>
+      <p:sp>
+        <p:nvSpPr>
+          <p:cNvPr id="5" name="TextBox 4"/>
           <p:cNvSpPr txBox="1"/>
           <p:nvPr/>
         </p:nvSpPr>
         <p:spPr>
           <a:xfrm>
-            <a:off x="1280160" y="4361688"/>
-            <a:ext cx="10287000" cy="1325880"/>
+            <a:off x="8061960" y="1691640"/>
+            <a:ext cx="3505200" cy="274320"/>
           </a:xfrm>
           <a:prstGeom prst="rect">
             <a:avLst/>
@@ -7888,30 +9170,120 @@
           </a:bodyPr>
           <a:lstStyle/>
           <a:p>
-            <a:r>
-              <a:rPr sz="1800" b="1">
+            <a:pPr algn="l"/>
+            <a:r>
+              <a:rPr sz="1200" b="1" i="0">
+                <a:solidFill>
+                  <a:srgbClr val="2EC4B6"/>
+                </a:solidFill>
+                <a:latin typeface="Calibri"/>
+              </a:rPr>
+              <a:t>EXPECTED OUTCOME</a:t>
+            </a:r>
+          </a:p>
+        </p:txBody>
+      </p:sp>
+      <p:cxnSp>
+        <p:nvCxnSpPr>
+          <p:cNvPr id="6" name="Connector 5"/>
+          <p:cNvCxnSpPr/>
+          <p:nvPr/>
+        </p:nvCxnSpPr>
+        <p:spPr>
+          <a:xfrm>
+            <a:off x="594360" y="2057400"/>
+            <a:ext cx="10972800" cy="0"/>
+          </a:xfrm>
+          <a:prstGeom prst="line">
+            <a:avLst/>
+          </a:prstGeom>
+          <a:ln w="12700">
+            <a:solidFill>
+              <a:srgbClr val="2B3C5E"/>
+            </a:solidFill>
+          </a:ln>
+        </p:spPr>
+        <p:style>
+          <a:lnRef idx="2">
+            <a:schemeClr val="accent1"/>
+          </a:lnRef>
+          <a:fillRef idx="0">
+            <a:schemeClr val="accent1"/>
+          </a:fillRef>
+          <a:effectRef idx="1">
+            <a:schemeClr val="accent1"/>
+          </a:effectRef>
+          <a:fontRef idx="minor">
+            <a:schemeClr val="tx1"/>
+          </a:fontRef>
+        </p:style>
+      </p:cxnSp>
+      <p:sp>
+        <p:nvSpPr>
+          <p:cNvPr id="7" name="TextBox 6"/>
+          <p:cNvSpPr txBox="1"/>
+          <p:nvPr/>
+        </p:nvSpPr>
+        <p:spPr>
+          <a:xfrm>
+            <a:off x="594360" y="2194560"/>
+            <a:ext cx="3505200" cy="1280160"/>
+          </a:xfrm>
+          <a:prstGeom prst="rect">
+            <a:avLst/>
+          </a:prstGeom>
+          <a:noFill/>
+        </p:spPr>
+        <p:txBody>
+          <a:bodyPr wrap="square">
+            <a:spAutoFit/>
+          </a:bodyPr>
+          <a:lstStyle/>
+          <a:p>
+            <a:pPr algn="l"/>
+            <a:r>
+              <a:rPr sz="1500" b="1" i="0">
+                <a:solidFill>
+                  <a:srgbClr val="2EC4B6"/>
+                </a:solidFill>
+                <a:latin typeface="Calibri"/>
+              </a:rPr>
+              <a:t>Fix #1: Billing Charges</a:t>
+            </a:r>
+          </a:p>
+        </p:txBody>
+      </p:sp>
+      <p:sp>
+        <p:nvSpPr>
+          <p:cNvPr id="8" name="TextBox 7"/>
+          <p:cNvSpPr txBox="1"/>
+          <p:nvPr/>
+        </p:nvSpPr>
+        <p:spPr>
+          <a:xfrm>
+            <a:off x="4328160" y="2194560"/>
+            <a:ext cx="3505200" cy="1280160"/>
+          </a:xfrm>
+          <a:prstGeom prst="rect">
+            <a:avLst/>
+          </a:prstGeom>
+          <a:noFill/>
+        </p:spPr>
+        <p:txBody>
+          <a:bodyPr wrap="square">
+            <a:spAutoFit/>
+          </a:bodyPr>
+          <a:lstStyle/>
+          <a:p>
+            <a:pPr algn="l"/>
+            <a:r>
+              <a:rPr sz="1300" b="0" i="0">
                 <a:solidFill>
                   <a:srgbClr val="FFFFFF"/>
                 </a:solidFill>
                 <a:latin typeface="Calibri"/>
               </a:rPr>
-              <a:t>Next step: Validate &amp; track</a:t>
-            </a:r>
-          </a:p>
-          <a:p>
-            <a:pPr>
-              <a:spcBef>
-                <a:spcPts val="400"/>
-              </a:spcBef>
-            </a:pPr>
-            <a:r>
-              <a:rPr sz="1450">
-                <a:solidFill>
-                  <a:srgbClr val="D7DEE8"/>
-                </a:solidFill>
-                <a:latin typeface="Calibri"/>
-              </a:rPr>
-              <a:t>Validate this taxonomy against a sample of real customer verbatim, then track the top driver's weekly trend (already built into the workbook) as fixes roll out.</a:t>
+              <a:t>Investigate “Duplicate Charge” specifically — the single most common, named sub-issue, not a vague theme.</a:t>
             </a:r>
           </a:p>
         </p:txBody>
@@ -7924,7 +9296,322 @@
         </p:nvSpPr>
         <p:spPr>
           <a:xfrm>
-            <a:off x="594360" y="6309360"/>
+            <a:off x="8061960" y="2194560"/>
+            <a:ext cx="3505200" cy="1280160"/>
+          </a:xfrm>
+          <a:prstGeom prst="rect">
+            <a:avLst/>
+          </a:prstGeom>
+          <a:noFill/>
+        </p:spPr>
+        <p:txBody>
+          <a:bodyPr wrap="square">
+            <a:spAutoFit/>
+          </a:bodyPr>
+          <a:lstStyle/>
+          <a:p>
+            <a:pPr algn="l"/>
+            <a:r>
+              <a:rPr sz="1300" b="0" i="0">
+                <a:solidFill>
+                  <a:srgbClr val="D7DEE8"/>
+                </a:solidFill>
+                <a:latin typeface="Calibri"/>
+              </a:rPr>
+              <a:t>Removes the highest-volume, lowest-CSAT driver (avg CSAT 2.51) from the table.</a:t>
+            </a:r>
+          </a:p>
+        </p:txBody>
+      </p:sp>
+      <p:cxnSp>
+        <p:nvCxnSpPr>
+          <p:cNvPr id="10" name="Connector 9"/>
+          <p:cNvCxnSpPr/>
+          <p:nvPr/>
+        </p:nvCxnSpPr>
+        <p:spPr>
+          <a:xfrm>
+            <a:off x="594360" y="3383280"/>
+            <a:ext cx="10972800" cy="0"/>
+          </a:xfrm>
+          <a:prstGeom prst="line">
+            <a:avLst/>
+          </a:prstGeom>
+          <a:ln w="6350">
+            <a:solidFill>
+              <a:srgbClr val="2B3C5E"/>
+            </a:solidFill>
+          </a:ln>
+        </p:spPr>
+        <p:style>
+          <a:lnRef idx="2">
+            <a:schemeClr val="accent1"/>
+          </a:lnRef>
+          <a:fillRef idx="0">
+            <a:schemeClr val="accent1"/>
+          </a:fillRef>
+          <a:effectRef idx="1">
+            <a:schemeClr val="accent1"/>
+          </a:effectRef>
+          <a:fontRef idx="minor">
+            <a:schemeClr val="tx1"/>
+          </a:fontRef>
+        </p:style>
+      </p:cxnSp>
+      <p:sp>
+        <p:nvSpPr>
+          <p:cNvPr id="11" name="TextBox 10"/>
+          <p:cNvSpPr txBox="1"/>
+          <p:nvPr/>
+        </p:nvSpPr>
+        <p:spPr>
+          <a:xfrm>
+            <a:off x="594360" y="3474720"/>
+            <a:ext cx="3505200" cy="1280160"/>
+          </a:xfrm>
+          <a:prstGeom prst="rect">
+            <a:avLst/>
+          </a:prstGeom>
+          <a:noFill/>
+        </p:spPr>
+        <p:txBody>
+          <a:bodyPr wrap="square">
+            <a:spAutoFit/>
+          </a:bodyPr>
+          <a:lstStyle/>
+          <a:p>
+            <a:pPr algn="l"/>
+            <a:r>
+              <a:rPr sz="1500" b="1" i="0">
+                <a:solidFill>
+                  <a:srgbClr val="2EC4B6"/>
+                </a:solidFill>
+                <a:latin typeface="Calibri"/>
+              </a:rPr>
+              <a:t>Fix #2: Coach newer agents</a:t>
+            </a:r>
+          </a:p>
+        </p:txBody>
+      </p:sp>
+      <p:sp>
+        <p:nvSpPr>
+          <p:cNvPr id="12" name="TextBox 11"/>
+          <p:cNvSpPr txBox="1"/>
+          <p:nvPr/>
+        </p:nvSpPr>
+        <p:spPr>
+          <a:xfrm>
+            <a:off x="4328160" y="3474720"/>
+            <a:ext cx="3505200" cy="1280160"/>
+          </a:xfrm>
+          <a:prstGeom prst="rect">
+            <a:avLst/>
+          </a:prstGeom>
+          <a:noFill/>
+        </p:spPr>
+        <p:txBody>
+          <a:bodyPr wrap="square">
+            <a:spAutoFit/>
+          </a:bodyPr>
+          <a:lstStyle/>
+          <a:p>
+            <a:pPr algn="l"/>
+            <a:r>
+              <a:rPr sz="1300" b="0" i="0">
+                <a:solidFill>
+                  <a:srgbClr val="FFFFFF"/>
+                </a:solidFill>
+                <a:latin typeface="Calibri"/>
+              </a:rPr>
+              <a:t>Target coaching at agents under 6 months' tenure — this cohort skews toward the weakest CSAT bucket.</a:t>
+            </a:r>
+          </a:p>
+        </p:txBody>
+      </p:sp>
+      <p:sp>
+        <p:nvSpPr>
+          <p:cNvPr id="13" name="TextBox 12"/>
+          <p:cNvSpPr txBox="1"/>
+          <p:nvPr/>
+        </p:nvSpPr>
+        <p:spPr>
+          <a:xfrm>
+            <a:off x="8061960" y="3474720"/>
+            <a:ext cx="3505200" cy="1280160"/>
+          </a:xfrm>
+          <a:prstGeom prst="rect">
+            <a:avLst/>
+          </a:prstGeom>
+          <a:noFill/>
+        </p:spPr>
+        <p:txBody>
+          <a:bodyPr wrap="square">
+            <a:spAutoFit/>
+          </a:bodyPr>
+          <a:lstStyle/>
+          <a:p>
+            <a:pPr algn="l"/>
+            <a:r>
+              <a:rPr sz="1300" b="0" i="0">
+                <a:solidFill>
+                  <a:srgbClr val="D7DEE8"/>
+                </a:solidFill>
+                <a:latin typeface="Calibri"/>
+              </a:rPr>
+              <a:t>Lifts Agent Behavior &amp; Communication scores, a top-volume driver.</a:t>
+            </a:r>
+          </a:p>
+        </p:txBody>
+      </p:sp>
+      <p:cxnSp>
+        <p:nvCxnSpPr>
+          <p:cNvPr id="14" name="Connector 13"/>
+          <p:cNvCxnSpPr/>
+          <p:nvPr/>
+        </p:nvCxnSpPr>
+        <p:spPr>
+          <a:xfrm>
+            <a:off x="594360" y="4663440"/>
+            <a:ext cx="10972800" cy="0"/>
+          </a:xfrm>
+          <a:prstGeom prst="line">
+            <a:avLst/>
+          </a:prstGeom>
+          <a:ln w="6350">
+            <a:solidFill>
+              <a:srgbClr val="2B3C5E"/>
+            </a:solidFill>
+          </a:ln>
+        </p:spPr>
+        <p:style>
+          <a:lnRef idx="2">
+            <a:schemeClr val="accent1"/>
+          </a:lnRef>
+          <a:fillRef idx="0">
+            <a:schemeClr val="accent1"/>
+          </a:fillRef>
+          <a:effectRef idx="1">
+            <a:schemeClr val="accent1"/>
+          </a:effectRef>
+          <a:fontRef idx="minor">
+            <a:schemeClr val="tx1"/>
+          </a:fontRef>
+        </p:style>
+      </p:cxnSp>
+      <p:sp>
+        <p:nvSpPr>
+          <p:cNvPr id="15" name="TextBox 14"/>
+          <p:cNvSpPr txBox="1"/>
+          <p:nvPr/>
+        </p:nvSpPr>
+        <p:spPr>
+          <a:xfrm>
+            <a:off x="594360" y="4754880"/>
+            <a:ext cx="3505200" cy="1280160"/>
+          </a:xfrm>
+          <a:prstGeom prst="rect">
+            <a:avLst/>
+          </a:prstGeom>
+          <a:noFill/>
+        </p:spPr>
+        <p:txBody>
+          <a:bodyPr wrap="square">
+            <a:spAutoFit/>
+          </a:bodyPr>
+          <a:lstStyle/>
+          <a:p>
+            <a:pPr algn="l"/>
+            <a:r>
+              <a:rPr sz="1500" b="1" i="0">
+                <a:solidFill>
+                  <a:srgbClr val="2EC4B6"/>
+                </a:solidFill>
+                <a:latin typeface="Calibri"/>
+              </a:rPr>
+              <a:t>Next: Validate &amp; track</a:t>
+            </a:r>
+          </a:p>
+        </p:txBody>
+      </p:sp>
+      <p:sp>
+        <p:nvSpPr>
+          <p:cNvPr id="16" name="TextBox 15"/>
+          <p:cNvSpPr txBox="1"/>
+          <p:nvPr/>
+        </p:nvSpPr>
+        <p:spPr>
+          <a:xfrm>
+            <a:off x="4328160" y="4754880"/>
+            <a:ext cx="3505200" cy="1280160"/>
+          </a:xfrm>
+          <a:prstGeom prst="rect">
+            <a:avLst/>
+          </a:prstGeom>
+          <a:noFill/>
+        </p:spPr>
+        <p:txBody>
+          <a:bodyPr wrap="square">
+            <a:spAutoFit/>
+          </a:bodyPr>
+          <a:lstStyle/>
+          <a:p>
+            <a:pPr algn="l"/>
+            <a:r>
+              <a:rPr sz="1300" b="0" i="0">
+                <a:solidFill>
+                  <a:srgbClr val="FFFFFF"/>
+                </a:solidFill>
+                <a:latin typeface="Calibri"/>
+              </a:rPr>
+              <a:t>Validate the taxonomy against real customer verbatim, then track the top driver's weekly trend already built into the workbook.</a:t>
+            </a:r>
+          </a:p>
+        </p:txBody>
+      </p:sp>
+      <p:sp>
+        <p:nvSpPr>
+          <p:cNvPr id="17" name="TextBox 16"/>
+          <p:cNvSpPr txBox="1"/>
+          <p:nvPr/>
+        </p:nvSpPr>
+        <p:spPr>
+          <a:xfrm>
+            <a:off x="8061960" y="4754880"/>
+            <a:ext cx="3505200" cy="1280160"/>
+          </a:xfrm>
+          <a:prstGeom prst="rect">
+            <a:avLst/>
+          </a:prstGeom>
+          <a:noFill/>
+        </p:spPr>
+        <p:txBody>
+          <a:bodyPr wrap="square">
+            <a:spAutoFit/>
+          </a:bodyPr>
+          <a:lstStyle/>
+          <a:p>
+            <a:pPr algn="l"/>
+            <a:r>
+              <a:rPr sz="1300" b="0" i="0">
+                <a:solidFill>
+                  <a:srgbClr val="D7DEE8"/>
+                </a:solidFill>
+                <a:latin typeface="Calibri"/>
+              </a:rPr>
+              <a:t>Confirms the fix is working with real data, not a one-time snapshot.</a:t>
+            </a:r>
+          </a:p>
+        </p:txBody>
+      </p:sp>
+      <p:sp>
+        <p:nvSpPr>
+          <p:cNvPr id="18" name="TextBox 17"/>
+          <p:cNvSpPr txBox="1"/>
+          <p:nvPr/>
+        </p:nvSpPr>
+        <p:spPr>
+          <a:xfrm>
+            <a:off x="594360" y="6355080"/>
             <a:ext cx="10058400" cy="365760"/>
           </a:xfrm>
           <a:prstGeom prst="rect">

--- a/usecase1_csat_nlp_rootcause/final_output/usecase1_csat_summary.pptx
+++ b/usecase1_csat_nlp_rootcause/final_output/usecase1_csat_summary.pptx
@@ -5174,7 +5174,7 @@
         </p:nvSpPr>
         <p:spPr>
           <a:xfrm>
-            <a:off x="594360" y="1417320"/>
+            <a:off x="594360" y="1371600"/>
             <a:ext cx="292608" cy="292608"/>
           </a:xfrm>
           <a:prstGeom prst="ellipse">
@@ -5227,7 +5227,7 @@
         </p:nvSpPr>
         <p:spPr>
           <a:xfrm>
-            <a:off x="978408" y="1399032"/>
+            <a:off x="978408" y="1353312"/>
             <a:ext cx="4828032" cy="292608"/>
           </a:xfrm>
           <a:prstGeom prst="rect">
@@ -5249,20 +5249,55 @@
                 </a:solidFill>
                 <a:latin typeface="Calibri"/>
               </a:rPr>
-              <a:t>Bootstrap dictionary</a:t>
-            </a:r>
-          </a:p>
-        </p:txBody>
-      </p:sp>
-      <p:sp>
-        <p:nvSpPr>
-          <p:cNvPr id="7" name="Oval 6"/>
+              <a:t>Load &amp; clean data</a:t>
+            </a:r>
+          </a:p>
+        </p:txBody>
+      </p:sp>
+      <p:sp>
+        <p:nvSpPr>
+          <p:cNvPr id="7" name="TextBox 6"/>
+          <p:cNvSpPr txBox="1"/>
+          <p:nvPr/>
+        </p:nvSpPr>
+        <p:spPr>
+          <a:xfrm>
+            <a:off x="649224" y="1700784"/>
+            <a:ext cx="5157216" cy="182880"/>
+          </a:xfrm>
+          <a:prstGeom prst="rect">
+            <a:avLst/>
+          </a:prstGeom>
+          <a:noFill/>
+        </p:spPr>
+        <p:txBody>
+          <a:bodyPr wrap="square">
+            <a:spAutoFit/>
+          </a:bodyPr>
+          <a:lstStyle/>
+          <a:p>
+            <a:pPr algn="l"/>
+            <a:r>
+              <a:rPr sz="950" b="1" i="0">
+                <a:solidFill>
+                  <a:srgbClr val="1F9A8F"/>
+                </a:solidFill>
+                <a:latin typeface="Calibri"/>
+              </a:rPr>
+              <a:t>APPROACH</a:t>
+            </a:r>
+          </a:p>
+        </p:txBody>
+      </p:sp>
+      <p:sp>
+        <p:nvSpPr>
+          <p:cNvPr id="8" name="Oval 7"/>
           <p:cNvSpPr/>
           <p:nvPr/>
         </p:nvSpPr>
         <p:spPr>
           <a:xfrm>
-            <a:off x="667512" y="1847088"/>
+            <a:off x="667512" y="1956816"/>
             <a:ext cx="82296" cy="82296"/>
           </a:xfrm>
           <a:prstGeom prst="ellipse">
@@ -5300,14 +5335,14 @@
       </p:sp>
       <p:sp>
         <p:nvSpPr>
-          <p:cNvPr id="8" name="TextBox 7"/>
+          <p:cNvPr id="9" name="TextBox 8"/>
           <p:cNvSpPr txBox="1"/>
           <p:nvPr/>
         </p:nvSpPr>
         <p:spPr>
           <a:xfrm>
-            <a:off x="868680" y="1783080"/>
-            <a:ext cx="4937760" cy="292608"/>
+            <a:off x="868680" y="1901952"/>
+            <a:ext cx="4937760" cy="256032"/>
           </a:xfrm>
           <a:prstGeom prst="rect">
             <a:avLst/>
@@ -5328,20 +5363,20 @@
                 </a:solidFill>
                 <a:latin typeface="Calibri"/>
               </a:rPr>
-              <a:t>Splits term frequency: low-CSAT vs high-CSAT text</a:t>
-            </a:r>
-          </a:p>
-        </p:txBody>
-      </p:sp>
-      <p:sp>
-        <p:nvSpPr>
-          <p:cNvPr id="9" name="Oval 8"/>
+              <a:t>pandas loads the 7,500-row survey export</a:t>
+            </a:r>
+          </a:p>
+        </p:txBody>
+      </p:sp>
+      <p:sp>
+        <p:nvSpPr>
+          <p:cNvPr id="10" name="Oval 9"/>
           <p:cNvSpPr/>
           <p:nvPr/>
         </p:nvSpPr>
         <p:spPr>
           <a:xfrm>
-            <a:off x="667512" y="2157984"/>
+            <a:off x="667512" y="2231136"/>
             <a:ext cx="82296" cy="82296"/>
           </a:xfrm>
           <a:prstGeom prst="ellipse">
@@ -5379,14 +5414,14 @@
       </p:sp>
       <p:sp>
         <p:nvSpPr>
-          <p:cNvPr id="10" name="TextBox 9"/>
+          <p:cNvPr id="11" name="TextBox 10"/>
           <p:cNvSpPr txBox="1"/>
           <p:nvPr/>
         </p:nvSpPr>
         <p:spPr>
           <a:xfrm>
-            <a:off x="868680" y="2093976"/>
-            <a:ext cx="4937760" cy="292608"/>
+            <a:off x="868680" y="2176272"/>
+            <a:ext cx="4937760" cy="256032"/>
           </a:xfrm>
           <a:prstGeom prst="rect">
             <a:avLst/>
@@ -5407,21 +5442,135 @@
                 </a:solidFill>
                 <a:latin typeface="Calibri"/>
               </a:rPr>
-              <a:t>Labels every term's sentiment lean upfront</a:t>
-            </a:r>
-          </a:p>
-        </p:txBody>
-      </p:sp>
-      <p:sp>
-        <p:nvSpPr>
-          <p:cNvPr id="11" name="Oval 10"/>
+              <a:t>Lowercase, strip punctuation, collapse whitespace</a:t>
+            </a:r>
+          </a:p>
+        </p:txBody>
+      </p:sp>
+      <p:sp>
+        <p:nvSpPr>
+          <p:cNvPr id="12" name="TextBox 11"/>
+          <p:cNvSpPr txBox="1"/>
+          <p:nvPr/>
+        </p:nvSpPr>
+        <p:spPr>
+          <a:xfrm>
+            <a:off x="649224" y="2468880"/>
+            <a:ext cx="5157216" cy="182880"/>
+          </a:xfrm>
+          <a:prstGeom prst="rect">
+            <a:avLst/>
+          </a:prstGeom>
+          <a:noFill/>
+        </p:spPr>
+        <p:txBody>
+          <a:bodyPr wrap="square">
+            <a:spAutoFit/>
+          </a:bodyPr>
+          <a:lstStyle/>
+          <a:p>
+            <a:pPr algn="l"/>
+            <a:r>
+              <a:rPr sz="950" b="1" i="0">
+                <a:solidFill>
+                  <a:srgbClr val="1B2A4A"/>
+                </a:solidFill>
+                <a:latin typeface="Calibri"/>
+              </a:rPr>
+              <a:t>OUTPUT</a:t>
+            </a:r>
+          </a:p>
+        </p:txBody>
+      </p:sp>
+      <p:sp>
+        <p:nvSpPr>
+          <p:cNvPr id="13" name="Oval 12"/>
           <p:cNvSpPr/>
           <p:nvPr/>
         </p:nvSpPr>
         <p:spPr>
           <a:xfrm>
-            <a:off x="667512" y="2468880"/>
+            <a:off x="667512" y="2724912"/>
             <a:ext cx="82296" cy="82296"/>
+          </a:xfrm>
+          <a:prstGeom prst="ellipse">
+            <a:avLst/>
+          </a:prstGeom>
+          <a:solidFill>
+            <a:srgbClr val="1B2A4A"/>
+          </a:solidFill>
+          <a:ln>
+            <a:noFill/>
+          </a:ln>
+          <a:effectLst/>
+        </p:spPr>
+        <p:style>
+          <a:lnRef idx="1">
+            <a:schemeClr val="accent1"/>
+          </a:lnRef>
+          <a:fillRef idx="3">
+            <a:schemeClr val="accent1"/>
+          </a:fillRef>
+          <a:effectRef idx="2">
+            <a:schemeClr val="accent1"/>
+          </a:effectRef>
+          <a:fontRef idx="minor">
+            <a:schemeClr val="lt1"/>
+          </a:fontRef>
+        </p:style>
+        <p:txBody>
+          <a:bodyPr rtlCol="0" anchor="ctr"/>
+          <a:lstStyle/>
+          <a:p>
+            <a:pPr algn="ctr"/>
+          </a:p>
+        </p:txBody>
+      </p:sp>
+      <p:sp>
+        <p:nvSpPr>
+          <p:cNvPr id="14" name="TextBox 13"/>
+          <p:cNvSpPr txBox="1"/>
+          <p:nvPr/>
+        </p:nvSpPr>
+        <p:spPr>
+          <a:xfrm>
+            <a:off x="868680" y="2670048"/>
+            <a:ext cx="4937760" cy="256032"/>
+          </a:xfrm>
+          <a:prstGeom prst="rect">
+            <a:avLst/>
+          </a:prstGeom>
+          <a:noFill/>
+        </p:spPr>
+        <p:txBody>
+          <a:bodyPr wrap="square">
+            <a:spAutoFit/>
+          </a:bodyPr>
+          <a:lstStyle/>
+          <a:p>
+            <a:pPr algn="l"/>
+            <a:r>
+              <a:rPr sz="1150" b="1" i="0">
+                <a:solidFill>
+                  <a:srgbClr val="202633"/>
+                </a:solidFill>
+                <a:latin typeface="Calibri"/>
+              </a:rPr>
+              <a:t>A clean_text column every later step reuses</a:t>
+            </a:r>
+          </a:p>
+        </p:txBody>
+      </p:sp>
+      <p:sp>
+        <p:nvSpPr>
+          <p:cNvPr id="15" name="Oval 14"/>
+          <p:cNvSpPr/>
+          <p:nvPr/>
+        </p:nvSpPr>
+        <p:spPr>
+          <a:xfrm>
+            <a:off x="594360" y="2962656"/>
+            <a:ext cx="292608" cy="292608"/>
           </a:xfrm>
           <a:prstGeom prst="ellipse">
             <a:avLst/>
@@ -5453,19 +5602,28 @@
           <a:lstStyle/>
           <a:p>
             <a:pPr algn="ctr"/>
-          </a:p>
-        </p:txBody>
-      </p:sp>
-      <p:sp>
-        <p:nvSpPr>
-          <p:cNvPr id="12" name="TextBox 11"/>
+            <a:r>
+              <a:rPr sz="1400" b="1">
+                <a:solidFill>
+                  <a:srgbClr val="FFFFFF"/>
+                </a:solidFill>
+                <a:latin typeface="Calibri"/>
+              </a:rPr>
+              <a:t>2</a:t>
+            </a:r>
+          </a:p>
+        </p:txBody>
+      </p:sp>
+      <p:sp>
+        <p:nvSpPr>
+          <p:cNvPr id="16" name="TextBox 15"/>
           <p:cNvSpPr txBox="1"/>
           <p:nvPr/>
         </p:nvSpPr>
         <p:spPr>
           <a:xfrm>
-            <a:off x="868680" y="2404872"/>
-            <a:ext cx="4937760" cy="292608"/>
+            <a:off x="978408" y="2944368"/>
+            <a:ext cx="4828032" cy="292608"/>
           </a:xfrm>
           <a:prstGeom prst="rect">
             <a:avLst/>
@@ -5480,26 +5638,61 @@
           <a:p>
             <a:pPr algn="l"/>
             <a:r>
-              <a:rPr sz="1150" b="0" i="0">
-                <a:solidFill>
-                  <a:srgbClr val="202633"/>
-                </a:solidFill>
-                <a:latin typeface="Calibri"/>
-              </a:rPr>
-              <a:t>Produces an inspectable shortlist, not a guess</a:t>
-            </a:r>
-          </a:p>
-        </p:txBody>
-      </p:sp>
-      <p:sp>
-        <p:nvSpPr>
-          <p:cNvPr id="13" name="Oval 12"/>
+              <a:rPr sz="1450" b="1" i="0">
+                <a:solidFill>
+                  <a:srgbClr val="1B2A4A"/>
+                </a:solidFill>
+                <a:latin typeface="Calibri"/>
+              </a:rPr>
+              <a:t>Bootstrap dictionary</a:t>
+            </a:r>
+          </a:p>
+        </p:txBody>
+      </p:sp>
+      <p:sp>
+        <p:nvSpPr>
+          <p:cNvPr id="17" name="TextBox 16"/>
+          <p:cNvSpPr txBox="1"/>
+          <p:nvPr/>
+        </p:nvSpPr>
+        <p:spPr>
+          <a:xfrm>
+            <a:off x="649224" y="3291840"/>
+            <a:ext cx="5157216" cy="182880"/>
+          </a:xfrm>
+          <a:prstGeom prst="rect">
+            <a:avLst/>
+          </a:prstGeom>
+          <a:noFill/>
+        </p:spPr>
+        <p:txBody>
+          <a:bodyPr wrap="square">
+            <a:spAutoFit/>
+          </a:bodyPr>
+          <a:lstStyle/>
+          <a:p>
+            <a:pPr algn="l"/>
+            <a:r>
+              <a:rPr sz="950" b="1" i="0">
+                <a:solidFill>
+                  <a:srgbClr val="1F9A8F"/>
+                </a:solidFill>
+                <a:latin typeface="Calibri"/>
+              </a:rPr>
+              <a:t>APPROACH</a:t>
+            </a:r>
+          </a:p>
+        </p:txBody>
+      </p:sp>
+      <p:sp>
+        <p:nvSpPr>
+          <p:cNvPr id="18" name="Oval 17"/>
           <p:cNvSpPr/>
           <p:nvPr/>
         </p:nvSpPr>
         <p:spPr>
           <a:xfrm>
-            <a:off x="667512" y="2779776"/>
+            <a:off x="667512" y="3547872"/>
             <a:ext cx="82296" cy="82296"/>
           </a:xfrm>
           <a:prstGeom prst="ellipse">
@@ -5537,14 +5730,14 @@
       </p:sp>
       <p:sp>
         <p:nvSpPr>
-          <p:cNvPr id="14" name="TextBox 13"/>
+          <p:cNvPr id="19" name="TextBox 18"/>
           <p:cNvSpPr txBox="1"/>
           <p:nvPr/>
         </p:nvSpPr>
         <p:spPr>
           <a:xfrm>
-            <a:off x="868680" y="2715768"/>
-            <a:ext cx="4937760" cy="292608"/>
+            <a:off x="868680" y="3493008"/>
+            <a:ext cx="4937760" cy="256032"/>
           </a:xfrm>
           <a:prstGeom prst="rect">
             <a:avLst/>
@@ -5565,21 +5758,21 @@
                 </a:solidFill>
                 <a:latin typeface="Calibri"/>
               </a:rPr>
-              <a:t>Minutes of compute, not days of manual reading</a:t>
-            </a:r>
-          </a:p>
-        </p:txBody>
-      </p:sp>
-      <p:sp>
-        <p:nvSpPr>
-          <p:cNvPr id="15" name="Oval 14"/>
+              <a:t>Split term frequency: low-CSAT vs high-CSAT text</a:t>
+            </a:r>
+          </a:p>
+        </p:txBody>
+      </p:sp>
+      <p:sp>
+        <p:nvSpPr>
+          <p:cNvPr id="20" name="Oval 19"/>
           <p:cNvSpPr/>
           <p:nvPr/>
         </p:nvSpPr>
         <p:spPr>
           <a:xfrm>
-            <a:off x="594360" y="3026664"/>
-            <a:ext cx="292608" cy="292608"/>
+            <a:off x="667512" y="3822192"/>
+            <a:ext cx="82296" cy="82296"/>
           </a:xfrm>
           <a:prstGeom prst="ellipse">
             <a:avLst/>
@@ -5611,28 +5804,19 @@
           <a:lstStyle/>
           <a:p>
             <a:pPr algn="ctr"/>
-            <a:r>
-              <a:rPr sz="1400" b="1">
-                <a:solidFill>
-                  <a:srgbClr val="FFFFFF"/>
-                </a:solidFill>
-                <a:latin typeface="Calibri"/>
-              </a:rPr>
-              <a:t>2</a:t>
-            </a:r>
-          </a:p>
-        </p:txBody>
-      </p:sp>
-      <p:sp>
-        <p:nvSpPr>
-          <p:cNvPr id="16" name="TextBox 15"/>
+          </a:p>
+        </p:txBody>
+      </p:sp>
+      <p:sp>
+        <p:nvSpPr>
+          <p:cNvPr id="21" name="TextBox 20"/>
           <p:cNvSpPr txBox="1"/>
           <p:nvPr/>
         </p:nvSpPr>
         <p:spPr>
           <a:xfrm>
-            <a:off x="978408" y="3008376"/>
-            <a:ext cx="4828032" cy="292608"/>
+            <a:off x="868680" y="3767328"/>
+            <a:ext cx="4937760" cy="256032"/>
           </a:xfrm>
           <a:prstGeom prst="rect">
             <a:avLst/>
@@ -5647,27 +5831,141 @@
           <a:p>
             <a:pPr algn="l"/>
             <a:r>
-              <a:rPr sz="1450" b="1" i="0">
+              <a:rPr sz="1150" b="0" i="0">
+                <a:solidFill>
+                  <a:srgbClr val="202633"/>
+                </a:solidFill>
+                <a:latin typeface="Calibri"/>
+              </a:rPr>
+              <a:t>Label every candidate term's sentiment lean</a:t>
+            </a:r>
+          </a:p>
+        </p:txBody>
+      </p:sp>
+      <p:sp>
+        <p:nvSpPr>
+          <p:cNvPr id="22" name="TextBox 21"/>
+          <p:cNvSpPr txBox="1"/>
+          <p:nvPr/>
+        </p:nvSpPr>
+        <p:spPr>
+          <a:xfrm>
+            <a:off x="649224" y="4059936"/>
+            <a:ext cx="5157216" cy="182880"/>
+          </a:xfrm>
+          <a:prstGeom prst="rect">
+            <a:avLst/>
+          </a:prstGeom>
+          <a:noFill/>
+        </p:spPr>
+        <p:txBody>
+          <a:bodyPr wrap="square">
+            <a:spAutoFit/>
+          </a:bodyPr>
+          <a:lstStyle/>
+          <a:p>
+            <a:pPr algn="l"/>
+            <a:r>
+              <a:rPr sz="950" b="1" i="0">
                 <a:solidFill>
                   <a:srgbClr val="1B2A4A"/>
                 </a:solidFill>
                 <a:latin typeface="Calibri"/>
               </a:rPr>
-              <a:t>Tag drivers</a:t>
-            </a:r>
-          </a:p>
-        </p:txBody>
-      </p:sp>
-      <p:sp>
-        <p:nvSpPr>
-          <p:cNvPr id="17" name="Oval 16"/>
+              <a:t>OUTPUT</a:t>
+            </a:r>
+          </a:p>
+        </p:txBody>
+      </p:sp>
+      <p:sp>
+        <p:nvSpPr>
+          <p:cNvPr id="23" name="Oval 22"/>
           <p:cNvSpPr/>
           <p:nvPr/>
         </p:nvSpPr>
         <p:spPr>
           <a:xfrm>
-            <a:off x="667512" y="3456432"/>
+            <a:off x="667512" y="4315968"/>
             <a:ext cx="82296" cy="82296"/>
+          </a:xfrm>
+          <a:prstGeom prst="ellipse">
+            <a:avLst/>
+          </a:prstGeom>
+          <a:solidFill>
+            <a:srgbClr val="1B2A4A"/>
+          </a:solidFill>
+          <a:ln>
+            <a:noFill/>
+          </a:ln>
+          <a:effectLst/>
+        </p:spPr>
+        <p:style>
+          <a:lnRef idx="1">
+            <a:schemeClr val="accent1"/>
+          </a:lnRef>
+          <a:fillRef idx="3">
+            <a:schemeClr val="accent1"/>
+          </a:fillRef>
+          <a:effectRef idx="2">
+            <a:schemeClr val="accent1"/>
+          </a:effectRef>
+          <a:fontRef idx="minor">
+            <a:schemeClr val="lt1"/>
+          </a:fontRef>
+        </p:style>
+        <p:txBody>
+          <a:bodyPr rtlCol="0" anchor="ctr"/>
+          <a:lstStyle/>
+          <a:p>
+            <a:pPr algn="ctr"/>
+          </a:p>
+        </p:txBody>
+      </p:sp>
+      <p:sp>
+        <p:nvSpPr>
+          <p:cNvPr id="24" name="TextBox 23"/>
+          <p:cNvSpPr txBox="1"/>
+          <p:nvPr/>
+        </p:nvSpPr>
+        <p:spPr>
+          <a:xfrm>
+            <a:off x="868680" y="4261104"/>
+            <a:ext cx="4937760" cy="256032"/>
+          </a:xfrm>
+          <a:prstGeom prst="rect">
+            <a:avLst/>
+          </a:prstGeom>
+          <a:noFill/>
+        </p:spPr>
+        <p:txBody>
+          <a:bodyPr wrap="square">
+            <a:spAutoFit/>
+          </a:bodyPr>
+          <a:lstStyle/>
+          <a:p>
+            <a:pPr algn="l"/>
+            <a:r>
+              <a:rPr sz="1150" b="1" i="0">
+                <a:solidFill>
+                  <a:srgbClr val="202633"/>
+                </a:solidFill>
+                <a:latin typeface="Calibri"/>
+              </a:rPr>
+              <a:t>An inspectable keyword shortlist, not a guess</a:t>
+            </a:r>
+          </a:p>
+        </p:txBody>
+      </p:sp>
+      <p:sp>
+        <p:nvSpPr>
+          <p:cNvPr id="25" name="Oval 24"/>
+          <p:cNvSpPr/>
+          <p:nvPr/>
+        </p:nvSpPr>
+        <p:spPr>
+          <a:xfrm>
+            <a:off x="594360" y="4553712"/>
+            <a:ext cx="292608" cy="292608"/>
           </a:xfrm>
           <a:prstGeom prst="ellipse">
             <a:avLst/>
@@ -5699,19 +5997,28 @@
           <a:lstStyle/>
           <a:p>
             <a:pPr algn="ctr"/>
-          </a:p>
-        </p:txBody>
-      </p:sp>
-      <p:sp>
-        <p:nvSpPr>
-          <p:cNvPr id="18" name="TextBox 17"/>
+            <a:r>
+              <a:rPr sz="1400" b="1">
+                <a:solidFill>
+                  <a:srgbClr val="FFFFFF"/>
+                </a:solidFill>
+                <a:latin typeface="Calibri"/>
+              </a:rPr>
+              <a:t>3</a:t>
+            </a:r>
+          </a:p>
+        </p:txBody>
+      </p:sp>
+      <p:sp>
+        <p:nvSpPr>
+          <p:cNvPr id="26" name="TextBox 25"/>
           <p:cNvSpPr txBox="1"/>
           <p:nvPr/>
         </p:nvSpPr>
         <p:spPr>
           <a:xfrm>
-            <a:off x="868680" y="3392424"/>
-            <a:ext cx="4937760" cy="292608"/>
+            <a:off x="978408" y="4535424"/>
+            <a:ext cx="4828032" cy="292608"/>
           </a:xfrm>
           <a:prstGeom prst="rect">
             <a:avLst/>
@@ -5726,26 +6033,61 @@
           <a:p>
             <a:pPr algn="l"/>
             <a:r>
-              <a:rPr sz="1150" b="0" i="0">
-                <a:solidFill>
-                  <a:srgbClr val="202633"/>
-                </a:solidFill>
-                <a:latin typeface="Calibri"/>
-              </a:rPr>
-              <a:t>Matches against 11 categories, 42 sub-issues</a:t>
-            </a:r>
-          </a:p>
-        </p:txBody>
-      </p:sp>
-      <p:sp>
-        <p:nvSpPr>
-          <p:cNvPr id="19" name="Oval 18"/>
+              <a:rPr sz="1450" b="1" i="0">
+                <a:solidFill>
+                  <a:srgbClr val="1B2A4A"/>
+                </a:solidFill>
+                <a:latin typeface="Calibri"/>
+              </a:rPr>
+              <a:t>Tag drivers</a:t>
+            </a:r>
+          </a:p>
+        </p:txBody>
+      </p:sp>
+      <p:sp>
+        <p:nvSpPr>
+          <p:cNvPr id="27" name="TextBox 26"/>
+          <p:cNvSpPr txBox="1"/>
+          <p:nvPr/>
+        </p:nvSpPr>
+        <p:spPr>
+          <a:xfrm>
+            <a:off x="649224" y="4882896"/>
+            <a:ext cx="5157216" cy="182880"/>
+          </a:xfrm>
+          <a:prstGeom prst="rect">
+            <a:avLst/>
+          </a:prstGeom>
+          <a:noFill/>
+        </p:spPr>
+        <p:txBody>
+          <a:bodyPr wrap="square">
+            <a:spAutoFit/>
+          </a:bodyPr>
+          <a:lstStyle/>
+          <a:p>
+            <a:pPr algn="l"/>
+            <a:r>
+              <a:rPr sz="950" b="1" i="0">
+                <a:solidFill>
+                  <a:srgbClr val="1F9A8F"/>
+                </a:solidFill>
+                <a:latin typeface="Calibri"/>
+              </a:rPr>
+              <a:t>APPROACH</a:t>
+            </a:r>
+          </a:p>
+        </p:txBody>
+      </p:sp>
+      <p:sp>
+        <p:nvSpPr>
+          <p:cNvPr id="28" name="Oval 27"/>
           <p:cNvSpPr/>
           <p:nvPr/>
         </p:nvSpPr>
         <p:spPr>
           <a:xfrm>
-            <a:off x="667512" y="3767328"/>
+            <a:off x="667512" y="5138928"/>
             <a:ext cx="82296" cy="82296"/>
           </a:xfrm>
           <a:prstGeom prst="ellipse">
@@ -5783,14 +6125,14 @@
       </p:sp>
       <p:sp>
         <p:nvSpPr>
-          <p:cNvPr id="20" name="TextBox 19"/>
+          <p:cNvPr id="29" name="TextBox 28"/>
           <p:cNvSpPr txBox="1"/>
           <p:nvPr/>
         </p:nvSpPr>
         <p:spPr>
           <a:xfrm>
-            <a:off x="868680" y="3703320"/>
-            <a:ext cx="4937760" cy="292608"/>
+            <a:off x="868680" y="5084064"/>
+            <a:ext cx="4937760" cy="256032"/>
           </a:xfrm>
           <a:prstGeom prst="rect">
             <a:avLst/>
@@ -5811,20 +6153,20 @@
                 </a:solidFill>
                 <a:latin typeface="Calibri"/>
               </a:rPr>
-              <a:t>Ranks matches by phrase-match strength</a:t>
-            </a:r>
-          </a:p>
-        </p:txBody>
-      </p:sp>
-      <p:sp>
-        <p:nvSpPr>
-          <p:cNvPr id="21" name="Oval 20"/>
+              <a:t>Match against 11 categories, 42 sub-issues</a:t>
+            </a:r>
+          </a:p>
+        </p:txBody>
+      </p:sp>
+      <p:sp>
+        <p:nvSpPr>
+          <p:cNvPr id="30" name="Oval 29"/>
           <p:cNvSpPr/>
           <p:nvPr/>
         </p:nvSpPr>
         <p:spPr>
           <a:xfrm>
-            <a:off x="667512" y="4078224"/>
+            <a:off x="667512" y="5413248"/>
             <a:ext cx="82296" cy="82296"/>
           </a:xfrm>
           <a:prstGeom prst="ellipse">
@@ -5862,14 +6204,14 @@
       </p:sp>
       <p:sp>
         <p:nvSpPr>
-          <p:cNvPr id="22" name="TextBox 21"/>
+          <p:cNvPr id="31" name="TextBox 30"/>
           <p:cNvSpPr txBox="1"/>
           <p:nvPr/>
         </p:nvSpPr>
         <p:spPr>
           <a:xfrm>
-            <a:off x="868680" y="4014216"/>
-            <a:ext cx="4937760" cy="292608"/>
+            <a:off x="868680" y="5358384"/>
+            <a:ext cx="4937760" cy="256032"/>
           </a:xfrm>
           <a:prstGeom prst="rect">
             <a:avLst/>
@@ -5890,21 +6232,135 @@
                 </a:solidFill>
                 <a:latin typeface="Calibri"/>
               </a:rPr>
-              <a:t>Strongest match's category = PRIMARY driver</a:t>
-            </a:r>
-          </a:p>
-        </p:txBody>
-      </p:sp>
-      <p:sp>
-        <p:nvSpPr>
-          <p:cNvPr id="23" name="Oval 22"/>
+              <a:t>Rank matches by phrase-match strength</a:t>
+            </a:r>
+          </a:p>
+        </p:txBody>
+      </p:sp>
+      <p:sp>
+        <p:nvSpPr>
+          <p:cNvPr id="32" name="TextBox 31"/>
+          <p:cNvSpPr txBox="1"/>
+          <p:nvPr/>
+        </p:nvSpPr>
+        <p:spPr>
+          <a:xfrm>
+            <a:off x="649224" y="5650992"/>
+            <a:ext cx="5157216" cy="182880"/>
+          </a:xfrm>
+          <a:prstGeom prst="rect">
+            <a:avLst/>
+          </a:prstGeom>
+          <a:noFill/>
+        </p:spPr>
+        <p:txBody>
+          <a:bodyPr wrap="square">
+            <a:spAutoFit/>
+          </a:bodyPr>
+          <a:lstStyle/>
+          <a:p>
+            <a:pPr algn="l"/>
+            <a:r>
+              <a:rPr sz="950" b="1" i="0">
+                <a:solidFill>
+                  <a:srgbClr val="1B2A4A"/>
+                </a:solidFill>
+                <a:latin typeface="Calibri"/>
+              </a:rPr>
+              <a:t>OUTPUT</a:t>
+            </a:r>
+          </a:p>
+        </p:txBody>
+      </p:sp>
+      <p:sp>
+        <p:nvSpPr>
+          <p:cNvPr id="33" name="Oval 32"/>
           <p:cNvSpPr/>
           <p:nvPr/>
         </p:nvSpPr>
         <p:spPr>
           <a:xfrm>
-            <a:off x="667512" y="4389120"/>
+            <a:off x="667512" y="5907024"/>
             <a:ext cx="82296" cy="82296"/>
+          </a:xfrm>
+          <a:prstGeom prst="ellipse">
+            <a:avLst/>
+          </a:prstGeom>
+          <a:solidFill>
+            <a:srgbClr val="1B2A4A"/>
+          </a:solidFill>
+          <a:ln>
+            <a:noFill/>
+          </a:ln>
+          <a:effectLst/>
+        </p:spPr>
+        <p:style>
+          <a:lnRef idx="1">
+            <a:schemeClr val="accent1"/>
+          </a:lnRef>
+          <a:fillRef idx="3">
+            <a:schemeClr val="accent1"/>
+          </a:fillRef>
+          <a:effectRef idx="2">
+            <a:schemeClr val="accent1"/>
+          </a:effectRef>
+          <a:fontRef idx="minor">
+            <a:schemeClr val="lt1"/>
+          </a:fontRef>
+        </p:style>
+        <p:txBody>
+          <a:bodyPr rtlCol="0" anchor="ctr"/>
+          <a:lstStyle/>
+          <a:p>
+            <a:pPr algn="ctr"/>
+          </a:p>
+        </p:txBody>
+      </p:sp>
+      <p:sp>
+        <p:nvSpPr>
+          <p:cNvPr id="34" name="TextBox 33"/>
+          <p:cNvSpPr txBox="1"/>
+          <p:nvPr/>
+        </p:nvSpPr>
+        <p:spPr>
+          <a:xfrm>
+            <a:off x="868680" y="5852160"/>
+            <a:ext cx="4937760" cy="256032"/>
+          </a:xfrm>
+          <a:prstGeom prst="rect">
+            <a:avLst/>
+          </a:prstGeom>
+          <a:noFill/>
+        </p:spPr>
+        <p:txBody>
+          <a:bodyPr wrap="square">
+            <a:spAutoFit/>
+          </a:bodyPr>
+          <a:lstStyle/>
+          <a:p>
+            <a:pPr algn="l"/>
+            <a:r>
+              <a:rPr sz="1150" b="1" i="0">
+                <a:solidFill>
+                  <a:srgbClr val="202633"/>
+                </a:solidFill>
+                <a:latin typeface="Calibri"/>
+              </a:rPr>
+              <a:t>A PRIMARY + actionable SECONDARY driver per row</a:t>
+            </a:r>
+          </a:p>
+        </p:txBody>
+      </p:sp>
+      <p:sp>
+        <p:nvSpPr>
+          <p:cNvPr id="35" name="Oval 34"/>
+          <p:cNvSpPr/>
+          <p:nvPr/>
+        </p:nvSpPr>
+        <p:spPr>
+          <a:xfrm>
+            <a:off x="6172200" y="1371600"/>
+            <a:ext cx="292608" cy="292608"/>
           </a:xfrm>
           <a:prstGeom prst="ellipse">
             <a:avLst/>
@@ -5936,19 +6392,28 @@
           <a:lstStyle/>
           <a:p>
             <a:pPr algn="ctr"/>
-          </a:p>
-        </p:txBody>
-      </p:sp>
-      <p:sp>
-        <p:nvSpPr>
-          <p:cNvPr id="24" name="TextBox 23"/>
+            <a:r>
+              <a:rPr sz="1400" b="1">
+                <a:solidFill>
+                  <a:srgbClr val="FFFFFF"/>
+                </a:solidFill>
+                <a:latin typeface="Calibri"/>
+              </a:rPr>
+              <a:t>4</a:t>
+            </a:r>
+          </a:p>
+        </p:txBody>
+      </p:sp>
+      <p:sp>
+        <p:nvSpPr>
+          <p:cNvPr id="36" name="TextBox 35"/>
           <p:cNvSpPr txBox="1"/>
           <p:nvPr/>
         </p:nvSpPr>
         <p:spPr>
           <a:xfrm>
-            <a:off x="868680" y="4325112"/>
-            <a:ext cx="4937760" cy="292608"/>
+            <a:off x="6556248" y="1353312"/>
+            <a:ext cx="4828032" cy="292608"/>
           </a:xfrm>
           <a:prstGeom prst="rect">
             <a:avLst/>
@@ -5963,27 +6428,62 @@
           <a:p>
             <a:pPr algn="l"/>
             <a:r>
-              <a:rPr sz="1150" b="0" i="0">
-                <a:solidFill>
-                  <a:srgbClr val="202633"/>
-                </a:solidFill>
-                <a:latin typeface="Calibri"/>
-              </a:rPr>
-              <a:t>The sub-issue itself = actionable SECONDARY</a:t>
-            </a:r>
-          </a:p>
-        </p:txBody>
-      </p:sp>
-      <p:sp>
-        <p:nvSpPr>
-          <p:cNvPr id="25" name="Oval 24"/>
+              <a:rPr sz="1450" b="1" i="0">
+                <a:solidFill>
+                  <a:srgbClr val="1B2A4A"/>
+                </a:solidFill>
+                <a:latin typeface="Calibri"/>
+              </a:rPr>
+              <a:t>NMF safety net</a:t>
+            </a:r>
+          </a:p>
+        </p:txBody>
+      </p:sp>
+      <p:sp>
+        <p:nvSpPr>
+          <p:cNvPr id="37" name="TextBox 36"/>
+          <p:cNvSpPr txBox="1"/>
+          <p:nvPr/>
+        </p:nvSpPr>
+        <p:spPr>
+          <a:xfrm>
+            <a:off x="6227064" y="1700784"/>
+            <a:ext cx="5157216" cy="182880"/>
+          </a:xfrm>
+          <a:prstGeom prst="rect">
+            <a:avLst/>
+          </a:prstGeom>
+          <a:noFill/>
+        </p:spPr>
+        <p:txBody>
+          <a:bodyPr wrap="square">
+            <a:spAutoFit/>
+          </a:bodyPr>
+          <a:lstStyle/>
+          <a:p>
+            <a:pPr algn="l"/>
+            <a:r>
+              <a:rPr sz="950" b="1" i="0">
+                <a:solidFill>
+                  <a:srgbClr val="1F9A8F"/>
+                </a:solidFill>
+                <a:latin typeface="Calibri"/>
+              </a:rPr>
+              <a:t>APPROACH</a:t>
+            </a:r>
+          </a:p>
+        </p:txBody>
+      </p:sp>
+      <p:sp>
+        <p:nvSpPr>
+          <p:cNvPr id="38" name="Oval 37"/>
           <p:cNvSpPr/>
           <p:nvPr/>
         </p:nvSpPr>
         <p:spPr>
           <a:xfrm>
-            <a:off x="594360" y="4636008"/>
-            <a:ext cx="292608" cy="292608"/>
+            <a:off x="6245352" y="1956816"/>
+            <a:ext cx="82296" cy="82296"/>
           </a:xfrm>
           <a:prstGeom prst="ellipse">
             <a:avLst/>
@@ -6015,28 +6515,19 @@
           <a:lstStyle/>
           <a:p>
             <a:pPr algn="ctr"/>
-            <a:r>
-              <a:rPr sz="1400" b="1">
-                <a:solidFill>
-                  <a:srgbClr val="FFFFFF"/>
-                </a:solidFill>
-                <a:latin typeface="Calibri"/>
-              </a:rPr>
-              <a:t>3</a:t>
-            </a:r>
-          </a:p>
-        </p:txBody>
-      </p:sp>
-      <p:sp>
-        <p:nvSpPr>
-          <p:cNvPr id="26" name="TextBox 25"/>
+          </a:p>
+        </p:txBody>
+      </p:sp>
+      <p:sp>
+        <p:nvSpPr>
+          <p:cNvPr id="39" name="TextBox 38"/>
           <p:cNvSpPr txBox="1"/>
           <p:nvPr/>
         </p:nvSpPr>
         <p:spPr>
           <a:xfrm>
-            <a:off x="978408" y="4617720"/>
-            <a:ext cx="4828032" cy="292608"/>
+            <a:off x="6446520" y="1901952"/>
+            <a:ext cx="4937760" cy="256032"/>
           </a:xfrm>
           <a:prstGeom prst="rect">
             <a:avLst/>
@@ -6051,26 +6542,26 @@
           <a:p>
             <a:pPr algn="l"/>
             <a:r>
-              <a:rPr sz="1450" b="1" i="0">
-                <a:solidFill>
-                  <a:srgbClr val="1B2A4A"/>
-                </a:solidFill>
-                <a:latin typeface="Calibri"/>
-              </a:rPr>
-              <a:t>NMF safety net</a:t>
-            </a:r>
-          </a:p>
-        </p:txBody>
-      </p:sp>
-      <p:sp>
-        <p:nvSpPr>
-          <p:cNvPr id="27" name="Oval 26"/>
+              <a:rPr sz="1150" b="0" i="0">
+                <a:solidFill>
+                  <a:srgbClr val="202633"/>
+                </a:solidFill>
+                <a:latin typeface="Calibri"/>
+              </a:rPr>
+              <a:t>TF-IDF + NMF finds latent themes in leftovers</a:t>
+            </a:r>
+          </a:p>
+        </p:txBody>
+      </p:sp>
+      <p:sp>
+        <p:nvSpPr>
+          <p:cNvPr id="40" name="Oval 39"/>
           <p:cNvSpPr/>
           <p:nvPr/>
         </p:nvSpPr>
         <p:spPr>
           <a:xfrm>
-            <a:off x="667512" y="5065776"/>
+            <a:off x="6245352" y="2231136"/>
             <a:ext cx="82296" cy="82296"/>
           </a:xfrm>
           <a:prstGeom prst="ellipse">
@@ -6108,14 +6599,14 @@
       </p:sp>
       <p:sp>
         <p:nvSpPr>
-          <p:cNvPr id="28" name="TextBox 27"/>
+          <p:cNvPr id="41" name="TextBox 40"/>
           <p:cNvSpPr txBox="1"/>
           <p:nvPr/>
         </p:nvSpPr>
         <p:spPr>
           <a:xfrm>
-            <a:off x="868680" y="5001768"/>
-            <a:ext cx="4937760" cy="292608"/>
+            <a:off x="6446520" y="2176272"/>
+            <a:ext cx="4937760" cy="256032"/>
           </a:xfrm>
           <a:prstGeom prst="rect">
             <a:avLst/>
@@ -6136,21 +6627,135 @@
                 </a:solidFill>
                 <a:latin typeface="Calibri"/>
               </a:rPr>
-              <a:t>TF-IDF + NMF finds latent themes in leftovers</a:t>
-            </a:r>
-          </a:p>
-        </p:txBody>
-      </p:sp>
-      <p:sp>
-        <p:nvSpPr>
-          <p:cNvPr id="29" name="Oval 28"/>
+              <a:t>YAKE auto-labels each theme, fully offline</a:t>
+            </a:r>
+          </a:p>
+        </p:txBody>
+      </p:sp>
+      <p:sp>
+        <p:nvSpPr>
+          <p:cNvPr id="42" name="TextBox 41"/>
+          <p:cNvSpPr txBox="1"/>
+          <p:nvPr/>
+        </p:nvSpPr>
+        <p:spPr>
+          <a:xfrm>
+            <a:off x="6227064" y="2468880"/>
+            <a:ext cx="5157216" cy="182880"/>
+          </a:xfrm>
+          <a:prstGeom prst="rect">
+            <a:avLst/>
+          </a:prstGeom>
+          <a:noFill/>
+        </p:spPr>
+        <p:txBody>
+          <a:bodyPr wrap="square">
+            <a:spAutoFit/>
+          </a:bodyPr>
+          <a:lstStyle/>
+          <a:p>
+            <a:pPr algn="l"/>
+            <a:r>
+              <a:rPr sz="950" b="1" i="0">
+                <a:solidFill>
+                  <a:srgbClr val="1B2A4A"/>
+                </a:solidFill>
+                <a:latin typeface="Calibri"/>
+              </a:rPr>
+              <a:t>OUTPUT</a:t>
+            </a:r>
+          </a:p>
+        </p:txBody>
+      </p:sp>
+      <p:sp>
+        <p:nvSpPr>
+          <p:cNvPr id="43" name="Oval 42"/>
           <p:cNvSpPr/>
           <p:nvPr/>
         </p:nvSpPr>
         <p:spPr>
           <a:xfrm>
-            <a:off x="667512" y="5376672"/>
+            <a:off x="6245352" y="2724912"/>
             <a:ext cx="82296" cy="82296"/>
+          </a:xfrm>
+          <a:prstGeom prst="ellipse">
+            <a:avLst/>
+          </a:prstGeom>
+          <a:solidFill>
+            <a:srgbClr val="1B2A4A"/>
+          </a:solidFill>
+          <a:ln>
+            <a:noFill/>
+          </a:ln>
+          <a:effectLst/>
+        </p:spPr>
+        <p:style>
+          <a:lnRef idx="1">
+            <a:schemeClr val="accent1"/>
+          </a:lnRef>
+          <a:fillRef idx="3">
+            <a:schemeClr val="accent1"/>
+          </a:fillRef>
+          <a:effectRef idx="2">
+            <a:schemeClr val="accent1"/>
+          </a:effectRef>
+          <a:fontRef idx="minor">
+            <a:schemeClr val="lt1"/>
+          </a:fontRef>
+        </p:style>
+        <p:txBody>
+          <a:bodyPr rtlCol="0" anchor="ctr"/>
+          <a:lstStyle/>
+          <a:p>
+            <a:pPr algn="ctr"/>
+          </a:p>
+        </p:txBody>
+      </p:sp>
+      <p:sp>
+        <p:nvSpPr>
+          <p:cNvPr id="44" name="TextBox 43"/>
+          <p:cNvSpPr txBox="1"/>
+          <p:nvPr/>
+        </p:nvSpPr>
+        <p:spPr>
+          <a:xfrm>
+            <a:off x="6446520" y="2670048"/>
+            <a:ext cx="4937760" cy="256032"/>
+          </a:xfrm>
+          <a:prstGeom prst="rect">
+            <a:avLst/>
+          </a:prstGeom>
+          <a:noFill/>
+        </p:spPr>
+        <p:txBody>
+          <a:bodyPr wrap="square">
+            <a:spAutoFit/>
+          </a:bodyPr>
+          <a:lstStyle/>
+          <a:p>
+            <a:pPr algn="l"/>
+            <a:r>
+              <a:rPr sz="1150" b="1" i="0">
+                <a:solidFill>
+                  <a:srgbClr val="202633"/>
+                </a:solidFill>
+                <a:latin typeface="Calibri"/>
+              </a:rPr>
+              <a:t>Zero responses left with a blank secondary driver</a:t>
+            </a:r>
+          </a:p>
+        </p:txBody>
+      </p:sp>
+      <p:sp>
+        <p:nvSpPr>
+          <p:cNvPr id="45" name="Oval 44"/>
+          <p:cNvSpPr/>
+          <p:nvPr/>
+        </p:nvSpPr>
+        <p:spPr>
+          <a:xfrm>
+            <a:off x="6172200" y="2962656"/>
+            <a:ext cx="292608" cy="292608"/>
           </a:xfrm>
           <a:prstGeom prst="ellipse">
             <a:avLst/>
@@ -6182,19 +6787,28 @@
           <a:lstStyle/>
           <a:p>
             <a:pPr algn="ctr"/>
-          </a:p>
-        </p:txBody>
-      </p:sp>
-      <p:sp>
-        <p:nvSpPr>
-          <p:cNvPr id="30" name="TextBox 29"/>
+            <a:r>
+              <a:rPr sz="1400" b="1">
+                <a:solidFill>
+                  <a:srgbClr val="FFFFFF"/>
+                </a:solidFill>
+                <a:latin typeface="Calibri"/>
+              </a:rPr>
+              <a:t>5</a:t>
+            </a:r>
+          </a:p>
+        </p:txBody>
+      </p:sp>
+      <p:sp>
+        <p:nvSpPr>
+          <p:cNvPr id="46" name="TextBox 45"/>
           <p:cNvSpPr txBox="1"/>
           <p:nvPr/>
         </p:nvSpPr>
         <p:spPr>
           <a:xfrm>
-            <a:off x="868680" y="5312664"/>
-            <a:ext cx="4937760" cy="292608"/>
+            <a:off x="6556248" y="2944368"/>
+            <a:ext cx="4828032" cy="292608"/>
           </a:xfrm>
           <a:prstGeom prst="rect">
             <a:avLst/>
@@ -6209,26 +6823,61 @@
           <a:p>
             <a:pPr algn="l"/>
             <a:r>
-              <a:rPr sz="1150" b="0" i="0">
-                <a:solidFill>
-                  <a:srgbClr val="202633"/>
-                </a:solidFill>
-                <a:latin typeface="Calibri"/>
-              </a:rPr>
-              <a:t>YAKE auto-labels each theme, fully offline</a:t>
-            </a:r>
-          </a:p>
-        </p:txBody>
-      </p:sp>
-      <p:sp>
-        <p:nvSpPr>
-          <p:cNvPr id="31" name="Oval 30"/>
+              <a:rPr sz="1450" b="1" i="0">
+                <a:solidFill>
+                  <a:srgbClr val="1B2A4A"/>
+                </a:solidFill>
+                <a:latin typeface="Calibri"/>
+              </a:rPr>
+              <a:t>Score sentiment</a:t>
+            </a:r>
+          </a:p>
+        </p:txBody>
+      </p:sp>
+      <p:sp>
+        <p:nvSpPr>
+          <p:cNvPr id="47" name="TextBox 46"/>
+          <p:cNvSpPr txBox="1"/>
+          <p:nvPr/>
+        </p:nvSpPr>
+        <p:spPr>
+          <a:xfrm>
+            <a:off x="6227064" y="3291840"/>
+            <a:ext cx="5157216" cy="182880"/>
+          </a:xfrm>
+          <a:prstGeom prst="rect">
+            <a:avLst/>
+          </a:prstGeom>
+          <a:noFill/>
+        </p:spPr>
+        <p:txBody>
+          <a:bodyPr wrap="square">
+            <a:spAutoFit/>
+          </a:bodyPr>
+          <a:lstStyle/>
+          <a:p>
+            <a:pPr algn="l"/>
+            <a:r>
+              <a:rPr sz="950" b="1" i="0">
+                <a:solidFill>
+                  <a:srgbClr val="1F9A8F"/>
+                </a:solidFill>
+                <a:latin typeface="Calibri"/>
+              </a:rPr>
+              <a:t>APPROACH</a:t>
+            </a:r>
+          </a:p>
+        </p:txBody>
+      </p:sp>
+      <p:sp>
+        <p:nvSpPr>
+          <p:cNvPr id="48" name="Oval 47"/>
           <p:cNvSpPr/>
           <p:nvPr/>
         </p:nvSpPr>
         <p:spPr>
           <a:xfrm>
-            <a:off x="667512" y="5687568"/>
+            <a:off x="6245352" y="3547872"/>
             <a:ext cx="82296" cy="82296"/>
           </a:xfrm>
           <a:prstGeom prst="ellipse">
@@ -6266,14 +6915,14 @@
       </p:sp>
       <p:sp>
         <p:nvSpPr>
-          <p:cNvPr id="32" name="TextBox 31"/>
+          <p:cNvPr id="49" name="TextBox 48"/>
           <p:cNvSpPr txBox="1"/>
           <p:nvPr/>
         </p:nvSpPr>
         <p:spPr>
           <a:xfrm>
-            <a:off x="868680" y="5623560"/>
-            <a:ext cx="4937760" cy="292608"/>
+            <a:off x="6446520" y="3493008"/>
+            <a:ext cx="4937760" cy="256032"/>
           </a:xfrm>
           <a:prstGeom prst="rect">
             <a:avLst/>
@@ -6294,20 +6943,20 @@
                 </a:solidFill>
                 <a:latin typeface="Calibri"/>
               </a:rPr>
-              <a:t>Catches edge-of-vocabulary phrasing</a:t>
-            </a:r>
-          </a:p>
-        </p:txBody>
-      </p:sp>
-      <p:sp>
-        <p:nvSpPr>
-          <p:cNvPr id="33" name="Oval 32"/>
+              <a:t>VADER lexicon model scores tone of every row</a:t>
+            </a:r>
+          </a:p>
+        </p:txBody>
+      </p:sp>
+      <p:sp>
+        <p:nvSpPr>
+          <p:cNvPr id="50" name="Oval 49"/>
           <p:cNvSpPr/>
           <p:nvPr/>
         </p:nvSpPr>
         <p:spPr>
           <a:xfrm>
-            <a:off x="667512" y="5998464"/>
+            <a:off x="6245352" y="3822192"/>
             <a:ext cx="82296" cy="82296"/>
           </a:xfrm>
           <a:prstGeom prst="ellipse">
@@ -6345,14 +6994,14 @@
       </p:sp>
       <p:sp>
         <p:nvSpPr>
-          <p:cNvPr id="34" name="TextBox 33"/>
+          <p:cNvPr id="51" name="TextBox 50"/>
           <p:cNvSpPr txBox="1"/>
           <p:nvPr/>
         </p:nvSpPr>
         <p:spPr>
           <a:xfrm>
-            <a:off x="868680" y="5934456"/>
-            <a:ext cx="4937760" cy="292608"/>
+            <a:off x="6446520" y="3767328"/>
+            <a:ext cx="4937760" cy="256032"/>
           </a:xfrm>
           <a:prstGeom prst="rect">
             <a:avLst/>
@@ -6373,20 +7022,134 @@
                 </a:solidFill>
                 <a:latin typeface="Calibri"/>
               </a:rPr>
-              <a:t>No response ends with a blank secondary driver</a:t>
-            </a:r>
-          </a:p>
-        </p:txBody>
-      </p:sp>
-      <p:sp>
-        <p:nvSpPr>
-          <p:cNvPr id="35" name="Oval 34"/>
+              <a:t>100% offline — zero AI/LLM API dependency</a:t>
+            </a:r>
+          </a:p>
+        </p:txBody>
+      </p:sp>
+      <p:sp>
+        <p:nvSpPr>
+          <p:cNvPr id="52" name="TextBox 51"/>
+          <p:cNvSpPr txBox="1"/>
+          <p:nvPr/>
+        </p:nvSpPr>
+        <p:spPr>
+          <a:xfrm>
+            <a:off x="6227064" y="4059936"/>
+            <a:ext cx="5157216" cy="182880"/>
+          </a:xfrm>
+          <a:prstGeom prst="rect">
+            <a:avLst/>
+          </a:prstGeom>
+          <a:noFill/>
+        </p:spPr>
+        <p:txBody>
+          <a:bodyPr wrap="square">
+            <a:spAutoFit/>
+          </a:bodyPr>
+          <a:lstStyle/>
+          <a:p>
+            <a:pPr algn="l"/>
+            <a:r>
+              <a:rPr sz="950" b="1" i="0">
+                <a:solidFill>
+                  <a:srgbClr val="1B2A4A"/>
+                </a:solidFill>
+                <a:latin typeface="Calibri"/>
+              </a:rPr>
+              <a:t>OUTPUT</a:t>
+            </a:r>
+          </a:p>
+        </p:txBody>
+      </p:sp>
+      <p:sp>
+        <p:nvSpPr>
+          <p:cNvPr id="53" name="Oval 52"/>
           <p:cNvSpPr/>
           <p:nvPr/>
         </p:nvSpPr>
         <p:spPr>
           <a:xfrm>
-            <a:off x="6172200" y="2221992"/>
+            <a:off x="6245352" y="4315968"/>
+            <a:ext cx="82296" cy="82296"/>
+          </a:xfrm>
+          <a:prstGeom prst="ellipse">
+            <a:avLst/>
+          </a:prstGeom>
+          <a:solidFill>
+            <a:srgbClr val="1B2A4A"/>
+          </a:solidFill>
+          <a:ln>
+            <a:noFill/>
+          </a:ln>
+          <a:effectLst/>
+        </p:spPr>
+        <p:style>
+          <a:lnRef idx="1">
+            <a:schemeClr val="accent1"/>
+          </a:lnRef>
+          <a:fillRef idx="3">
+            <a:schemeClr val="accent1"/>
+          </a:fillRef>
+          <a:effectRef idx="2">
+            <a:schemeClr val="accent1"/>
+          </a:effectRef>
+          <a:fontRef idx="minor">
+            <a:schemeClr val="lt1"/>
+          </a:fontRef>
+        </p:style>
+        <p:txBody>
+          <a:bodyPr rtlCol="0" anchor="ctr"/>
+          <a:lstStyle/>
+          <a:p>
+            <a:pPr algn="ctr"/>
+          </a:p>
+        </p:txBody>
+      </p:sp>
+      <p:sp>
+        <p:nvSpPr>
+          <p:cNvPr id="54" name="TextBox 53"/>
+          <p:cNvSpPr txBox="1"/>
+          <p:nvPr/>
+        </p:nvSpPr>
+        <p:spPr>
+          <a:xfrm>
+            <a:off x="6446520" y="4261104"/>
+            <a:ext cx="4937760" cy="256032"/>
+          </a:xfrm>
+          <a:prstGeom prst="rect">
+            <a:avLst/>
+          </a:prstGeom>
+          <a:noFill/>
+        </p:spPr>
+        <p:txBody>
+          <a:bodyPr wrap="square">
+            <a:spAutoFit/>
+          </a:bodyPr>
+          <a:lstStyle/>
+          <a:p>
+            <a:pPr algn="l"/>
+            <a:r>
+              <a:rPr sz="1150" b="1" i="0">
+                <a:solidFill>
+                  <a:srgbClr val="202633"/>
+                </a:solidFill>
+                <a:latin typeface="Calibri"/>
+              </a:rPr>
+              <a:t>A Negative/Neutral/Positive label per response</a:t>
+            </a:r>
+          </a:p>
+        </p:txBody>
+      </p:sp>
+      <p:sp>
+        <p:nvSpPr>
+          <p:cNvPr id="55" name="Oval 54"/>
+          <p:cNvSpPr/>
+          <p:nvPr/>
+        </p:nvSpPr>
+        <p:spPr>
+          <a:xfrm>
+            <a:off x="6172200" y="4553712"/>
             <a:ext cx="292608" cy="292608"/>
           </a:xfrm>
           <a:prstGeom prst="ellipse">
@@ -6426,20 +7189,20 @@
                 </a:solidFill>
                 <a:latin typeface="Calibri"/>
               </a:rPr>
-              <a:t>4</a:t>
-            </a:r>
-          </a:p>
-        </p:txBody>
-      </p:sp>
-      <p:sp>
-        <p:nvSpPr>
-          <p:cNvPr id="36" name="TextBox 35"/>
+              <a:t>6</a:t>
+            </a:r>
+          </a:p>
+        </p:txBody>
+      </p:sp>
+      <p:sp>
+        <p:nvSpPr>
+          <p:cNvPr id="56" name="TextBox 55"/>
           <p:cNvSpPr txBox="1"/>
           <p:nvPr/>
         </p:nvSpPr>
         <p:spPr>
           <a:xfrm>
-            <a:off x="6556248" y="2203704"/>
+            <a:off x="6556248" y="4535424"/>
             <a:ext cx="4828032" cy="292608"/>
           </a:xfrm>
           <a:prstGeom prst="rect">
@@ -6461,20 +7224,55 @@
                 </a:solidFill>
                 <a:latin typeface="Calibri"/>
               </a:rPr>
-              <a:t>Score sentiment</a:t>
-            </a:r>
-          </a:p>
-        </p:txBody>
-      </p:sp>
-      <p:sp>
-        <p:nvSpPr>
-          <p:cNvPr id="37" name="Oval 36"/>
+              <a:t>Publish</a:t>
+            </a:r>
+          </a:p>
+        </p:txBody>
+      </p:sp>
+      <p:sp>
+        <p:nvSpPr>
+          <p:cNvPr id="57" name="TextBox 56"/>
+          <p:cNvSpPr txBox="1"/>
+          <p:nvPr/>
+        </p:nvSpPr>
+        <p:spPr>
+          <a:xfrm>
+            <a:off x="6227064" y="4882896"/>
+            <a:ext cx="5157216" cy="182880"/>
+          </a:xfrm>
+          <a:prstGeom prst="rect">
+            <a:avLst/>
+          </a:prstGeom>
+          <a:noFill/>
+        </p:spPr>
+        <p:txBody>
+          <a:bodyPr wrap="square">
+            <a:spAutoFit/>
+          </a:bodyPr>
+          <a:lstStyle/>
+          <a:p>
+            <a:pPr algn="l"/>
+            <a:r>
+              <a:rPr sz="950" b="1" i="0">
+                <a:solidFill>
+                  <a:srgbClr val="1F9A8F"/>
+                </a:solidFill>
+                <a:latin typeface="Calibri"/>
+              </a:rPr>
+              <a:t>APPROACH</a:t>
+            </a:r>
+          </a:p>
+        </p:txBody>
+      </p:sp>
+      <p:sp>
+        <p:nvSpPr>
+          <p:cNvPr id="58" name="Oval 57"/>
           <p:cNvSpPr/>
           <p:nvPr/>
         </p:nvSpPr>
         <p:spPr>
           <a:xfrm>
-            <a:off x="6245352" y="2651760"/>
+            <a:off x="6245352" y="5138928"/>
             <a:ext cx="82296" cy="82296"/>
           </a:xfrm>
           <a:prstGeom prst="ellipse">
@@ -6512,14 +7310,14 @@
       </p:sp>
       <p:sp>
         <p:nvSpPr>
-          <p:cNvPr id="38" name="TextBox 37"/>
+          <p:cNvPr id="59" name="TextBox 58"/>
           <p:cNvSpPr txBox="1"/>
           <p:nvPr/>
         </p:nvSpPr>
         <p:spPr>
           <a:xfrm>
-            <a:off x="6446520" y="2587752"/>
-            <a:ext cx="4937760" cy="292608"/>
+            <a:off x="6446520" y="5084064"/>
+            <a:ext cx="4937760" cy="256032"/>
           </a:xfrm>
           <a:prstGeom prst="rect">
             <a:avLst/>
@@ -6540,20 +7338,20 @@
                 </a:solidFill>
                 <a:latin typeface="Calibri"/>
               </a:rPr>
-              <a:t>VADER lexicon model scores tone of every row</a:t>
-            </a:r>
-          </a:p>
-        </p:txBody>
-      </p:sp>
-      <p:sp>
-        <p:nvSpPr>
-          <p:cNvPr id="39" name="Oval 38"/>
+              <a:t>Write one workbook: row data + Analysis sheet</a:t>
+            </a:r>
+          </a:p>
+        </p:txBody>
+      </p:sp>
+      <p:sp>
+        <p:nvSpPr>
+          <p:cNvPr id="60" name="Oval 59"/>
           <p:cNvSpPr/>
           <p:nvPr/>
         </p:nvSpPr>
         <p:spPr>
           <a:xfrm>
-            <a:off x="6245352" y="2962656"/>
+            <a:off x="6245352" y="5413248"/>
             <a:ext cx="82296" cy="82296"/>
           </a:xfrm>
           <a:prstGeom prst="ellipse">
@@ -6591,14 +7389,14 @@
       </p:sp>
       <p:sp>
         <p:nvSpPr>
-          <p:cNvPr id="40" name="TextBox 39"/>
+          <p:cNvPr id="61" name="TextBox 60"/>
           <p:cNvSpPr txBox="1"/>
           <p:nvPr/>
         </p:nvSpPr>
         <p:spPr>
           <a:xfrm>
-            <a:off x="6446520" y="2898648"/>
-            <a:ext cx="4937760" cy="292608"/>
+            <a:off x="6446520" y="5358384"/>
+            <a:ext cx="4937760" cy="256032"/>
           </a:xfrm>
           <a:prstGeom prst="rect">
             <a:avLst/>
@@ -6619,27 +7417,62 @@
                 </a:solidFill>
                 <a:latin typeface="Calibri"/>
               </a:rPr>
-              <a:t>Deterministic and explainable, no black box</a:t>
-            </a:r>
-          </a:p>
-        </p:txBody>
-      </p:sp>
-      <p:sp>
-        <p:nvSpPr>
-          <p:cNvPr id="41" name="Oval 40"/>
+              <a:t>Build the PPT deck + Power BI report on top</a:t>
+            </a:r>
+          </a:p>
+        </p:txBody>
+      </p:sp>
+      <p:sp>
+        <p:nvSpPr>
+          <p:cNvPr id="62" name="TextBox 61"/>
+          <p:cNvSpPr txBox="1"/>
+          <p:nvPr/>
+        </p:nvSpPr>
+        <p:spPr>
+          <a:xfrm>
+            <a:off x="6227064" y="5650992"/>
+            <a:ext cx="5157216" cy="182880"/>
+          </a:xfrm>
+          <a:prstGeom prst="rect">
+            <a:avLst/>
+          </a:prstGeom>
+          <a:noFill/>
+        </p:spPr>
+        <p:txBody>
+          <a:bodyPr wrap="square">
+            <a:spAutoFit/>
+          </a:bodyPr>
+          <a:lstStyle/>
+          <a:p>
+            <a:pPr algn="l"/>
+            <a:r>
+              <a:rPr sz="950" b="1" i="0">
+                <a:solidFill>
+                  <a:srgbClr val="1B2A4A"/>
+                </a:solidFill>
+                <a:latin typeface="Calibri"/>
+              </a:rPr>
+              <a:t>OUTPUT</a:t>
+            </a:r>
+          </a:p>
+        </p:txBody>
+      </p:sp>
+      <p:sp>
+        <p:nvSpPr>
+          <p:cNvPr id="63" name="Oval 62"/>
           <p:cNvSpPr/>
           <p:nvPr/>
         </p:nvSpPr>
         <p:spPr>
           <a:xfrm>
-            <a:off x="6245352" y="3273552"/>
+            <a:off x="6245352" y="5907024"/>
             <a:ext cx="82296" cy="82296"/>
           </a:xfrm>
           <a:prstGeom prst="ellipse">
             <a:avLst/>
           </a:prstGeom>
           <a:solidFill>
-            <a:srgbClr val="2EC4B6"/>
+            <a:srgbClr val="1B2A4A"/>
           </a:solidFill>
           <a:ln>
             <a:noFill/>
@@ -6670,14 +7503,14 @@
       </p:sp>
       <p:sp>
         <p:nvSpPr>
-          <p:cNvPr id="42" name="TextBox 41"/>
+          <p:cNvPr id="64" name="TextBox 63"/>
           <p:cNvSpPr txBox="1"/>
           <p:nvPr/>
         </p:nvSpPr>
         <p:spPr>
           <a:xfrm>
-            <a:off x="6446520" y="3209544"/>
-            <a:ext cx="4937760" cy="292608"/>
+            <a:off x="6446520" y="5852160"/>
+            <a:ext cx="4937760" cy="256032"/>
           </a:xfrm>
           <a:prstGeom prst="rect">
             <a:avLst/>
@@ -6692,71 +7525,27 @@
           <a:p>
             <a:pPr algn="l"/>
             <a:r>
-              <a:rPr sz="1150" b="0" i="0">
+              <a:rPr sz="1150" b="1" i="0">
                 <a:solidFill>
                   <a:srgbClr val="202633"/>
                 </a:solidFill>
                 <a:latin typeface="Calibri"/>
               </a:rPr>
-              <a:t>100% offline — zero AI/LLM API dependency</a:t>
-            </a:r>
-          </a:p>
-        </p:txBody>
-      </p:sp>
-      <p:sp>
-        <p:nvSpPr>
-          <p:cNvPr id="43" name="Oval 42"/>
-          <p:cNvSpPr/>
-          <p:nvPr/>
-        </p:nvSpPr>
-        <p:spPr>
-          <a:xfrm>
-            <a:off x="6245352" y="3584448"/>
-            <a:ext cx="82296" cy="82296"/>
-          </a:xfrm>
-          <a:prstGeom prst="ellipse">
-            <a:avLst/>
-          </a:prstGeom>
-          <a:solidFill>
-            <a:srgbClr val="2EC4B6"/>
-          </a:solidFill>
-          <a:ln>
-            <a:noFill/>
-          </a:ln>
-          <a:effectLst/>
-        </p:spPr>
-        <p:style>
-          <a:lnRef idx="1">
-            <a:schemeClr val="accent1"/>
-          </a:lnRef>
-          <a:fillRef idx="3">
-            <a:schemeClr val="accent1"/>
-          </a:fillRef>
-          <a:effectRef idx="2">
-            <a:schemeClr val="accent1"/>
-          </a:effectRef>
-          <a:fontRef idx="minor">
-            <a:schemeClr val="lt1"/>
-          </a:fontRef>
-        </p:style>
-        <p:txBody>
-          <a:bodyPr rtlCol="0" anchor="ctr"/>
-          <a:lstStyle/>
-          <a:p>
-            <a:pPr algn="ctr"/>
-          </a:p>
-        </p:txBody>
-      </p:sp>
-      <p:sp>
-        <p:nvSpPr>
-          <p:cNvPr id="44" name="TextBox 43"/>
+              <a:t>A client-ready package, numbers always in sync</a:t>
+            </a:r>
+          </a:p>
+        </p:txBody>
+      </p:sp>
+      <p:sp>
+        <p:nvSpPr>
+          <p:cNvPr id="65" name="TextBox 64"/>
           <p:cNvSpPr txBox="1"/>
           <p:nvPr/>
         </p:nvSpPr>
         <p:spPr>
           <a:xfrm>
-            <a:off x="6446520" y="3520440"/>
-            <a:ext cx="4937760" cy="292608"/>
+            <a:off x="594360" y="6473952"/>
+            <a:ext cx="9144000" cy="320040"/>
           </a:xfrm>
           <a:prstGeom prst="rect">
             <a:avLst/>
@@ -6771,445 +7560,6 @@
           <a:p>
             <a:pPr algn="l"/>
             <a:r>
-              <a:rPr sz="1150" b="0" i="0">
-                <a:solidFill>
-                  <a:srgbClr val="202633"/>
-                </a:solidFill>
-                <a:latin typeface="Calibri"/>
-              </a:rPr>
-              <a:t>Cross-checked against the CSAT score bucket</a:t>
-            </a:r>
-          </a:p>
-        </p:txBody>
-      </p:sp>
-      <p:sp>
-        <p:nvSpPr>
-          <p:cNvPr id="45" name="Oval 44"/>
-          <p:cNvSpPr/>
-          <p:nvPr/>
-        </p:nvSpPr>
-        <p:spPr>
-          <a:xfrm>
-            <a:off x="6172200" y="3831336"/>
-            <a:ext cx="292608" cy="292608"/>
-          </a:xfrm>
-          <a:prstGeom prst="ellipse">
-            <a:avLst/>
-          </a:prstGeom>
-          <a:solidFill>
-            <a:srgbClr val="2EC4B6"/>
-          </a:solidFill>
-          <a:ln>
-            <a:noFill/>
-          </a:ln>
-          <a:effectLst/>
-        </p:spPr>
-        <p:style>
-          <a:lnRef idx="1">
-            <a:schemeClr val="accent1"/>
-          </a:lnRef>
-          <a:fillRef idx="3">
-            <a:schemeClr val="accent1"/>
-          </a:fillRef>
-          <a:effectRef idx="2">
-            <a:schemeClr val="accent1"/>
-          </a:effectRef>
-          <a:fontRef idx="minor">
-            <a:schemeClr val="lt1"/>
-          </a:fontRef>
-        </p:style>
-        <p:txBody>
-          <a:bodyPr rtlCol="0" anchor="ctr"/>
-          <a:lstStyle/>
-          <a:p>
-            <a:pPr algn="ctr"/>
-            <a:r>
-              <a:rPr sz="1400" b="1">
-                <a:solidFill>
-                  <a:srgbClr val="FFFFFF"/>
-                </a:solidFill>
-                <a:latin typeface="Calibri"/>
-              </a:rPr>
-              <a:t>5</a:t>
-            </a:r>
-          </a:p>
-        </p:txBody>
-      </p:sp>
-      <p:sp>
-        <p:nvSpPr>
-          <p:cNvPr id="46" name="TextBox 45"/>
-          <p:cNvSpPr txBox="1"/>
-          <p:nvPr/>
-        </p:nvSpPr>
-        <p:spPr>
-          <a:xfrm>
-            <a:off x="6556248" y="3813048"/>
-            <a:ext cx="4828032" cy="292608"/>
-          </a:xfrm>
-          <a:prstGeom prst="rect">
-            <a:avLst/>
-          </a:prstGeom>
-          <a:noFill/>
-        </p:spPr>
-        <p:txBody>
-          <a:bodyPr wrap="square">
-            <a:spAutoFit/>
-          </a:bodyPr>
-          <a:lstStyle/>
-          <a:p>
-            <a:pPr algn="l"/>
-            <a:r>
-              <a:rPr sz="1450" b="1" i="0">
-                <a:solidFill>
-                  <a:srgbClr val="1B2A4A"/>
-                </a:solidFill>
-                <a:latin typeface="Calibri"/>
-              </a:rPr>
-              <a:t>Publish</a:t>
-            </a:r>
-          </a:p>
-        </p:txBody>
-      </p:sp>
-      <p:sp>
-        <p:nvSpPr>
-          <p:cNvPr id="47" name="Oval 46"/>
-          <p:cNvSpPr/>
-          <p:nvPr/>
-        </p:nvSpPr>
-        <p:spPr>
-          <a:xfrm>
-            <a:off x="6245352" y="4261104"/>
-            <a:ext cx="82296" cy="82296"/>
-          </a:xfrm>
-          <a:prstGeom prst="ellipse">
-            <a:avLst/>
-          </a:prstGeom>
-          <a:solidFill>
-            <a:srgbClr val="2EC4B6"/>
-          </a:solidFill>
-          <a:ln>
-            <a:noFill/>
-          </a:ln>
-          <a:effectLst/>
-        </p:spPr>
-        <p:style>
-          <a:lnRef idx="1">
-            <a:schemeClr val="accent1"/>
-          </a:lnRef>
-          <a:fillRef idx="3">
-            <a:schemeClr val="accent1"/>
-          </a:fillRef>
-          <a:effectRef idx="2">
-            <a:schemeClr val="accent1"/>
-          </a:effectRef>
-          <a:fontRef idx="minor">
-            <a:schemeClr val="lt1"/>
-          </a:fontRef>
-        </p:style>
-        <p:txBody>
-          <a:bodyPr rtlCol="0" anchor="ctr"/>
-          <a:lstStyle/>
-          <a:p>
-            <a:pPr algn="ctr"/>
-          </a:p>
-        </p:txBody>
-      </p:sp>
-      <p:sp>
-        <p:nvSpPr>
-          <p:cNvPr id="48" name="TextBox 47"/>
-          <p:cNvSpPr txBox="1"/>
-          <p:nvPr/>
-        </p:nvSpPr>
-        <p:spPr>
-          <a:xfrm>
-            <a:off x="6446520" y="4197096"/>
-            <a:ext cx="4937760" cy="292608"/>
-          </a:xfrm>
-          <a:prstGeom prst="rect">
-            <a:avLst/>
-          </a:prstGeom>
-          <a:noFill/>
-        </p:spPr>
-        <p:txBody>
-          <a:bodyPr wrap="square">
-            <a:spAutoFit/>
-          </a:bodyPr>
-          <a:lstStyle/>
-          <a:p>
-            <a:pPr algn="l"/>
-            <a:r>
-              <a:rPr sz="1150" b="0" i="0">
-                <a:solidFill>
-                  <a:srgbClr val="202633"/>
-                </a:solidFill>
-                <a:latin typeface="Calibri"/>
-              </a:rPr>
-              <a:t>One workbook: row data + Analysis sheet</a:t>
-            </a:r>
-          </a:p>
-        </p:txBody>
-      </p:sp>
-      <p:sp>
-        <p:nvSpPr>
-          <p:cNvPr id="49" name="Oval 48"/>
-          <p:cNvSpPr/>
-          <p:nvPr/>
-        </p:nvSpPr>
-        <p:spPr>
-          <a:xfrm>
-            <a:off x="6245352" y="4572000"/>
-            <a:ext cx="82296" cy="82296"/>
-          </a:xfrm>
-          <a:prstGeom prst="ellipse">
-            <a:avLst/>
-          </a:prstGeom>
-          <a:solidFill>
-            <a:srgbClr val="2EC4B6"/>
-          </a:solidFill>
-          <a:ln>
-            <a:noFill/>
-          </a:ln>
-          <a:effectLst/>
-        </p:spPr>
-        <p:style>
-          <a:lnRef idx="1">
-            <a:schemeClr val="accent1"/>
-          </a:lnRef>
-          <a:fillRef idx="3">
-            <a:schemeClr val="accent1"/>
-          </a:fillRef>
-          <a:effectRef idx="2">
-            <a:schemeClr val="accent1"/>
-          </a:effectRef>
-          <a:fontRef idx="minor">
-            <a:schemeClr val="lt1"/>
-          </a:fontRef>
-        </p:style>
-        <p:txBody>
-          <a:bodyPr rtlCol="0" anchor="ctr"/>
-          <a:lstStyle/>
-          <a:p>
-            <a:pPr algn="ctr"/>
-          </a:p>
-        </p:txBody>
-      </p:sp>
-      <p:sp>
-        <p:nvSpPr>
-          <p:cNvPr id="50" name="TextBox 49"/>
-          <p:cNvSpPr txBox="1"/>
-          <p:nvPr/>
-        </p:nvSpPr>
-        <p:spPr>
-          <a:xfrm>
-            <a:off x="6446520" y="4507992"/>
-            <a:ext cx="4937760" cy="292608"/>
-          </a:xfrm>
-          <a:prstGeom prst="rect">
-            <a:avLst/>
-          </a:prstGeom>
-          <a:noFill/>
-        </p:spPr>
-        <p:txBody>
-          <a:bodyPr wrap="square">
-            <a:spAutoFit/>
-          </a:bodyPr>
-          <a:lstStyle/>
-          <a:p>
-            <a:pPr algn="l"/>
-            <a:r>
-              <a:rPr sz="1150" b="0" i="0">
-                <a:solidFill>
-                  <a:srgbClr val="202633"/>
-                </a:solidFill>
-                <a:latin typeface="Calibri"/>
-              </a:rPr>
-              <a:t>Every chart pairs volume with CSAT severity</a:t>
-            </a:r>
-          </a:p>
-        </p:txBody>
-      </p:sp>
-      <p:sp>
-        <p:nvSpPr>
-          <p:cNvPr id="51" name="Oval 50"/>
-          <p:cNvSpPr/>
-          <p:nvPr/>
-        </p:nvSpPr>
-        <p:spPr>
-          <a:xfrm>
-            <a:off x="6245352" y="4882896"/>
-            <a:ext cx="82296" cy="82296"/>
-          </a:xfrm>
-          <a:prstGeom prst="ellipse">
-            <a:avLst/>
-          </a:prstGeom>
-          <a:solidFill>
-            <a:srgbClr val="2EC4B6"/>
-          </a:solidFill>
-          <a:ln>
-            <a:noFill/>
-          </a:ln>
-          <a:effectLst/>
-        </p:spPr>
-        <p:style>
-          <a:lnRef idx="1">
-            <a:schemeClr val="accent1"/>
-          </a:lnRef>
-          <a:fillRef idx="3">
-            <a:schemeClr val="accent1"/>
-          </a:fillRef>
-          <a:effectRef idx="2">
-            <a:schemeClr val="accent1"/>
-          </a:effectRef>
-          <a:fontRef idx="minor">
-            <a:schemeClr val="lt1"/>
-          </a:fontRef>
-        </p:style>
-        <p:txBody>
-          <a:bodyPr rtlCol="0" anchor="ctr"/>
-          <a:lstStyle/>
-          <a:p>
-            <a:pPr algn="ctr"/>
-          </a:p>
-        </p:txBody>
-      </p:sp>
-      <p:sp>
-        <p:nvSpPr>
-          <p:cNvPr id="52" name="TextBox 51"/>
-          <p:cNvSpPr txBox="1"/>
-          <p:nvPr/>
-        </p:nvSpPr>
-        <p:spPr>
-          <a:xfrm>
-            <a:off x="6446520" y="4818888"/>
-            <a:ext cx="4937760" cy="292608"/>
-          </a:xfrm>
-          <a:prstGeom prst="rect">
-            <a:avLst/>
-          </a:prstGeom>
-          <a:noFill/>
-        </p:spPr>
-        <p:txBody>
-          <a:bodyPr wrap="square">
-            <a:spAutoFit/>
-          </a:bodyPr>
-          <a:lstStyle/>
-          <a:p>
-            <a:pPr algn="l"/>
-            <a:r>
-              <a:rPr sz="1150" b="0" i="0">
-                <a:solidFill>
-                  <a:srgbClr val="202633"/>
-                </a:solidFill>
-                <a:latin typeface="Calibri"/>
-              </a:rPr>
-              <a:t>A 6-slide deck, numbers read live from the data</a:t>
-            </a:r>
-          </a:p>
-        </p:txBody>
-      </p:sp>
-      <p:sp>
-        <p:nvSpPr>
-          <p:cNvPr id="53" name="Oval 52"/>
-          <p:cNvSpPr/>
-          <p:nvPr/>
-        </p:nvSpPr>
-        <p:spPr>
-          <a:xfrm>
-            <a:off x="6245352" y="5193792"/>
-            <a:ext cx="82296" cy="82296"/>
-          </a:xfrm>
-          <a:prstGeom prst="ellipse">
-            <a:avLst/>
-          </a:prstGeom>
-          <a:solidFill>
-            <a:srgbClr val="2EC4B6"/>
-          </a:solidFill>
-          <a:ln>
-            <a:noFill/>
-          </a:ln>
-          <a:effectLst/>
-        </p:spPr>
-        <p:style>
-          <a:lnRef idx="1">
-            <a:schemeClr val="accent1"/>
-          </a:lnRef>
-          <a:fillRef idx="3">
-            <a:schemeClr val="accent1"/>
-          </a:fillRef>
-          <a:effectRef idx="2">
-            <a:schemeClr val="accent1"/>
-          </a:effectRef>
-          <a:fontRef idx="minor">
-            <a:schemeClr val="lt1"/>
-          </a:fontRef>
-        </p:style>
-        <p:txBody>
-          <a:bodyPr rtlCol="0" anchor="ctr"/>
-          <a:lstStyle/>
-          <a:p>
-            <a:pPr algn="ctr"/>
-          </a:p>
-        </p:txBody>
-      </p:sp>
-      <p:sp>
-        <p:nvSpPr>
-          <p:cNvPr id="54" name="TextBox 53"/>
-          <p:cNvSpPr txBox="1"/>
-          <p:nvPr/>
-        </p:nvSpPr>
-        <p:spPr>
-          <a:xfrm>
-            <a:off x="6446520" y="5129784"/>
-            <a:ext cx="4937760" cy="292608"/>
-          </a:xfrm>
-          <a:prstGeom prst="rect">
-            <a:avLst/>
-          </a:prstGeom>
-          <a:noFill/>
-        </p:spPr>
-        <p:txBody>
-          <a:bodyPr wrap="square">
-            <a:spAutoFit/>
-          </a:bodyPr>
-          <a:lstStyle/>
-          <a:p>
-            <a:pPr algn="l"/>
-            <a:r>
-              <a:rPr sz="1150" b="0" i="0">
-                <a:solidFill>
-                  <a:srgbClr val="202633"/>
-                </a:solidFill>
-                <a:latin typeface="Calibri"/>
-              </a:rPr>
-              <a:t>A Power BI report built on top for the business</a:t>
-            </a:r>
-          </a:p>
-        </p:txBody>
-      </p:sp>
-      <p:sp>
-        <p:nvSpPr>
-          <p:cNvPr id="55" name="TextBox 54"/>
-          <p:cNvSpPr txBox="1"/>
-          <p:nvPr/>
-        </p:nvSpPr>
-        <p:spPr>
-          <a:xfrm>
-            <a:off x="594360" y="6473952"/>
-            <a:ext cx="9144000" cy="320040"/>
-          </a:xfrm>
-          <a:prstGeom prst="rect">
-            <a:avLst/>
-          </a:prstGeom>
-          <a:noFill/>
-        </p:spPr>
-        <p:txBody>
-          <a:bodyPr wrap="square">
-            <a:spAutoFit/>
-          </a:bodyPr>
-          <a:lstStyle/>
-          <a:p>
-            <a:pPr algn="l"/>
-            <a:r>
               <a:rPr sz="1000" b="0" i="0">
                 <a:solidFill>
                   <a:srgbClr val="5A6B7D"/>
@@ -7223,7 +7573,7 @@
       </p:sp>
       <p:sp>
         <p:nvSpPr>
-          <p:cNvPr id="56" name="TextBox 55"/>
+          <p:cNvPr id="66" name="TextBox 65"/>
           <p:cNvSpPr txBox="1"/>
           <p:nvPr/>
         </p:nvSpPr>
@@ -8300,7 +8650,7 @@
                 </a:solidFill>
                 <a:latin typeface="Calibri"/>
               </a:rPr>
-              <a:t>TOP 3 PRIMARY DRIVERS</a:t>
+              <a:t>TOP 5 PRIMARY DRIVERS</a:t>
             </a:r>
           </a:p>
         </p:txBody>
@@ -8313,8 +8663,8 @@
         </p:nvSpPr>
         <p:spPr>
           <a:xfrm>
-            <a:off x="4337304" y="3447288"/>
-            <a:ext cx="237744" cy="237744"/>
+            <a:off x="4337304" y="3438144"/>
+            <a:ext cx="201168" cy="201168"/>
           </a:xfrm>
           <a:prstGeom prst="ellipse">
             <a:avLst/>
@@ -8347,7 +8697,7 @@
           <a:p>
             <a:pPr algn="ctr"/>
             <a:r>
-              <a:rPr sz="1200" b="1">
+              <a:rPr sz="1050" b="1">
                 <a:solidFill>
                   <a:srgbClr val="FFFFFF"/>
                 </a:solidFill>
@@ -8366,8 +8716,8 @@
         </p:nvSpPr>
         <p:spPr>
           <a:xfrm>
-            <a:off x="4666488" y="3429000"/>
-            <a:ext cx="3185160" cy="329184"/>
+            <a:off x="4629912" y="3410712"/>
+            <a:ext cx="3221736" cy="292608"/>
           </a:xfrm>
           <a:prstGeom prst="rect">
             <a:avLst/>
@@ -8382,7 +8732,7 @@
           <a:p>
             <a:pPr algn="l"/>
             <a:r>
-              <a:rPr sz="1300" b="0" i="0">
+              <a:rPr sz="1200" b="0" i="0">
                 <a:solidFill>
                   <a:srgbClr val="202633"/>
                 </a:solidFill>
@@ -8401,8 +8751,8 @@
         </p:nvSpPr>
         <p:spPr>
           <a:xfrm>
-            <a:off x="4337304" y="3831336"/>
-            <a:ext cx="237744" cy="237744"/>
+            <a:off x="4337304" y="3767328"/>
+            <a:ext cx="201168" cy="201168"/>
           </a:xfrm>
           <a:prstGeom prst="ellipse">
             <a:avLst/>
@@ -8435,7 +8785,7 @@
           <a:p>
             <a:pPr algn="ctr"/>
             <a:r>
-              <a:rPr sz="1200" b="1">
+              <a:rPr sz="1050" b="1">
                 <a:solidFill>
                   <a:srgbClr val="FFFFFF"/>
                 </a:solidFill>
@@ -8454,8 +8804,8 @@
         </p:nvSpPr>
         <p:spPr>
           <a:xfrm>
-            <a:off x="4666488" y="3813048"/>
-            <a:ext cx="3185160" cy="329184"/>
+            <a:off x="4629912" y="3739896"/>
+            <a:ext cx="3221736" cy="292608"/>
           </a:xfrm>
           <a:prstGeom prst="rect">
             <a:avLst/>
@@ -8470,7 +8820,7 @@
           <a:p>
             <a:pPr algn="l"/>
             <a:r>
-              <a:rPr sz="1300" b="0" i="0">
+              <a:rPr sz="1200" b="0" i="0">
                 <a:solidFill>
                   <a:srgbClr val="202633"/>
                 </a:solidFill>
@@ -8489,8 +8839,8 @@
         </p:nvSpPr>
         <p:spPr>
           <a:xfrm>
-            <a:off x="4337304" y="4215384"/>
-            <a:ext cx="237744" cy="237744"/>
+            <a:off x="4337304" y="4096512"/>
+            <a:ext cx="201168" cy="201168"/>
           </a:xfrm>
           <a:prstGeom prst="ellipse">
             <a:avLst/>
@@ -8523,7 +8873,7 @@
           <a:p>
             <a:pPr algn="ctr"/>
             <a:r>
-              <a:rPr sz="1200" b="1">
+              <a:rPr sz="1050" b="1">
                 <a:solidFill>
                   <a:srgbClr val="FFFFFF"/>
                 </a:solidFill>
@@ -8542,8 +8892,8 @@
         </p:nvSpPr>
         <p:spPr>
           <a:xfrm>
-            <a:off x="4666488" y="4197096"/>
-            <a:ext cx="3185160" cy="329184"/>
+            <a:off x="4629912" y="4069080"/>
+            <a:ext cx="3221736" cy="292608"/>
           </a:xfrm>
           <a:prstGeom prst="rect">
             <a:avLst/>
@@ -8558,7 +8908,7 @@
           <a:p>
             <a:pPr algn="l"/>
             <a:r>
-              <a:rPr sz="1300" b="0" i="0">
+              <a:rPr sz="1200" b="0" i="0">
                 <a:solidFill>
                   <a:srgbClr val="202633"/>
                 </a:solidFill>
@@ -8571,49 +8921,14 @@
       </p:sp>
       <p:sp>
         <p:nvSpPr>
-          <p:cNvPr id="30" name="TextBox 29"/>
-          <p:cNvSpPr txBox="1"/>
-          <p:nvPr/>
-        </p:nvSpPr>
-        <p:spPr>
-          <a:xfrm>
-            <a:off x="8080248" y="3063240"/>
-            <a:ext cx="3514344" cy="274320"/>
-          </a:xfrm>
-          <a:prstGeom prst="rect">
-            <a:avLst/>
-          </a:prstGeom>
-          <a:noFill/>
-        </p:spPr>
-        <p:txBody>
-          <a:bodyPr wrap="square">
-            <a:spAutoFit/>
-          </a:bodyPr>
-          <a:lstStyle/>
-          <a:p>
-            <a:pPr algn="l"/>
-            <a:r>
-              <a:rPr sz="1200" b="1" i="0">
-                <a:solidFill>
-                  <a:srgbClr val="1F9A8F"/>
-                </a:solidFill>
-                <a:latin typeface="Calibri"/>
-              </a:rPr>
-              <a:t>TOP 3 SECONDARY DRIVERS</a:t>
-            </a:r>
-          </a:p>
-        </p:txBody>
-      </p:sp>
-      <p:sp>
-        <p:nvSpPr>
-          <p:cNvPr id="31" name="Oval 30"/>
+          <p:cNvPr id="30" name="Oval 29"/>
           <p:cNvSpPr/>
           <p:nvPr/>
         </p:nvSpPr>
         <p:spPr>
           <a:xfrm>
-            <a:off x="8080248" y="3447288"/>
-            <a:ext cx="237744" cy="237744"/>
+            <a:off x="4337304" y="4425696"/>
+            <a:ext cx="201168" cy="201168"/>
           </a:xfrm>
           <a:prstGeom prst="ellipse">
             <a:avLst/>
@@ -8646,27 +8961,27 @@
           <a:p>
             <a:pPr algn="ctr"/>
             <a:r>
-              <a:rPr sz="1200" b="1">
+              <a:rPr sz="1050" b="1">
                 <a:solidFill>
                   <a:srgbClr val="FFFFFF"/>
                 </a:solidFill>
                 <a:latin typeface="Calibri"/>
               </a:rPr>
-              <a:t>1</a:t>
-            </a:r>
-          </a:p>
-        </p:txBody>
-      </p:sp>
-      <p:sp>
-        <p:nvSpPr>
-          <p:cNvPr id="32" name="TextBox 31"/>
+              <a:t>4</a:t>
+            </a:r>
+          </a:p>
+        </p:txBody>
+      </p:sp>
+      <p:sp>
+        <p:nvSpPr>
+          <p:cNvPr id="31" name="TextBox 30"/>
           <p:cNvSpPr txBox="1"/>
           <p:nvPr/>
         </p:nvSpPr>
         <p:spPr>
           <a:xfrm>
-            <a:off x="8409432" y="3429000"/>
-            <a:ext cx="3185160" cy="329184"/>
+            <a:off x="4629912" y="4398264"/>
+            <a:ext cx="3221736" cy="292608"/>
           </a:xfrm>
           <a:prstGeom prst="rect">
             <a:avLst/>
@@ -8681,27 +8996,27 @@
           <a:p>
             <a:pPr algn="l"/>
             <a:r>
-              <a:rPr sz="1300" b="0" i="0">
+              <a:rPr sz="1200" b="0" i="0">
                 <a:solidFill>
                   <a:srgbClr val="202633"/>
                 </a:solidFill>
                 <a:latin typeface="Calibri"/>
               </a:rPr>
-              <a:t>Duplicate Charge — 4.6%</a:t>
-            </a:r>
-          </a:p>
-        </p:txBody>
-      </p:sp>
-      <p:sp>
-        <p:nvSpPr>
-          <p:cNvPr id="33" name="Oval 32"/>
+              <a:t>Network Connectivity — 10.3%</a:t>
+            </a:r>
+          </a:p>
+        </p:txBody>
+      </p:sp>
+      <p:sp>
+        <p:nvSpPr>
+          <p:cNvPr id="32" name="Oval 31"/>
           <p:cNvSpPr/>
           <p:nvPr/>
         </p:nvSpPr>
         <p:spPr>
           <a:xfrm>
-            <a:off x="8080248" y="3831336"/>
-            <a:ext cx="237744" cy="237744"/>
+            <a:off x="4337304" y="4754880"/>
+            <a:ext cx="201168" cy="201168"/>
           </a:xfrm>
           <a:prstGeom prst="ellipse">
             <a:avLst/>
@@ -8734,27 +9049,27 @@
           <a:p>
             <a:pPr algn="ctr"/>
             <a:r>
-              <a:rPr sz="1200" b="1">
+              <a:rPr sz="1050" b="1">
                 <a:solidFill>
                   <a:srgbClr val="FFFFFF"/>
                 </a:solidFill>
                 <a:latin typeface="Calibri"/>
               </a:rPr>
-              <a:t>2</a:t>
-            </a:r>
-          </a:p>
-        </p:txBody>
-      </p:sp>
-      <p:sp>
-        <p:nvSpPr>
-          <p:cNvPr id="34" name="TextBox 33"/>
+              <a:t>5</a:t>
+            </a:r>
+          </a:p>
+        </p:txBody>
+      </p:sp>
+      <p:sp>
+        <p:nvSpPr>
+          <p:cNvPr id="33" name="TextBox 32"/>
           <p:cNvSpPr txBox="1"/>
           <p:nvPr/>
         </p:nvSpPr>
         <p:spPr>
           <a:xfrm>
-            <a:off x="8409432" y="3813048"/>
-            <a:ext cx="3185160" cy="329184"/>
+            <a:off x="4629912" y="4727448"/>
+            <a:ext cx="3221736" cy="292608"/>
           </a:xfrm>
           <a:prstGeom prst="rect">
             <a:avLst/>
@@ -8769,13 +9084,48 @@
           <a:p>
             <a:pPr algn="l"/>
             <a:r>
-              <a:rPr sz="1300" b="0" i="0">
+              <a:rPr sz="1200" b="0" i="0">
                 <a:solidFill>
                   <a:srgbClr val="202633"/>
                 </a:solidFill>
                 <a:latin typeface="Calibri"/>
               </a:rPr>
-              <a:t>GST/Tax Confusion — 4.3%</a:t>
+              <a:t>Resolution Time FCR — 9.0%</a:t>
+            </a:r>
+          </a:p>
+        </p:txBody>
+      </p:sp>
+      <p:sp>
+        <p:nvSpPr>
+          <p:cNvPr id="34" name="TextBox 33"/>
+          <p:cNvSpPr txBox="1"/>
+          <p:nvPr/>
+        </p:nvSpPr>
+        <p:spPr>
+          <a:xfrm>
+            <a:off x="8080248" y="3063240"/>
+            <a:ext cx="3514344" cy="274320"/>
+          </a:xfrm>
+          <a:prstGeom prst="rect">
+            <a:avLst/>
+          </a:prstGeom>
+          <a:noFill/>
+        </p:spPr>
+        <p:txBody>
+          <a:bodyPr wrap="square">
+            <a:spAutoFit/>
+          </a:bodyPr>
+          <a:lstStyle/>
+          <a:p>
+            <a:pPr algn="l"/>
+            <a:r>
+              <a:rPr sz="1200" b="1" i="0">
+                <a:solidFill>
+                  <a:srgbClr val="1F9A8F"/>
+                </a:solidFill>
+                <a:latin typeface="Calibri"/>
+              </a:rPr>
+              <a:t>TOP 5 SECONDARY DRIVERS</a:t>
             </a:r>
           </a:p>
         </p:txBody>
@@ -8788,8 +9138,8 @@
         </p:nvSpPr>
         <p:spPr>
           <a:xfrm>
-            <a:off x="8080248" y="4215384"/>
-            <a:ext cx="237744" cy="237744"/>
+            <a:off x="8080248" y="3438144"/>
+            <a:ext cx="201168" cy="201168"/>
           </a:xfrm>
           <a:prstGeom prst="ellipse">
             <a:avLst/>
@@ -8822,13 +9172,13 @@
           <a:p>
             <a:pPr algn="ctr"/>
             <a:r>
-              <a:rPr sz="1200" b="1">
+              <a:rPr sz="1050" b="1">
                 <a:solidFill>
                   <a:srgbClr val="FFFFFF"/>
                 </a:solidFill>
                 <a:latin typeface="Calibri"/>
               </a:rPr>
-              <a:t>3</a:t>
+              <a:t>1</a:t>
             </a:r>
           </a:p>
         </p:txBody>
@@ -8841,8 +9191,8 @@
         </p:nvSpPr>
         <p:spPr>
           <a:xfrm>
-            <a:off x="8409432" y="4197096"/>
-            <a:ext cx="3185160" cy="329184"/>
+            <a:off x="8372856" y="3410712"/>
+            <a:ext cx="3221736" cy="292608"/>
           </a:xfrm>
           <a:prstGeom prst="rect">
             <a:avLst/>
@@ -8857,13 +9207,13 @@
           <a:p>
             <a:pPr algn="l"/>
             <a:r>
-              <a:rPr sz="1300" b="0" i="0">
+              <a:rPr sz="1200" b="0" i="0">
                 <a:solidFill>
                   <a:srgbClr val="202633"/>
                 </a:solidFill>
                 <a:latin typeface="Calibri"/>
               </a:rPr>
-              <a:t>Incorrect Late Fee — 4.2%</a:t>
+              <a:t>Duplicate Charge — 4.6%</a:t>
             </a:r>
           </a:p>
         </p:txBody>
@@ -8876,8 +9226,8 @@
         </p:nvSpPr>
         <p:spPr>
           <a:xfrm>
-            <a:off x="594360" y="5330952"/>
-            <a:ext cx="128016" cy="128016"/>
+            <a:off x="8080248" y="3767328"/>
+            <a:ext cx="201168" cy="201168"/>
           </a:xfrm>
           <a:prstGeom prst="ellipse">
             <a:avLst/>
@@ -8909,6 +9259,15 @@
           <a:lstStyle/>
           <a:p>
             <a:pPr algn="ctr"/>
+            <a:r>
+              <a:rPr sz="1050" b="1">
+                <a:solidFill>
+                  <a:srgbClr val="FFFFFF"/>
+                </a:solidFill>
+                <a:latin typeface="Calibri"/>
+              </a:rPr>
+              <a:t>2</a:t>
+            </a:r>
           </a:p>
         </p:txBody>
       </p:sp>
@@ -8920,8 +9279,8 @@
         </p:nvSpPr>
         <p:spPr>
           <a:xfrm>
-            <a:off x="914400" y="5257800"/>
-            <a:ext cx="10561320" cy="548640"/>
+            <a:off x="8372856" y="3739896"/>
+            <a:ext cx="3221736" cy="292608"/>
           </a:xfrm>
           <a:prstGeom prst="rect">
             <a:avLst/>
@@ -8936,27 +9295,80 @@
           <a:p>
             <a:pPr algn="l"/>
             <a:r>
-              <a:rPr sz="1450" b="0" i="0">
+              <a:rPr sz="1200" b="0" i="0">
                 <a:solidFill>
                   <a:srgbClr val="202633"/>
                 </a:solidFill>
                 <a:latin typeface="Calibri"/>
               </a:rPr>
-              <a:t>Agents with less than 6 months' tenure skew toward the lowest-CSAT bucket (&lt;6 months) - a coaching signal alongside the process fix.</a:t>
-            </a:r>
-          </a:p>
-        </p:txBody>
-      </p:sp>
-      <p:sp>
-        <p:nvSpPr>
-          <p:cNvPr id="39" name="TextBox 38"/>
+              <a:t>GST/Tax Confusion — 4.3%</a:t>
+            </a:r>
+          </a:p>
+        </p:txBody>
+      </p:sp>
+      <p:sp>
+        <p:nvSpPr>
+          <p:cNvPr id="39" name="Oval 38"/>
+          <p:cNvSpPr/>
+          <p:nvPr/>
+        </p:nvSpPr>
+        <p:spPr>
+          <a:xfrm>
+            <a:off x="8080248" y="4096512"/>
+            <a:ext cx="201168" cy="201168"/>
+          </a:xfrm>
+          <a:prstGeom prst="ellipse">
+            <a:avLst/>
+          </a:prstGeom>
+          <a:solidFill>
+            <a:srgbClr val="2EC4B6"/>
+          </a:solidFill>
+          <a:ln>
+            <a:noFill/>
+          </a:ln>
+          <a:effectLst/>
+        </p:spPr>
+        <p:style>
+          <a:lnRef idx="1">
+            <a:schemeClr val="accent1"/>
+          </a:lnRef>
+          <a:fillRef idx="3">
+            <a:schemeClr val="accent1"/>
+          </a:fillRef>
+          <a:effectRef idx="2">
+            <a:schemeClr val="accent1"/>
+          </a:effectRef>
+          <a:fontRef idx="minor">
+            <a:schemeClr val="lt1"/>
+          </a:fontRef>
+        </p:style>
+        <p:txBody>
+          <a:bodyPr rtlCol="0" anchor="ctr"/>
+          <a:lstStyle/>
+          <a:p>
+            <a:pPr algn="ctr"/>
+            <a:r>
+              <a:rPr sz="1050" b="1">
+                <a:solidFill>
+                  <a:srgbClr val="FFFFFF"/>
+                </a:solidFill>
+                <a:latin typeface="Calibri"/>
+              </a:rPr>
+              <a:t>3</a:t>
+            </a:r>
+          </a:p>
+        </p:txBody>
+      </p:sp>
+      <p:sp>
+        <p:nvSpPr>
+          <p:cNvPr id="40" name="TextBox 39"/>
           <p:cNvSpPr txBox="1"/>
           <p:nvPr/>
         </p:nvSpPr>
         <p:spPr>
           <a:xfrm>
-            <a:off x="594360" y="6473952"/>
-            <a:ext cx="9144000" cy="320040"/>
+            <a:off x="8372856" y="4069080"/>
+            <a:ext cx="3221736" cy="292608"/>
           </a:xfrm>
           <a:prstGeom prst="rect">
             <a:avLst/>
@@ -8971,6 +9383,296 @@
           <a:p>
             <a:pPr algn="l"/>
             <a:r>
+              <a:rPr sz="1200" b="0" i="0">
+                <a:solidFill>
+                  <a:srgbClr val="202633"/>
+                </a:solidFill>
+                <a:latin typeface="Calibri"/>
+              </a:rPr>
+              <a:t>Incorrect Late Fee — 4.2%</a:t>
+            </a:r>
+          </a:p>
+        </p:txBody>
+      </p:sp>
+      <p:sp>
+        <p:nvSpPr>
+          <p:cNvPr id="41" name="Oval 40"/>
+          <p:cNvSpPr/>
+          <p:nvPr/>
+        </p:nvSpPr>
+        <p:spPr>
+          <a:xfrm>
+            <a:off x="8080248" y="4425696"/>
+            <a:ext cx="201168" cy="201168"/>
+          </a:xfrm>
+          <a:prstGeom prst="ellipse">
+            <a:avLst/>
+          </a:prstGeom>
+          <a:solidFill>
+            <a:srgbClr val="2EC4B6"/>
+          </a:solidFill>
+          <a:ln>
+            <a:noFill/>
+          </a:ln>
+          <a:effectLst/>
+        </p:spPr>
+        <p:style>
+          <a:lnRef idx="1">
+            <a:schemeClr val="accent1"/>
+          </a:lnRef>
+          <a:fillRef idx="3">
+            <a:schemeClr val="accent1"/>
+          </a:fillRef>
+          <a:effectRef idx="2">
+            <a:schemeClr val="accent1"/>
+          </a:effectRef>
+          <a:fontRef idx="minor">
+            <a:schemeClr val="lt1"/>
+          </a:fontRef>
+        </p:style>
+        <p:txBody>
+          <a:bodyPr rtlCol="0" anchor="ctr"/>
+          <a:lstStyle/>
+          <a:p>
+            <a:pPr algn="ctr"/>
+            <a:r>
+              <a:rPr sz="1050" b="1">
+                <a:solidFill>
+                  <a:srgbClr val="FFFFFF"/>
+                </a:solidFill>
+                <a:latin typeface="Calibri"/>
+              </a:rPr>
+              <a:t>4</a:t>
+            </a:r>
+          </a:p>
+        </p:txBody>
+      </p:sp>
+      <p:sp>
+        <p:nvSpPr>
+          <p:cNvPr id="42" name="TextBox 41"/>
+          <p:cNvSpPr txBox="1"/>
+          <p:nvPr/>
+        </p:nvSpPr>
+        <p:spPr>
+          <a:xfrm>
+            <a:off x="8372856" y="4398264"/>
+            <a:ext cx="3221736" cy="292608"/>
+          </a:xfrm>
+          <a:prstGeom prst="rect">
+            <a:avLst/>
+          </a:prstGeom>
+          <a:noFill/>
+        </p:spPr>
+        <p:txBody>
+          <a:bodyPr wrap="square">
+            <a:spAutoFit/>
+          </a:bodyPr>
+          <a:lstStyle/>
+          <a:p>
+            <a:pPr algn="l"/>
+            <a:r>
+              <a:rPr sz="1200" b="0" i="0">
+                <a:solidFill>
+                  <a:srgbClr val="202633"/>
+                </a:solidFill>
+                <a:latin typeface="Calibri"/>
+              </a:rPr>
+              <a:t>Roaming Charge Dispute — 4.0%</a:t>
+            </a:r>
+          </a:p>
+        </p:txBody>
+      </p:sp>
+      <p:sp>
+        <p:nvSpPr>
+          <p:cNvPr id="43" name="Oval 42"/>
+          <p:cNvSpPr/>
+          <p:nvPr/>
+        </p:nvSpPr>
+        <p:spPr>
+          <a:xfrm>
+            <a:off x="8080248" y="4754880"/>
+            <a:ext cx="201168" cy="201168"/>
+          </a:xfrm>
+          <a:prstGeom prst="ellipse">
+            <a:avLst/>
+          </a:prstGeom>
+          <a:solidFill>
+            <a:srgbClr val="2EC4B6"/>
+          </a:solidFill>
+          <a:ln>
+            <a:noFill/>
+          </a:ln>
+          <a:effectLst/>
+        </p:spPr>
+        <p:style>
+          <a:lnRef idx="1">
+            <a:schemeClr val="accent1"/>
+          </a:lnRef>
+          <a:fillRef idx="3">
+            <a:schemeClr val="accent1"/>
+          </a:fillRef>
+          <a:effectRef idx="2">
+            <a:schemeClr val="accent1"/>
+          </a:effectRef>
+          <a:fontRef idx="minor">
+            <a:schemeClr val="lt1"/>
+          </a:fontRef>
+        </p:style>
+        <p:txBody>
+          <a:bodyPr rtlCol="0" anchor="ctr"/>
+          <a:lstStyle/>
+          <a:p>
+            <a:pPr algn="ctr"/>
+            <a:r>
+              <a:rPr sz="1050" b="1">
+                <a:solidFill>
+                  <a:srgbClr val="FFFFFF"/>
+                </a:solidFill>
+                <a:latin typeface="Calibri"/>
+              </a:rPr>
+              <a:t>5</a:t>
+            </a:r>
+          </a:p>
+        </p:txBody>
+      </p:sp>
+      <p:sp>
+        <p:nvSpPr>
+          <p:cNvPr id="44" name="TextBox 43"/>
+          <p:cNvSpPr txBox="1"/>
+          <p:nvPr/>
+        </p:nvSpPr>
+        <p:spPr>
+          <a:xfrm>
+            <a:off x="8372856" y="4727448"/>
+            <a:ext cx="3221736" cy="292608"/>
+          </a:xfrm>
+          <a:prstGeom prst="rect">
+            <a:avLst/>
+          </a:prstGeom>
+          <a:noFill/>
+        </p:spPr>
+        <p:txBody>
+          <a:bodyPr wrap="square">
+            <a:spAutoFit/>
+          </a:bodyPr>
+          <a:lstStyle/>
+          <a:p>
+            <a:pPr algn="l"/>
+            <a:r>
+              <a:rPr sz="1200" b="0" i="0">
+                <a:solidFill>
+                  <a:srgbClr val="202633"/>
+                </a:solidFill>
+                <a:latin typeface="Calibri"/>
+              </a:rPr>
+              <a:t>Unexplained Deduction — 3.7%</a:t>
+            </a:r>
+          </a:p>
+        </p:txBody>
+      </p:sp>
+      <p:sp>
+        <p:nvSpPr>
+          <p:cNvPr id="45" name="Oval 44"/>
+          <p:cNvSpPr/>
+          <p:nvPr/>
+        </p:nvSpPr>
+        <p:spPr>
+          <a:xfrm>
+            <a:off x="594360" y="5513832"/>
+            <a:ext cx="128016" cy="128016"/>
+          </a:xfrm>
+          <a:prstGeom prst="ellipse">
+            <a:avLst/>
+          </a:prstGeom>
+          <a:solidFill>
+            <a:srgbClr val="2EC4B6"/>
+          </a:solidFill>
+          <a:ln>
+            <a:noFill/>
+          </a:ln>
+          <a:effectLst/>
+        </p:spPr>
+        <p:style>
+          <a:lnRef idx="1">
+            <a:schemeClr val="accent1"/>
+          </a:lnRef>
+          <a:fillRef idx="3">
+            <a:schemeClr val="accent1"/>
+          </a:fillRef>
+          <a:effectRef idx="2">
+            <a:schemeClr val="accent1"/>
+          </a:effectRef>
+          <a:fontRef idx="minor">
+            <a:schemeClr val="lt1"/>
+          </a:fontRef>
+        </p:style>
+        <p:txBody>
+          <a:bodyPr rtlCol="0" anchor="ctr"/>
+          <a:lstStyle/>
+          <a:p>
+            <a:pPr algn="ctr"/>
+          </a:p>
+        </p:txBody>
+      </p:sp>
+      <p:sp>
+        <p:nvSpPr>
+          <p:cNvPr id="46" name="TextBox 45"/>
+          <p:cNvSpPr txBox="1"/>
+          <p:nvPr/>
+        </p:nvSpPr>
+        <p:spPr>
+          <a:xfrm>
+            <a:off x="914400" y="5440680"/>
+            <a:ext cx="10561320" cy="548640"/>
+          </a:xfrm>
+          <a:prstGeom prst="rect">
+            <a:avLst/>
+          </a:prstGeom>
+          <a:noFill/>
+        </p:spPr>
+        <p:txBody>
+          <a:bodyPr wrap="square">
+            <a:spAutoFit/>
+          </a:bodyPr>
+          <a:lstStyle/>
+          <a:p>
+            <a:pPr algn="l"/>
+            <a:r>
+              <a:rPr sz="1450" b="0" i="0">
+                <a:solidFill>
+                  <a:srgbClr val="202633"/>
+                </a:solidFill>
+                <a:latin typeface="Calibri"/>
+              </a:rPr>
+              <a:t>Agents with less than 6 months' tenure skew toward the lowest-CSAT bucket (&lt;6 months) - a coaching signal alongside the process fix.</a:t>
+            </a:r>
+          </a:p>
+        </p:txBody>
+      </p:sp>
+      <p:sp>
+        <p:nvSpPr>
+          <p:cNvPr id="47" name="TextBox 46"/>
+          <p:cNvSpPr txBox="1"/>
+          <p:nvPr/>
+        </p:nvSpPr>
+        <p:spPr>
+          <a:xfrm>
+            <a:off x="594360" y="6473952"/>
+            <a:ext cx="9144000" cy="320040"/>
+          </a:xfrm>
+          <a:prstGeom prst="rect">
+            <a:avLst/>
+          </a:prstGeom>
+          <a:noFill/>
+        </p:spPr>
+        <p:txBody>
+          <a:bodyPr wrap="square">
+            <a:spAutoFit/>
+          </a:bodyPr>
+          <a:lstStyle/>
+          <a:p>
+            <a:pPr algn="l"/>
+            <a:r>
               <a:rPr sz="1000" b="0" i="0">
                 <a:solidFill>
                   <a:srgbClr val="5A6B7D"/>
@@ -8984,7 +9686,7 @@
       </p:sp>
       <p:sp>
         <p:nvSpPr>
-          <p:cNvPr id="40" name="TextBox 39"/>
+          <p:cNvPr id="48" name="TextBox 47"/>
           <p:cNvSpPr txBox="1"/>
           <p:nvPr/>
         </p:nvSpPr>
@@ -9087,7 +9789,7 @@
         <p:spPr>
           <a:xfrm>
             <a:off x="594360" y="1691640"/>
-            <a:ext cx="3505200" cy="274320"/>
+            <a:ext cx="2536911" cy="274320"/>
           </a:xfrm>
           <a:prstGeom prst="rect">
             <a:avLst/>
@@ -9121,8 +9823,8 @@
         </p:nvSpPr>
         <p:spPr>
           <a:xfrm>
-            <a:off x="4328160" y="1691640"/>
-            <a:ext cx="3505200" cy="274320"/>
+            <a:off x="3332439" y="1691640"/>
+            <a:ext cx="4651004" cy="274320"/>
           </a:xfrm>
           <a:prstGeom prst="rect">
             <a:avLst/>
@@ -9156,8 +9858,8 @@
         </p:nvSpPr>
         <p:spPr>
           <a:xfrm>
-            <a:off x="8061960" y="1691640"/>
-            <a:ext cx="3505200" cy="274320"/>
+            <a:off x="8184611" y="1691640"/>
+            <a:ext cx="3382549" cy="274320"/>
           </a:xfrm>
           <a:prstGeom prst="rect">
             <a:avLst/>
@@ -9227,7 +9929,7 @@
         <p:spPr>
           <a:xfrm>
             <a:off x="594360" y="2194560"/>
-            <a:ext cx="3505200" cy="1280160"/>
+            <a:ext cx="2536911" cy="1280160"/>
           </a:xfrm>
           <a:prstGeom prst="rect">
             <a:avLst/>
@@ -9242,13 +9944,13 @@
           <a:p>
             <a:pPr algn="l"/>
             <a:r>
-              <a:rPr sz="1500" b="1" i="0">
+              <a:rPr sz="1450" b="1" i="0">
                 <a:solidFill>
                   <a:srgbClr val="2EC4B6"/>
                 </a:solidFill>
                 <a:latin typeface="Calibri"/>
               </a:rPr>
-              <a:t>Fix #1: Billing Charges</a:t>
+              <a:t>Fix #1: Billing Charges (20.8%)</a:t>
             </a:r>
           </a:p>
         </p:txBody>
@@ -9261,8 +9963,8 @@
         </p:nvSpPr>
         <p:spPr>
           <a:xfrm>
-            <a:off x="4328160" y="2194560"/>
-            <a:ext cx="3505200" cy="1280160"/>
+            <a:off x="3332439" y="2194560"/>
+            <a:ext cx="4651004" cy="1280160"/>
           </a:xfrm>
           <a:prstGeom prst="rect">
             <a:avLst/>
@@ -9277,13 +9979,13 @@
           <a:p>
             <a:pPr algn="l"/>
             <a:r>
-              <a:rPr sz="1300" b="0" i="0">
+              <a:rPr sz="1250" b="0" i="0">
                 <a:solidFill>
                   <a:srgbClr val="FFFFFF"/>
                 </a:solidFill>
                 <a:latin typeface="Calibri"/>
               </a:rPr>
-              <a:t>Investigate “Duplicate Charge” specifically — the single most common, named sub-issue, not a vague theme.</a:t>
+              <a:t>20.8% of all complaints are Billing Charges, and “Duplicate Charge” alone drives 22.0% of those — fix the duplicate-charge billing defect first, not the category as a whole.</a:t>
             </a:r>
           </a:p>
         </p:txBody>
@@ -9296,8 +9998,8 @@
         </p:nvSpPr>
         <p:spPr>
           <a:xfrm>
-            <a:off x="8061960" y="2194560"/>
-            <a:ext cx="3505200" cy="1280160"/>
+            <a:off x="8184611" y="2194560"/>
+            <a:ext cx="3382549" cy="1280160"/>
           </a:xfrm>
           <a:prstGeom prst="rect">
             <a:avLst/>
@@ -9312,13 +10014,13 @@
           <a:p>
             <a:pPr algn="l"/>
             <a:r>
-              <a:rPr sz="1300" b="0" i="0">
+              <a:rPr sz="1250" b="0" i="0">
                 <a:solidFill>
                   <a:srgbClr val="D7DEE8"/>
                 </a:solidFill>
                 <a:latin typeface="Calibri"/>
               </a:rPr>
-              <a:t>Removes the highest-volume, lowest-CSAT driver (avg CSAT 2.51) from the table.</a:t>
+              <a:t>Billing responses average 2.51 vs 2.95 everywhere else — closing that gap could lift OVERALL CSAT from 2.86 toward roughly 2.95 over time.</a:t>
             </a:r>
           </a:p>
         </p:txBody>
@@ -9367,7 +10069,7 @@
         <p:spPr>
           <a:xfrm>
             <a:off x="594360" y="3474720"/>
-            <a:ext cx="3505200" cy="1280160"/>
+            <a:ext cx="2536911" cy="1280160"/>
           </a:xfrm>
           <a:prstGeom prst="rect">
             <a:avLst/>
@@ -9382,13 +10084,13 @@
           <a:p>
             <a:pPr algn="l"/>
             <a:r>
-              <a:rPr sz="1500" b="1" i="0">
+              <a:rPr sz="1450" b="1" i="0">
                 <a:solidFill>
                   <a:srgbClr val="2EC4B6"/>
                 </a:solidFill>
                 <a:latin typeface="Calibri"/>
               </a:rPr>
-              <a:t>Fix #2: Coach newer agents</a:t>
+              <a:t>Fix #2: Coach agents under 6 months (34% of roster)</a:t>
             </a:r>
           </a:p>
         </p:txBody>
@@ -9401,8 +10103,8 @@
         </p:nvSpPr>
         <p:spPr>
           <a:xfrm>
-            <a:off x="4328160" y="3474720"/>
-            <a:ext cx="3505200" cy="1280160"/>
+            <a:off x="3332439" y="3474720"/>
+            <a:ext cx="4651004" cy="1280160"/>
           </a:xfrm>
           <a:prstGeom prst="rect">
             <a:avLst/>
@@ -9417,13 +10119,13 @@
           <a:p>
             <a:pPr algn="l"/>
             <a:r>
-              <a:rPr sz="1300" b="0" i="0">
+              <a:rPr sz="1250" b="0" i="0">
                 <a:solidFill>
                   <a:srgbClr val="FFFFFF"/>
                 </a:solidFill>
                 <a:latin typeface="Calibri"/>
               </a:rPr>
-              <a:t>Target coaching at agents under 6 months' tenure — this cohort skews toward the weakest CSAT bucket.</a:t>
+              <a:t>Agents under 6 months' tenure are 34% of the roster but generate 47% of Agent Behavior complaints — these specific agents are driving this category, not the team broadly.</a:t>
             </a:r>
           </a:p>
         </p:txBody>
@@ -9436,8 +10138,8 @@
         </p:nvSpPr>
         <p:spPr>
           <a:xfrm>
-            <a:off x="8061960" y="3474720"/>
-            <a:ext cx="3505200" cy="1280160"/>
+            <a:off x="8184611" y="3474720"/>
+            <a:ext cx="3382549" cy="1280160"/>
           </a:xfrm>
           <a:prstGeom prst="rect">
             <a:avLst/>
@@ -9452,13 +10154,13 @@
           <a:p>
             <a:pPr algn="l"/>
             <a:r>
-              <a:rPr sz="1300" b="0" i="0">
+              <a:rPr sz="1250" b="0" i="0">
                 <a:solidFill>
                   <a:srgbClr val="D7DEE8"/>
                 </a:solidFill>
                 <a:latin typeface="Calibri"/>
               </a:rPr>
-              <a:t>Lifts Agent Behavior &amp; Communication scores, a top-volume driver.</a:t>
+              <a:t>Targeted coaching (not generic training) directly shrinks a top-3 driver by volume.</a:t>
             </a:r>
           </a:p>
         </p:txBody>
@@ -9507,7 +10209,7 @@
         <p:spPr>
           <a:xfrm>
             <a:off x="594360" y="4754880"/>
-            <a:ext cx="3505200" cy="1280160"/>
+            <a:ext cx="2536911" cy="1280160"/>
           </a:xfrm>
           <a:prstGeom prst="rect">
             <a:avLst/>
@@ -9522,7 +10224,7 @@
           <a:p>
             <a:pPr algn="l"/>
             <a:r>
-              <a:rPr sz="1500" b="1" i="0">
+              <a:rPr sz="1450" b="1" i="0">
                 <a:solidFill>
                   <a:srgbClr val="2EC4B6"/>
                 </a:solidFill>
@@ -9541,8 +10243,8 @@
         </p:nvSpPr>
         <p:spPr>
           <a:xfrm>
-            <a:off x="4328160" y="4754880"/>
-            <a:ext cx="3505200" cy="1280160"/>
+            <a:off x="3332439" y="4754880"/>
+            <a:ext cx="4651004" cy="1280160"/>
           </a:xfrm>
           <a:prstGeom prst="rect">
             <a:avLst/>
@@ -9557,7 +10259,7 @@
           <a:p>
             <a:pPr algn="l"/>
             <a:r>
-              <a:rPr sz="1300" b="0" i="0">
+              <a:rPr sz="1250" b="0" i="0">
                 <a:solidFill>
                   <a:srgbClr val="FFFFFF"/>
                 </a:solidFill>
@@ -9576,8 +10278,8 @@
         </p:nvSpPr>
         <p:spPr>
           <a:xfrm>
-            <a:off x="8061960" y="4754880"/>
-            <a:ext cx="3505200" cy="1280160"/>
+            <a:off x="8184611" y="4754880"/>
+            <a:ext cx="3382549" cy="1280160"/>
           </a:xfrm>
           <a:prstGeom prst="rect">
             <a:avLst/>
@@ -9592,13 +10294,13 @@
           <a:p>
             <a:pPr algn="l"/>
             <a:r>
-              <a:rPr sz="1300" b="0" i="0">
+              <a:rPr sz="1250" b="0" i="0">
                 <a:solidFill>
                   <a:srgbClr val="D7DEE8"/>
                 </a:solidFill>
                 <a:latin typeface="Calibri"/>
               </a:rPr>
-              <a:t>Confirms the fix is working with real data, not a one-time snapshot.</a:t>
+              <a:t>Confirms both fixes are actually moving CSAT, with real data, not a one-time snapshot.</a:t>
             </a:r>
           </a:p>
         </p:txBody>

--- a/usecase1_csat_nlp_rootcause/final_output/usecase1_csat_summary.pptx
+++ b/usecase1_csat_nlp_rootcause/final_output/usecase1_csat_summary.pptx
@@ -5168,14 +5168,259 @@
       </p:sp>
       <p:sp>
         <p:nvSpPr>
-          <p:cNvPr id="5" name="Oval 4"/>
+          <p:cNvPr id="5" name="TextBox 4"/>
+          <p:cNvSpPr txBox="1"/>
+          <p:nvPr/>
+        </p:nvSpPr>
+        <p:spPr>
+          <a:xfrm>
+            <a:off x="3291840" y="1463040"/>
+            <a:ext cx="4846320" cy="274320"/>
+          </a:xfrm>
+          <a:prstGeom prst="rect">
+            <a:avLst/>
+          </a:prstGeom>
+          <a:noFill/>
+        </p:spPr>
+        <p:txBody>
+          <a:bodyPr wrap="square">
+            <a:spAutoFit/>
+          </a:bodyPr>
+          <a:lstStyle/>
+          <a:p>
+            <a:pPr algn="l"/>
+            <a:r>
+              <a:rPr sz="1050" b="1" i="0">
+                <a:solidFill>
+                  <a:srgbClr val="1F9A8F"/>
+                </a:solidFill>
+                <a:latin typeface="Calibri"/>
+              </a:rPr>
+              <a:t>APPROACH</a:t>
+            </a:r>
+          </a:p>
+        </p:txBody>
+      </p:sp>
+      <p:sp>
+        <p:nvSpPr>
+          <p:cNvPr id="6" name="TextBox 5"/>
+          <p:cNvSpPr txBox="1"/>
+          <p:nvPr/>
+        </p:nvSpPr>
+        <p:spPr>
+          <a:xfrm>
+            <a:off x="8366760" y="1463040"/>
+            <a:ext cx="3227832" cy="274320"/>
+          </a:xfrm>
+          <a:prstGeom prst="rect">
+            <a:avLst/>
+          </a:prstGeom>
+          <a:noFill/>
+        </p:spPr>
+        <p:txBody>
+          <a:bodyPr wrap="square">
+            <a:spAutoFit/>
+          </a:bodyPr>
+          <a:lstStyle/>
+          <a:p>
+            <a:pPr algn="l"/>
+            <a:r>
+              <a:rPr sz="1050" b="1" i="0">
+                <a:solidFill>
+                  <a:srgbClr val="1F9A8F"/>
+                </a:solidFill>
+                <a:latin typeface="Calibri"/>
+              </a:rPr>
+              <a:t>OUTPUT</a:t>
+            </a:r>
+          </a:p>
+        </p:txBody>
+      </p:sp>
+      <p:cxnSp>
+        <p:nvCxnSpPr>
+          <p:cNvPr id="7" name="Connector 6"/>
+          <p:cNvCxnSpPr/>
+          <p:nvPr/>
+        </p:nvCxnSpPr>
+        <p:spPr>
+          <a:xfrm>
+            <a:off x="768096" y="1929384"/>
+            <a:ext cx="64008" cy="768096"/>
+          </a:xfrm>
+          <a:prstGeom prst="line">
+            <a:avLst/>
+          </a:prstGeom>
+          <a:ln w="22225">
+            <a:solidFill>
+              <a:srgbClr val="DDE2E8"/>
+            </a:solidFill>
+          </a:ln>
+        </p:spPr>
+        <p:style>
+          <a:lnRef idx="2">
+            <a:schemeClr val="accent1"/>
+          </a:lnRef>
+          <a:fillRef idx="0">
+            <a:schemeClr val="accent1"/>
+          </a:fillRef>
+          <a:effectRef idx="1">
+            <a:schemeClr val="accent1"/>
+          </a:effectRef>
+          <a:fontRef idx="minor">
+            <a:schemeClr val="tx1"/>
+          </a:fontRef>
+        </p:style>
+      </p:cxnSp>
+      <p:cxnSp>
+        <p:nvCxnSpPr>
+          <p:cNvPr id="8" name="Connector 7"/>
+          <p:cNvCxnSpPr/>
+          <p:nvPr/>
+        </p:nvCxnSpPr>
+        <p:spPr>
+          <a:xfrm>
+            <a:off x="832104" y="2697480"/>
+            <a:ext cx="64008" cy="768096"/>
+          </a:xfrm>
+          <a:prstGeom prst="line">
+            <a:avLst/>
+          </a:prstGeom>
+          <a:ln w="22225">
+            <a:solidFill>
+              <a:srgbClr val="DDE2E8"/>
+            </a:solidFill>
+          </a:ln>
+        </p:spPr>
+        <p:style>
+          <a:lnRef idx="2">
+            <a:schemeClr val="accent1"/>
+          </a:lnRef>
+          <a:fillRef idx="0">
+            <a:schemeClr val="accent1"/>
+          </a:fillRef>
+          <a:effectRef idx="1">
+            <a:schemeClr val="accent1"/>
+          </a:effectRef>
+          <a:fontRef idx="minor">
+            <a:schemeClr val="tx1"/>
+          </a:fontRef>
+        </p:style>
+      </p:cxnSp>
+      <p:cxnSp>
+        <p:nvCxnSpPr>
+          <p:cNvPr id="9" name="Connector 8"/>
+          <p:cNvCxnSpPr/>
+          <p:nvPr/>
+        </p:nvCxnSpPr>
+        <p:spPr>
+          <a:xfrm>
+            <a:off x="896112" y="3465576"/>
+            <a:ext cx="64008" cy="768096"/>
+          </a:xfrm>
+          <a:prstGeom prst="line">
+            <a:avLst/>
+          </a:prstGeom>
+          <a:ln w="22225">
+            <a:solidFill>
+              <a:srgbClr val="DDE2E8"/>
+            </a:solidFill>
+          </a:ln>
+        </p:spPr>
+        <p:style>
+          <a:lnRef idx="2">
+            <a:schemeClr val="accent1"/>
+          </a:lnRef>
+          <a:fillRef idx="0">
+            <a:schemeClr val="accent1"/>
+          </a:fillRef>
+          <a:effectRef idx="1">
+            <a:schemeClr val="accent1"/>
+          </a:effectRef>
+          <a:fontRef idx="minor">
+            <a:schemeClr val="tx1"/>
+          </a:fontRef>
+        </p:style>
+      </p:cxnSp>
+      <p:cxnSp>
+        <p:nvCxnSpPr>
+          <p:cNvPr id="10" name="Connector 9"/>
+          <p:cNvCxnSpPr/>
+          <p:nvPr/>
+        </p:nvCxnSpPr>
+        <p:spPr>
+          <a:xfrm>
+            <a:off x="960120" y="4233672"/>
+            <a:ext cx="64008" cy="768096"/>
+          </a:xfrm>
+          <a:prstGeom prst="line">
+            <a:avLst/>
+          </a:prstGeom>
+          <a:ln w="22225">
+            <a:solidFill>
+              <a:srgbClr val="DDE2E8"/>
+            </a:solidFill>
+          </a:ln>
+        </p:spPr>
+        <p:style>
+          <a:lnRef idx="2">
+            <a:schemeClr val="accent1"/>
+          </a:lnRef>
+          <a:fillRef idx="0">
+            <a:schemeClr val="accent1"/>
+          </a:fillRef>
+          <a:effectRef idx="1">
+            <a:schemeClr val="accent1"/>
+          </a:effectRef>
+          <a:fontRef idx="minor">
+            <a:schemeClr val="tx1"/>
+          </a:fontRef>
+        </p:style>
+      </p:cxnSp>
+      <p:cxnSp>
+        <p:nvCxnSpPr>
+          <p:cNvPr id="11" name="Connector 10"/>
+          <p:cNvCxnSpPr/>
+          <p:nvPr/>
+        </p:nvCxnSpPr>
+        <p:spPr>
+          <a:xfrm>
+            <a:off x="1024128" y="5001768"/>
+            <a:ext cx="64008" cy="768096"/>
+          </a:xfrm>
+          <a:prstGeom prst="line">
+            <a:avLst/>
+          </a:prstGeom>
+          <a:ln w="22225">
+            <a:solidFill>
+              <a:srgbClr val="DDE2E8"/>
+            </a:solidFill>
+          </a:ln>
+        </p:spPr>
+        <p:style>
+          <a:lnRef idx="2">
+            <a:schemeClr val="accent1"/>
+          </a:lnRef>
+          <a:fillRef idx="0">
+            <a:schemeClr val="accent1"/>
+          </a:fillRef>
+          <a:effectRef idx="1">
+            <a:schemeClr val="accent1"/>
+          </a:effectRef>
+          <a:fontRef idx="minor">
+            <a:schemeClr val="tx1"/>
+          </a:fontRef>
+        </p:style>
+      </p:cxnSp>
+      <p:sp>
+        <p:nvSpPr>
+          <p:cNvPr id="12" name="Oval 11"/>
           <p:cNvSpPr/>
           <p:nvPr/>
         </p:nvSpPr>
         <p:spPr>
           <a:xfrm>
-            <a:off x="594360" y="1371600"/>
-            <a:ext cx="292608" cy="292608"/>
+            <a:off x="594360" y="1755648"/>
+            <a:ext cx="347472" cy="347472"/>
           </a:xfrm>
           <a:prstGeom prst="ellipse">
             <a:avLst/>
@@ -5208,7 +5453,7 @@
           <a:p>
             <a:pPr algn="ctr"/>
             <a:r>
-              <a:rPr sz="1400" b="1">
+              <a:rPr sz="1500" b="1">
                 <a:solidFill>
                   <a:srgbClr val="FFFFFF"/>
                 </a:solidFill>
@@ -5221,14 +5466,14 @@
       </p:sp>
       <p:sp>
         <p:nvSpPr>
-          <p:cNvPr id="6" name="TextBox 5"/>
+          <p:cNvPr id="13" name="TextBox 12"/>
           <p:cNvSpPr txBox="1"/>
           <p:nvPr/>
         </p:nvSpPr>
         <p:spPr>
           <a:xfrm>
-            <a:off x="978408" y="1353312"/>
-            <a:ext cx="4828032" cy="292608"/>
+            <a:off x="1051560" y="1764792"/>
+            <a:ext cx="2011680" cy="502920"/>
           </a:xfrm>
           <a:prstGeom prst="rect">
             <a:avLst/>
@@ -5256,14 +5501,14 @@
       </p:sp>
       <p:sp>
         <p:nvSpPr>
-          <p:cNvPr id="7" name="TextBox 6"/>
+          <p:cNvPr id="14" name="TextBox 13"/>
           <p:cNvSpPr txBox="1"/>
           <p:nvPr/>
         </p:nvSpPr>
         <p:spPr>
           <a:xfrm>
-            <a:off x="649224" y="1700784"/>
-            <a:ext cx="5157216" cy="182880"/>
+            <a:off x="3291840" y="1755648"/>
+            <a:ext cx="4846320" cy="768096"/>
           </a:xfrm>
           <a:prstGeom prst="rect">
             <a:avLst/>
@@ -5278,27 +5523,82 @@
           <a:p>
             <a:pPr algn="l"/>
             <a:r>
-              <a:rPr sz="950" b="1" i="0">
-                <a:solidFill>
-                  <a:srgbClr val="1F9A8F"/>
-                </a:solidFill>
-                <a:latin typeface="Calibri"/>
-              </a:rPr>
-              <a:t>APPROACH</a:t>
-            </a:r>
-          </a:p>
-        </p:txBody>
-      </p:sp>
-      <p:sp>
-        <p:nvSpPr>
-          <p:cNvPr id="8" name="Oval 7"/>
+              <a:rPr sz="1250" b="0" i="0">
+                <a:solidFill>
+                  <a:srgbClr val="202633"/>
+                </a:solidFill>
+                <a:latin typeface="Calibri"/>
+              </a:rPr>
+              <a:t>pandas loads the 7,500-row survey export, then the text is lowercased, stripped of punctuation, and whitespace-collapsed.</a:t>
+            </a:r>
+          </a:p>
+        </p:txBody>
+      </p:sp>
+      <p:sp>
+        <p:nvSpPr>
+          <p:cNvPr id="15" name="Rounded Rectangle 14"/>
           <p:cNvSpPr/>
           <p:nvPr/>
         </p:nvSpPr>
         <p:spPr>
           <a:xfrm>
-            <a:off x="667512" y="1956816"/>
-            <a:ext cx="82296" cy="82296"/>
+            <a:off x="8366760" y="1755648"/>
+            <a:ext cx="3227832" cy="676656"/>
+          </a:xfrm>
+          <a:prstGeom prst="roundRect">
+            <a:avLst/>
+          </a:prstGeom>
+          <a:solidFill>
+            <a:srgbClr val="F5F7FA"/>
+          </a:solidFill>
+          <a:ln>
+            <a:solidFill>
+              <a:srgbClr val="DDE2E8"/>
+            </a:solidFill>
+          </a:ln>
+          <a:effectLst/>
+        </p:spPr>
+        <p:style>
+          <a:lnRef idx="1">
+            <a:schemeClr val="accent1"/>
+          </a:lnRef>
+          <a:fillRef idx="3">
+            <a:schemeClr val="accent1"/>
+          </a:fillRef>
+          <a:effectRef idx="2">
+            <a:schemeClr val="accent1"/>
+          </a:effectRef>
+          <a:fontRef idx="minor">
+            <a:schemeClr val="lt1"/>
+          </a:fontRef>
+        </p:style>
+        <p:txBody>
+          <a:bodyPr rtlCol="0" anchor="ctr" wrap="square"/>
+          <a:lstStyle/>
+          <a:p>
+            <a:pPr algn="l"/>
+            <a:r>
+              <a:rPr sz="1200" b="1">
+                <a:solidFill>
+                  <a:srgbClr val="1B2A4A"/>
+                </a:solidFill>
+                <a:latin typeface="Calibri"/>
+              </a:rPr>
+              <a:t>A clean_text column every later step reuses</a:t>
+            </a:r>
+          </a:p>
+        </p:txBody>
+      </p:sp>
+      <p:sp>
+        <p:nvSpPr>
+          <p:cNvPr id="16" name="Oval 15"/>
+          <p:cNvSpPr/>
+          <p:nvPr/>
+        </p:nvSpPr>
+        <p:spPr>
+          <a:xfrm>
+            <a:off x="658368" y="2523744"/>
+            <a:ext cx="347472" cy="347472"/>
           </a:xfrm>
           <a:prstGeom prst="ellipse">
             <a:avLst/>
@@ -5330,19 +5630,28 @@
           <a:lstStyle/>
           <a:p>
             <a:pPr algn="ctr"/>
-          </a:p>
-        </p:txBody>
-      </p:sp>
-      <p:sp>
-        <p:nvSpPr>
-          <p:cNvPr id="9" name="TextBox 8"/>
+            <a:r>
+              <a:rPr sz="1500" b="1">
+                <a:solidFill>
+                  <a:srgbClr val="FFFFFF"/>
+                </a:solidFill>
+                <a:latin typeface="Calibri"/>
+              </a:rPr>
+              <a:t>2</a:t>
+            </a:r>
+          </a:p>
+        </p:txBody>
+      </p:sp>
+      <p:sp>
+        <p:nvSpPr>
+          <p:cNvPr id="17" name="TextBox 16"/>
           <p:cNvSpPr txBox="1"/>
           <p:nvPr/>
         </p:nvSpPr>
         <p:spPr>
           <a:xfrm>
-            <a:off x="868680" y="1901952"/>
-            <a:ext cx="4937760" cy="256032"/>
+            <a:off x="1115568" y="2532888"/>
+            <a:ext cx="1947672" cy="502920"/>
           </a:xfrm>
           <a:prstGeom prst="rect">
             <a:avLst/>
@@ -5357,27 +5666,117 @@
           <a:p>
             <a:pPr algn="l"/>
             <a:r>
-              <a:rPr sz="1150" b="0" i="0">
+              <a:rPr sz="1450" b="1" i="0">
+                <a:solidFill>
+                  <a:srgbClr val="1B2A4A"/>
+                </a:solidFill>
+                <a:latin typeface="Calibri"/>
+              </a:rPr>
+              <a:t>Bootstrap dictionary</a:t>
+            </a:r>
+          </a:p>
+        </p:txBody>
+      </p:sp>
+      <p:sp>
+        <p:nvSpPr>
+          <p:cNvPr id="18" name="TextBox 17"/>
+          <p:cNvSpPr txBox="1"/>
+          <p:nvPr/>
+        </p:nvSpPr>
+        <p:spPr>
+          <a:xfrm>
+            <a:off x="3291840" y="2523744"/>
+            <a:ext cx="4846320" cy="768096"/>
+          </a:xfrm>
+          <a:prstGeom prst="rect">
+            <a:avLst/>
+          </a:prstGeom>
+          <a:noFill/>
+        </p:spPr>
+        <p:txBody>
+          <a:bodyPr wrap="square">
+            <a:spAutoFit/>
+          </a:bodyPr>
+          <a:lstStyle/>
+          <a:p>
+            <a:pPr algn="l"/>
+            <a:r>
+              <a:rPr sz="1250" b="0" i="0">
                 <a:solidFill>
                   <a:srgbClr val="202633"/>
                 </a:solidFill>
                 <a:latin typeface="Calibri"/>
               </a:rPr>
-              <a:t>pandas loads the 7,500-row survey export</a:t>
-            </a:r>
-          </a:p>
-        </p:txBody>
-      </p:sp>
-      <p:sp>
-        <p:nvSpPr>
-          <p:cNvPr id="10" name="Oval 9"/>
+              <a:t>Term frequency is split low-CSAT vs high-CSAT text, and every candidate term's sentiment lean is labeled upfront.</a:t>
+            </a:r>
+          </a:p>
+        </p:txBody>
+      </p:sp>
+      <p:sp>
+        <p:nvSpPr>
+          <p:cNvPr id="19" name="Rounded Rectangle 18"/>
           <p:cNvSpPr/>
           <p:nvPr/>
         </p:nvSpPr>
         <p:spPr>
           <a:xfrm>
-            <a:off x="667512" y="2231136"/>
-            <a:ext cx="82296" cy="82296"/>
+            <a:off x="8366760" y="2523744"/>
+            <a:ext cx="3227832" cy="676656"/>
+          </a:xfrm>
+          <a:prstGeom prst="roundRect">
+            <a:avLst/>
+          </a:prstGeom>
+          <a:solidFill>
+            <a:srgbClr val="F5F7FA"/>
+          </a:solidFill>
+          <a:ln>
+            <a:solidFill>
+              <a:srgbClr val="DDE2E8"/>
+            </a:solidFill>
+          </a:ln>
+          <a:effectLst/>
+        </p:spPr>
+        <p:style>
+          <a:lnRef idx="1">
+            <a:schemeClr val="accent1"/>
+          </a:lnRef>
+          <a:fillRef idx="3">
+            <a:schemeClr val="accent1"/>
+          </a:fillRef>
+          <a:effectRef idx="2">
+            <a:schemeClr val="accent1"/>
+          </a:effectRef>
+          <a:fontRef idx="minor">
+            <a:schemeClr val="lt1"/>
+          </a:fontRef>
+        </p:style>
+        <p:txBody>
+          <a:bodyPr rtlCol="0" anchor="ctr" wrap="square"/>
+          <a:lstStyle/>
+          <a:p>
+            <a:pPr algn="l"/>
+            <a:r>
+              <a:rPr sz="1200" b="1">
+                <a:solidFill>
+                  <a:srgbClr val="1B2A4A"/>
+                </a:solidFill>
+                <a:latin typeface="Calibri"/>
+              </a:rPr>
+              <a:t>An inspectable keyword shortlist, not a guess</a:t>
+            </a:r>
+          </a:p>
+        </p:txBody>
+      </p:sp>
+      <p:sp>
+        <p:nvSpPr>
+          <p:cNvPr id="20" name="Oval 19"/>
+          <p:cNvSpPr/>
+          <p:nvPr/>
+        </p:nvSpPr>
+        <p:spPr>
+          <a:xfrm>
+            <a:off x="722376" y="3291840"/>
+            <a:ext cx="347472" cy="347472"/>
           </a:xfrm>
           <a:prstGeom prst="ellipse">
             <a:avLst/>
@@ -5409,19 +5808,28 @@
           <a:lstStyle/>
           <a:p>
             <a:pPr algn="ctr"/>
-          </a:p>
-        </p:txBody>
-      </p:sp>
-      <p:sp>
-        <p:nvSpPr>
-          <p:cNvPr id="11" name="TextBox 10"/>
+            <a:r>
+              <a:rPr sz="1500" b="1">
+                <a:solidFill>
+                  <a:srgbClr val="FFFFFF"/>
+                </a:solidFill>
+                <a:latin typeface="Calibri"/>
+              </a:rPr>
+              <a:t>3</a:t>
+            </a:r>
+          </a:p>
+        </p:txBody>
+      </p:sp>
+      <p:sp>
+        <p:nvSpPr>
+          <p:cNvPr id="21" name="TextBox 20"/>
           <p:cNvSpPr txBox="1"/>
           <p:nvPr/>
         </p:nvSpPr>
         <p:spPr>
           <a:xfrm>
-            <a:off x="868680" y="2176272"/>
-            <a:ext cx="4937760" cy="256032"/>
+            <a:off x="1179576" y="3300984"/>
+            <a:ext cx="1883664" cy="502920"/>
           </a:xfrm>
           <a:prstGeom prst="rect">
             <a:avLst/>
@@ -5436,27 +5844,27 @@
           <a:p>
             <a:pPr algn="l"/>
             <a:r>
-              <a:rPr sz="1150" b="0" i="0">
-                <a:solidFill>
-                  <a:srgbClr val="202633"/>
-                </a:solidFill>
-                <a:latin typeface="Calibri"/>
-              </a:rPr>
-              <a:t>Lowercase, strip punctuation, collapse whitespace</a:t>
-            </a:r>
-          </a:p>
-        </p:txBody>
-      </p:sp>
-      <p:sp>
-        <p:nvSpPr>
-          <p:cNvPr id="12" name="TextBox 11"/>
+              <a:rPr sz="1450" b="1" i="0">
+                <a:solidFill>
+                  <a:srgbClr val="1B2A4A"/>
+                </a:solidFill>
+                <a:latin typeface="Calibri"/>
+              </a:rPr>
+              <a:t>Tag drivers</a:t>
+            </a:r>
+          </a:p>
+        </p:txBody>
+      </p:sp>
+      <p:sp>
+        <p:nvSpPr>
+          <p:cNvPr id="22" name="TextBox 21"/>
           <p:cNvSpPr txBox="1"/>
           <p:nvPr/>
         </p:nvSpPr>
         <p:spPr>
           <a:xfrm>
-            <a:off x="649224" y="2468880"/>
-            <a:ext cx="5157216" cy="182880"/>
+            <a:off x="3291840" y="3291840"/>
+            <a:ext cx="4846320" cy="768096"/>
           </a:xfrm>
           <a:prstGeom prst="rect">
             <a:avLst/>
@@ -5471,36 +5879,38 @@
           <a:p>
             <a:pPr algn="l"/>
             <a:r>
-              <a:rPr sz="950" b="1" i="0">
-                <a:solidFill>
-                  <a:srgbClr val="1B2A4A"/>
-                </a:solidFill>
-                <a:latin typeface="Calibri"/>
-              </a:rPr>
-              <a:t>OUTPUT</a:t>
-            </a:r>
-          </a:p>
-        </p:txBody>
-      </p:sp>
-      <p:sp>
-        <p:nvSpPr>
-          <p:cNvPr id="13" name="Oval 12"/>
+              <a:rPr sz="1250" b="0" i="0">
+                <a:solidFill>
+                  <a:srgbClr val="202633"/>
+                </a:solidFill>
+                <a:latin typeface="Calibri"/>
+              </a:rPr>
+              <a:t>Every response is matched against 11 categories and 42 sub-issues, ranked by phrase-match strength.</a:t>
+            </a:r>
+          </a:p>
+        </p:txBody>
+      </p:sp>
+      <p:sp>
+        <p:nvSpPr>
+          <p:cNvPr id="23" name="Rounded Rectangle 22"/>
           <p:cNvSpPr/>
           <p:nvPr/>
         </p:nvSpPr>
         <p:spPr>
           <a:xfrm>
-            <a:off x="667512" y="2724912"/>
-            <a:ext cx="82296" cy="82296"/>
-          </a:xfrm>
-          <a:prstGeom prst="ellipse">
+            <a:off x="8366760" y="3291840"/>
+            <a:ext cx="3227832" cy="676656"/>
+          </a:xfrm>
+          <a:prstGeom prst="roundRect">
             <a:avLst/>
           </a:prstGeom>
           <a:solidFill>
-            <a:srgbClr val="1B2A4A"/>
+            <a:srgbClr val="F5F7FA"/>
           </a:solidFill>
           <a:ln>
-            <a:noFill/>
+            <a:solidFill>
+              <a:srgbClr val="DDE2E8"/>
+            </a:solidFill>
           </a:ln>
           <a:effectLst/>
         </p:spPr>
@@ -5519,58 +5929,32 @@
           </a:fontRef>
         </p:style>
         <p:txBody>
-          <a:bodyPr rtlCol="0" anchor="ctr"/>
-          <a:lstStyle/>
-          <a:p>
-            <a:pPr algn="ctr"/>
-          </a:p>
-        </p:txBody>
-      </p:sp>
-      <p:sp>
-        <p:nvSpPr>
-          <p:cNvPr id="14" name="TextBox 13"/>
-          <p:cNvSpPr txBox="1"/>
-          <p:nvPr/>
-        </p:nvSpPr>
-        <p:spPr>
-          <a:xfrm>
-            <a:off x="868680" y="2670048"/>
-            <a:ext cx="4937760" cy="256032"/>
-          </a:xfrm>
-          <a:prstGeom prst="rect">
-            <a:avLst/>
-          </a:prstGeom>
-          <a:noFill/>
-        </p:spPr>
-        <p:txBody>
-          <a:bodyPr wrap="square">
-            <a:spAutoFit/>
-          </a:bodyPr>
+          <a:bodyPr rtlCol="0" anchor="ctr" wrap="square"/>
           <a:lstStyle/>
           <a:p>
             <a:pPr algn="l"/>
             <a:r>
-              <a:rPr sz="1150" b="1" i="0">
-                <a:solidFill>
-                  <a:srgbClr val="202633"/>
-                </a:solidFill>
-                <a:latin typeface="Calibri"/>
-              </a:rPr>
-              <a:t>A clean_text column every later step reuses</a:t>
-            </a:r>
-          </a:p>
-        </p:txBody>
-      </p:sp>
-      <p:sp>
-        <p:nvSpPr>
-          <p:cNvPr id="15" name="Oval 14"/>
+              <a:rPr sz="1200" b="1">
+                <a:solidFill>
+                  <a:srgbClr val="1B2A4A"/>
+                </a:solidFill>
+                <a:latin typeface="Calibri"/>
+              </a:rPr>
+              <a:t>A PRIMARY + actionable SECONDARY driver per row</a:t>
+            </a:r>
+          </a:p>
+        </p:txBody>
+      </p:sp>
+      <p:sp>
+        <p:nvSpPr>
+          <p:cNvPr id="24" name="Oval 23"/>
           <p:cNvSpPr/>
           <p:nvPr/>
         </p:nvSpPr>
         <p:spPr>
           <a:xfrm>
-            <a:off x="594360" y="2962656"/>
-            <a:ext cx="292608" cy="292608"/>
+            <a:off x="786384" y="4059936"/>
+            <a:ext cx="347472" cy="347472"/>
           </a:xfrm>
           <a:prstGeom prst="ellipse">
             <a:avLst/>
@@ -5603,27 +5987,27 @@
           <a:p>
             <a:pPr algn="ctr"/>
             <a:r>
-              <a:rPr sz="1400" b="1">
+              <a:rPr sz="1500" b="1">
                 <a:solidFill>
                   <a:srgbClr val="FFFFFF"/>
                 </a:solidFill>
                 <a:latin typeface="Calibri"/>
               </a:rPr>
-              <a:t>2</a:t>
-            </a:r>
-          </a:p>
-        </p:txBody>
-      </p:sp>
-      <p:sp>
-        <p:nvSpPr>
-          <p:cNvPr id="16" name="TextBox 15"/>
+              <a:t>4</a:t>
+            </a:r>
+          </a:p>
+        </p:txBody>
+      </p:sp>
+      <p:sp>
+        <p:nvSpPr>
+          <p:cNvPr id="25" name="TextBox 24"/>
           <p:cNvSpPr txBox="1"/>
           <p:nvPr/>
         </p:nvSpPr>
         <p:spPr>
           <a:xfrm>
-            <a:off x="978408" y="2944368"/>
-            <a:ext cx="4828032" cy="292608"/>
+            <a:off x="1243584" y="4069080"/>
+            <a:ext cx="1819656" cy="502920"/>
           </a:xfrm>
           <a:prstGeom prst="rect">
             <a:avLst/>
@@ -5644,21 +6028,21 @@
                 </a:solidFill>
                 <a:latin typeface="Calibri"/>
               </a:rPr>
-              <a:t>Bootstrap dictionary</a:t>
-            </a:r>
-          </a:p>
-        </p:txBody>
-      </p:sp>
-      <p:sp>
-        <p:nvSpPr>
-          <p:cNvPr id="17" name="TextBox 16"/>
+              <a:t>NMF safety net</a:t>
+            </a:r>
+          </a:p>
+        </p:txBody>
+      </p:sp>
+      <p:sp>
+        <p:nvSpPr>
+          <p:cNvPr id="26" name="TextBox 25"/>
           <p:cNvSpPr txBox="1"/>
           <p:nvPr/>
         </p:nvSpPr>
         <p:spPr>
           <a:xfrm>
-            <a:off x="649224" y="3291840"/>
-            <a:ext cx="5157216" cy="182880"/>
+            <a:off x="3291840" y="4059936"/>
+            <a:ext cx="4846320" cy="768096"/>
           </a:xfrm>
           <a:prstGeom prst="rect">
             <a:avLst/>
@@ -5673,27 +6057,82 @@
           <a:p>
             <a:pPr algn="l"/>
             <a:r>
-              <a:rPr sz="950" b="1" i="0">
-                <a:solidFill>
-                  <a:srgbClr val="1F9A8F"/>
-                </a:solidFill>
-                <a:latin typeface="Calibri"/>
-              </a:rPr>
-              <a:t>APPROACH</a:t>
-            </a:r>
-          </a:p>
-        </p:txBody>
-      </p:sp>
-      <p:sp>
-        <p:nvSpPr>
-          <p:cNvPr id="18" name="Oval 17"/>
+              <a:rPr sz="1250" b="0" i="0">
+                <a:solidFill>
+                  <a:srgbClr val="202633"/>
+                </a:solidFill>
+                <a:latin typeface="Calibri"/>
+              </a:rPr>
+              <a:t>TF-IDF + NMF finds latent themes in any leftover text; YAKE auto-labels each theme, fully offline.</a:t>
+            </a:r>
+          </a:p>
+        </p:txBody>
+      </p:sp>
+      <p:sp>
+        <p:nvSpPr>
+          <p:cNvPr id="27" name="Rounded Rectangle 26"/>
           <p:cNvSpPr/>
           <p:nvPr/>
         </p:nvSpPr>
         <p:spPr>
           <a:xfrm>
-            <a:off x="667512" y="3547872"/>
-            <a:ext cx="82296" cy="82296"/>
+            <a:off x="8366760" y="4059936"/>
+            <a:ext cx="3227832" cy="676656"/>
+          </a:xfrm>
+          <a:prstGeom prst="roundRect">
+            <a:avLst/>
+          </a:prstGeom>
+          <a:solidFill>
+            <a:srgbClr val="F5F7FA"/>
+          </a:solidFill>
+          <a:ln>
+            <a:solidFill>
+              <a:srgbClr val="DDE2E8"/>
+            </a:solidFill>
+          </a:ln>
+          <a:effectLst/>
+        </p:spPr>
+        <p:style>
+          <a:lnRef idx="1">
+            <a:schemeClr val="accent1"/>
+          </a:lnRef>
+          <a:fillRef idx="3">
+            <a:schemeClr val="accent1"/>
+          </a:fillRef>
+          <a:effectRef idx="2">
+            <a:schemeClr val="accent1"/>
+          </a:effectRef>
+          <a:fontRef idx="minor">
+            <a:schemeClr val="lt1"/>
+          </a:fontRef>
+        </p:style>
+        <p:txBody>
+          <a:bodyPr rtlCol="0" anchor="ctr" wrap="square"/>
+          <a:lstStyle/>
+          <a:p>
+            <a:pPr algn="l"/>
+            <a:r>
+              <a:rPr sz="1200" b="1">
+                <a:solidFill>
+                  <a:srgbClr val="1B2A4A"/>
+                </a:solidFill>
+                <a:latin typeface="Calibri"/>
+              </a:rPr>
+              <a:t>Zero responses left with a blank secondary driver</a:t>
+            </a:r>
+          </a:p>
+        </p:txBody>
+      </p:sp>
+      <p:sp>
+        <p:nvSpPr>
+          <p:cNvPr id="28" name="Oval 27"/>
+          <p:cNvSpPr/>
+          <p:nvPr/>
+        </p:nvSpPr>
+        <p:spPr>
+          <a:xfrm>
+            <a:off x="850392" y="4828032"/>
+            <a:ext cx="347472" cy="347472"/>
           </a:xfrm>
           <a:prstGeom prst="ellipse">
             <a:avLst/>
@@ -5725,19 +6164,28 @@
           <a:lstStyle/>
           <a:p>
             <a:pPr algn="ctr"/>
-          </a:p>
-        </p:txBody>
-      </p:sp>
-      <p:sp>
-        <p:nvSpPr>
-          <p:cNvPr id="19" name="TextBox 18"/>
+            <a:r>
+              <a:rPr sz="1500" b="1">
+                <a:solidFill>
+                  <a:srgbClr val="FFFFFF"/>
+                </a:solidFill>
+                <a:latin typeface="Calibri"/>
+              </a:rPr>
+              <a:t>5</a:t>
+            </a:r>
+          </a:p>
+        </p:txBody>
+      </p:sp>
+      <p:sp>
+        <p:nvSpPr>
+          <p:cNvPr id="29" name="TextBox 28"/>
           <p:cNvSpPr txBox="1"/>
           <p:nvPr/>
         </p:nvSpPr>
         <p:spPr>
           <a:xfrm>
-            <a:off x="868680" y="3493008"/>
-            <a:ext cx="4937760" cy="256032"/>
+            <a:off x="1307592" y="4837176"/>
+            <a:ext cx="1755648" cy="502920"/>
           </a:xfrm>
           <a:prstGeom prst="rect">
             <a:avLst/>
@@ -5752,27 +6200,117 @@
           <a:p>
             <a:pPr algn="l"/>
             <a:r>
-              <a:rPr sz="1150" b="0" i="0">
+              <a:rPr sz="1450" b="1" i="0">
+                <a:solidFill>
+                  <a:srgbClr val="1B2A4A"/>
+                </a:solidFill>
+                <a:latin typeface="Calibri"/>
+              </a:rPr>
+              <a:t>Score sentiment</a:t>
+            </a:r>
+          </a:p>
+        </p:txBody>
+      </p:sp>
+      <p:sp>
+        <p:nvSpPr>
+          <p:cNvPr id="30" name="TextBox 29"/>
+          <p:cNvSpPr txBox="1"/>
+          <p:nvPr/>
+        </p:nvSpPr>
+        <p:spPr>
+          <a:xfrm>
+            <a:off x="3291840" y="4828032"/>
+            <a:ext cx="4846320" cy="768096"/>
+          </a:xfrm>
+          <a:prstGeom prst="rect">
+            <a:avLst/>
+          </a:prstGeom>
+          <a:noFill/>
+        </p:spPr>
+        <p:txBody>
+          <a:bodyPr wrap="square">
+            <a:spAutoFit/>
+          </a:bodyPr>
+          <a:lstStyle/>
+          <a:p>
+            <a:pPr algn="l"/>
+            <a:r>
+              <a:rPr sz="1250" b="0" i="0">
                 <a:solidFill>
                   <a:srgbClr val="202633"/>
                 </a:solidFill>
                 <a:latin typeface="Calibri"/>
               </a:rPr>
-              <a:t>Split term frequency: low-CSAT vs high-CSAT text</a:t>
-            </a:r>
-          </a:p>
-        </p:txBody>
-      </p:sp>
-      <p:sp>
-        <p:nvSpPr>
-          <p:cNvPr id="20" name="Oval 19"/>
+              <a:t>VADER, a lexicon-based model, scores the tone of every row — 100% offline, zero AI/LLM API dependency.</a:t>
+            </a:r>
+          </a:p>
+        </p:txBody>
+      </p:sp>
+      <p:sp>
+        <p:nvSpPr>
+          <p:cNvPr id="31" name="Rounded Rectangle 30"/>
           <p:cNvSpPr/>
           <p:nvPr/>
         </p:nvSpPr>
         <p:spPr>
           <a:xfrm>
-            <a:off x="667512" y="3822192"/>
-            <a:ext cx="82296" cy="82296"/>
+            <a:off x="8366760" y="4828032"/>
+            <a:ext cx="3227832" cy="676656"/>
+          </a:xfrm>
+          <a:prstGeom prst="roundRect">
+            <a:avLst/>
+          </a:prstGeom>
+          <a:solidFill>
+            <a:srgbClr val="F5F7FA"/>
+          </a:solidFill>
+          <a:ln>
+            <a:solidFill>
+              <a:srgbClr val="DDE2E8"/>
+            </a:solidFill>
+          </a:ln>
+          <a:effectLst/>
+        </p:spPr>
+        <p:style>
+          <a:lnRef idx="1">
+            <a:schemeClr val="accent1"/>
+          </a:lnRef>
+          <a:fillRef idx="3">
+            <a:schemeClr val="accent1"/>
+          </a:fillRef>
+          <a:effectRef idx="2">
+            <a:schemeClr val="accent1"/>
+          </a:effectRef>
+          <a:fontRef idx="minor">
+            <a:schemeClr val="lt1"/>
+          </a:fontRef>
+        </p:style>
+        <p:txBody>
+          <a:bodyPr rtlCol="0" anchor="ctr" wrap="square"/>
+          <a:lstStyle/>
+          <a:p>
+            <a:pPr algn="l"/>
+            <a:r>
+              <a:rPr sz="1200" b="1">
+                <a:solidFill>
+                  <a:srgbClr val="1B2A4A"/>
+                </a:solidFill>
+                <a:latin typeface="Calibri"/>
+              </a:rPr>
+              <a:t>A Negative/Neutral/Positive label per response</a:t>
+            </a:r>
+          </a:p>
+        </p:txBody>
+      </p:sp>
+      <p:sp>
+        <p:nvSpPr>
+          <p:cNvPr id="32" name="Oval 31"/>
+          <p:cNvSpPr/>
+          <p:nvPr/>
+        </p:nvSpPr>
+        <p:spPr>
+          <a:xfrm>
+            <a:off x="914400" y="5596128"/>
+            <a:ext cx="347472" cy="347472"/>
           </a:xfrm>
           <a:prstGeom prst="ellipse">
             <a:avLst/>
@@ -5804,19 +6342,28 @@
           <a:lstStyle/>
           <a:p>
             <a:pPr algn="ctr"/>
-          </a:p>
-        </p:txBody>
-      </p:sp>
-      <p:sp>
-        <p:nvSpPr>
-          <p:cNvPr id="21" name="TextBox 20"/>
+            <a:r>
+              <a:rPr sz="1500" b="1">
+                <a:solidFill>
+                  <a:srgbClr val="FFFFFF"/>
+                </a:solidFill>
+                <a:latin typeface="Calibri"/>
+              </a:rPr>
+              <a:t>6</a:t>
+            </a:r>
+          </a:p>
+        </p:txBody>
+      </p:sp>
+      <p:sp>
+        <p:nvSpPr>
+          <p:cNvPr id="33" name="TextBox 32"/>
           <p:cNvSpPr txBox="1"/>
           <p:nvPr/>
         </p:nvSpPr>
         <p:spPr>
           <a:xfrm>
-            <a:off x="868680" y="3767328"/>
-            <a:ext cx="4937760" cy="256032"/>
+            <a:off x="1371600" y="5605272"/>
+            <a:ext cx="1691640" cy="502920"/>
           </a:xfrm>
           <a:prstGeom prst="rect">
             <a:avLst/>
@@ -5831,27 +6378,27 @@
           <a:p>
             <a:pPr algn="l"/>
             <a:r>
-              <a:rPr sz="1150" b="0" i="0">
-                <a:solidFill>
-                  <a:srgbClr val="202633"/>
-                </a:solidFill>
-                <a:latin typeface="Calibri"/>
-              </a:rPr>
-              <a:t>Label every candidate term's sentiment lean</a:t>
-            </a:r>
-          </a:p>
-        </p:txBody>
-      </p:sp>
-      <p:sp>
-        <p:nvSpPr>
-          <p:cNvPr id="22" name="TextBox 21"/>
+              <a:rPr sz="1450" b="1" i="0">
+                <a:solidFill>
+                  <a:srgbClr val="1B2A4A"/>
+                </a:solidFill>
+                <a:latin typeface="Calibri"/>
+              </a:rPr>
+              <a:t>Publish</a:t>
+            </a:r>
+          </a:p>
+        </p:txBody>
+      </p:sp>
+      <p:sp>
+        <p:nvSpPr>
+          <p:cNvPr id="34" name="TextBox 33"/>
           <p:cNvSpPr txBox="1"/>
           <p:nvPr/>
         </p:nvSpPr>
         <p:spPr>
           <a:xfrm>
-            <a:off x="649224" y="4059936"/>
-            <a:ext cx="5157216" cy="182880"/>
+            <a:off x="3291840" y="5596128"/>
+            <a:ext cx="4846320" cy="768096"/>
           </a:xfrm>
           <a:prstGeom prst="rect">
             <a:avLst/>
@@ -5866,36 +6413,38 @@
           <a:p>
             <a:pPr algn="l"/>
             <a:r>
-              <a:rPr sz="950" b="1" i="0">
-                <a:solidFill>
-                  <a:srgbClr val="1B2A4A"/>
-                </a:solidFill>
-                <a:latin typeface="Calibri"/>
-              </a:rPr>
-              <a:t>OUTPUT</a:t>
-            </a:r>
-          </a:p>
-        </p:txBody>
-      </p:sp>
-      <p:sp>
-        <p:nvSpPr>
-          <p:cNvPr id="23" name="Oval 22"/>
+              <a:rPr sz="1250" b="0" i="0">
+                <a:solidFill>
+                  <a:srgbClr val="202633"/>
+                </a:solidFill>
+                <a:latin typeface="Calibri"/>
+              </a:rPr>
+              <a:t>One workbook is written (row data + Analysis sheet), then the PPT deck and Power BI report are built on top.</a:t>
+            </a:r>
+          </a:p>
+        </p:txBody>
+      </p:sp>
+      <p:sp>
+        <p:nvSpPr>
+          <p:cNvPr id="35" name="Rounded Rectangle 34"/>
           <p:cNvSpPr/>
           <p:nvPr/>
         </p:nvSpPr>
         <p:spPr>
           <a:xfrm>
-            <a:off x="667512" y="4315968"/>
-            <a:ext cx="82296" cy="82296"/>
-          </a:xfrm>
-          <a:prstGeom prst="ellipse">
+            <a:off x="8366760" y="5596128"/>
+            <a:ext cx="3227832" cy="676656"/>
+          </a:xfrm>
+          <a:prstGeom prst="roundRect">
             <a:avLst/>
           </a:prstGeom>
           <a:solidFill>
-            <a:srgbClr val="1B2A4A"/>
+            <a:srgbClr val="F5F7FA"/>
           </a:solidFill>
           <a:ln>
-            <a:noFill/>
+            <a:solidFill>
+              <a:srgbClr val="DDE2E8"/>
+            </a:solidFill>
           </a:ln>
           <a:effectLst/>
         </p:spPr>
@@ -5914,23 +6463,32 @@
           </a:fontRef>
         </p:style>
         <p:txBody>
-          <a:bodyPr rtlCol="0" anchor="ctr"/>
-          <a:lstStyle/>
-          <a:p>
-            <a:pPr algn="ctr"/>
-          </a:p>
-        </p:txBody>
-      </p:sp>
-      <p:sp>
-        <p:nvSpPr>
-          <p:cNvPr id="24" name="TextBox 23"/>
+          <a:bodyPr rtlCol="0" anchor="ctr" wrap="square"/>
+          <a:lstStyle/>
+          <a:p>
+            <a:pPr algn="l"/>
+            <a:r>
+              <a:rPr sz="1200" b="1">
+                <a:solidFill>
+                  <a:srgbClr val="1B2A4A"/>
+                </a:solidFill>
+                <a:latin typeface="Calibri"/>
+              </a:rPr>
+              <a:t>A client-ready package, numbers always in sync</a:t>
+            </a:r>
+          </a:p>
+        </p:txBody>
+      </p:sp>
+      <p:sp>
+        <p:nvSpPr>
+          <p:cNvPr id="36" name="TextBox 35"/>
           <p:cNvSpPr txBox="1"/>
           <p:nvPr/>
         </p:nvSpPr>
         <p:spPr>
           <a:xfrm>
-            <a:off x="868680" y="4261104"/>
-            <a:ext cx="4937760" cy="256032"/>
+            <a:off x="594360" y="6473952"/>
+            <a:ext cx="9144000" cy="320040"/>
           </a:xfrm>
           <a:prstGeom prst="rect">
             <a:avLst/>
@@ -5945,496 +6503,13 @@
           <a:p>
             <a:pPr algn="l"/>
             <a:r>
-              <a:rPr sz="1150" b="1" i="0">
-                <a:solidFill>
-                  <a:srgbClr val="202633"/>
-                </a:solidFill>
-                <a:latin typeface="Calibri"/>
-              </a:rPr>
-              <a:t>An inspectable keyword shortlist, not a guess</a:t>
-            </a:r>
-          </a:p>
-        </p:txBody>
-      </p:sp>
-      <p:sp>
-        <p:nvSpPr>
-          <p:cNvPr id="25" name="Oval 24"/>
-          <p:cNvSpPr/>
-          <p:nvPr/>
-        </p:nvSpPr>
-        <p:spPr>
-          <a:xfrm>
-            <a:off x="594360" y="4553712"/>
-            <a:ext cx="292608" cy="292608"/>
-          </a:xfrm>
-          <a:prstGeom prst="ellipse">
-            <a:avLst/>
-          </a:prstGeom>
-          <a:solidFill>
-            <a:srgbClr val="2EC4B6"/>
-          </a:solidFill>
-          <a:ln>
-            <a:noFill/>
-          </a:ln>
-          <a:effectLst/>
-        </p:spPr>
-        <p:style>
-          <a:lnRef idx="1">
-            <a:schemeClr val="accent1"/>
-          </a:lnRef>
-          <a:fillRef idx="3">
-            <a:schemeClr val="accent1"/>
-          </a:fillRef>
-          <a:effectRef idx="2">
-            <a:schemeClr val="accent1"/>
-          </a:effectRef>
-          <a:fontRef idx="minor">
-            <a:schemeClr val="lt1"/>
-          </a:fontRef>
-        </p:style>
-        <p:txBody>
-          <a:bodyPr rtlCol="0" anchor="ctr"/>
-          <a:lstStyle/>
-          <a:p>
-            <a:pPr algn="ctr"/>
-            <a:r>
-              <a:rPr sz="1400" b="1">
-                <a:solidFill>
-                  <a:srgbClr val="FFFFFF"/>
-                </a:solidFill>
-                <a:latin typeface="Calibri"/>
-              </a:rPr>
-              <a:t>3</a:t>
-            </a:r>
-          </a:p>
-        </p:txBody>
-      </p:sp>
-      <p:sp>
-        <p:nvSpPr>
-          <p:cNvPr id="26" name="TextBox 25"/>
-          <p:cNvSpPr txBox="1"/>
-          <p:nvPr/>
-        </p:nvSpPr>
-        <p:spPr>
-          <a:xfrm>
-            <a:off x="978408" y="4535424"/>
-            <a:ext cx="4828032" cy="292608"/>
-          </a:xfrm>
-          <a:prstGeom prst="rect">
-            <a:avLst/>
-          </a:prstGeom>
-          <a:noFill/>
-        </p:spPr>
-        <p:txBody>
-          <a:bodyPr wrap="square">
-            <a:spAutoFit/>
-          </a:bodyPr>
-          <a:lstStyle/>
-          <a:p>
-            <a:pPr algn="l"/>
-            <a:r>
-              <a:rPr sz="1450" b="1" i="0">
-                <a:solidFill>
-                  <a:srgbClr val="1B2A4A"/>
-                </a:solidFill>
-                <a:latin typeface="Calibri"/>
-              </a:rPr>
-              <a:t>Tag drivers</a:t>
-            </a:r>
-          </a:p>
-        </p:txBody>
-      </p:sp>
-      <p:sp>
-        <p:nvSpPr>
-          <p:cNvPr id="27" name="TextBox 26"/>
-          <p:cNvSpPr txBox="1"/>
-          <p:nvPr/>
-        </p:nvSpPr>
-        <p:spPr>
-          <a:xfrm>
-            <a:off x="649224" y="4882896"/>
-            <a:ext cx="5157216" cy="182880"/>
-          </a:xfrm>
-          <a:prstGeom prst="rect">
-            <a:avLst/>
-          </a:prstGeom>
-          <a:noFill/>
-        </p:spPr>
-        <p:txBody>
-          <a:bodyPr wrap="square">
-            <a:spAutoFit/>
-          </a:bodyPr>
-          <a:lstStyle/>
-          <a:p>
-            <a:pPr algn="l"/>
-            <a:r>
-              <a:rPr sz="950" b="1" i="0">
-                <a:solidFill>
-                  <a:srgbClr val="1F9A8F"/>
-                </a:solidFill>
-                <a:latin typeface="Calibri"/>
-              </a:rPr>
-              <a:t>APPROACH</a:t>
-            </a:r>
-          </a:p>
-        </p:txBody>
-      </p:sp>
-      <p:sp>
-        <p:nvSpPr>
-          <p:cNvPr id="28" name="Oval 27"/>
-          <p:cNvSpPr/>
-          <p:nvPr/>
-        </p:nvSpPr>
-        <p:spPr>
-          <a:xfrm>
-            <a:off x="667512" y="5138928"/>
-            <a:ext cx="82296" cy="82296"/>
-          </a:xfrm>
-          <a:prstGeom prst="ellipse">
-            <a:avLst/>
-          </a:prstGeom>
-          <a:solidFill>
-            <a:srgbClr val="2EC4B6"/>
-          </a:solidFill>
-          <a:ln>
-            <a:noFill/>
-          </a:ln>
-          <a:effectLst/>
-        </p:spPr>
-        <p:style>
-          <a:lnRef idx="1">
-            <a:schemeClr val="accent1"/>
-          </a:lnRef>
-          <a:fillRef idx="3">
-            <a:schemeClr val="accent1"/>
-          </a:fillRef>
-          <a:effectRef idx="2">
-            <a:schemeClr val="accent1"/>
-          </a:effectRef>
-          <a:fontRef idx="minor">
-            <a:schemeClr val="lt1"/>
-          </a:fontRef>
-        </p:style>
-        <p:txBody>
-          <a:bodyPr rtlCol="0" anchor="ctr"/>
-          <a:lstStyle/>
-          <a:p>
-            <a:pPr algn="ctr"/>
-          </a:p>
-        </p:txBody>
-      </p:sp>
-      <p:sp>
-        <p:nvSpPr>
-          <p:cNvPr id="29" name="TextBox 28"/>
-          <p:cNvSpPr txBox="1"/>
-          <p:nvPr/>
-        </p:nvSpPr>
-        <p:spPr>
-          <a:xfrm>
-            <a:off x="868680" y="5084064"/>
-            <a:ext cx="4937760" cy="256032"/>
-          </a:xfrm>
-          <a:prstGeom prst="rect">
-            <a:avLst/>
-          </a:prstGeom>
-          <a:noFill/>
-        </p:spPr>
-        <p:txBody>
-          <a:bodyPr wrap="square">
-            <a:spAutoFit/>
-          </a:bodyPr>
-          <a:lstStyle/>
-          <a:p>
-            <a:pPr algn="l"/>
-            <a:r>
-              <a:rPr sz="1150" b="0" i="0">
-                <a:solidFill>
-                  <a:srgbClr val="202633"/>
-                </a:solidFill>
-                <a:latin typeface="Calibri"/>
-              </a:rPr>
-              <a:t>Match against 11 categories, 42 sub-issues</a:t>
-            </a:r>
-          </a:p>
-        </p:txBody>
-      </p:sp>
-      <p:sp>
-        <p:nvSpPr>
-          <p:cNvPr id="30" name="Oval 29"/>
-          <p:cNvSpPr/>
-          <p:nvPr/>
-        </p:nvSpPr>
-        <p:spPr>
-          <a:xfrm>
-            <a:off x="667512" y="5413248"/>
-            <a:ext cx="82296" cy="82296"/>
-          </a:xfrm>
-          <a:prstGeom prst="ellipse">
-            <a:avLst/>
-          </a:prstGeom>
-          <a:solidFill>
-            <a:srgbClr val="2EC4B6"/>
-          </a:solidFill>
-          <a:ln>
-            <a:noFill/>
-          </a:ln>
-          <a:effectLst/>
-        </p:spPr>
-        <p:style>
-          <a:lnRef idx="1">
-            <a:schemeClr val="accent1"/>
-          </a:lnRef>
-          <a:fillRef idx="3">
-            <a:schemeClr val="accent1"/>
-          </a:fillRef>
-          <a:effectRef idx="2">
-            <a:schemeClr val="accent1"/>
-          </a:effectRef>
-          <a:fontRef idx="minor">
-            <a:schemeClr val="lt1"/>
-          </a:fontRef>
-        </p:style>
-        <p:txBody>
-          <a:bodyPr rtlCol="0" anchor="ctr"/>
-          <a:lstStyle/>
-          <a:p>
-            <a:pPr algn="ctr"/>
-          </a:p>
-        </p:txBody>
-      </p:sp>
-      <p:sp>
-        <p:nvSpPr>
-          <p:cNvPr id="31" name="TextBox 30"/>
-          <p:cNvSpPr txBox="1"/>
-          <p:nvPr/>
-        </p:nvSpPr>
-        <p:spPr>
-          <a:xfrm>
-            <a:off x="868680" y="5358384"/>
-            <a:ext cx="4937760" cy="256032"/>
-          </a:xfrm>
-          <a:prstGeom prst="rect">
-            <a:avLst/>
-          </a:prstGeom>
-          <a:noFill/>
-        </p:spPr>
-        <p:txBody>
-          <a:bodyPr wrap="square">
-            <a:spAutoFit/>
-          </a:bodyPr>
-          <a:lstStyle/>
-          <a:p>
-            <a:pPr algn="l"/>
-            <a:r>
-              <a:rPr sz="1150" b="0" i="0">
-                <a:solidFill>
-                  <a:srgbClr val="202633"/>
-                </a:solidFill>
-                <a:latin typeface="Calibri"/>
-              </a:rPr>
-              <a:t>Rank matches by phrase-match strength</a:t>
-            </a:r>
-          </a:p>
-        </p:txBody>
-      </p:sp>
-      <p:sp>
-        <p:nvSpPr>
-          <p:cNvPr id="32" name="TextBox 31"/>
-          <p:cNvSpPr txBox="1"/>
-          <p:nvPr/>
-        </p:nvSpPr>
-        <p:spPr>
-          <a:xfrm>
-            <a:off x="649224" y="5650992"/>
-            <a:ext cx="5157216" cy="182880"/>
-          </a:xfrm>
-          <a:prstGeom prst="rect">
-            <a:avLst/>
-          </a:prstGeom>
-          <a:noFill/>
-        </p:spPr>
-        <p:txBody>
-          <a:bodyPr wrap="square">
-            <a:spAutoFit/>
-          </a:bodyPr>
-          <a:lstStyle/>
-          <a:p>
-            <a:pPr algn="l"/>
-            <a:r>
-              <a:rPr sz="950" b="1" i="0">
-                <a:solidFill>
-                  <a:srgbClr val="1B2A4A"/>
-                </a:solidFill>
-                <a:latin typeface="Calibri"/>
-              </a:rPr>
-              <a:t>OUTPUT</a:t>
-            </a:r>
-          </a:p>
-        </p:txBody>
-      </p:sp>
-      <p:sp>
-        <p:nvSpPr>
-          <p:cNvPr id="33" name="Oval 32"/>
-          <p:cNvSpPr/>
-          <p:nvPr/>
-        </p:nvSpPr>
-        <p:spPr>
-          <a:xfrm>
-            <a:off x="667512" y="5907024"/>
-            <a:ext cx="82296" cy="82296"/>
-          </a:xfrm>
-          <a:prstGeom prst="ellipse">
-            <a:avLst/>
-          </a:prstGeom>
-          <a:solidFill>
-            <a:srgbClr val="1B2A4A"/>
-          </a:solidFill>
-          <a:ln>
-            <a:noFill/>
-          </a:ln>
-          <a:effectLst/>
-        </p:spPr>
-        <p:style>
-          <a:lnRef idx="1">
-            <a:schemeClr val="accent1"/>
-          </a:lnRef>
-          <a:fillRef idx="3">
-            <a:schemeClr val="accent1"/>
-          </a:fillRef>
-          <a:effectRef idx="2">
-            <a:schemeClr val="accent1"/>
-          </a:effectRef>
-          <a:fontRef idx="minor">
-            <a:schemeClr val="lt1"/>
-          </a:fontRef>
-        </p:style>
-        <p:txBody>
-          <a:bodyPr rtlCol="0" anchor="ctr"/>
-          <a:lstStyle/>
-          <a:p>
-            <a:pPr algn="ctr"/>
-          </a:p>
-        </p:txBody>
-      </p:sp>
-      <p:sp>
-        <p:nvSpPr>
-          <p:cNvPr id="34" name="TextBox 33"/>
-          <p:cNvSpPr txBox="1"/>
-          <p:nvPr/>
-        </p:nvSpPr>
-        <p:spPr>
-          <a:xfrm>
-            <a:off x="868680" y="5852160"/>
-            <a:ext cx="4937760" cy="256032"/>
-          </a:xfrm>
-          <a:prstGeom prst="rect">
-            <a:avLst/>
-          </a:prstGeom>
-          <a:noFill/>
-        </p:spPr>
-        <p:txBody>
-          <a:bodyPr wrap="square">
-            <a:spAutoFit/>
-          </a:bodyPr>
-          <a:lstStyle/>
-          <a:p>
-            <a:pPr algn="l"/>
-            <a:r>
-              <a:rPr sz="1150" b="1" i="0">
-                <a:solidFill>
-                  <a:srgbClr val="202633"/>
-                </a:solidFill>
-                <a:latin typeface="Calibri"/>
-              </a:rPr>
-              <a:t>A PRIMARY + actionable SECONDARY driver per row</a:t>
-            </a:r>
-          </a:p>
-        </p:txBody>
-      </p:sp>
-      <p:sp>
-        <p:nvSpPr>
-          <p:cNvPr id="35" name="Oval 34"/>
-          <p:cNvSpPr/>
-          <p:nvPr/>
-        </p:nvSpPr>
-        <p:spPr>
-          <a:xfrm>
-            <a:off x="6172200" y="1371600"/>
-            <a:ext cx="292608" cy="292608"/>
-          </a:xfrm>
-          <a:prstGeom prst="ellipse">
-            <a:avLst/>
-          </a:prstGeom>
-          <a:solidFill>
-            <a:srgbClr val="2EC4B6"/>
-          </a:solidFill>
-          <a:ln>
-            <a:noFill/>
-          </a:ln>
-          <a:effectLst/>
-        </p:spPr>
-        <p:style>
-          <a:lnRef idx="1">
-            <a:schemeClr val="accent1"/>
-          </a:lnRef>
-          <a:fillRef idx="3">
-            <a:schemeClr val="accent1"/>
-          </a:fillRef>
-          <a:effectRef idx="2">
-            <a:schemeClr val="accent1"/>
-          </a:effectRef>
-          <a:fontRef idx="minor">
-            <a:schemeClr val="lt1"/>
-          </a:fontRef>
-        </p:style>
-        <p:txBody>
-          <a:bodyPr rtlCol="0" anchor="ctr"/>
-          <a:lstStyle/>
-          <a:p>
-            <a:pPr algn="ctr"/>
-            <a:r>
-              <a:rPr sz="1400" b="1">
-                <a:solidFill>
-                  <a:srgbClr val="FFFFFF"/>
-                </a:solidFill>
-                <a:latin typeface="Calibri"/>
-              </a:rPr>
-              <a:t>4</a:t>
-            </a:r>
-          </a:p>
-        </p:txBody>
-      </p:sp>
-      <p:sp>
-        <p:nvSpPr>
-          <p:cNvPr id="36" name="TextBox 35"/>
-          <p:cNvSpPr txBox="1"/>
-          <p:nvPr/>
-        </p:nvSpPr>
-        <p:spPr>
-          <a:xfrm>
-            <a:off x="6556248" y="1353312"/>
-            <a:ext cx="4828032" cy="292608"/>
-          </a:xfrm>
-          <a:prstGeom prst="rect">
-            <a:avLst/>
-          </a:prstGeom>
-          <a:noFill/>
-        </p:spPr>
-        <p:txBody>
-          <a:bodyPr wrap="square">
-            <a:spAutoFit/>
-          </a:bodyPr>
-          <a:lstStyle/>
-          <a:p>
-            <a:pPr algn="l"/>
-            <a:r>
-              <a:rPr sz="1450" b="1" i="0">
-                <a:solidFill>
-                  <a:srgbClr val="1B2A4A"/>
-                </a:solidFill>
-                <a:latin typeface="Calibri"/>
-              </a:rPr>
-              <a:t>NMF safety net</a:t>
+              <a:rPr sz="1000" b="0" i="0">
+                <a:solidFill>
+                  <a:srgbClr val="5A6B7D"/>
+                </a:solidFill>
+                <a:latin typeface="Calibri"/>
+              </a:rPr>
+              <a:t>CSAT Root-Cause &amp; Sentiment Driver Analysis</a:t>
             </a:r>
           </a:p>
         </p:txBody>
@@ -6442,1138 +6517,6 @@
       <p:sp>
         <p:nvSpPr>
           <p:cNvPr id="37" name="TextBox 36"/>
-          <p:cNvSpPr txBox="1"/>
-          <p:nvPr/>
-        </p:nvSpPr>
-        <p:spPr>
-          <a:xfrm>
-            <a:off x="6227064" y="1700784"/>
-            <a:ext cx="5157216" cy="182880"/>
-          </a:xfrm>
-          <a:prstGeom prst="rect">
-            <a:avLst/>
-          </a:prstGeom>
-          <a:noFill/>
-        </p:spPr>
-        <p:txBody>
-          <a:bodyPr wrap="square">
-            <a:spAutoFit/>
-          </a:bodyPr>
-          <a:lstStyle/>
-          <a:p>
-            <a:pPr algn="l"/>
-            <a:r>
-              <a:rPr sz="950" b="1" i="0">
-                <a:solidFill>
-                  <a:srgbClr val="1F9A8F"/>
-                </a:solidFill>
-                <a:latin typeface="Calibri"/>
-              </a:rPr>
-              <a:t>APPROACH</a:t>
-            </a:r>
-          </a:p>
-        </p:txBody>
-      </p:sp>
-      <p:sp>
-        <p:nvSpPr>
-          <p:cNvPr id="38" name="Oval 37"/>
-          <p:cNvSpPr/>
-          <p:nvPr/>
-        </p:nvSpPr>
-        <p:spPr>
-          <a:xfrm>
-            <a:off x="6245352" y="1956816"/>
-            <a:ext cx="82296" cy="82296"/>
-          </a:xfrm>
-          <a:prstGeom prst="ellipse">
-            <a:avLst/>
-          </a:prstGeom>
-          <a:solidFill>
-            <a:srgbClr val="2EC4B6"/>
-          </a:solidFill>
-          <a:ln>
-            <a:noFill/>
-          </a:ln>
-          <a:effectLst/>
-        </p:spPr>
-        <p:style>
-          <a:lnRef idx="1">
-            <a:schemeClr val="accent1"/>
-          </a:lnRef>
-          <a:fillRef idx="3">
-            <a:schemeClr val="accent1"/>
-          </a:fillRef>
-          <a:effectRef idx="2">
-            <a:schemeClr val="accent1"/>
-          </a:effectRef>
-          <a:fontRef idx="minor">
-            <a:schemeClr val="lt1"/>
-          </a:fontRef>
-        </p:style>
-        <p:txBody>
-          <a:bodyPr rtlCol="0" anchor="ctr"/>
-          <a:lstStyle/>
-          <a:p>
-            <a:pPr algn="ctr"/>
-          </a:p>
-        </p:txBody>
-      </p:sp>
-      <p:sp>
-        <p:nvSpPr>
-          <p:cNvPr id="39" name="TextBox 38"/>
-          <p:cNvSpPr txBox="1"/>
-          <p:nvPr/>
-        </p:nvSpPr>
-        <p:spPr>
-          <a:xfrm>
-            <a:off x="6446520" y="1901952"/>
-            <a:ext cx="4937760" cy="256032"/>
-          </a:xfrm>
-          <a:prstGeom prst="rect">
-            <a:avLst/>
-          </a:prstGeom>
-          <a:noFill/>
-        </p:spPr>
-        <p:txBody>
-          <a:bodyPr wrap="square">
-            <a:spAutoFit/>
-          </a:bodyPr>
-          <a:lstStyle/>
-          <a:p>
-            <a:pPr algn="l"/>
-            <a:r>
-              <a:rPr sz="1150" b="0" i="0">
-                <a:solidFill>
-                  <a:srgbClr val="202633"/>
-                </a:solidFill>
-                <a:latin typeface="Calibri"/>
-              </a:rPr>
-              <a:t>TF-IDF + NMF finds latent themes in leftovers</a:t>
-            </a:r>
-          </a:p>
-        </p:txBody>
-      </p:sp>
-      <p:sp>
-        <p:nvSpPr>
-          <p:cNvPr id="40" name="Oval 39"/>
-          <p:cNvSpPr/>
-          <p:nvPr/>
-        </p:nvSpPr>
-        <p:spPr>
-          <a:xfrm>
-            <a:off x="6245352" y="2231136"/>
-            <a:ext cx="82296" cy="82296"/>
-          </a:xfrm>
-          <a:prstGeom prst="ellipse">
-            <a:avLst/>
-          </a:prstGeom>
-          <a:solidFill>
-            <a:srgbClr val="2EC4B6"/>
-          </a:solidFill>
-          <a:ln>
-            <a:noFill/>
-          </a:ln>
-          <a:effectLst/>
-        </p:spPr>
-        <p:style>
-          <a:lnRef idx="1">
-            <a:schemeClr val="accent1"/>
-          </a:lnRef>
-          <a:fillRef idx="3">
-            <a:schemeClr val="accent1"/>
-          </a:fillRef>
-          <a:effectRef idx="2">
-            <a:schemeClr val="accent1"/>
-          </a:effectRef>
-          <a:fontRef idx="minor">
-            <a:schemeClr val="lt1"/>
-          </a:fontRef>
-        </p:style>
-        <p:txBody>
-          <a:bodyPr rtlCol="0" anchor="ctr"/>
-          <a:lstStyle/>
-          <a:p>
-            <a:pPr algn="ctr"/>
-          </a:p>
-        </p:txBody>
-      </p:sp>
-      <p:sp>
-        <p:nvSpPr>
-          <p:cNvPr id="41" name="TextBox 40"/>
-          <p:cNvSpPr txBox="1"/>
-          <p:nvPr/>
-        </p:nvSpPr>
-        <p:spPr>
-          <a:xfrm>
-            <a:off x="6446520" y="2176272"/>
-            <a:ext cx="4937760" cy="256032"/>
-          </a:xfrm>
-          <a:prstGeom prst="rect">
-            <a:avLst/>
-          </a:prstGeom>
-          <a:noFill/>
-        </p:spPr>
-        <p:txBody>
-          <a:bodyPr wrap="square">
-            <a:spAutoFit/>
-          </a:bodyPr>
-          <a:lstStyle/>
-          <a:p>
-            <a:pPr algn="l"/>
-            <a:r>
-              <a:rPr sz="1150" b="0" i="0">
-                <a:solidFill>
-                  <a:srgbClr val="202633"/>
-                </a:solidFill>
-                <a:latin typeface="Calibri"/>
-              </a:rPr>
-              <a:t>YAKE auto-labels each theme, fully offline</a:t>
-            </a:r>
-          </a:p>
-        </p:txBody>
-      </p:sp>
-      <p:sp>
-        <p:nvSpPr>
-          <p:cNvPr id="42" name="TextBox 41"/>
-          <p:cNvSpPr txBox="1"/>
-          <p:nvPr/>
-        </p:nvSpPr>
-        <p:spPr>
-          <a:xfrm>
-            <a:off x="6227064" y="2468880"/>
-            <a:ext cx="5157216" cy="182880"/>
-          </a:xfrm>
-          <a:prstGeom prst="rect">
-            <a:avLst/>
-          </a:prstGeom>
-          <a:noFill/>
-        </p:spPr>
-        <p:txBody>
-          <a:bodyPr wrap="square">
-            <a:spAutoFit/>
-          </a:bodyPr>
-          <a:lstStyle/>
-          <a:p>
-            <a:pPr algn="l"/>
-            <a:r>
-              <a:rPr sz="950" b="1" i="0">
-                <a:solidFill>
-                  <a:srgbClr val="1B2A4A"/>
-                </a:solidFill>
-                <a:latin typeface="Calibri"/>
-              </a:rPr>
-              <a:t>OUTPUT</a:t>
-            </a:r>
-          </a:p>
-        </p:txBody>
-      </p:sp>
-      <p:sp>
-        <p:nvSpPr>
-          <p:cNvPr id="43" name="Oval 42"/>
-          <p:cNvSpPr/>
-          <p:nvPr/>
-        </p:nvSpPr>
-        <p:spPr>
-          <a:xfrm>
-            <a:off x="6245352" y="2724912"/>
-            <a:ext cx="82296" cy="82296"/>
-          </a:xfrm>
-          <a:prstGeom prst="ellipse">
-            <a:avLst/>
-          </a:prstGeom>
-          <a:solidFill>
-            <a:srgbClr val="1B2A4A"/>
-          </a:solidFill>
-          <a:ln>
-            <a:noFill/>
-          </a:ln>
-          <a:effectLst/>
-        </p:spPr>
-        <p:style>
-          <a:lnRef idx="1">
-            <a:schemeClr val="accent1"/>
-          </a:lnRef>
-          <a:fillRef idx="3">
-            <a:schemeClr val="accent1"/>
-          </a:fillRef>
-          <a:effectRef idx="2">
-            <a:schemeClr val="accent1"/>
-          </a:effectRef>
-          <a:fontRef idx="minor">
-            <a:schemeClr val="lt1"/>
-          </a:fontRef>
-        </p:style>
-        <p:txBody>
-          <a:bodyPr rtlCol="0" anchor="ctr"/>
-          <a:lstStyle/>
-          <a:p>
-            <a:pPr algn="ctr"/>
-          </a:p>
-        </p:txBody>
-      </p:sp>
-      <p:sp>
-        <p:nvSpPr>
-          <p:cNvPr id="44" name="TextBox 43"/>
-          <p:cNvSpPr txBox="1"/>
-          <p:nvPr/>
-        </p:nvSpPr>
-        <p:spPr>
-          <a:xfrm>
-            <a:off x="6446520" y="2670048"/>
-            <a:ext cx="4937760" cy="256032"/>
-          </a:xfrm>
-          <a:prstGeom prst="rect">
-            <a:avLst/>
-          </a:prstGeom>
-          <a:noFill/>
-        </p:spPr>
-        <p:txBody>
-          <a:bodyPr wrap="square">
-            <a:spAutoFit/>
-          </a:bodyPr>
-          <a:lstStyle/>
-          <a:p>
-            <a:pPr algn="l"/>
-            <a:r>
-              <a:rPr sz="1150" b="1" i="0">
-                <a:solidFill>
-                  <a:srgbClr val="202633"/>
-                </a:solidFill>
-                <a:latin typeface="Calibri"/>
-              </a:rPr>
-              <a:t>Zero responses left with a blank secondary driver</a:t>
-            </a:r>
-          </a:p>
-        </p:txBody>
-      </p:sp>
-      <p:sp>
-        <p:nvSpPr>
-          <p:cNvPr id="45" name="Oval 44"/>
-          <p:cNvSpPr/>
-          <p:nvPr/>
-        </p:nvSpPr>
-        <p:spPr>
-          <a:xfrm>
-            <a:off x="6172200" y="2962656"/>
-            <a:ext cx="292608" cy="292608"/>
-          </a:xfrm>
-          <a:prstGeom prst="ellipse">
-            <a:avLst/>
-          </a:prstGeom>
-          <a:solidFill>
-            <a:srgbClr val="2EC4B6"/>
-          </a:solidFill>
-          <a:ln>
-            <a:noFill/>
-          </a:ln>
-          <a:effectLst/>
-        </p:spPr>
-        <p:style>
-          <a:lnRef idx="1">
-            <a:schemeClr val="accent1"/>
-          </a:lnRef>
-          <a:fillRef idx="3">
-            <a:schemeClr val="accent1"/>
-          </a:fillRef>
-          <a:effectRef idx="2">
-            <a:schemeClr val="accent1"/>
-          </a:effectRef>
-          <a:fontRef idx="minor">
-            <a:schemeClr val="lt1"/>
-          </a:fontRef>
-        </p:style>
-        <p:txBody>
-          <a:bodyPr rtlCol="0" anchor="ctr"/>
-          <a:lstStyle/>
-          <a:p>
-            <a:pPr algn="ctr"/>
-            <a:r>
-              <a:rPr sz="1400" b="1">
-                <a:solidFill>
-                  <a:srgbClr val="FFFFFF"/>
-                </a:solidFill>
-                <a:latin typeface="Calibri"/>
-              </a:rPr>
-              <a:t>5</a:t>
-            </a:r>
-          </a:p>
-        </p:txBody>
-      </p:sp>
-      <p:sp>
-        <p:nvSpPr>
-          <p:cNvPr id="46" name="TextBox 45"/>
-          <p:cNvSpPr txBox="1"/>
-          <p:nvPr/>
-        </p:nvSpPr>
-        <p:spPr>
-          <a:xfrm>
-            <a:off x="6556248" y="2944368"/>
-            <a:ext cx="4828032" cy="292608"/>
-          </a:xfrm>
-          <a:prstGeom prst="rect">
-            <a:avLst/>
-          </a:prstGeom>
-          <a:noFill/>
-        </p:spPr>
-        <p:txBody>
-          <a:bodyPr wrap="square">
-            <a:spAutoFit/>
-          </a:bodyPr>
-          <a:lstStyle/>
-          <a:p>
-            <a:pPr algn="l"/>
-            <a:r>
-              <a:rPr sz="1450" b="1" i="0">
-                <a:solidFill>
-                  <a:srgbClr val="1B2A4A"/>
-                </a:solidFill>
-                <a:latin typeface="Calibri"/>
-              </a:rPr>
-              <a:t>Score sentiment</a:t>
-            </a:r>
-          </a:p>
-        </p:txBody>
-      </p:sp>
-      <p:sp>
-        <p:nvSpPr>
-          <p:cNvPr id="47" name="TextBox 46"/>
-          <p:cNvSpPr txBox="1"/>
-          <p:nvPr/>
-        </p:nvSpPr>
-        <p:spPr>
-          <a:xfrm>
-            <a:off x="6227064" y="3291840"/>
-            <a:ext cx="5157216" cy="182880"/>
-          </a:xfrm>
-          <a:prstGeom prst="rect">
-            <a:avLst/>
-          </a:prstGeom>
-          <a:noFill/>
-        </p:spPr>
-        <p:txBody>
-          <a:bodyPr wrap="square">
-            <a:spAutoFit/>
-          </a:bodyPr>
-          <a:lstStyle/>
-          <a:p>
-            <a:pPr algn="l"/>
-            <a:r>
-              <a:rPr sz="950" b="1" i="0">
-                <a:solidFill>
-                  <a:srgbClr val="1F9A8F"/>
-                </a:solidFill>
-                <a:latin typeface="Calibri"/>
-              </a:rPr>
-              <a:t>APPROACH</a:t>
-            </a:r>
-          </a:p>
-        </p:txBody>
-      </p:sp>
-      <p:sp>
-        <p:nvSpPr>
-          <p:cNvPr id="48" name="Oval 47"/>
-          <p:cNvSpPr/>
-          <p:nvPr/>
-        </p:nvSpPr>
-        <p:spPr>
-          <a:xfrm>
-            <a:off x="6245352" y="3547872"/>
-            <a:ext cx="82296" cy="82296"/>
-          </a:xfrm>
-          <a:prstGeom prst="ellipse">
-            <a:avLst/>
-          </a:prstGeom>
-          <a:solidFill>
-            <a:srgbClr val="2EC4B6"/>
-          </a:solidFill>
-          <a:ln>
-            <a:noFill/>
-          </a:ln>
-          <a:effectLst/>
-        </p:spPr>
-        <p:style>
-          <a:lnRef idx="1">
-            <a:schemeClr val="accent1"/>
-          </a:lnRef>
-          <a:fillRef idx="3">
-            <a:schemeClr val="accent1"/>
-          </a:fillRef>
-          <a:effectRef idx="2">
-            <a:schemeClr val="accent1"/>
-          </a:effectRef>
-          <a:fontRef idx="minor">
-            <a:schemeClr val="lt1"/>
-          </a:fontRef>
-        </p:style>
-        <p:txBody>
-          <a:bodyPr rtlCol="0" anchor="ctr"/>
-          <a:lstStyle/>
-          <a:p>
-            <a:pPr algn="ctr"/>
-          </a:p>
-        </p:txBody>
-      </p:sp>
-      <p:sp>
-        <p:nvSpPr>
-          <p:cNvPr id="49" name="TextBox 48"/>
-          <p:cNvSpPr txBox="1"/>
-          <p:nvPr/>
-        </p:nvSpPr>
-        <p:spPr>
-          <a:xfrm>
-            <a:off x="6446520" y="3493008"/>
-            <a:ext cx="4937760" cy="256032"/>
-          </a:xfrm>
-          <a:prstGeom prst="rect">
-            <a:avLst/>
-          </a:prstGeom>
-          <a:noFill/>
-        </p:spPr>
-        <p:txBody>
-          <a:bodyPr wrap="square">
-            <a:spAutoFit/>
-          </a:bodyPr>
-          <a:lstStyle/>
-          <a:p>
-            <a:pPr algn="l"/>
-            <a:r>
-              <a:rPr sz="1150" b="0" i="0">
-                <a:solidFill>
-                  <a:srgbClr val="202633"/>
-                </a:solidFill>
-                <a:latin typeface="Calibri"/>
-              </a:rPr>
-              <a:t>VADER lexicon model scores tone of every row</a:t>
-            </a:r>
-          </a:p>
-        </p:txBody>
-      </p:sp>
-      <p:sp>
-        <p:nvSpPr>
-          <p:cNvPr id="50" name="Oval 49"/>
-          <p:cNvSpPr/>
-          <p:nvPr/>
-        </p:nvSpPr>
-        <p:spPr>
-          <a:xfrm>
-            <a:off x="6245352" y="3822192"/>
-            <a:ext cx="82296" cy="82296"/>
-          </a:xfrm>
-          <a:prstGeom prst="ellipse">
-            <a:avLst/>
-          </a:prstGeom>
-          <a:solidFill>
-            <a:srgbClr val="2EC4B6"/>
-          </a:solidFill>
-          <a:ln>
-            <a:noFill/>
-          </a:ln>
-          <a:effectLst/>
-        </p:spPr>
-        <p:style>
-          <a:lnRef idx="1">
-            <a:schemeClr val="accent1"/>
-          </a:lnRef>
-          <a:fillRef idx="3">
-            <a:schemeClr val="accent1"/>
-          </a:fillRef>
-          <a:effectRef idx="2">
-            <a:schemeClr val="accent1"/>
-          </a:effectRef>
-          <a:fontRef idx="minor">
-            <a:schemeClr val="lt1"/>
-          </a:fontRef>
-        </p:style>
-        <p:txBody>
-          <a:bodyPr rtlCol="0" anchor="ctr"/>
-          <a:lstStyle/>
-          <a:p>
-            <a:pPr algn="ctr"/>
-          </a:p>
-        </p:txBody>
-      </p:sp>
-      <p:sp>
-        <p:nvSpPr>
-          <p:cNvPr id="51" name="TextBox 50"/>
-          <p:cNvSpPr txBox="1"/>
-          <p:nvPr/>
-        </p:nvSpPr>
-        <p:spPr>
-          <a:xfrm>
-            <a:off x="6446520" y="3767328"/>
-            <a:ext cx="4937760" cy="256032"/>
-          </a:xfrm>
-          <a:prstGeom prst="rect">
-            <a:avLst/>
-          </a:prstGeom>
-          <a:noFill/>
-        </p:spPr>
-        <p:txBody>
-          <a:bodyPr wrap="square">
-            <a:spAutoFit/>
-          </a:bodyPr>
-          <a:lstStyle/>
-          <a:p>
-            <a:pPr algn="l"/>
-            <a:r>
-              <a:rPr sz="1150" b="0" i="0">
-                <a:solidFill>
-                  <a:srgbClr val="202633"/>
-                </a:solidFill>
-                <a:latin typeface="Calibri"/>
-              </a:rPr>
-              <a:t>100% offline — zero AI/LLM API dependency</a:t>
-            </a:r>
-          </a:p>
-        </p:txBody>
-      </p:sp>
-      <p:sp>
-        <p:nvSpPr>
-          <p:cNvPr id="52" name="TextBox 51"/>
-          <p:cNvSpPr txBox="1"/>
-          <p:nvPr/>
-        </p:nvSpPr>
-        <p:spPr>
-          <a:xfrm>
-            <a:off x="6227064" y="4059936"/>
-            <a:ext cx="5157216" cy="182880"/>
-          </a:xfrm>
-          <a:prstGeom prst="rect">
-            <a:avLst/>
-          </a:prstGeom>
-          <a:noFill/>
-        </p:spPr>
-        <p:txBody>
-          <a:bodyPr wrap="square">
-            <a:spAutoFit/>
-          </a:bodyPr>
-          <a:lstStyle/>
-          <a:p>
-            <a:pPr algn="l"/>
-            <a:r>
-              <a:rPr sz="950" b="1" i="0">
-                <a:solidFill>
-                  <a:srgbClr val="1B2A4A"/>
-                </a:solidFill>
-                <a:latin typeface="Calibri"/>
-              </a:rPr>
-              <a:t>OUTPUT</a:t>
-            </a:r>
-          </a:p>
-        </p:txBody>
-      </p:sp>
-      <p:sp>
-        <p:nvSpPr>
-          <p:cNvPr id="53" name="Oval 52"/>
-          <p:cNvSpPr/>
-          <p:nvPr/>
-        </p:nvSpPr>
-        <p:spPr>
-          <a:xfrm>
-            <a:off x="6245352" y="4315968"/>
-            <a:ext cx="82296" cy="82296"/>
-          </a:xfrm>
-          <a:prstGeom prst="ellipse">
-            <a:avLst/>
-          </a:prstGeom>
-          <a:solidFill>
-            <a:srgbClr val="1B2A4A"/>
-          </a:solidFill>
-          <a:ln>
-            <a:noFill/>
-          </a:ln>
-          <a:effectLst/>
-        </p:spPr>
-        <p:style>
-          <a:lnRef idx="1">
-            <a:schemeClr val="accent1"/>
-          </a:lnRef>
-          <a:fillRef idx="3">
-            <a:schemeClr val="accent1"/>
-          </a:fillRef>
-          <a:effectRef idx="2">
-            <a:schemeClr val="accent1"/>
-          </a:effectRef>
-          <a:fontRef idx="minor">
-            <a:schemeClr val="lt1"/>
-          </a:fontRef>
-        </p:style>
-        <p:txBody>
-          <a:bodyPr rtlCol="0" anchor="ctr"/>
-          <a:lstStyle/>
-          <a:p>
-            <a:pPr algn="ctr"/>
-          </a:p>
-        </p:txBody>
-      </p:sp>
-      <p:sp>
-        <p:nvSpPr>
-          <p:cNvPr id="54" name="TextBox 53"/>
-          <p:cNvSpPr txBox="1"/>
-          <p:nvPr/>
-        </p:nvSpPr>
-        <p:spPr>
-          <a:xfrm>
-            <a:off x="6446520" y="4261104"/>
-            <a:ext cx="4937760" cy="256032"/>
-          </a:xfrm>
-          <a:prstGeom prst="rect">
-            <a:avLst/>
-          </a:prstGeom>
-          <a:noFill/>
-        </p:spPr>
-        <p:txBody>
-          <a:bodyPr wrap="square">
-            <a:spAutoFit/>
-          </a:bodyPr>
-          <a:lstStyle/>
-          <a:p>
-            <a:pPr algn="l"/>
-            <a:r>
-              <a:rPr sz="1150" b="1" i="0">
-                <a:solidFill>
-                  <a:srgbClr val="202633"/>
-                </a:solidFill>
-                <a:latin typeface="Calibri"/>
-              </a:rPr>
-              <a:t>A Negative/Neutral/Positive label per response</a:t>
-            </a:r>
-          </a:p>
-        </p:txBody>
-      </p:sp>
-      <p:sp>
-        <p:nvSpPr>
-          <p:cNvPr id="55" name="Oval 54"/>
-          <p:cNvSpPr/>
-          <p:nvPr/>
-        </p:nvSpPr>
-        <p:spPr>
-          <a:xfrm>
-            <a:off x="6172200" y="4553712"/>
-            <a:ext cx="292608" cy="292608"/>
-          </a:xfrm>
-          <a:prstGeom prst="ellipse">
-            <a:avLst/>
-          </a:prstGeom>
-          <a:solidFill>
-            <a:srgbClr val="2EC4B6"/>
-          </a:solidFill>
-          <a:ln>
-            <a:noFill/>
-          </a:ln>
-          <a:effectLst/>
-        </p:spPr>
-        <p:style>
-          <a:lnRef idx="1">
-            <a:schemeClr val="accent1"/>
-          </a:lnRef>
-          <a:fillRef idx="3">
-            <a:schemeClr val="accent1"/>
-          </a:fillRef>
-          <a:effectRef idx="2">
-            <a:schemeClr val="accent1"/>
-          </a:effectRef>
-          <a:fontRef idx="minor">
-            <a:schemeClr val="lt1"/>
-          </a:fontRef>
-        </p:style>
-        <p:txBody>
-          <a:bodyPr rtlCol="0" anchor="ctr"/>
-          <a:lstStyle/>
-          <a:p>
-            <a:pPr algn="ctr"/>
-            <a:r>
-              <a:rPr sz="1400" b="1">
-                <a:solidFill>
-                  <a:srgbClr val="FFFFFF"/>
-                </a:solidFill>
-                <a:latin typeface="Calibri"/>
-              </a:rPr>
-              <a:t>6</a:t>
-            </a:r>
-          </a:p>
-        </p:txBody>
-      </p:sp>
-      <p:sp>
-        <p:nvSpPr>
-          <p:cNvPr id="56" name="TextBox 55"/>
-          <p:cNvSpPr txBox="1"/>
-          <p:nvPr/>
-        </p:nvSpPr>
-        <p:spPr>
-          <a:xfrm>
-            <a:off x="6556248" y="4535424"/>
-            <a:ext cx="4828032" cy="292608"/>
-          </a:xfrm>
-          <a:prstGeom prst="rect">
-            <a:avLst/>
-          </a:prstGeom>
-          <a:noFill/>
-        </p:spPr>
-        <p:txBody>
-          <a:bodyPr wrap="square">
-            <a:spAutoFit/>
-          </a:bodyPr>
-          <a:lstStyle/>
-          <a:p>
-            <a:pPr algn="l"/>
-            <a:r>
-              <a:rPr sz="1450" b="1" i="0">
-                <a:solidFill>
-                  <a:srgbClr val="1B2A4A"/>
-                </a:solidFill>
-                <a:latin typeface="Calibri"/>
-              </a:rPr>
-              <a:t>Publish</a:t>
-            </a:r>
-          </a:p>
-        </p:txBody>
-      </p:sp>
-      <p:sp>
-        <p:nvSpPr>
-          <p:cNvPr id="57" name="TextBox 56"/>
-          <p:cNvSpPr txBox="1"/>
-          <p:nvPr/>
-        </p:nvSpPr>
-        <p:spPr>
-          <a:xfrm>
-            <a:off x="6227064" y="4882896"/>
-            <a:ext cx="5157216" cy="182880"/>
-          </a:xfrm>
-          <a:prstGeom prst="rect">
-            <a:avLst/>
-          </a:prstGeom>
-          <a:noFill/>
-        </p:spPr>
-        <p:txBody>
-          <a:bodyPr wrap="square">
-            <a:spAutoFit/>
-          </a:bodyPr>
-          <a:lstStyle/>
-          <a:p>
-            <a:pPr algn="l"/>
-            <a:r>
-              <a:rPr sz="950" b="1" i="0">
-                <a:solidFill>
-                  <a:srgbClr val="1F9A8F"/>
-                </a:solidFill>
-                <a:latin typeface="Calibri"/>
-              </a:rPr>
-              <a:t>APPROACH</a:t>
-            </a:r>
-          </a:p>
-        </p:txBody>
-      </p:sp>
-      <p:sp>
-        <p:nvSpPr>
-          <p:cNvPr id="58" name="Oval 57"/>
-          <p:cNvSpPr/>
-          <p:nvPr/>
-        </p:nvSpPr>
-        <p:spPr>
-          <a:xfrm>
-            <a:off x="6245352" y="5138928"/>
-            <a:ext cx="82296" cy="82296"/>
-          </a:xfrm>
-          <a:prstGeom prst="ellipse">
-            <a:avLst/>
-          </a:prstGeom>
-          <a:solidFill>
-            <a:srgbClr val="2EC4B6"/>
-          </a:solidFill>
-          <a:ln>
-            <a:noFill/>
-          </a:ln>
-          <a:effectLst/>
-        </p:spPr>
-        <p:style>
-          <a:lnRef idx="1">
-            <a:schemeClr val="accent1"/>
-          </a:lnRef>
-          <a:fillRef idx="3">
-            <a:schemeClr val="accent1"/>
-          </a:fillRef>
-          <a:effectRef idx="2">
-            <a:schemeClr val="accent1"/>
-          </a:effectRef>
-          <a:fontRef idx="minor">
-            <a:schemeClr val="lt1"/>
-          </a:fontRef>
-        </p:style>
-        <p:txBody>
-          <a:bodyPr rtlCol="0" anchor="ctr"/>
-          <a:lstStyle/>
-          <a:p>
-            <a:pPr algn="ctr"/>
-          </a:p>
-        </p:txBody>
-      </p:sp>
-      <p:sp>
-        <p:nvSpPr>
-          <p:cNvPr id="59" name="TextBox 58"/>
-          <p:cNvSpPr txBox="1"/>
-          <p:nvPr/>
-        </p:nvSpPr>
-        <p:spPr>
-          <a:xfrm>
-            <a:off x="6446520" y="5084064"/>
-            <a:ext cx="4937760" cy="256032"/>
-          </a:xfrm>
-          <a:prstGeom prst="rect">
-            <a:avLst/>
-          </a:prstGeom>
-          <a:noFill/>
-        </p:spPr>
-        <p:txBody>
-          <a:bodyPr wrap="square">
-            <a:spAutoFit/>
-          </a:bodyPr>
-          <a:lstStyle/>
-          <a:p>
-            <a:pPr algn="l"/>
-            <a:r>
-              <a:rPr sz="1150" b="0" i="0">
-                <a:solidFill>
-                  <a:srgbClr val="202633"/>
-                </a:solidFill>
-                <a:latin typeface="Calibri"/>
-              </a:rPr>
-              <a:t>Write one workbook: row data + Analysis sheet</a:t>
-            </a:r>
-          </a:p>
-        </p:txBody>
-      </p:sp>
-      <p:sp>
-        <p:nvSpPr>
-          <p:cNvPr id="60" name="Oval 59"/>
-          <p:cNvSpPr/>
-          <p:nvPr/>
-        </p:nvSpPr>
-        <p:spPr>
-          <a:xfrm>
-            <a:off x="6245352" y="5413248"/>
-            <a:ext cx="82296" cy="82296"/>
-          </a:xfrm>
-          <a:prstGeom prst="ellipse">
-            <a:avLst/>
-          </a:prstGeom>
-          <a:solidFill>
-            <a:srgbClr val="2EC4B6"/>
-          </a:solidFill>
-          <a:ln>
-            <a:noFill/>
-          </a:ln>
-          <a:effectLst/>
-        </p:spPr>
-        <p:style>
-          <a:lnRef idx="1">
-            <a:schemeClr val="accent1"/>
-          </a:lnRef>
-          <a:fillRef idx="3">
-            <a:schemeClr val="accent1"/>
-          </a:fillRef>
-          <a:effectRef idx="2">
-            <a:schemeClr val="accent1"/>
-          </a:effectRef>
-          <a:fontRef idx="minor">
-            <a:schemeClr val="lt1"/>
-          </a:fontRef>
-        </p:style>
-        <p:txBody>
-          <a:bodyPr rtlCol="0" anchor="ctr"/>
-          <a:lstStyle/>
-          <a:p>
-            <a:pPr algn="ctr"/>
-          </a:p>
-        </p:txBody>
-      </p:sp>
-      <p:sp>
-        <p:nvSpPr>
-          <p:cNvPr id="61" name="TextBox 60"/>
-          <p:cNvSpPr txBox="1"/>
-          <p:nvPr/>
-        </p:nvSpPr>
-        <p:spPr>
-          <a:xfrm>
-            <a:off x="6446520" y="5358384"/>
-            <a:ext cx="4937760" cy="256032"/>
-          </a:xfrm>
-          <a:prstGeom prst="rect">
-            <a:avLst/>
-          </a:prstGeom>
-          <a:noFill/>
-        </p:spPr>
-        <p:txBody>
-          <a:bodyPr wrap="square">
-            <a:spAutoFit/>
-          </a:bodyPr>
-          <a:lstStyle/>
-          <a:p>
-            <a:pPr algn="l"/>
-            <a:r>
-              <a:rPr sz="1150" b="0" i="0">
-                <a:solidFill>
-                  <a:srgbClr val="202633"/>
-                </a:solidFill>
-                <a:latin typeface="Calibri"/>
-              </a:rPr>
-              <a:t>Build the PPT deck + Power BI report on top</a:t>
-            </a:r>
-          </a:p>
-        </p:txBody>
-      </p:sp>
-      <p:sp>
-        <p:nvSpPr>
-          <p:cNvPr id="62" name="TextBox 61"/>
-          <p:cNvSpPr txBox="1"/>
-          <p:nvPr/>
-        </p:nvSpPr>
-        <p:spPr>
-          <a:xfrm>
-            <a:off x="6227064" y="5650992"/>
-            <a:ext cx="5157216" cy="182880"/>
-          </a:xfrm>
-          <a:prstGeom prst="rect">
-            <a:avLst/>
-          </a:prstGeom>
-          <a:noFill/>
-        </p:spPr>
-        <p:txBody>
-          <a:bodyPr wrap="square">
-            <a:spAutoFit/>
-          </a:bodyPr>
-          <a:lstStyle/>
-          <a:p>
-            <a:pPr algn="l"/>
-            <a:r>
-              <a:rPr sz="950" b="1" i="0">
-                <a:solidFill>
-                  <a:srgbClr val="1B2A4A"/>
-                </a:solidFill>
-                <a:latin typeface="Calibri"/>
-              </a:rPr>
-              <a:t>OUTPUT</a:t>
-            </a:r>
-          </a:p>
-        </p:txBody>
-      </p:sp>
-      <p:sp>
-        <p:nvSpPr>
-          <p:cNvPr id="63" name="Oval 62"/>
-          <p:cNvSpPr/>
-          <p:nvPr/>
-        </p:nvSpPr>
-        <p:spPr>
-          <a:xfrm>
-            <a:off x="6245352" y="5907024"/>
-            <a:ext cx="82296" cy="82296"/>
-          </a:xfrm>
-          <a:prstGeom prst="ellipse">
-            <a:avLst/>
-          </a:prstGeom>
-          <a:solidFill>
-            <a:srgbClr val="1B2A4A"/>
-          </a:solidFill>
-          <a:ln>
-            <a:noFill/>
-          </a:ln>
-          <a:effectLst/>
-        </p:spPr>
-        <p:style>
-          <a:lnRef idx="1">
-            <a:schemeClr val="accent1"/>
-          </a:lnRef>
-          <a:fillRef idx="3">
-            <a:schemeClr val="accent1"/>
-          </a:fillRef>
-          <a:effectRef idx="2">
-            <a:schemeClr val="accent1"/>
-          </a:effectRef>
-          <a:fontRef idx="minor">
-            <a:schemeClr val="lt1"/>
-          </a:fontRef>
-        </p:style>
-        <p:txBody>
-          <a:bodyPr rtlCol="0" anchor="ctr"/>
-          <a:lstStyle/>
-          <a:p>
-            <a:pPr algn="ctr"/>
-          </a:p>
-        </p:txBody>
-      </p:sp>
-      <p:sp>
-        <p:nvSpPr>
-          <p:cNvPr id="64" name="TextBox 63"/>
-          <p:cNvSpPr txBox="1"/>
-          <p:nvPr/>
-        </p:nvSpPr>
-        <p:spPr>
-          <a:xfrm>
-            <a:off x="6446520" y="5852160"/>
-            <a:ext cx="4937760" cy="256032"/>
-          </a:xfrm>
-          <a:prstGeom prst="rect">
-            <a:avLst/>
-          </a:prstGeom>
-          <a:noFill/>
-        </p:spPr>
-        <p:txBody>
-          <a:bodyPr wrap="square">
-            <a:spAutoFit/>
-          </a:bodyPr>
-          <a:lstStyle/>
-          <a:p>
-            <a:pPr algn="l"/>
-            <a:r>
-              <a:rPr sz="1150" b="1" i="0">
-                <a:solidFill>
-                  <a:srgbClr val="202633"/>
-                </a:solidFill>
-                <a:latin typeface="Calibri"/>
-              </a:rPr>
-              <a:t>A client-ready package, numbers always in sync</a:t>
-            </a:r>
-          </a:p>
-        </p:txBody>
-      </p:sp>
-      <p:sp>
-        <p:nvSpPr>
-          <p:cNvPr id="65" name="TextBox 64"/>
-          <p:cNvSpPr txBox="1"/>
-          <p:nvPr/>
-        </p:nvSpPr>
-        <p:spPr>
-          <a:xfrm>
-            <a:off x="594360" y="6473952"/>
-            <a:ext cx="9144000" cy="320040"/>
-          </a:xfrm>
-          <a:prstGeom prst="rect">
-            <a:avLst/>
-          </a:prstGeom>
-          <a:noFill/>
-        </p:spPr>
-        <p:txBody>
-          <a:bodyPr wrap="square">
-            <a:spAutoFit/>
-          </a:bodyPr>
-          <a:lstStyle/>
-          <a:p>
-            <a:pPr algn="l"/>
-            <a:r>
-              <a:rPr sz="1000" b="0" i="0">
-                <a:solidFill>
-                  <a:srgbClr val="5A6B7D"/>
-                </a:solidFill>
-                <a:latin typeface="Calibri"/>
-              </a:rPr>
-              <a:t>CSAT Root-Cause &amp; Sentiment Driver Analysis</a:t>
-            </a:r>
-          </a:p>
-        </p:txBody>
-      </p:sp>
-      <p:sp>
-        <p:nvSpPr>
-          <p:cNvPr id="66" name="TextBox 65"/>
           <p:cNvSpPr txBox="1"/>
           <p:nvPr/>
         </p:nvSpPr>

--- a/usecase1_csat_nlp_rootcause/final_output/usecase1_csat_summary.pptx
+++ b/usecase1_csat_nlp_rootcause/final_output/usecase1_csat_summary.pptx
@@ -5245,7 +5245,7 @@
         <p:spPr>
           <a:xfrm>
             <a:off x="768096" y="1929384"/>
-            <a:ext cx="64008" cy="768096"/>
+            <a:ext cx="0" cy="768096"/>
           </a:xfrm>
           <a:prstGeom prst="line">
             <a:avLst/>
@@ -5279,8 +5279,8 @@
         </p:nvCxnSpPr>
         <p:spPr>
           <a:xfrm>
-            <a:off x="832104" y="2697480"/>
-            <a:ext cx="64008" cy="768096"/>
+            <a:off x="768096" y="2697480"/>
+            <a:ext cx="0" cy="768096"/>
           </a:xfrm>
           <a:prstGeom prst="line">
             <a:avLst/>
@@ -5314,8 +5314,8 @@
         </p:nvCxnSpPr>
         <p:spPr>
           <a:xfrm>
-            <a:off x="896112" y="3465576"/>
-            <a:ext cx="64008" cy="768096"/>
+            <a:off x="768096" y="3465576"/>
+            <a:ext cx="0" cy="768096"/>
           </a:xfrm>
           <a:prstGeom prst="line">
             <a:avLst/>
@@ -5349,8 +5349,8 @@
         </p:nvCxnSpPr>
         <p:spPr>
           <a:xfrm>
-            <a:off x="960120" y="4233672"/>
-            <a:ext cx="64008" cy="768096"/>
+            <a:off x="768096" y="4233672"/>
+            <a:ext cx="0" cy="768096"/>
           </a:xfrm>
           <a:prstGeom prst="line">
             <a:avLst/>
@@ -5384,8 +5384,8 @@
         </p:nvCxnSpPr>
         <p:spPr>
           <a:xfrm>
-            <a:off x="1024128" y="5001768"/>
-            <a:ext cx="64008" cy="768096"/>
+            <a:off x="768096" y="5001768"/>
+            <a:ext cx="0" cy="768096"/>
           </a:xfrm>
           <a:prstGeom prst="line">
             <a:avLst/>
@@ -5523,13 +5523,13 @@
           <a:p>
             <a:pPr algn="l"/>
             <a:r>
-              <a:rPr sz="1250" b="0" i="0">
+              <a:rPr sz="1050" b="0" i="0">
                 <a:solidFill>
                   <a:srgbClr val="202633"/>
                 </a:solidFill>
                 <a:latin typeface="Calibri"/>
               </a:rPr>
-              <a:t>pandas loads the 7,500-row survey export, then the text is lowercased, stripped of punctuation, and whitespace-collapsed.</a:t>
+              <a:t>pandas reads the 7,500-row Excel export; text is lowercased, punctuation-stripped and whitespace-collapsed so later keyword matching is spelling/case-insensitive.</a:t>
             </a:r>
           </a:p>
         </p:txBody>
@@ -5597,7 +5597,7 @@
         </p:nvSpPr>
         <p:spPr>
           <a:xfrm>
-            <a:off x="658368" y="2523744"/>
+            <a:off x="594360" y="2523744"/>
             <a:ext cx="347472" cy="347472"/>
           </a:xfrm>
           <a:prstGeom prst="ellipse">
@@ -5650,8 +5650,8 @@
         </p:nvSpPr>
         <p:spPr>
           <a:xfrm>
-            <a:off x="1115568" y="2532888"/>
-            <a:ext cx="1947672" cy="502920"/>
+            <a:off x="1051560" y="2532888"/>
+            <a:ext cx="2011680" cy="502920"/>
           </a:xfrm>
           <a:prstGeom prst="rect">
             <a:avLst/>
@@ -5701,13 +5701,13 @@
           <a:p>
             <a:pPr algn="l"/>
             <a:r>
-              <a:rPr sz="1250" b="0" i="0">
+              <a:rPr sz="1050" b="0" i="0">
                 <a:solidFill>
                   <a:srgbClr val="202633"/>
                 </a:solidFill>
                 <a:latin typeface="Calibri"/>
               </a:rPr>
-              <a:t>Term frequency is split low-CSAT vs high-CSAT text, and every candidate term's sentiment lean is labeled upfront.</a:t>
+              <a:t>CountVectorizer counts how often each word/phrase appears separately in low-CSAT vs high-CSAT text; terms that skew heavily toward low-CSAT become candidate complaint keywords, each tagged by its sentiment lean.</a:t>
             </a:r>
           </a:p>
         </p:txBody>
@@ -5775,7 +5775,7 @@
         </p:nvSpPr>
         <p:spPr>
           <a:xfrm>
-            <a:off x="722376" y="3291840"/>
+            <a:off x="594360" y="3291840"/>
             <a:ext cx="347472" cy="347472"/>
           </a:xfrm>
           <a:prstGeom prst="ellipse">
@@ -5828,8 +5828,8 @@
         </p:nvSpPr>
         <p:spPr>
           <a:xfrm>
-            <a:off x="1179576" y="3300984"/>
-            <a:ext cx="1883664" cy="502920"/>
+            <a:off x="1051560" y="3300984"/>
+            <a:ext cx="2011680" cy="502920"/>
           </a:xfrm>
           <a:prstGeom prst="rect">
             <a:avLst/>
@@ -5879,13 +5879,13 @@
           <a:p>
             <a:pPr algn="l"/>
             <a:r>
-              <a:rPr sz="1250" b="0" i="0">
+              <a:rPr sz="1050" b="0" i="0">
                 <a:solidFill>
                   <a:srgbClr val="202633"/>
                 </a:solidFill>
                 <a:latin typeface="Calibri"/>
               </a:rPr>
-              <a:t>Every response is matched against 11 categories and 42 sub-issues, ranked by phrase-match strength.</a:t>
+              <a:t>Each response's text is checked against every sub-issue's keyword phrases; whichever sub-issue matches the MOST distinct phrases wins - its parent category becomes the PRIMARY driver, the sub-issue itself the SECONDARY.</a:t>
             </a:r>
           </a:p>
         </p:txBody>
@@ -5953,7 +5953,7 @@
         </p:nvSpPr>
         <p:spPr>
           <a:xfrm>
-            <a:off x="786384" y="4059936"/>
+            <a:off x="594360" y="4059936"/>
             <a:ext cx="347472" cy="347472"/>
           </a:xfrm>
           <a:prstGeom prst="ellipse">
@@ -6006,8 +6006,8 @@
         </p:nvSpPr>
         <p:spPr>
           <a:xfrm>
-            <a:off x="1243584" y="4069080"/>
-            <a:ext cx="1819656" cy="502920"/>
+            <a:off x="1051560" y="4069080"/>
+            <a:ext cx="2011680" cy="502920"/>
           </a:xfrm>
           <a:prstGeom prst="rect">
             <a:avLst/>
@@ -6057,13 +6057,13 @@
           <a:p>
             <a:pPr algn="l"/>
             <a:r>
-              <a:rPr sz="1250" b="0" i="0">
+              <a:rPr sz="1050" b="0" i="0">
                 <a:solidFill>
                   <a:srgbClr val="202633"/>
                 </a:solidFill>
                 <a:latin typeface="Calibri"/>
               </a:rPr>
-              <a:t>TF-IDF + NMF finds latent themes in any leftover text; YAKE auto-labels each theme, fully offline.</a:t>
+              <a:t>For the rare response matching no phrase, TF-IDF converts its text into a weighted-term vector; NMF (matrix factorization) decomposes that into latent topics, and YAKE picks each topic's top keyword as its label.</a:t>
             </a:r>
           </a:p>
         </p:txBody>
@@ -6131,7 +6131,7 @@
         </p:nvSpPr>
         <p:spPr>
           <a:xfrm>
-            <a:off x="850392" y="4828032"/>
+            <a:off x="594360" y="4828032"/>
             <a:ext cx="347472" cy="347472"/>
           </a:xfrm>
           <a:prstGeom prst="ellipse">
@@ -6184,8 +6184,8 @@
         </p:nvSpPr>
         <p:spPr>
           <a:xfrm>
-            <a:off x="1307592" y="4837176"/>
-            <a:ext cx="1755648" cy="502920"/>
+            <a:off x="1051560" y="4837176"/>
+            <a:ext cx="2011680" cy="502920"/>
           </a:xfrm>
           <a:prstGeom prst="rect">
             <a:avLst/>
@@ -6235,13 +6235,13 @@
           <a:p>
             <a:pPr algn="l"/>
             <a:r>
-              <a:rPr sz="1250" b="0" i="0">
+              <a:rPr sz="1050" b="0" i="0">
                 <a:solidFill>
                   <a:srgbClr val="202633"/>
                 </a:solidFill>
                 <a:latin typeface="Calibri"/>
               </a:rPr>
-              <a:t>VADER, a lexicon-based model, scores the tone of every row — 100% offline, zero AI/LLM API dependency.</a:t>
+              <a:t>VADER looks up each word in a pre-built sentiment lexicon, weights negations/intensifiers, and sums to a -1..+1 compound score, bucketed into Negative/Neutral/Positive.</a:t>
             </a:r>
           </a:p>
         </p:txBody>
@@ -6296,7 +6296,7 @@
                 </a:solidFill>
                 <a:latin typeface="Calibri"/>
               </a:rPr>
-              <a:t>A Negative/Neutral/Positive label per response</a:t>
+              <a:t>A sentiment label per response, cross-checked against the CSAT score</a:t>
             </a:r>
           </a:p>
         </p:txBody>
@@ -6309,7 +6309,7 @@
         </p:nvSpPr>
         <p:spPr>
           <a:xfrm>
-            <a:off x="914400" y="5596128"/>
+            <a:off x="594360" y="5596128"/>
             <a:ext cx="347472" cy="347472"/>
           </a:xfrm>
           <a:prstGeom prst="ellipse">
@@ -6362,8 +6362,8 @@
         </p:nvSpPr>
         <p:spPr>
           <a:xfrm>
-            <a:off x="1371600" y="5605272"/>
-            <a:ext cx="1691640" cy="502920"/>
+            <a:off x="1051560" y="5605272"/>
+            <a:ext cx="2011680" cy="502920"/>
           </a:xfrm>
           <a:prstGeom prst="rect">
             <a:avLst/>
@@ -6413,13 +6413,13 @@
           <a:p>
             <a:pPr algn="l"/>
             <a:r>
-              <a:rPr sz="1250" b="0" i="0">
+              <a:rPr sz="1050" b="0" i="0">
                 <a:solidFill>
                   <a:srgbClr val="202633"/>
                 </a:solidFill>
                 <a:latin typeface="Calibri"/>
               </a:rPr>
-              <a:t>One workbook is written (row data + Analysis sheet), then the PPT deck and Power BI report are built on top.</a:t>
+              <a:t>openpyxl writes one workbook (row data + an Analysis sheet with native Excel charts); python-pptx then re-reads that SAME file to build this deck, so the numbers can never drift out of sync.</a:t>
             </a:r>
           </a:p>
         </p:txBody>
@@ -9173,7 +9173,7 @@
                 </a:solidFill>
                 <a:latin typeface="Calibri"/>
               </a:rPr>
-              <a:t>Next: Validate &amp; track</a:t>
+              <a:t>Fix #3: Network &amp; Connectivity (10.3%)</a:t>
             </a:r>
           </a:p>
         </p:txBody>
@@ -9208,7 +9208,7 @@
                 </a:solidFill>
                 <a:latin typeface="Calibri"/>
               </a:rPr>
-              <a:t>Validate the taxonomy against real customer verbatim, then track the top driver's weekly trend already built into the workbook.</a:t>
+              <a:t>Network &amp; Connectivity is the lowest-scoring driver of all - 2.45 avg CSAT, even worse than Billing - led by “Network Outage” in 27% of its own complaints.</a:t>
             </a:r>
           </a:p>
         </p:txBody>
@@ -9243,7 +9243,7 @@
                 </a:solidFill>
                 <a:latin typeface="Calibri"/>
               </a:rPr>
-              <a:t>Confirms both fixes are actually moving CSAT, with real data, not a one-time snapshot.</a:t>
+              <a:t>Fixing the leading network sub-issue addresses the single worst-rated driver in the data.</a:t>
             </a:r>
           </a:p>
         </p:txBody>
